--- a/slides/CSC336-Lecture-15-Async-JavaScript-Promises-and-Fetch.pptx
+++ b/slides/CSC336-Lecture-15-Async-JavaScript-Promises-and-Fetch.pptx
@@ -3904,79 +3904,44 @@
       </p:sp>
       <p:sp>
         <p:nvSpPr>
-          <p:cNvPr id="6" name="Text 4"/>
-          <p:cNvSpPr txBox="1"/>
-          <p:nvPr/>
-        </p:nvSpPr>
-        <p:spPr>
-          <a:xfrm>
-            <a:off x="640080" y="6446520"/>
-            <a:ext cx="8686800" cy="292608"/>
-          </a:xfrm>
-          <a:prstGeom prst="rect">
-            <a:avLst/>
-          </a:prstGeom>
-          <a:noFill/>
-          <a:ln/>
-        </p:spPr>
-        <p:txBody>
-          <a:bodyPr wrap="square" lIns="0" tIns="0" rIns="0" bIns="0" rtlCol="0" anchor="ctr"/>
-          <a:lstStyle/>
-          <a:p>
-            <a:pPr algn="l" indent="0" marL="0">
-              <a:buNone/>
-            </a:pPr>
-            <a:r>
-              <a:rPr lang="en-US" sz="900" dirty="0">
-                <a:solidFill>
-                  <a:srgbClr val="9AA3D8"/>
-                </a:solidFill>
-                <a:latin typeface="Calibri" pitchFamily="34" charset="0"/>
-                <a:ea typeface="Calibri" pitchFamily="34" charset="-122"/>
-                <a:cs typeface="Calibri" pitchFamily="34" charset="-120"/>
-              </a:rPr>
-              <a:t>Usman Akram  •  COMSATS University Islamabad</a:t>
-            </a:r>
-            <a:endParaRPr lang="en-US" sz="900" dirty="0"/>
-          </a:p>
-        </p:txBody>
-      </p:sp>
-      <p:sp>
-        <p:nvSpPr>
-          <p:cNvPr id="7" name="Text 5"/>
-          <p:cNvSpPr txBox="1"/>
-          <p:nvPr/>
-        </p:nvSpPr>
-        <p:spPr>
-          <a:xfrm>
-            <a:off x="11155680" y="6446520"/>
-            <a:ext cx="457200" cy="292608"/>
-          </a:xfrm>
-          <a:prstGeom prst="rect">
-            <a:avLst/>
-          </a:prstGeom>
-          <a:noFill/>
-          <a:ln/>
-        </p:spPr>
-        <p:txBody>
-          <a:bodyPr wrap="square" lIns="0" tIns="0" rIns="0" bIns="0" rtlCol="0" anchor="ctr"/>
-          <a:lstStyle/>
-          <a:p>
-            <a:pPr algn="r" indent="0" marL="0">
-              <a:buNone/>
-            </a:pPr>
-            <a:r>
-              <a:rPr lang="en-US" sz="900" dirty="0">
-                <a:solidFill>
-                  <a:srgbClr val="9AA3D8"/>
-                </a:solidFill>
-                <a:latin typeface="Calibri" pitchFamily="34" charset="0"/>
-                <a:ea typeface="Calibri" pitchFamily="34" charset="-122"/>
-                <a:cs typeface="Calibri" pitchFamily="34" charset="-120"/>
-              </a:rPr>
-              <a:t>1</a:t>
-            </a:r>
-            <a:endParaRPr lang="en-US" sz="900" dirty="0"/>
+          <p:cNvPr id="8" name="cuinotes-footer-mark"/>
+          <p:cNvSpPr txBox="1"/>
+          <p:nvPr/>
+        </p:nvSpPr>
+        <p:spPr>
+          <a:xfrm>
+            <a:off x="9951720" y="6455664"/>
+            <a:ext cx="2011680" cy="292608"/>
+          </a:xfrm>
+          <a:prstGeom prst="rect">
+            <a:avLst/>
+          </a:prstGeom>
+          <a:noFill/>
+        </p:spPr>
+        <p:txBody>
+          <a:bodyPr wrap="none" lIns="0" rIns="0" tIns="0" bIns="0">
+            <a:spAutoFit/>
+          </a:bodyPr>
+          <a:lstStyle/>
+          <a:p>
+            <a:pPr algn="r"/>
+            <a:r>
+              <a:rPr sz="1000">
+                <a:solidFill>
+                  <a:srgbClr val="8A939B"/>
+                </a:solidFill>
+                <a:hlinkClick r:id="rId3"/>
+              </a:rPr>
+              <a:t>cuinotes.com</a:t>
+            </a:r>
+            <a:r>
+              <a:rPr sz="1000">
+                <a:solidFill>
+                  <a:srgbClr val="8A939B"/>
+                </a:solidFill>
+              </a:rPr>
+              <a:t>  ·  1</a:t>
+            </a:r>
           </a:p>
         </p:txBody>
       </p:sp>
@@ -4111,6 +4076,10 @@
           </a:solidFill>
           <a:ln/>
         </p:spPr>
+        <p:txBody>
+          <a:bodyPr/>
+          <a:p/>
+        </p:txBody>
       </p:sp>
       <p:sp>
         <p:nvSpPr>
@@ -4296,79 +4265,44 @@
       </p:sp>
       <p:sp>
         <p:nvSpPr>
-          <p:cNvPr id="6" name="Text 4"/>
-          <p:cNvSpPr txBox="1"/>
-          <p:nvPr/>
-        </p:nvSpPr>
-        <p:spPr>
-          <a:xfrm>
-            <a:off x="640080" y="6446520"/>
-            <a:ext cx="8686800" cy="292608"/>
-          </a:xfrm>
-          <a:prstGeom prst="rect">
-            <a:avLst/>
-          </a:prstGeom>
-          <a:noFill/>
-          <a:ln/>
-        </p:spPr>
-        <p:txBody>
-          <a:bodyPr wrap="square" lIns="0" tIns="0" rIns="0" bIns="0" rtlCol="0" anchor="ctr"/>
-          <a:lstStyle/>
-          <a:p>
-            <a:pPr algn="l" indent="0" marL="0">
-              <a:buNone/>
-            </a:pPr>
-            <a:r>
-              <a:rPr lang="en-US" sz="900" dirty="0">
-                <a:solidFill>
-                  <a:srgbClr val="5D5D72"/>
-                </a:solidFill>
-                <a:latin typeface="Calibri" pitchFamily="34" charset="0"/>
-                <a:ea typeface="Calibri" pitchFamily="34" charset="-122"/>
-                <a:cs typeface="Calibri" pitchFamily="34" charset="-120"/>
-              </a:rPr>
-              <a:t>Usman Akram  •  COMSATS University Islamabad</a:t>
-            </a:r>
-            <a:endParaRPr lang="en-US" sz="900" dirty="0"/>
-          </a:p>
-        </p:txBody>
-      </p:sp>
-      <p:sp>
-        <p:nvSpPr>
-          <p:cNvPr id="7" name="Text 5"/>
-          <p:cNvSpPr txBox="1"/>
-          <p:nvPr/>
-        </p:nvSpPr>
-        <p:spPr>
-          <a:xfrm>
-            <a:off x="11155680" y="6446520"/>
-            <a:ext cx="457200" cy="292608"/>
-          </a:xfrm>
-          <a:prstGeom prst="rect">
-            <a:avLst/>
-          </a:prstGeom>
-          <a:noFill/>
-          <a:ln/>
-        </p:spPr>
-        <p:txBody>
-          <a:bodyPr wrap="square" lIns="0" tIns="0" rIns="0" bIns="0" rtlCol="0" anchor="ctr"/>
-          <a:lstStyle/>
-          <a:p>
-            <a:pPr algn="r" indent="0" marL="0">
-              <a:buNone/>
-            </a:pPr>
-            <a:r>
-              <a:rPr lang="en-US" sz="900" dirty="0">
-                <a:solidFill>
-                  <a:srgbClr val="5D5D72"/>
-                </a:solidFill>
-                <a:latin typeface="Calibri" pitchFamily="34" charset="0"/>
-                <a:ea typeface="Calibri" pitchFamily="34" charset="-122"/>
-                <a:cs typeface="Calibri" pitchFamily="34" charset="-120"/>
-              </a:rPr>
-              <a:t>10</a:t>
-            </a:r>
-            <a:endParaRPr lang="en-US" sz="900" dirty="0"/>
+          <p:cNvPr id="8" name="cuinotes-footer-mark"/>
+          <p:cNvSpPr txBox="1"/>
+          <p:nvPr/>
+        </p:nvSpPr>
+        <p:spPr>
+          <a:xfrm>
+            <a:off x="9951720" y="6455664"/>
+            <a:ext cx="2011680" cy="292608"/>
+          </a:xfrm>
+          <a:prstGeom prst="rect">
+            <a:avLst/>
+          </a:prstGeom>
+          <a:noFill/>
+        </p:spPr>
+        <p:txBody>
+          <a:bodyPr wrap="none" lIns="0" rIns="0" tIns="0" bIns="0">
+            <a:spAutoFit/>
+          </a:bodyPr>
+          <a:lstStyle/>
+          <a:p>
+            <a:pPr algn="r"/>
+            <a:r>
+              <a:rPr sz="1000">
+                <a:solidFill>
+                  <a:srgbClr val="8A939B"/>
+                </a:solidFill>
+                <a:hlinkClick r:id="rId3"/>
+              </a:rPr>
+              <a:t>cuinotes.com</a:t>
+            </a:r>
+            <a:r>
+              <a:rPr sz="1000">
+                <a:solidFill>
+                  <a:srgbClr val="8A939B"/>
+                </a:solidFill>
+              </a:rPr>
+              <a:t>  ·  10</a:t>
+            </a:r>
           </a:p>
         </p:txBody>
       </p:sp>
@@ -4501,6 +4435,10 @@
           </a:solidFill>
           <a:ln/>
         </p:spPr>
+        <p:txBody>
+          <a:bodyPr/>
+          <a:p/>
+        </p:txBody>
       </p:sp>
       <p:sp>
         <p:nvSpPr>
@@ -4599,6 +4537,10 @@
           </a:solidFill>
           <a:ln/>
         </p:spPr>
+        <p:txBody>
+          <a:bodyPr/>
+          <a:p/>
+        </p:txBody>
       </p:sp>
       <p:sp>
         <p:nvSpPr>
@@ -4680,79 +4622,44 @@
       </p:sp>
       <p:sp>
         <p:nvSpPr>
-          <p:cNvPr id="10" name="Text 8"/>
-          <p:cNvSpPr txBox="1"/>
-          <p:nvPr/>
-        </p:nvSpPr>
-        <p:spPr>
-          <a:xfrm>
-            <a:off x="640080" y="6446520"/>
-            <a:ext cx="8686800" cy="292608"/>
-          </a:xfrm>
-          <a:prstGeom prst="rect">
-            <a:avLst/>
-          </a:prstGeom>
-          <a:noFill/>
-          <a:ln/>
-        </p:spPr>
-        <p:txBody>
-          <a:bodyPr wrap="square" lIns="0" tIns="0" rIns="0" bIns="0" rtlCol="0" anchor="ctr"/>
-          <a:lstStyle/>
-          <a:p>
-            <a:pPr algn="l" indent="0" marL="0">
-              <a:buNone/>
-            </a:pPr>
-            <a:r>
-              <a:rPr lang="en-US" sz="900" dirty="0">
-                <a:solidFill>
-                  <a:srgbClr val="5D5D72"/>
-                </a:solidFill>
-                <a:latin typeface="Calibri" pitchFamily="34" charset="0"/>
-                <a:ea typeface="Calibri" pitchFamily="34" charset="-122"/>
-                <a:cs typeface="Calibri" pitchFamily="34" charset="-120"/>
-              </a:rPr>
-              <a:t>Usman Akram  •  COMSATS University Islamabad</a:t>
-            </a:r>
-            <a:endParaRPr lang="en-US" sz="900" dirty="0"/>
-          </a:p>
-        </p:txBody>
-      </p:sp>
-      <p:sp>
-        <p:nvSpPr>
-          <p:cNvPr id="11" name="Text 9"/>
-          <p:cNvSpPr txBox="1"/>
-          <p:nvPr/>
-        </p:nvSpPr>
-        <p:spPr>
-          <a:xfrm>
-            <a:off x="11155680" y="6446520"/>
-            <a:ext cx="457200" cy="292608"/>
-          </a:xfrm>
-          <a:prstGeom prst="rect">
-            <a:avLst/>
-          </a:prstGeom>
-          <a:noFill/>
-          <a:ln/>
-        </p:spPr>
-        <p:txBody>
-          <a:bodyPr wrap="square" lIns="0" tIns="0" rIns="0" bIns="0" rtlCol="0" anchor="ctr"/>
-          <a:lstStyle/>
-          <a:p>
-            <a:pPr algn="r" indent="0" marL="0">
-              <a:buNone/>
-            </a:pPr>
-            <a:r>
-              <a:rPr lang="en-US" sz="900" dirty="0">
-                <a:solidFill>
-                  <a:srgbClr val="5D5D72"/>
-                </a:solidFill>
-                <a:latin typeface="Calibri" pitchFamily="34" charset="0"/>
-                <a:ea typeface="Calibri" pitchFamily="34" charset="-122"/>
-                <a:cs typeface="Calibri" pitchFamily="34" charset="-120"/>
-              </a:rPr>
-              <a:t>11</a:t>
-            </a:r>
-            <a:endParaRPr lang="en-US" sz="900" dirty="0"/>
+          <p:cNvPr id="12" name="cuinotes-footer-mark"/>
+          <p:cNvSpPr txBox="1"/>
+          <p:nvPr/>
+        </p:nvSpPr>
+        <p:spPr>
+          <a:xfrm>
+            <a:off x="9951720" y="6455664"/>
+            <a:ext cx="2011680" cy="292608"/>
+          </a:xfrm>
+          <a:prstGeom prst="rect">
+            <a:avLst/>
+          </a:prstGeom>
+          <a:noFill/>
+        </p:spPr>
+        <p:txBody>
+          <a:bodyPr wrap="none" lIns="0" rIns="0" tIns="0" bIns="0">
+            <a:spAutoFit/>
+          </a:bodyPr>
+          <a:lstStyle/>
+          <a:p>
+            <a:pPr algn="r"/>
+            <a:r>
+              <a:rPr sz="1000">
+                <a:solidFill>
+                  <a:srgbClr val="8A939B"/>
+                </a:solidFill>
+                <a:hlinkClick r:id="rId3"/>
+              </a:rPr>
+              <a:t>cuinotes.com</a:t>
+            </a:r>
+            <a:r>
+              <a:rPr sz="1000">
+                <a:solidFill>
+                  <a:srgbClr val="8A939B"/>
+                </a:solidFill>
+              </a:rPr>
+              <a:t>  ·  11</a:t>
+            </a:r>
           </a:p>
         </p:txBody>
       </p:sp>
@@ -4889,6 +4796,10 @@
             <a:tailEnd type="triangle"/>
           </a:ln>
         </p:spPr>
+        <p:txBody>
+          <a:bodyPr/>
+          <a:p/>
+        </p:txBody>
       </p:sp>
       <p:sp>
         <p:nvSpPr>
@@ -4971,6 +4882,10 @@
             <a:tailEnd type="triangle"/>
           </a:ln>
         </p:spPr>
+        <p:txBody>
+          <a:bodyPr/>
+          <a:p/>
+        </p:txBody>
       </p:sp>
       <p:sp>
         <p:nvSpPr>
@@ -5051,6 +4966,10 @@
           </a:solidFill>
           <a:ln/>
         </p:spPr>
+        <p:txBody>
+          <a:bodyPr/>
+          <a:p/>
+        </p:txBody>
       </p:sp>
       <p:sp>
         <p:nvSpPr>
@@ -5115,6 +5034,10 @@
           </a:solidFill>
           <a:ln/>
         </p:spPr>
+        <p:txBody>
+          <a:bodyPr/>
+          <a:p/>
+        </p:txBody>
       </p:sp>
       <p:sp>
         <p:nvSpPr>
@@ -5179,6 +5102,10 @@
           </a:solidFill>
           <a:ln/>
         </p:spPr>
+        <p:txBody>
+          <a:bodyPr/>
+          <a:p/>
+        </p:txBody>
       </p:sp>
       <p:sp>
         <p:nvSpPr>
@@ -5263,79 +5190,44 @@
       </p:sp>
       <p:sp>
         <p:nvSpPr>
-          <p:cNvPr id="15" name="Text 13"/>
-          <p:cNvSpPr txBox="1"/>
-          <p:nvPr/>
-        </p:nvSpPr>
-        <p:spPr>
-          <a:xfrm>
-            <a:off x="640080" y="6446520"/>
-            <a:ext cx="8686800" cy="292608"/>
-          </a:xfrm>
-          <a:prstGeom prst="rect">
-            <a:avLst/>
-          </a:prstGeom>
-          <a:noFill/>
-          <a:ln/>
-        </p:spPr>
-        <p:txBody>
-          <a:bodyPr wrap="square" lIns="0" tIns="0" rIns="0" bIns="0" rtlCol="0" anchor="ctr"/>
-          <a:lstStyle/>
-          <a:p>
-            <a:pPr algn="l" indent="0" marL="0">
-              <a:buNone/>
-            </a:pPr>
-            <a:r>
-              <a:rPr lang="en-US" sz="900" dirty="0">
-                <a:solidFill>
-                  <a:srgbClr val="5D5D72"/>
-                </a:solidFill>
-                <a:latin typeface="Calibri" pitchFamily="34" charset="0"/>
-                <a:ea typeface="Calibri" pitchFamily="34" charset="-122"/>
-                <a:cs typeface="Calibri" pitchFamily="34" charset="-120"/>
-              </a:rPr>
-              <a:t>Usman Akram  •  COMSATS University Islamabad</a:t>
-            </a:r>
-            <a:endParaRPr lang="en-US" sz="900" dirty="0"/>
-          </a:p>
-        </p:txBody>
-      </p:sp>
-      <p:sp>
-        <p:nvSpPr>
-          <p:cNvPr id="16" name="Text 14"/>
-          <p:cNvSpPr txBox="1"/>
-          <p:nvPr/>
-        </p:nvSpPr>
-        <p:spPr>
-          <a:xfrm>
-            <a:off x="11155680" y="6446520"/>
-            <a:ext cx="457200" cy="292608"/>
-          </a:xfrm>
-          <a:prstGeom prst="rect">
-            <a:avLst/>
-          </a:prstGeom>
-          <a:noFill/>
-          <a:ln/>
-        </p:spPr>
-        <p:txBody>
-          <a:bodyPr wrap="square" lIns="0" tIns="0" rIns="0" bIns="0" rtlCol="0" anchor="ctr"/>
-          <a:lstStyle/>
-          <a:p>
-            <a:pPr algn="r" indent="0" marL="0">
-              <a:buNone/>
-            </a:pPr>
-            <a:r>
-              <a:rPr lang="en-US" sz="900" dirty="0">
-                <a:solidFill>
-                  <a:srgbClr val="5D5D72"/>
-                </a:solidFill>
-                <a:latin typeface="Calibri" pitchFamily="34" charset="0"/>
-                <a:ea typeface="Calibri" pitchFamily="34" charset="-122"/>
-                <a:cs typeface="Calibri" pitchFamily="34" charset="-120"/>
-              </a:rPr>
-              <a:t>12</a:t>
-            </a:r>
-            <a:endParaRPr lang="en-US" sz="900" dirty="0"/>
+          <p:cNvPr id="17" name="cuinotes-footer-mark"/>
+          <p:cNvSpPr txBox="1"/>
+          <p:nvPr/>
+        </p:nvSpPr>
+        <p:spPr>
+          <a:xfrm>
+            <a:off x="9951720" y="6455664"/>
+            <a:ext cx="2011680" cy="292608"/>
+          </a:xfrm>
+          <a:prstGeom prst="rect">
+            <a:avLst/>
+          </a:prstGeom>
+          <a:noFill/>
+        </p:spPr>
+        <p:txBody>
+          <a:bodyPr wrap="none" lIns="0" rIns="0" tIns="0" bIns="0">
+            <a:spAutoFit/>
+          </a:bodyPr>
+          <a:lstStyle/>
+          <a:p>
+            <a:pPr algn="r"/>
+            <a:r>
+              <a:rPr sz="1000">
+                <a:solidFill>
+                  <a:srgbClr val="8A939B"/>
+                </a:solidFill>
+                <a:hlinkClick r:id="rId3"/>
+              </a:rPr>
+              <a:t>cuinotes.com</a:t>
+            </a:r>
+            <a:r>
+              <a:rPr sz="1000">
+                <a:solidFill>
+                  <a:srgbClr val="8A939B"/>
+                </a:solidFill>
+              </a:rPr>
+              <a:t>  ·  12</a:t>
+            </a:r>
           </a:p>
         </p:txBody>
       </p:sp>
@@ -5470,6 +5362,10 @@
           </a:solidFill>
           <a:ln/>
         </p:spPr>
+        <p:txBody>
+          <a:bodyPr/>
+          <a:p/>
+        </p:txBody>
       </p:sp>
       <p:sp>
         <p:nvSpPr>
@@ -5704,79 +5600,44 @@
       </p:sp>
       <p:sp>
         <p:nvSpPr>
-          <p:cNvPr id="6" name="Text 4"/>
-          <p:cNvSpPr txBox="1"/>
-          <p:nvPr/>
-        </p:nvSpPr>
-        <p:spPr>
-          <a:xfrm>
-            <a:off x="640080" y="6446520"/>
-            <a:ext cx="8686800" cy="292608"/>
-          </a:xfrm>
-          <a:prstGeom prst="rect">
-            <a:avLst/>
-          </a:prstGeom>
-          <a:noFill/>
-          <a:ln/>
-        </p:spPr>
-        <p:txBody>
-          <a:bodyPr wrap="square" lIns="0" tIns="0" rIns="0" bIns="0" rtlCol="0" anchor="ctr"/>
-          <a:lstStyle/>
-          <a:p>
-            <a:pPr algn="l" indent="0" marL="0">
-              <a:buNone/>
-            </a:pPr>
-            <a:r>
-              <a:rPr lang="en-US" sz="900" dirty="0">
-                <a:solidFill>
-                  <a:srgbClr val="5D5D72"/>
-                </a:solidFill>
-                <a:latin typeface="Calibri" pitchFamily="34" charset="0"/>
-                <a:ea typeface="Calibri" pitchFamily="34" charset="-122"/>
-                <a:cs typeface="Calibri" pitchFamily="34" charset="-120"/>
-              </a:rPr>
-              <a:t>Usman Akram  •  COMSATS University Islamabad</a:t>
-            </a:r>
-            <a:endParaRPr lang="en-US" sz="900" dirty="0"/>
-          </a:p>
-        </p:txBody>
-      </p:sp>
-      <p:sp>
-        <p:nvSpPr>
-          <p:cNvPr id="7" name="Text 5"/>
-          <p:cNvSpPr txBox="1"/>
-          <p:nvPr/>
-        </p:nvSpPr>
-        <p:spPr>
-          <a:xfrm>
-            <a:off x="11155680" y="6446520"/>
-            <a:ext cx="457200" cy="292608"/>
-          </a:xfrm>
-          <a:prstGeom prst="rect">
-            <a:avLst/>
-          </a:prstGeom>
-          <a:noFill/>
-          <a:ln/>
-        </p:spPr>
-        <p:txBody>
-          <a:bodyPr wrap="square" lIns="0" tIns="0" rIns="0" bIns="0" rtlCol="0" anchor="ctr"/>
-          <a:lstStyle/>
-          <a:p>
-            <a:pPr algn="r" indent="0" marL="0">
-              <a:buNone/>
-            </a:pPr>
-            <a:r>
-              <a:rPr lang="en-US" sz="900" dirty="0">
-                <a:solidFill>
-                  <a:srgbClr val="5D5D72"/>
-                </a:solidFill>
-                <a:latin typeface="Calibri" pitchFamily="34" charset="0"/>
-                <a:ea typeface="Calibri" pitchFamily="34" charset="-122"/>
-                <a:cs typeface="Calibri" pitchFamily="34" charset="-120"/>
-              </a:rPr>
-              <a:t>13</a:t>
-            </a:r>
-            <a:endParaRPr lang="en-US" sz="900" dirty="0"/>
+          <p:cNvPr id="8" name="cuinotes-footer-mark"/>
+          <p:cNvSpPr txBox="1"/>
+          <p:nvPr/>
+        </p:nvSpPr>
+        <p:spPr>
+          <a:xfrm>
+            <a:off x="9951720" y="6455664"/>
+            <a:ext cx="2011680" cy="292608"/>
+          </a:xfrm>
+          <a:prstGeom prst="rect">
+            <a:avLst/>
+          </a:prstGeom>
+          <a:noFill/>
+        </p:spPr>
+        <p:txBody>
+          <a:bodyPr wrap="none" lIns="0" rIns="0" tIns="0" bIns="0">
+            <a:spAutoFit/>
+          </a:bodyPr>
+          <a:lstStyle/>
+          <a:p>
+            <a:pPr algn="r"/>
+            <a:r>
+              <a:rPr sz="1000">
+                <a:solidFill>
+                  <a:srgbClr val="8A939B"/>
+                </a:solidFill>
+                <a:hlinkClick r:id="rId3"/>
+              </a:rPr>
+              <a:t>cuinotes.com</a:t>
+            </a:r>
+            <a:r>
+              <a:rPr sz="1000">
+                <a:solidFill>
+                  <a:srgbClr val="8A939B"/>
+                </a:solidFill>
+              </a:rPr>
+              <a:t>  ·  13</a:t>
+            </a:r>
           </a:p>
         </p:txBody>
       </p:sp>
@@ -5911,6 +5772,10 @@
           </a:solidFill>
           <a:ln/>
         </p:spPr>
+        <p:txBody>
+          <a:bodyPr/>
+          <a:p/>
+        </p:txBody>
       </p:sp>
       <p:sp>
         <p:nvSpPr>
@@ -6127,6 +5992,10 @@
             </a:outerShdw>
           </a:effectLst>
         </p:spPr>
+        <p:txBody>
+          <a:bodyPr/>
+          <a:p/>
+        </p:txBody>
       </p:sp>
       <p:pic>
         <p:nvPicPr>
@@ -6154,79 +6023,44 @@
       </p:pic>
       <p:sp>
         <p:nvSpPr>
-          <p:cNvPr id="8" name="Text 5"/>
-          <p:cNvSpPr txBox="1"/>
-          <p:nvPr/>
-        </p:nvSpPr>
-        <p:spPr>
-          <a:xfrm>
-            <a:off x="640080" y="6446520"/>
-            <a:ext cx="8686800" cy="292608"/>
-          </a:xfrm>
-          <a:prstGeom prst="rect">
-            <a:avLst/>
-          </a:prstGeom>
-          <a:noFill/>
-          <a:ln/>
-        </p:spPr>
-        <p:txBody>
-          <a:bodyPr wrap="square" lIns="0" tIns="0" rIns="0" bIns="0" rtlCol="0" anchor="ctr"/>
-          <a:lstStyle/>
-          <a:p>
-            <a:pPr algn="l" indent="0" marL="0">
-              <a:buNone/>
-            </a:pPr>
-            <a:r>
-              <a:rPr lang="en-US" sz="900" dirty="0">
-                <a:solidFill>
-                  <a:srgbClr val="5D5D72"/>
-                </a:solidFill>
-                <a:latin typeface="Calibri" pitchFamily="34" charset="0"/>
-                <a:ea typeface="Calibri" pitchFamily="34" charset="-122"/>
-                <a:cs typeface="Calibri" pitchFamily="34" charset="-120"/>
-              </a:rPr>
-              <a:t>Usman Akram  •  COMSATS University Islamabad</a:t>
-            </a:r>
-            <a:endParaRPr lang="en-US" sz="900" dirty="0"/>
-          </a:p>
-        </p:txBody>
-      </p:sp>
-      <p:sp>
-        <p:nvSpPr>
-          <p:cNvPr id="9" name="Text 6"/>
-          <p:cNvSpPr txBox="1"/>
-          <p:nvPr/>
-        </p:nvSpPr>
-        <p:spPr>
-          <a:xfrm>
-            <a:off x="11155680" y="6446520"/>
-            <a:ext cx="457200" cy="292608"/>
-          </a:xfrm>
-          <a:prstGeom prst="rect">
-            <a:avLst/>
-          </a:prstGeom>
-          <a:noFill/>
-          <a:ln/>
-        </p:spPr>
-        <p:txBody>
-          <a:bodyPr wrap="square" lIns="0" tIns="0" rIns="0" bIns="0" rtlCol="0" anchor="ctr"/>
-          <a:lstStyle/>
-          <a:p>
-            <a:pPr algn="r" indent="0" marL="0">
-              <a:buNone/>
-            </a:pPr>
-            <a:r>
-              <a:rPr lang="en-US" sz="900" dirty="0">
-                <a:solidFill>
-                  <a:srgbClr val="5D5D72"/>
-                </a:solidFill>
-                <a:latin typeface="Calibri" pitchFamily="34" charset="0"/>
-                <a:ea typeface="Calibri" pitchFamily="34" charset="-122"/>
-                <a:cs typeface="Calibri" pitchFamily="34" charset="-120"/>
-              </a:rPr>
-              <a:t>14</a:t>
-            </a:r>
-            <a:endParaRPr lang="en-US" sz="900" dirty="0"/>
+          <p:cNvPr id="10" name="cuinotes-footer-mark"/>
+          <p:cNvSpPr txBox="1"/>
+          <p:nvPr/>
+        </p:nvSpPr>
+        <p:spPr>
+          <a:xfrm>
+            <a:off x="9951720" y="6455664"/>
+            <a:ext cx="2011680" cy="292608"/>
+          </a:xfrm>
+          <a:prstGeom prst="rect">
+            <a:avLst/>
+          </a:prstGeom>
+          <a:noFill/>
+        </p:spPr>
+        <p:txBody>
+          <a:bodyPr wrap="none" lIns="0" rIns="0" tIns="0" bIns="0">
+            <a:spAutoFit/>
+          </a:bodyPr>
+          <a:lstStyle/>
+          <a:p>
+            <a:pPr algn="r"/>
+            <a:r>
+              <a:rPr sz="1000">
+                <a:solidFill>
+                  <a:srgbClr val="8A939B"/>
+                </a:solidFill>
+                <a:hlinkClick r:id="rId4"/>
+              </a:rPr>
+              <a:t>cuinotes.com</a:t>
+            </a:r>
+            <a:r>
+              <a:rPr sz="1000">
+                <a:solidFill>
+                  <a:srgbClr val="8A939B"/>
+                </a:solidFill>
+              </a:rPr>
+              <a:t>  ·  14</a:t>
+            </a:r>
           </a:p>
         </p:txBody>
       </p:sp>
@@ -6361,6 +6195,10 @@
           </a:solidFill>
           <a:ln/>
         </p:spPr>
+        <p:txBody>
+          <a:bodyPr/>
+          <a:p/>
+        </p:txBody>
       </p:sp>
       <p:sp>
         <p:nvSpPr>
@@ -6525,79 +6363,44 @@
       </p:sp>
       <p:sp>
         <p:nvSpPr>
-          <p:cNvPr id="7" name="Text 5"/>
-          <p:cNvSpPr txBox="1"/>
-          <p:nvPr/>
-        </p:nvSpPr>
-        <p:spPr>
-          <a:xfrm>
-            <a:off x="640080" y="6446520"/>
-            <a:ext cx="8686800" cy="292608"/>
-          </a:xfrm>
-          <a:prstGeom prst="rect">
-            <a:avLst/>
-          </a:prstGeom>
-          <a:noFill/>
-          <a:ln/>
-        </p:spPr>
-        <p:txBody>
-          <a:bodyPr wrap="square" lIns="0" tIns="0" rIns="0" bIns="0" rtlCol="0" anchor="ctr"/>
-          <a:lstStyle/>
-          <a:p>
-            <a:pPr algn="l" indent="0" marL="0">
-              <a:buNone/>
-            </a:pPr>
-            <a:r>
-              <a:rPr lang="en-US" sz="900" dirty="0">
-                <a:solidFill>
-                  <a:srgbClr val="5D5D72"/>
-                </a:solidFill>
-                <a:latin typeface="Calibri" pitchFamily="34" charset="0"/>
-                <a:ea typeface="Calibri" pitchFamily="34" charset="-122"/>
-                <a:cs typeface="Calibri" pitchFamily="34" charset="-120"/>
-              </a:rPr>
-              <a:t>Usman Akram  •  COMSATS University Islamabad</a:t>
-            </a:r>
-            <a:endParaRPr lang="en-US" sz="900" dirty="0"/>
-          </a:p>
-        </p:txBody>
-      </p:sp>
-      <p:sp>
-        <p:nvSpPr>
-          <p:cNvPr id="8" name="Text 6"/>
-          <p:cNvSpPr txBox="1"/>
-          <p:nvPr/>
-        </p:nvSpPr>
-        <p:spPr>
-          <a:xfrm>
-            <a:off x="11155680" y="6446520"/>
-            <a:ext cx="457200" cy="292608"/>
-          </a:xfrm>
-          <a:prstGeom prst="rect">
-            <a:avLst/>
-          </a:prstGeom>
-          <a:noFill/>
-          <a:ln/>
-        </p:spPr>
-        <p:txBody>
-          <a:bodyPr wrap="square" lIns="0" tIns="0" rIns="0" bIns="0" rtlCol="0" anchor="ctr"/>
-          <a:lstStyle/>
-          <a:p>
-            <a:pPr algn="r" indent="0" marL="0">
-              <a:buNone/>
-            </a:pPr>
-            <a:r>
-              <a:rPr lang="en-US" sz="900" dirty="0">
-                <a:solidFill>
-                  <a:srgbClr val="5D5D72"/>
-                </a:solidFill>
-                <a:latin typeface="Calibri" pitchFamily="34" charset="0"/>
-                <a:ea typeface="Calibri" pitchFamily="34" charset="-122"/>
-                <a:cs typeface="Calibri" pitchFamily="34" charset="-120"/>
-              </a:rPr>
-              <a:t>15</a:t>
-            </a:r>
-            <a:endParaRPr lang="en-US" sz="900" dirty="0"/>
+          <p:cNvPr id="9" name="cuinotes-footer-mark"/>
+          <p:cNvSpPr txBox="1"/>
+          <p:nvPr/>
+        </p:nvSpPr>
+        <p:spPr>
+          <a:xfrm>
+            <a:off x="9951720" y="6455664"/>
+            <a:ext cx="2011680" cy="292608"/>
+          </a:xfrm>
+          <a:prstGeom prst="rect">
+            <a:avLst/>
+          </a:prstGeom>
+          <a:noFill/>
+        </p:spPr>
+        <p:txBody>
+          <a:bodyPr wrap="none" lIns="0" rIns="0" tIns="0" bIns="0">
+            <a:spAutoFit/>
+          </a:bodyPr>
+          <a:lstStyle/>
+          <a:p>
+            <a:pPr algn="r"/>
+            <a:r>
+              <a:rPr sz="1000">
+                <a:solidFill>
+                  <a:srgbClr val="8A939B"/>
+                </a:solidFill>
+                <a:hlinkClick r:id="rId3"/>
+              </a:rPr>
+              <a:t>cuinotes.com</a:t>
+            </a:r>
+            <a:r>
+              <a:rPr sz="1000">
+                <a:solidFill>
+                  <a:srgbClr val="8A939B"/>
+                </a:solidFill>
+              </a:rPr>
+              <a:t>  ·  15</a:t>
+            </a:r>
           </a:p>
         </p:txBody>
       </p:sp>
@@ -6732,6 +6535,10 @@
           </a:solidFill>
           <a:ln/>
         </p:spPr>
+        <p:txBody>
+          <a:bodyPr/>
+          <a:p/>
+        </p:txBody>
       </p:sp>
       <p:sp>
         <p:nvSpPr>
@@ -6925,79 +6732,44 @@
       </p:sp>
       <p:sp>
         <p:nvSpPr>
-          <p:cNvPr id="7" name="Text 5"/>
-          <p:cNvSpPr txBox="1"/>
-          <p:nvPr/>
-        </p:nvSpPr>
-        <p:spPr>
-          <a:xfrm>
-            <a:off x="640080" y="6446520"/>
-            <a:ext cx="8686800" cy="292608"/>
-          </a:xfrm>
-          <a:prstGeom prst="rect">
-            <a:avLst/>
-          </a:prstGeom>
-          <a:noFill/>
-          <a:ln/>
-        </p:spPr>
-        <p:txBody>
-          <a:bodyPr wrap="square" lIns="0" tIns="0" rIns="0" bIns="0" rtlCol="0" anchor="ctr"/>
-          <a:lstStyle/>
-          <a:p>
-            <a:pPr algn="l" indent="0" marL="0">
-              <a:buNone/>
-            </a:pPr>
-            <a:r>
-              <a:rPr lang="en-US" sz="900" dirty="0">
-                <a:solidFill>
-                  <a:srgbClr val="5D5D72"/>
-                </a:solidFill>
-                <a:latin typeface="Calibri" pitchFamily="34" charset="0"/>
-                <a:ea typeface="Calibri" pitchFamily="34" charset="-122"/>
-                <a:cs typeface="Calibri" pitchFamily="34" charset="-120"/>
-              </a:rPr>
-              <a:t>Usman Akram  •  COMSATS University Islamabad</a:t>
-            </a:r>
-            <a:endParaRPr lang="en-US" sz="900" dirty="0"/>
-          </a:p>
-        </p:txBody>
-      </p:sp>
-      <p:sp>
-        <p:nvSpPr>
-          <p:cNvPr id="8" name="Text 6"/>
-          <p:cNvSpPr txBox="1"/>
-          <p:nvPr/>
-        </p:nvSpPr>
-        <p:spPr>
-          <a:xfrm>
-            <a:off x="11155680" y="6446520"/>
-            <a:ext cx="457200" cy="292608"/>
-          </a:xfrm>
-          <a:prstGeom prst="rect">
-            <a:avLst/>
-          </a:prstGeom>
-          <a:noFill/>
-          <a:ln/>
-        </p:spPr>
-        <p:txBody>
-          <a:bodyPr wrap="square" lIns="0" tIns="0" rIns="0" bIns="0" rtlCol="0" anchor="ctr"/>
-          <a:lstStyle/>
-          <a:p>
-            <a:pPr algn="r" indent="0" marL="0">
-              <a:buNone/>
-            </a:pPr>
-            <a:r>
-              <a:rPr lang="en-US" sz="900" dirty="0">
-                <a:solidFill>
-                  <a:srgbClr val="5D5D72"/>
-                </a:solidFill>
-                <a:latin typeface="Calibri" pitchFamily="34" charset="0"/>
-                <a:ea typeface="Calibri" pitchFamily="34" charset="-122"/>
-                <a:cs typeface="Calibri" pitchFamily="34" charset="-120"/>
-              </a:rPr>
-              <a:t>16</a:t>
-            </a:r>
-            <a:endParaRPr lang="en-US" sz="900" dirty="0"/>
+          <p:cNvPr id="9" name="cuinotes-footer-mark"/>
+          <p:cNvSpPr txBox="1"/>
+          <p:nvPr/>
+        </p:nvSpPr>
+        <p:spPr>
+          <a:xfrm>
+            <a:off x="9951720" y="6455664"/>
+            <a:ext cx="2011680" cy="292608"/>
+          </a:xfrm>
+          <a:prstGeom prst="rect">
+            <a:avLst/>
+          </a:prstGeom>
+          <a:noFill/>
+        </p:spPr>
+        <p:txBody>
+          <a:bodyPr wrap="none" lIns="0" rIns="0" tIns="0" bIns="0">
+            <a:spAutoFit/>
+          </a:bodyPr>
+          <a:lstStyle/>
+          <a:p>
+            <a:pPr algn="r"/>
+            <a:r>
+              <a:rPr sz="1000">
+                <a:solidFill>
+                  <a:srgbClr val="8A939B"/>
+                </a:solidFill>
+                <a:hlinkClick r:id="rId3"/>
+              </a:rPr>
+              <a:t>cuinotes.com</a:t>
+            </a:r>
+            <a:r>
+              <a:rPr sz="1000">
+                <a:solidFill>
+                  <a:srgbClr val="8A939B"/>
+                </a:solidFill>
+              </a:rPr>
+              <a:t>  ·  16</a:t>
+            </a:r>
           </a:p>
         </p:txBody>
       </p:sp>
@@ -7132,6 +6904,10 @@
           </a:solidFill>
           <a:ln/>
         </p:spPr>
+        <p:txBody>
+          <a:bodyPr/>
+          <a:p/>
+        </p:txBody>
       </p:sp>
       <p:sp>
         <p:nvSpPr>
@@ -7377,6 +7153,10 @@
             </a:outerShdw>
           </a:effectLst>
         </p:spPr>
+        <p:txBody>
+          <a:bodyPr/>
+          <a:p/>
+        </p:txBody>
       </p:sp>
       <p:pic>
         <p:nvPicPr>
@@ -7404,79 +7184,44 @@
       </p:pic>
       <p:sp>
         <p:nvSpPr>
-          <p:cNvPr id="8" name="Text 5"/>
-          <p:cNvSpPr txBox="1"/>
-          <p:nvPr/>
-        </p:nvSpPr>
-        <p:spPr>
-          <a:xfrm>
-            <a:off x="640080" y="6446520"/>
-            <a:ext cx="8686800" cy="292608"/>
-          </a:xfrm>
-          <a:prstGeom prst="rect">
-            <a:avLst/>
-          </a:prstGeom>
-          <a:noFill/>
-          <a:ln/>
-        </p:spPr>
-        <p:txBody>
-          <a:bodyPr wrap="square" lIns="0" tIns="0" rIns="0" bIns="0" rtlCol="0" anchor="ctr"/>
-          <a:lstStyle/>
-          <a:p>
-            <a:pPr algn="l" indent="0" marL="0">
-              <a:buNone/>
-            </a:pPr>
-            <a:r>
-              <a:rPr lang="en-US" sz="900" dirty="0">
-                <a:solidFill>
-                  <a:srgbClr val="5D5D72"/>
-                </a:solidFill>
-                <a:latin typeface="Calibri" pitchFamily="34" charset="0"/>
-                <a:ea typeface="Calibri" pitchFamily="34" charset="-122"/>
-                <a:cs typeface="Calibri" pitchFamily="34" charset="-120"/>
-              </a:rPr>
-              <a:t>Usman Akram  •  COMSATS University Islamabad</a:t>
-            </a:r>
-            <a:endParaRPr lang="en-US" sz="900" dirty="0"/>
-          </a:p>
-        </p:txBody>
-      </p:sp>
-      <p:sp>
-        <p:nvSpPr>
-          <p:cNvPr id="9" name="Text 6"/>
-          <p:cNvSpPr txBox="1"/>
-          <p:nvPr/>
-        </p:nvSpPr>
-        <p:spPr>
-          <a:xfrm>
-            <a:off x="11155680" y="6446520"/>
-            <a:ext cx="457200" cy="292608"/>
-          </a:xfrm>
-          <a:prstGeom prst="rect">
-            <a:avLst/>
-          </a:prstGeom>
-          <a:noFill/>
-          <a:ln/>
-        </p:spPr>
-        <p:txBody>
-          <a:bodyPr wrap="square" lIns="0" tIns="0" rIns="0" bIns="0" rtlCol="0" anchor="ctr"/>
-          <a:lstStyle/>
-          <a:p>
-            <a:pPr algn="r" indent="0" marL="0">
-              <a:buNone/>
-            </a:pPr>
-            <a:r>
-              <a:rPr lang="en-US" sz="900" dirty="0">
-                <a:solidFill>
-                  <a:srgbClr val="5D5D72"/>
-                </a:solidFill>
-                <a:latin typeface="Calibri" pitchFamily="34" charset="0"/>
-                <a:ea typeface="Calibri" pitchFamily="34" charset="-122"/>
-                <a:cs typeface="Calibri" pitchFamily="34" charset="-120"/>
-              </a:rPr>
-              <a:t>17</a:t>
-            </a:r>
-            <a:endParaRPr lang="en-US" sz="900" dirty="0"/>
+          <p:cNvPr id="10" name="cuinotes-footer-mark"/>
+          <p:cNvSpPr txBox="1"/>
+          <p:nvPr/>
+        </p:nvSpPr>
+        <p:spPr>
+          <a:xfrm>
+            <a:off x="9951720" y="6455664"/>
+            <a:ext cx="2011680" cy="292608"/>
+          </a:xfrm>
+          <a:prstGeom prst="rect">
+            <a:avLst/>
+          </a:prstGeom>
+          <a:noFill/>
+        </p:spPr>
+        <p:txBody>
+          <a:bodyPr wrap="none" lIns="0" rIns="0" tIns="0" bIns="0">
+            <a:spAutoFit/>
+          </a:bodyPr>
+          <a:lstStyle/>
+          <a:p>
+            <a:pPr algn="r"/>
+            <a:r>
+              <a:rPr sz="1000">
+                <a:solidFill>
+                  <a:srgbClr val="8A939B"/>
+                </a:solidFill>
+                <a:hlinkClick r:id="rId4"/>
+              </a:rPr>
+              <a:t>cuinotes.com</a:t>
+            </a:r>
+            <a:r>
+              <a:rPr sz="1000">
+                <a:solidFill>
+                  <a:srgbClr val="8A939B"/>
+                </a:solidFill>
+              </a:rPr>
+              <a:t>  ·  17</a:t>
+            </a:r>
           </a:p>
         </p:txBody>
       </p:sp>
@@ -7609,6 +7354,10 @@
           </a:solidFill>
           <a:ln/>
         </p:spPr>
+        <p:txBody>
+          <a:bodyPr/>
+          <a:p/>
+        </p:txBody>
       </p:sp>
       <p:sp>
         <p:nvSpPr>
@@ -7707,6 +7456,10 @@
           </a:solidFill>
           <a:ln/>
         </p:spPr>
+        <p:txBody>
+          <a:bodyPr/>
+          <a:p/>
+        </p:txBody>
       </p:sp>
       <p:sp>
         <p:nvSpPr>
@@ -7788,79 +7541,44 @@
       </p:sp>
       <p:sp>
         <p:nvSpPr>
-          <p:cNvPr id="10" name="Text 8"/>
-          <p:cNvSpPr txBox="1"/>
-          <p:nvPr/>
-        </p:nvSpPr>
-        <p:spPr>
-          <a:xfrm>
-            <a:off x="640080" y="6446520"/>
-            <a:ext cx="8686800" cy="292608"/>
-          </a:xfrm>
-          <a:prstGeom prst="rect">
-            <a:avLst/>
-          </a:prstGeom>
-          <a:noFill/>
-          <a:ln/>
-        </p:spPr>
-        <p:txBody>
-          <a:bodyPr wrap="square" lIns="0" tIns="0" rIns="0" bIns="0" rtlCol="0" anchor="ctr"/>
-          <a:lstStyle/>
-          <a:p>
-            <a:pPr algn="l" indent="0" marL="0">
-              <a:buNone/>
-            </a:pPr>
-            <a:r>
-              <a:rPr lang="en-US" sz="900" dirty="0">
-                <a:solidFill>
-                  <a:srgbClr val="5D5D72"/>
-                </a:solidFill>
-                <a:latin typeface="Calibri" pitchFamily="34" charset="0"/>
-                <a:ea typeface="Calibri" pitchFamily="34" charset="-122"/>
-                <a:cs typeface="Calibri" pitchFamily="34" charset="-120"/>
-              </a:rPr>
-              <a:t>Usman Akram  •  COMSATS University Islamabad</a:t>
-            </a:r>
-            <a:endParaRPr lang="en-US" sz="900" dirty="0"/>
-          </a:p>
-        </p:txBody>
-      </p:sp>
-      <p:sp>
-        <p:nvSpPr>
-          <p:cNvPr id="11" name="Text 9"/>
-          <p:cNvSpPr txBox="1"/>
-          <p:nvPr/>
-        </p:nvSpPr>
-        <p:spPr>
-          <a:xfrm>
-            <a:off x="11155680" y="6446520"/>
-            <a:ext cx="457200" cy="292608"/>
-          </a:xfrm>
-          <a:prstGeom prst="rect">
-            <a:avLst/>
-          </a:prstGeom>
-          <a:noFill/>
-          <a:ln/>
-        </p:spPr>
-        <p:txBody>
-          <a:bodyPr wrap="square" lIns="0" tIns="0" rIns="0" bIns="0" rtlCol="0" anchor="ctr"/>
-          <a:lstStyle/>
-          <a:p>
-            <a:pPr algn="r" indent="0" marL="0">
-              <a:buNone/>
-            </a:pPr>
-            <a:r>
-              <a:rPr lang="en-US" sz="900" dirty="0">
-                <a:solidFill>
-                  <a:srgbClr val="5D5D72"/>
-                </a:solidFill>
-                <a:latin typeface="Calibri" pitchFamily="34" charset="0"/>
-                <a:ea typeface="Calibri" pitchFamily="34" charset="-122"/>
-                <a:cs typeface="Calibri" pitchFamily="34" charset="-120"/>
-              </a:rPr>
-              <a:t>18</a:t>
-            </a:r>
-            <a:endParaRPr lang="en-US" sz="900" dirty="0"/>
+          <p:cNvPr id="12" name="cuinotes-footer-mark"/>
+          <p:cNvSpPr txBox="1"/>
+          <p:nvPr/>
+        </p:nvSpPr>
+        <p:spPr>
+          <a:xfrm>
+            <a:off x="9951720" y="6455664"/>
+            <a:ext cx="2011680" cy="292608"/>
+          </a:xfrm>
+          <a:prstGeom prst="rect">
+            <a:avLst/>
+          </a:prstGeom>
+          <a:noFill/>
+        </p:spPr>
+        <p:txBody>
+          <a:bodyPr wrap="none" lIns="0" rIns="0" tIns="0" bIns="0">
+            <a:spAutoFit/>
+          </a:bodyPr>
+          <a:lstStyle/>
+          <a:p>
+            <a:pPr algn="r"/>
+            <a:r>
+              <a:rPr sz="1000">
+                <a:solidFill>
+                  <a:srgbClr val="8A939B"/>
+                </a:solidFill>
+                <a:hlinkClick r:id="rId3"/>
+              </a:rPr>
+              <a:t>cuinotes.com</a:t>
+            </a:r>
+            <a:r>
+              <a:rPr sz="1000">
+                <a:solidFill>
+                  <a:srgbClr val="8A939B"/>
+                </a:solidFill>
+              </a:rPr>
+              <a:t>  ·  18</a:t>
+            </a:r>
           </a:p>
         </p:txBody>
       </p:sp>
@@ -7995,6 +7713,10 @@
           </a:solidFill>
           <a:ln/>
         </p:spPr>
+        <p:txBody>
+          <a:bodyPr/>
+          <a:p/>
+        </p:txBody>
       </p:sp>
       <p:sp>
         <p:nvSpPr>
@@ -8140,79 +7862,44 @@
       </p:sp>
       <p:sp>
         <p:nvSpPr>
-          <p:cNvPr id="6" name="Text 4"/>
-          <p:cNvSpPr txBox="1"/>
-          <p:nvPr/>
-        </p:nvSpPr>
-        <p:spPr>
-          <a:xfrm>
-            <a:off x="640080" y="6446520"/>
-            <a:ext cx="8686800" cy="292608"/>
-          </a:xfrm>
-          <a:prstGeom prst="rect">
-            <a:avLst/>
-          </a:prstGeom>
-          <a:noFill/>
-          <a:ln/>
-        </p:spPr>
-        <p:txBody>
-          <a:bodyPr wrap="square" lIns="0" tIns="0" rIns="0" bIns="0" rtlCol="0" anchor="ctr"/>
-          <a:lstStyle/>
-          <a:p>
-            <a:pPr algn="l" indent="0" marL="0">
-              <a:buNone/>
-            </a:pPr>
-            <a:r>
-              <a:rPr lang="en-US" sz="900" dirty="0">
-                <a:solidFill>
-                  <a:srgbClr val="5D5D72"/>
-                </a:solidFill>
-                <a:latin typeface="Calibri" pitchFamily="34" charset="0"/>
-                <a:ea typeface="Calibri" pitchFamily="34" charset="-122"/>
-                <a:cs typeface="Calibri" pitchFamily="34" charset="-120"/>
-              </a:rPr>
-              <a:t>Usman Akram  •  COMSATS University Islamabad</a:t>
-            </a:r>
-            <a:endParaRPr lang="en-US" sz="900" dirty="0"/>
-          </a:p>
-        </p:txBody>
-      </p:sp>
-      <p:sp>
-        <p:nvSpPr>
-          <p:cNvPr id="7" name="Text 5"/>
-          <p:cNvSpPr txBox="1"/>
-          <p:nvPr/>
-        </p:nvSpPr>
-        <p:spPr>
-          <a:xfrm>
-            <a:off x="11155680" y="6446520"/>
-            <a:ext cx="457200" cy="292608"/>
-          </a:xfrm>
-          <a:prstGeom prst="rect">
-            <a:avLst/>
-          </a:prstGeom>
-          <a:noFill/>
-          <a:ln/>
-        </p:spPr>
-        <p:txBody>
-          <a:bodyPr wrap="square" lIns="0" tIns="0" rIns="0" bIns="0" rtlCol="0" anchor="ctr"/>
-          <a:lstStyle/>
-          <a:p>
-            <a:pPr algn="r" indent="0" marL="0">
-              <a:buNone/>
-            </a:pPr>
-            <a:r>
-              <a:rPr lang="en-US" sz="900" dirty="0">
-                <a:solidFill>
-                  <a:srgbClr val="5D5D72"/>
-                </a:solidFill>
-                <a:latin typeface="Calibri" pitchFamily="34" charset="0"/>
-                <a:ea typeface="Calibri" pitchFamily="34" charset="-122"/>
-                <a:cs typeface="Calibri" pitchFamily="34" charset="-120"/>
-              </a:rPr>
-              <a:t>19</a:t>
-            </a:r>
-            <a:endParaRPr lang="en-US" sz="900" dirty="0"/>
+          <p:cNvPr id="8" name="cuinotes-footer-mark"/>
+          <p:cNvSpPr txBox="1"/>
+          <p:nvPr/>
+        </p:nvSpPr>
+        <p:spPr>
+          <a:xfrm>
+            <a:off x="9951720" y="6455664"/>
+            <a:ext cx="2011680" cy="292608"/>
+          </a:xfrm>
+          <a:prstGeom prst="rect">
+            <a:avLst/>
+          </a:prstGeom>
+          <a:noFill/>
+        </p:spPr>
+        <p:txBody>
+          <a:bodyPr wrap="none" lIns="0" rIns="0" tIns="0" bIns="0">
+            <a:spAutoFit/>
+          </a:bodyPr>
+          <a:lstStyle/>
+          <a:p>
+            <a:pPr algn="r"/>
+            <a:r>
+              <a:rPr sz="1000">
+                <a:solidFill>
+                  <a:srgbClr val="8A939B"/>
+                </a:solidFill>
+                <a:hlinkClick r:id="rId3"/>
+              </a:rPr>
+              <a:t>cuinotes.com</a:t>
+            </a:r>
+            <a:r>
+              <a:rPr sz="1000">
+                <a:solidFill>
+                  <a:srgbClr val="8A939B"/>
+                </a:solidFill>
+              </a:rPr>
+              <a:t>  ·  19</a:t>
+            </a:r>
           </a:p>
         </p:txBody>
       </p:sp>
@@ -8345,6 +8032,10 @@
           </a:solidFill>
           <a:ln/>
         </p:spPr>
+        <p:txBody>
+          <a:bodyPr/>
+          <a:p/>
+        </p:txBody>
       </p:sp>
       <p:sp>
         <p:nvSpPr>
@@ -8443,6 +8134,10 @@
           </a:solidFill>
           <a:ln/>
         </p:spPr>
+        <p:txBody>
+          <a:bodyPr/>
+          <a:p/>
+        </p:txBody>
       </p:sp>
       <p:sp>
         <p:nvSpPr>
@@ -8541,6 +8236,10 @@
           </a:solidFill>
           <a:ln/>
         </p:spPr>
+        <p:txBody>
+          <a:bodyPr/>
+          <a:p/>
+        </p:txBody>
       </p:sp>
       <p:sp>
         <p:nvSpPr>
@@ -8639,6 +8338,10 @@
           </a:solidFill>
           <a:ln/>
         </p:spPr>
+        <p:txBody>
+          <a:bodyPr/>
+          <a:p/>
+        </p:txBody>
       </p:sp>
       <p:sp>
         <p:nvSpPr>
@@ -8720,79 +8423,44 @@
       </p:sp>
       <p:sp>
         <p:nvSpPr>
-          <p:cNvPr id="16" name="Text 14"/>
-          <p:cNvSpPr txBox="1"/>
-          <p:nvPr/>
-        </p:nvSpPr>
-        <p:spPr>
-          <a:xfrm>
-            <a:off x="640080" y="6446520"/>
-            <a:ext cx="8686800" cy="292608"/>
-          </a:xfrm>
-          <a:prstGeom prst="rect">
-            <a:avLst/>
-          </a:prstGeom>
-          <a:noFill/>
-          <a:ln/>
-        </p:spPr>
-        <p:txBody>
-          <a:bodyPr wrap="square" lIns="0" tIns="0" rIns="0" bIns="0" rtlCol="0" anchor="ctr"/>
-          <a:lstStyle/>
-          <a:p>
-            <a:pPr algn="l" indent="0" marL="0">
-              <a:buNone/>
-            </a:pPr>
-            <a:r>
-              <a:rPr lang="en-US" sz="900" dirty="0">
-                <a:solidFill>
-                  <a:srgbClr val="5D5D72"/>
-                </a:solidFill>
-                <a:latin typeface="Calibri" pitchFamily="34" charset="0"/>
-                <a:ea typeface="Calibri" pitchFamily="34" charset="-122"/>
-                <a:cs typeface="Calibri" pitchFamily="34" charset="-120"/>
-              </a:rPr>
-              <a:t>Usman Akram  •  COMSATS University Islamabad</a:t>
-            </a:r>
-            <a:endParaRPr lang="en-US" sz="900" dirty="0"/>
-          </a:p>
-        </p:txBody>
-      </p:sp>
-      <p:sp>
-        <p:nvSpPr>
-          <p:cNvPr id="17" name="Text 15"/>
-          <p:cNvSpPr txBox="1"/>
-          <p:nvPr/>
-        </p:nvSpPr>
-        <p:spPr>
-          <a:xfrm>
-            <a:off x="11155680" y="6446520"/>
-            <a:ext cx="457200" cy="292608"/>
-          </a:xfrm>
-          <a:prstGeom prst="rect">
-            <a:avLst/>
-          </a:prstGeom>
-          <a:noFill/>
-          <a:ln/>
-        </p:spPr>
-        <p:txBody>
-          <a:bodyPr wrap="square" lIns="0" tIns="0" rIns="0" bIns="0" rtlCol="0" anchor="ctr"/>
-          <a:lstStyle/>
-          <a:p>
-            <a:pPr algn="r" indent="0" marL="0">
-              <a:buNone/>
-            </a:pPr>
-            <a:r>
-              <a:rPr lang="en-US" sz="900" dirty="0">
-                <a:solidFill>
-                  <a:srgbClr val="5D5D72"/>
-                </a:solidFill>
-                <a:latin typeface="Calibri" pitchFamily="34" charset="0"/>
-                <a:ea typeface="Calibri" pitchFamily="34" charset="-122"/>
-                <a:cs typeface="Calibri" pitchFamily="34" charset="-120"/>
-              </a:rPr>
-              <a:t>2</a:t>
-            </a:r>
-            <a:endParaRPr lang="en-US" sz="900" dirty="0"/>
+          <p:cNvPr id="18" name="cuinotes-footer-mark"/>
+          <p:cNvSpPr txBox="1"/>
+          <p:nvPr/>
+        </p:nvSpPr>
+        <p:spPr>
+          <a:xfrm>
+            <a:off x="9951720" y="6455664"/>
+            <a:ext cx="2011680" cy="292608"/>
+          </a:xfrm>
+          <a:prstGeom prst="rect">
+            <a:avLst/>
+          </a:prstGeom>
+          <a:noFill/>
+        </p:spPr>
+        <p:txBody>
+          <a:bodyPr wrap="none" lIns="0" rIns="0" tIns="0" bIns="0">
+            <a:spAutoFit/>
+          </a:bodyPr>
+          <a:lstStyle/>
+          <a:p>
+            <a:pPr algn="r"/>
+            <a:r>
+              <a:rPr sz="1000">
+                <a:solidFill>
+                  <a:srgbClr val="8A939B"/>
+                </a:solidFill>
+                <a:hlinkClick r:id="rId3"/>
+              </a:rPr>
+              <a:t>cuinotes.com</a:t>
+            </a:r>
+            <a:r>
+              <a:rPr sz="1000">
+                <a:solidFill>
+                  <a:srgbClr val="8A939B"/>
+                </a:solidFill>
+              </a:rPr>
+              <a:t>  ·  2</a:t>
+            </a:r>
           </a:p>
         </p:txBody>
       </p:sp>
@@ -8927,6 +8595,10 @@
           </a:solidFill>
           <a:ln/>
         </p:spPr>
+        <p:txBody>
+          <a:bodyPr/>
+          <a:p/>
+        </p:txBody>
       </p:sp>
       <p:sp>
         <p:nvSpPr>
@@ -9172,79 +8844,44 @@
       </p:sp>
       <p:sp>
         <p:nvSpPr>
-          <p:cNvPr id="6" name="Text 4"/>
-          <p:cNvSpPr txBox="1"/>
-          <p:nvPr/>
-        </p:nvSpPr>
-        <p:spPr>
-          <a:xfrm>
-            <a:off x="640080" y="6446520"/>
-            <a:ext cx="8686800" cy="292608"/>
-          </a:xfrm>
-          <a:prstGeom prst="rect">
-            <a:avLst/>
-          </a:prstGeom>
-          <a:noFill/>
-          <a:ln/>
-        </p:spPr>
-        <p:txBody>
-          <a:bodyPr wrap="square" lIns="0" tIns="0" rIns="0" bIns="0" rtlCol="0" anchor="ctr"/>
-          <a:lstStyle/>
-          <a:p>
-            <a:pPr algn="l" indent="0" marL="0">
-              <a:buNone/>
-            </a:pPr>
-            <a:r>
-              <a:rPr lang="en-US" sz="900" dirty="0">
-                <a:solidFill>
-                  <a:srgbClr val="5D5D72"/>
-                </a:solidFill>
-                <a:latin typeface="Calibri" pitchFamily="34" charset="0"/>
-                <a:ea typeface="Calibri" pitchFamily="34" charset="-122"/>
-                <a:cs typeface="Calibri" pitchFamily="34" charset="-120"/>
-              </a:rPr>
-              <a:t>Usman Akram  •  COMSATS University Islamabad</a:t>
-            </a:r>
-            <a:endParaRPr lang="en-US" sz="900" dirty="0"/>
-          </a:p>
-        </p:txBody>
-      </p:sp>
-      <p:sp>
-        <p:nvSpPr>
-          <p:cNvPr id="7" name="Text 5"/>
-          <p:cNvSpPr txBox="1"/>
-          <p:nvPr/>
-        </p:nvSpPr>
-        <p:spPr>
-          <a:xfrm>
-            <a:off x="11155680" y="6446520"/>
-            <a:ext cx="457200" cy="292608"/>
-          </a:xfrm>
-          <a:prstGeom prst="rect">
-            <a:avLst/>
-          </a:prstGeom>
-          <a:noFill/>
-          <a:ln/>
-        </p:spPr>
-        <p:txBody>
-          <a:bodyPr wrap="square" lIns="0" tIns="0" rIns="0" bIns="0" rtlCol="0" anchor="ctr"/>
-          <a:lstStyle/>
-          <a:p>
-            <a:pPr algn="r" indent="0" marL="0">
-              <a:buNone/>
-            </a:pPr>
-            <a:r>
-              <a:rPr lang="en-US" sz="900" dirty="0">
-                <a:solidFill>
-                  <a:srgbClr val="5D5D72"/>
-                </a:solidFill>
-                <a:latin typeface="Calibri" pitchFamily="34" charset="0"/>
-                <a:ea typeface="Calibri" pitchFamily="34" charset="-122"/>
-                <a:cs typeface="Calibri" pitchFamily="34" charset="-120"/>
-              </a:rPr>
-              <a:t>20</a:t>
-            </a:r>
-            <a:endParaRPr lang="en-US" sz="900" dirty="0"/>
+          <p:cNvPr id="8" name="cuinotes-footer-mark"/>
+          <p:cNvSpPr txBox="1"/>
+          <p:nvPr/>
+        </p:nvSpPr>
+        <p:spPr>
+          <a:xfrm>
+            <a:off x="9951720" y="6455664"/>
+            <a:ext cx="2011680" cy="292608"/>
+          </a:xfrm>
+          <a:prstGeom prst="rect">
+            <a:avLst/>
+          </a:prstGeom>
+          <a:noFill/>
+        </p:spPr>
+        <p:txBody>
+          <a:bodyPr wrap="none" lIns="0" rIns="0" tIns="0" bIns="0">
+            <a:spAutoFit/>
+          </a:bodyPr>
+          <a:lstStyle/>
+          <a:p>
+            <a:pPr algn="r"/>
+            <a:r>
+              <a:rPr sz="1000">
+                <a:solidFill>
+                  <a:srgbClr val="8A939B"/>
+                </a:solidFill>
+                <a:hlinkClick r:id="rId3"/>
+              </a:rPr>
+              <a:t>cuinotes.com</a:t>
+            </a:r>
+            <a:r>
+              <a:rPr sz="1000">
+                <a:solidFill>
+                  <a:srgbClr val="8A939B"/>
+                </a:solidFill>
+              </a:rPr>
+              <a:t>  ·  20</a:t>
+            </a:r>
           </a:p>
         </p:txBody>
       </p:sp>
@@ -9379,6 +9016,10 @@
           </a:solidFill>
           <a:ln/>
         </p:spPr>
+        <p:txBody>
+          <a:bodyPr/>
+          <a:p/>
+        </p:txBody>
       </p:sp>
       <p:sp>
         <p:nvSpPr>
@@ -9655,6 +9296,10 @@
             </a:outerShdw>
           </a:effectLst>
         </p:spPr>
+        <p:txBody>
+          <a:bodyPr/>
+          <a:p/>
+        </p:txBody>
       </p:sp>
       <p:pic>
         <p:nvPicPr>
@@ -9682,79 +9327,44 @@
       </p:pic>
       <p:sp>
         <p:nvSpPr>
-          <p:cNvPr id="8" name="Text 5"/>
-          <p:cNvSpPr txBox="1"/>
-          <p:nvPr/>
-        </p:nvSpPr>
-        <p:spPr>
-          <a:xfrm>
-            <a:off x="640080" y="6446520"/>
-            <a:ext cx="8686800" cy="292608"/>
-          </a:xfrm>
-          <a:prstGeom prst="rect">
-            <a:avLst/>
-          </a:prstGeom>
-          <a:noFill/>
-          <a:ln/>
-        </p:spPr>
-        <p:txBody>
-          <a:bodyPr wrap="square" lIns="0" tIns="0" rIns="0" bIns="0" rtlCol="0" anchor="ctr"/>
-          <a:lstStyle/>
-          <a:p>
-            <a:pPr algn="l" indent="0" marL="0">
-              <a:buNone/>
-            </a:pPr>
-            <a:r>
-              <a:rPr lang="en-US" sz="900" dirty="0">
-                <a:solidFill>
-                  <a:srgbClr val="5D5D72"/>
-                </a:solidFill>
-                <a:latin typeface="Calibri" pitchFamily="34" charset="0"/>
-                <a:ea typeface="Calibri" pitchFamily="34" charset="-122"/>
-                <a:cs typeface="Calibri" pitchFamily="34" charset="-120"/>
-              </a:rPr>
-              <a:t>Usman Akram  •  COMSATS University Islamabad</a:t>
-            </a:r>
-            <a:endParaRPr lang="en-US" sz="900" dirty="0"/>
-          </a:p>
-        </p:txBody>
-      </p:sp>
-      <p:sp>
-        <p:nvSpPr>
-          <p:cNvPr id="9" name="Text 6"/>
-          <p:cNvSpPr txBox="1"/>
-          <p:nvPr/>
-        </p:nvSpPr>
-        <p:spPr>
-          <a:xfrm>
-            <a:off x="11155680" y="6446520"/>
-            <a:ext cx="457200" cy="292608"/>
-          </a:xfrm>
-          <a:prstGeom prst="rect">
-            <a:avLst/>
-          </a:prstGeom>
-          <a:noFill/>
-          <a:ln/>
-        </p:spPr>
-        <p:txBody>
-          <a:bodyPr wrap="square" lIns="0" tIns="0" rIns="0" bIns="0" rtlCol="0" anchor="ctr"/>
-          <a:lstStyle/>
-          <a:p>
-            <a:pPr algn="r" indent="0" marL="0">
-              <a:buNone/>
-            </a:pPr>
-            <a:r>
-              <a:rPr lang="en-US" sz="900" dirty="0">
-                <a:solidFill>
-                  <a:srgbClr val="5D5D72"/>
-                </a:solidFill>
-                <a:latin typeface="Calibri" pitchFamily="34" charset="0"/>
-                <a:ea typeface="Calibri" pitchFamily="34" charset="-122"/>
-                <a:cs typeface="Calibri" pitchFamily="34" charset="-120"/>
-              </a:rPr>
-              <a:t>21</a:t>
-            </a:r>
-            <a:endParaRPr lang="en-US" sz="900" dirty="0"/>
+          <p:cNvPr id="10" name="cuinotes-footer-mark"/>
+          <p:cNvSpPr txBox="1"/>
+          <p:nvPr/>
+        </p:nvSpPr>
+        <p:spPr>
+          <a:xfrm>
+            <a:off x="9951720" y="6455664"/>
+            <a:ext cx="2011680" cy="292608"/>
+          </a:xfrm>
+          <a:prstGeom prst="rect">
+            <a:avLst/>
+          </a:prstGeom>
+          <a:noFill/>
+        </p:spPr>
+        <p:txBody>
+          <a:bodyPr wrap="none" lIns="0" rIns="0" tIns="0" bIns="0">
+            <a:spAutoFit/>
+          </a:bodyPr>
+          <a:lstStyle/>
+          <a:p>
+            <a:pPr algn="r"/>
+            <a:r>
+              <a:rPr sz="1000">
+                <a:solidFill>
+                  <a:srgbClr val="8A939B"/>
+                </a:solidFill>
+                <a:hlinkClick r:id="rId4"/>
+              </a:rPr>
+              <a:t>cuinotes.com</a:t>
+            </a:r>
+            <a:r>
+              <a:rPr sz="1000">
+                <a:solidFill>
+                  <a:srgbClr val="8A939B"/>
+                </a:solidFill>
+              </a:rPr>
+              <a:t>  ·  21</a:t>
+            </a:r>
           </a:p>
         </p:txBody>
       </p:sp>
@@ -9894,6 +9504,10 @@
             <a:prstDash val="solid"/>
           </a:ln>
         </p:spPr>
+        <p:txBody>
+          <a:bodyPr/>
+          <a:p/>
+        </p:txBody>
       </p:sp>
       <p:sp>
         <p:nvSpPr>
@@ -9975,79 +9589,44 @@
       </p:sp>
       <p:sp>
         <p:nvSpPr>
-          <p:cNvPr id="7" name="Text 5"/>
-          <p:cNvSpPr txBox="1"/>
-          <p:nvPr/>
-        </p:nvSpPr>
-        <p:spPr>
-          <a:xfrm>
-            <a:off x="640080" y="6446520"/>
-            <a:ext cx="8686800" cy="292608"/>
-          </a:xfrm>
-          <a:prstGeom prst="rect">
-            <a:avLst/>
-          </a:prstGeom>
-          <a:noFill/>
-          <a:ln/>
-        </p:spPr>
-        <p:txBody>
-          <a:bodyPr wrap="square" lIns="0" tIns="0" rIns="0" bIns="0" rtlCol="0" anchor="ctr"/>
-          <a:lstStyle/>
-          <a:p>
-            <a:pPr algn="l" indent="0" marL="0">
-              <a:buNone/>
-            </a:pPr>
-            <a:r>
-              <a:rPr lang="en-US" sz="900" dirty="0">
-                <a:solidFill>
-                  <a:srgbClr val="5D5D72"/>
-                </a:solidFill>
-                <a:latin typeface="Calibri" pitchFamily="34" charset="0"/>
-                <a:ea typeface="Calibri" pitchFamily="34" charset="-122"/>
-                <a:cs typeface="Calibri" pitchFamily="34" charset="-120"/>
-              </a:rPr>
-              <a:t>Usman Akram  •  COMSATS University Islamabad</a:t>
-            </a:r>
-            <a:endParaRPr lang="en-US" sz="900" dirty="0"/>
-          </a:p>
-        </p:txBody>
-      </p:sp>
-      <p:sp>
-        <p:nvSpPr>
-          <p:cNvPr id="8" name="Text 6"/>
-          <p:cNvSpPr txBox="1"/>
-          <p:nvPr/>
-        </p:nvSpPr>
-        <p:spPr>
-          <a:xfrm>
-            <a:off x="11155680" y="6446520"/>
-            <a:ext cx="457200" cy="292608"/>
-          </a:xfrm>
-          <a:prstGeom prst="rect">
-            <a:avLst/>
-          </a:prstGeom>
-          <a:noFill/>
-          <a:ln/>
-        </p:spPr>
-        <p:txBody>
-          <a:bodyPr wrap="square" lIns="0" tIns="0" rIns="0" bIns="0" rtlCol="0" anchor="ctr"/>
-          <a:lstStyle/>
-          <a:p>
-            <a:pPr algn="r" indent="0" marL="0">
-              <a:buNone/>
-            </a:pPr>
-            <a:r>
-              <a:rPr lang="en-US" sz="900" dirty="0">
-                <a:solidFill>
-                  <a:srgbClr val="5D5D72"/>
-                </a:solidFill>
-                <a:latin typeface="Calibri" pitchFamily="34" charset="0"/>
-                <a:ea typeface="Calibri" pitchFamily="34" charset="-122"/>
-                <a:cs typeface="Calibri" pitchFamily="34" charset="-120"/>
-              </a:rPr>
-              <a:t>22</a:t>
-            </a:r>
-            <a:endParaRPr lang="en-US" sz="900" dirty="0"/>
+          <p:cNvPr id="9" name="cuinotes-footer-mark"/>
+          <p:cNvSpPr txBox="1"/>
+          <p:nvPr/>
+        </p:nvSpPr>
+        <p:spPr>
+          <a:xfrm>
+            <a:off x="9951720" y="6455664"/>
+            <a:ext cx="2011680" cy="292608"/>
+          </a:xfrm>
+          <a:prstGeom prst="rect">
+            <a:avLst/>
+          </a:prstGeom>
+          <a:noFill/>
+        </p:spPr>
+        <p:txBody>
+          <a:bodyPr wrap="none" lIns="0" rIns="0" tIns="0" bIns="0">
+            <a:spAutoFit/>
+          </a:bodyPr>
+          <a:lstStyle/>
+          <a:p>
+            <a:pPr algn="r"/>
+            <a:r>
+              <a:rPr sz="1000">
+                <a:solidFill>
+                  <a:srgbClr val="8A939B"/>
+                </a:solidFill>
+                <a:hlinkClick r:id="rId3"/>
+              </a:rPr>
+              <a:t>cuinotes.com</a:t>
+            </a:r>
+            <a:r>
+              <a:rPr sz="1000">
+                <a:solidFill>
+                  <a:srgbClr val="8A939B"/>
+                </a:solidFill>
+              </a:rPr>
+              <a:t>  ·  22</a:t>
+            </a:r>
           </a:p>
         </p:txBody>
       </p:sp>
@@ -10180,6 +9759,10 @@
           </a:solidFill>
           <a:ln/>
         </p:spPr>
+        <p:txBody>
+          <a:bodyPr/>
+          <a:p/>
+        </p:txBody>
       </p:sp>
       <p:sp>
         <p:nvSpPr>
@@ -10278,6 +9861,10 @@
           </a:solidFill>
           <a:ln/>
         </p:spPr>
+        <p:txBody>
+          <a:bodyPr/>
+          <a:p/>
+        </p:txBody>
       </p:sp>
       <p:sp>
         <p:nvSpPr>
@@ -10376,6 +9963,10 @@
           </a:solidFill>
           <a:ln/>
         </p:spPr>
+        <p:txBody>
+          <a:bodyPr/>
+          <a:p/>
+        </p:txBody>
       </p:sp>
       <p:sp>
         <p:nvSpPr>
@@ -10457,79 +10048,44 @@
       </p:sp>
       <p:sp>
         <p:nvSpPr>
-          <p:cNvPr id="13" name="Text 11"/>
-          <p:cNvSpPr txBox="1"/>
-          <p:nvPr/>
-        </p:nvSpPr>
-        <p:spPr>
-          <a:xfrm>
-            <a:off x="640080" y="6446520"/>
-            <a:ext cx="8686800" cy="292608"/>
-          </a:xfrm>
-          <a:prstGeom prst="rect">
-            <a:avLst/>
-          </a:prstGeom>
-          <a:noFill/>
-          <a:ln/>
-        </p:spPr>
-        <p:txBody>
-          <a:bodyPr wrap="square" lIns="0" tIns="0" rIns="0" bIns="0" rtlCol="0" anchor="ctr"/>
-          <a:lstStyle/>
-          <a:p>
-            <a:pPr algn="l" indent="0" marL="0">
-              <a:buNone/>
-            </a:pPr>
-            <a:r>
-              <a:rPr lang="en-US" sz="900" dirty="0">
-                <a:solidFill>
-                  <a:srgbClr val="5D5D72"/>
-                </a:solidFill>
-                <a:latin typeface="Calibri" pitchFamily="34" charset="0"/>
-                <a:ea typeface="Calibri" pitchFamily="34" charset="-122"/>
-                <a:cs typeface="Calibri" pitchFamily="34" charset="-120"/>
-              </a:rPr>
-              <a:t>Usman Akram  •  COMSATS University Islamabad</a:t>
-            </a:r>
-            <a:endParaRPr lang="en-US" sz="900" dirty="0"/>
-          </a:p>
-        </p:txBody>
-      </p:sp>
-      <p:sp>
-        <p:nvSpPr>
-          <p:cNvPr id="14" name="Text 12"/>
-          <p:cNvSpPr txBox="1"/>
-          <p:nvPr/>
-        </p:nvSpPr>
-        <p:spPr>
-          <a:xfrm>
-            <a:off x="11155680" y="6446520"/>
-            <a:ext cx="457200" cy="292608"/>
-          </a:xfrm>
-          <a:prstGeom prst="rect">
-            <a:avLst/>
-          </a:prstGeom>
-          <a:noFill/>
-          <a:ln/>
-        </p:spPr>
-        <p:txBody>
-          <a:bodyPr wrap="square" lIns="0" tIns="0" rIns="0" bIns="0" rtlCol="0" anchor="ctr"/>
-          <a:lstStyle/>
-          <a:p>
-            <a:pPr algn="r" indent="0" marL="0">
-              <a:buNone/>
-            </a:pPr>
-            <a:r>
-              <a:rPr lang="en-US" sz="900" dirty="0">
-                <a:solidFill>
-                  <a:srgbClr val="5D5D72"/>
-                </a:solidFill>
-                <a:latin typeface="Calibri" pitchFamily="34" charset="0"/>
-                <a:ea typeface="Calibri" pitchFamily="34" charset="-122"/>
-                <a:cs typeface="Calibri" pitchFamily="34" charset="-120"/>
-              </a:rPr>
-              <a:t>23</a:t>
-            </a:r>
-            <a:endParaRPr lang="en-US" sz="900" dirty="0"/>
+          <p:cNvPr id="15" name="cuinotes-footer-mark"/>
+          <p:cNvSpPr txBox="1"/>
+          <p:nvPr/>
+        </p:nvSpPr>
+        <p:spPr>
+          <a:xfrm>
+            <a:off x="9951720" y="6455664"/>
+            <a:ext cx="2011680" cy="292608"/>
+          </a:xfrm>
+          <a:prstGeom prst="rect">
+            <a:avLst/>
+          </a:prstGeom>
+          <a:noFill/>
+        </p:spPr>
+        <p:txBody>
+          <a:bodyPr wrap="none" lIns="0" rIns="0" tIns="0" bIns="0">
+            <a:spAutoFit/>
+          </a:bodyPr>
+          <a:lstStyle/>
+          <a:p>
+            <a:pPr algn="r"/>
+            <a:r>
+              <a:rPr sz="1000">
+                <a:solidFill>
+                  <a:srgbClr val="8A939B"/>
+                </a:solidFill>
+                <a:hlinkClick r:id="rId3"/>
+              </a:rPr>
+              <a:t>cuinotes.com</a:t>
+            </a:r>
+            <a:r>
+              <a:rPr sz="1000">
+                <a:solidFill>
+                  <a:srgbClr val="8A939B"/>
+                </a:solidFill>
+              </a:rPr>
+              <a:t>  ·  23</a:t>
+            </a:r>
           </a:p>
         </p:txBody>
       </p:sp>
@@ -10664,6 +10220,10 @@
           </a:solidFill>
           <a:ln/>
         </p:spPr>
+        <p:txBody>
+          <a:bodyPr/>
+          <a:p/>
+        </p:txBody>
       </p:sp>
       <p:sp>
         <p:nvSpPr>
@@ -10828,79 +10388,44 @@
       </p:sp>
       <p:sp>
         <p:nvSpPr>
-          <p:cNvPr id="7" name="Text 5"/>
-          <p:cNvSpPr txBox="1"/>
-          <p:nvPr/>
-        </p:nvSpPr>
-        <p:spPr>
-          <a:xfrm>
-            <a:off x="640080" y="6446520"/>
-            <a:ext cx="8686800" cy="292608"/>
-          </a:xfrm>
-          <a:prstGeom prst="rect">
-            <a:avLst/>
-          </a:prstGeom>
-          <a:noFill/>
-          <a:ln/>
-        </p:spPr>
-        <p:txBody>
-          <a:bodyPr wrap="square" lIns="0" tIns="0" rIns="0" bIns="0" rtlCol="0" anchor="ctr"/>
-          <a:lstStyle/>
-          <a:p>
-            <a:pPr algn="l" indent="0" marL="0">
-              <a:buNone/>
-            </a:pPr>
-            <a:r>
-              <a:rPr lang="en-US" sz="900" dirty="0">
-                <a:solidFill>
-                  <a:srgbClr val="5D5D72"/>
-                </a:solidFill>
-                <a:latin typeface="Calibri" pitchFamily="34" charset="0"/>
-                <a:ea typeface="Calibri" pitchFamily="34" charset="-122"/>
-                <a:cs typeface="Calibri" pitchFamily="34" charset="-120"/>
-              </a:rPr>
-              <a:t>Usman Akram  •  COMSATS University Islamabad</a:t>
-            </a:r>
-            <a:endParaRPr lang="en-US" sz="900" dirty="0"/>
-          </a:p>
-        </p:txBody>
-      </p:sp>
-      <p:sp>
-        <p:nvSpPr>
-          <p:cNvPr id="8" name="Text 6"/>
-          <p:cNvSpPr txBox="1"/>
-          <p:nvPr/>
-        </p:nvSpPr>
-        <p:spPr>
-          <a:xfrm>
-            <a:off x="11155680" y="6446520"/>
-            <a:ext cx="457200" cy="292608"/>
-          </a:xfrm>
-          <a:prstGeom prst="rect">
-            <a:avLst/>
-          </a:prstGeom>
-          <a:noFill/>
-          <a:ln/>
-        </p:spPr>
-        <p:txBody>
-          <a:bodyPr wrap="square" lIns="0" tIns="0" rIns="0" bIns="0" rtlCol="0" anchor="ctr"/>
-          <a:lstStyle/>
-          <a:p>
-            <a:pPr algn="r" indent="0" marL="0">
-              <a:buNone/>
-            </a:pPr>
-            <a:r>
-              <a:rPr lang="en-US" sz="900" dirty="0">
-                <a:solidFill>
-                  <a:srgbClr val="5D5D72"/>
-                </a:solidFill>
-                <a:latin typeface="Calibri" pitchFamily="34" charset="0"/>
-                <a:ea typeface="Calibri" pitchFamily="34" charset="-122"/>
-                <a:cs typeface="Calibri" pitchFamily="34" charset="-120"/>
-              </a:rPr>
-              <a:t>24</a:t>
-            </a:r>
-            <a:endParaRPr lang="en-US" sz="900" dirty="0"/>
+          <p:cNvPr id="9" name="cuinotes-footer-mark"/>
+          <p:cNvSpPr txBox="1"/>
+          <p:nvPr/>
+        </p:nvSpPr>
+        <p:spPr>
+          <a:xfrm>
+            <a:off x="9951720" y="6455664"/>
+            <a:ext cx="2011680" cy="292608"/>
+          </a:xfrm>
+          <a:prstGeom prst="rect">
+            <a:avLst/>
+          </a:prstGeom>
+          <a:noFill/>
+        </p:spPr>
+        <p:txBody>
+          <a:bodyPr wrap="none" lIns="0" rIns="0" tIns="0" bIns="0">
+            <a:spAutoFit/>
+          </a:bodyPr>
+          <a:lstStyle/>
+          <a:p>
+            <a:pPr algn="r"/>
+            <a:r>
+              <a:rPr sz="1000">
+                <a:solidFill>
+                  <a:srgbClr val="8A939B"/>
+                </a:solidFill>
+                <a:hlinkClick r:id="rId3"/>
+              </a:rPr>
+              <a:t>cuinotes.com</a:t>
+            </a:r>
+            <a:r>
+              <a:rPr sz="1000">
+                <a:solidFill>
+                  <a:srgbClr val="8A939B"/>
+                </a:solidFill>
+              </a:rPr>
+              <a:t>  ·  24</a:t>
+            </a:r>
           </a:p>
         </p:txBody>
       </p:sp>
@@ -11035,6 +10560,10 @@
           </a:solidFill>
           <a:ln/>
         </p:spPr>
+        <p:txBody>
+          <a:bodyPr/>
+          <a:p/>
+        </p:txBody>
       </p:sp>
       <p:sp>
         <p:nvSpPr>
@@ -11220,79 +10749,44 @@
       </p:sp>
       <p:sp>
         <p:nvSpPr>
-          <p:cNvPr id="6" name="Text 4"/>
-          <p:cNvSpPr txBox="1"/>
-          <p:nvPr/>
-        </p:nvSpPr>
-        <p:spPr>
-          <a:xfrm>
-            <a:off x="640080" y="6446520"/>
-            <a:ext cx="8686800" cy="292608"/>
-          </a:xfrm>
-          <a:prstGeom prst="rect">
-            <a:avLst/>
-          </a:prstGeom>
-          <a:noFill/>
-          <a:ln/>
-        </p:spPr>
-        <p:txBody>
-          <a:bodyPr wrap="square" lIns="0" tIns="0" rIns="0" bIns="0" rtlCol="0" anchor="ctr"/>
-          <a:lstStyle/>
-          <a:p>
-            <a:pPr algn="l" indent="0" marL="0">
-              <a:buNone/>
-            </a:pPr>
-            <a:r>
-              <a:rPr lang="en-US" sz="900" dirty="0">
-                <a:solidFill>
-                  <a:srgbClr val="5D5D72"/>
-                </a:solidFill>
-                <a:latin typeface="Calibri" pitchFamily="34" charset="0"/>
-                <a:ea typeface="Calibri" pitchFamily="34" charset="-122"/>
-                <a:cs typeface="Calibri" pitchFamily="34" charset="-120"/>
-              </a:rPr>
-              <a:t>Usman Akram  •  COMSATS University Islamabad</a:t>
-            </a:r>
-            <a:endParaRPr lang="en-US" sz="900" dirty="0"/>
-          </a:p>
-        </p:txBody>
-      </p:sp>
-      <p:sp>
-        <p:nvSpPr>
-          <p:cNvPr id="7" name="Text 5"/>
-          <p:cNvSpPr txBox="1"/>
-          <p:nvPr/>
-        </p:nvSpPr>
-        <p:spPr>
-          <a:xfrm>
-            <a:off x="11155680" y="6446520"/>
-            <a:ext cx="457200" cy="292608"/>
-          </a:xfrm>
-          <a:prstGeom prst="rect">
-            <a:avLst/>
-          </a:prstGeom>
-          <a:noFill/>
-          <a:ln/>
-        </p:spPr>
-        <p:txBody>
-          <a:bodyPr wrap="square" lIns="0" tIns="0" rIns="0" bIns="0" rtlCol="0" anchor="ctr"/>
-          <a:lstStyle/>
-          <a:p>
-            <a:pPr algn="r" indent="0" marL="0">
-              <a:buNone/>
-            </a:pPr>
-            <a:r>
-              <a:rPr lang="en-US" sz="900" dirty="0">
-                <a:solidFill>
-                  <a:srgbClr val="5D5D72"/>
-                </a:solidFill>
-                <a:latin typeface="Calibri" pitchFamily="34" charset="0"/>
-                <a:ea typeface="Calibri" pitchFamily="34" charset="-122"/>
-                <a:cs typeface="Calibri" pitchFamily="34" charset="-120"/>
-              </a:rPr>
-              <a:t>25</a:t>
-            </a:r>
-            <a:endParaRPr lang="en-US" sz="900" dirty="0"/>
+          <p:cNvPr id="8" name="cuinotes-footer-mark"/>
+          <p:cNvSpPr txBox="1"/>
+          <p:nvPr/>
+        </p:nvSpPr>
+        <p:spPr>
+          <a:xfrm>
+            <a:off x="9951720" y="6455664"/>
+            <a:ext cx="2011680" cy="292608"/>
+          </a:xfrm>
+          <a:prstGeom prst="rect">
+            <a:avLst/>
+          </a:prstGeom>
+          <a:noFill/>
+        </p:spPr>
+        <p:txBody>
+          <a:bodyPr wrap="none" lIns="0" rIns="0" tIns="0" bIns="0">
+            <a:spAutoFit/>
+          </a:bodyPr>
+          <a:lstStyle/>
+          <a:p>
+            <a:pPr algn="r"/>
+            <a:r>
+              <a:rPr sz="1000">
+                <a:solidFill>
+                  <a:srgbClr val="8A939B"/>
+                </a:solidFill>
+                <a:hlinkClick r:id="rId3"/>
+              </a:rPr>
+              <a:t>cuinotes.com</a:t>
+            </a:r>
+            <a:r>
+              <a:rPr sz="1000">
+                <a:solidFill>
+                  <a:srgbClr val="8A939B"/>
+                </a:solidFill>
+              </a:rPr>
+              <a:t>  ·  25</a:t>
+            </a:r>
           </a:p>
         </p:txBody>
       </p:sp>
@@ -11427,6 +10921,10 @@
           </a:solidFill>
           <a:ln/>
         </p:spPr>
+        <p:txBody>
+          <a:bodyPr/>
+          <a:p/>
+        </p:txBody>
       </p:sp>
       <p:sp>
         <p:nvSpPr>
@@ -11612,6 +11110,10 @@
             </a:outerShdw>
           </a:effectLst>
         </p:spPr>
+        <p:txBody>
+          <a:bodyPr/>
+          <a:p/>
+        </p:txBody>
       </p:sp>
       <p:pic>
         <p:nvPicPr>
@@ -11639,79 +11141,44 @@
       </p:pic>
       <p:sp>
         <p:nvSpPr>
-          <p:cNvPr id="8" name="Text 5"/>
-          <p:cNvSpPr txBox="1"/>
-          <p:nvPr/>
-        </p:nvSpPr>
-        <p:spPr>
-          <a:xfrm>
-            <a:off x="640080" y="6446520"/>
-            <a:ext cx="8686800" cy="292608"/>
-          </a:xfrm>
-          <a:prstGeom prst="rect">
-            <a:avLst/>
-          </a:prstGeom>
-          <a:noFill/>
-          <a:ln/>
-        </p:spPr>
-        <p:txBody>
-          <a:bodyPr wrap="square" lIns="0" tIns="0" rIns="0" bIns="0" rtlCol="0" anchor="ctr"/>
-          <a:lstStyle/>
-          <a:p>
-            <a:pPr algn="l" indent="0" marL="0">
-              <a:buNone/>
-            </a:pPr>
-            <a:r>
-              <a:rPr lang="en-US" sz="900" dirty="0">
-                <a:solidFill>
-                  <a:srgbClr val="5D5D72"/>
-                </a:solidFill>
-                <a:latin typeface="Calibri" pitchFamily="34" charset="0"/>
-                <a:ea typeface="Calibri" pitchFamily="34" charset="-122"/>
-                <a:cs typeface="Calibri" pitchFamily="34" charset="-120"/>
-              </a:rPr>
-              <a:t>Usman Akram  •  COMSATS University Islamabad</a:t>
-            </a:r>
-            <a:endParaRPr lang="en-US" sz="900" dirty="0"/>
-          </a:p>
-        </p:txBody>
-      </p:sp>
-      <p:sp>
-        <p:nvSpPr>
-          <p:cNvPr id="9" name="Text 6"/>
-          <p:cNvSpPr txBox="1"/>
-          <p:nvPr/>
-        </p:nvSpPr>
-        <p:spPr>
-          <a:xfrm>
-            <a:off x="11155680" y="6446520"/>
-            <a:ext cx="457200" cy="292608"/>
-          </a:xfrm>
-          <a:prstGeom prst="rect">
-            <a:avLst/>
-          </a:prstGeom>
-          <a:noFill/>
-          <a:ln/>
-        </p:spPr>
-        <p:txBody>
-          <a:bodyPr wrap="square" lIns="0" tIns="0" rIns="0" bIns="0" rtlCol="0" anchor="ctr"/>
-          <a:lstStyle/>
-          <a:p>
-            <a:pPr algn="r" indent="0" marL="0">
-              <a:buNone/>
-            </a:pPr>
-            <a:r>
-              <a:rPr lang="en-US" sz="900" dirty="0">
-                <a:solidFill>
-                  <a:srgbClr val="5D5D72"/>
-                </a:solidFill>
-                <a:latin typeface="Calibri" pitchFamily="34" charset="0"/>
-                <a:ea typeface="Calibri" pitchFamily="34" charset="-122"/>
-                <a:cs typeface="Calibri" pitchFamily="34" charset="-120"/>
-              </a:rPr>
-              <a:t>26</a:t>
-            </a:r>
-            <a:endParaRPr lang="en-US" sz="900" dirty="0"/>
+          <p:cNvPr id="10" name="cuinotes-footer-mark"/>
+          <p:cNvSpPr txBox="1"/>
+          <p:nvPr/>
+        </p:nvSpPr>
+        <p:spPr>
+          <a:xfrm>
+            <a:off x="9951720" y="6455664"/>
+            <a:ext cx="2011680" cy="292608"/>
+          </a:xfrm>
+          <a:prstGeom prst="rect">
+            <a:avLst/>
+          </a:prstGeom>
+          <a:noFill/>
+        </p:spPr>
+        <p:txBody>
+          <a:bodyPr wrap="none" lIns="0" rIns="0" tIns="0" bIns="0">
+            <a:spAutoFit/>
+          </a:bodyPr>
+          <a:lstStyle/>
+          <a:p>
+            <a:pPr algn="r"/>
+            <a:r>
+              <a:rPr sz="1000">
+                <a:solidFill>
+                  <a:srgbClr val="8A939B"/>
+                </a:solidFill>
+                <a:hlinkClick r:id="rId4"/>
+              </a:rPr>
+              <a:t>cuinotes.com</a:t>
+            </a:r>
+            <a:r>
+              <a:rPr sz="1000">
+                <a:solidFill>
+                  <a:srgbClr val="8A939B"/>
+                </a:solidFill>
+              </a:rPr>
+              <a:t>  ·  26</a:t>
+            </a:r>
           </a:p>
         </p:txBody>
       </p:sp>
@@ -11846,6 +11313,10 @@
           </a:solidFill>
           <a:ln/>
         </p:spPr>
+        <p:txBody>
+          <a:bodyPr/>
+          <a:p/>
+        </p:txBody>
       </p:sp>
       <p:sp>
         <p:nvSpPr>
@@ -12090,79 +11561,44 @@
       </p:sp>
       <p:sp>
         <p:nvSpPr>
-          <p:cNvPr id="7" name="Text 5"/>
-          <p:cNvSpPr txBox="1"/>
-          <p:nvPr/>
-        </p:nvSpPr>
-        <p:spPr>
-          <a:xfrm>
-            <a:off x="640080" y="6446520"/>
-            <a:ext cx="8686800" cy="292608"/>
-          </a:xfrm>
-          <a:prstGeom prst="rect">
-            <a:avLst/>
-          </a:prstGeom>
-          <a:noFill/>
-          <a:ln/>
-        </p:spPr>
-        <p:txBody>
-          <a:bodyPr wrap="square" lIns="0" tIns="0" rIns="0" bIns="0" rtlCol="0" anchor="ctr"/>
-          <a:lstStyle/>
-          <a:p>
-            <a:pPr algn="l" indent="0" marL="0">
-              <a:buNone/>
-            </a:pPr>
-            <a:r>
-              <a:rPr lang="en-US" sz="900" dirty="0">
-                <a:solidFill>
-                  <a:srgbClr val="5D5D72"/>
-                </a:solidFill>
-                <a:latin typeface="Calibri" pitchFamily="34" charset="0"/>
-                <a:ea typeface="Calibri" pitchFamily="34" charset="-122"/>
-                <a:cs typeface="Calibri" pitchFamily="34" charset="-120"/>
-              </a:rPr>
-              <a:t>Usman Akram  •  COMSATS University Islamabad</a:t>
-            </a:r>
-            <a:endParaRPr lang="en-US" sz="900" dirty="0"/>
-          </a:p>
-        </p:txBody>
-      </p:sp>
-      <p:sp>
-        <p:nvSpPr>
-          <p:cNvPr id="8" name="Text 6"/>
-          <p:cNvSpPr txBox="1"/>
-          <p:nvPr/>
-        </p:nvSpPr>
-        <p:spPr>
-          <a:xfrm>
-            <a:off x="11155680" y="6446520"/>
-            <a:ext cx="457200" cy="292608"/>
-          </a:xfrm>
-          <a:prstGeom prst="rect">
-            <a:avLst/>
-          </a:prstGeom>
-          <a:noFill/>
-          <a:ln/>
-        </p:spPr>
-        <p:txBody>
-          <a:bodyPr wrap="square" lIns="0" tIns="0" rIns="0" bIns="0" rtlCol="0" anchor="ctr"/>
-          <a:lstStyle/>
-          <a:p>
-            <a:pPr algn="r" indent="0" marL="0">
-              <a:buNone/>
-            </a:pPr>
-            <a:r>
-              <a:rPr lang="en-US" sz="900" dirty="0">
-                <a:solidFill>
-                  <a:srgbClr val="5D5D72"/>
-                </a:solidFill>
-                <a:latin typeface="Calibri" pitchFamily="34" charset="0"/>
-                <a:ea typeface="Calibri" pitchFamily="34" charset="-122"/>
-                <a:cs typeface="Calibri" pitchFamily="34" charset="-120"/>
-              </a:rPr>
-              <a:t>27</a:t>
-            </a:r>
-            <a:endParaRPr lang="en-US" sz="900" dirty="0"/>
+          <p:cNvPr id="9" name="cuinotes-footer-mark"/>
+          <p:cNvSpPr txBox="1"/>
+          <p:nvPr/>
+        </p:nvSpPr>
+        <p:spPr>
+          <a:xfrm>
+            <a:off x="9951720" y="6455664"/>
+            <a:ext cx="2011680" cy="292608"/>
+          </a:xfrm>
+          <a:prstGeom prst="rect">
+            <a:avLst/>
+          </a:prstGeom>
+          <a:noFill/>
+        </p:spPr>
+        <p:txBody>
+          <a:bodyPr wrap="none" lIns="0" rIns="0" tIns="0" bIns="0">
+            <a:spAutoFit/>
+          </a:bodyPr>
+          <a:lstStyle/>
+          <a:p>
+            <a:pPr algn="r"/>
+            <a:r>
+              <a:rPr sz="1000">
+                <a:solidFill>
+                  <a:srgbClr val="8A939B"/>
+                </a:solidFill>
+                <a:hlinkClick r:id="rId3"/>
+              </a:rPr>
+              <a:t>cuinotes.com</a:t>
+            </a:r>
+            <a:r>
+              <a:rPr sz="1000">
+                <a:solidFill>
+                  <a:srgbClr val="8A939B"/>
+                </a:solidFill>
+              </a:rPr>
+              <a:t>  ·  27</a:t>
+            </a:r>
           </a:p>
         </p:txBody>
       </p:sp>
@@ -12899,79 +12335,44 @@
       </p:sp>
       <p:sp>
         <p:nvSpPr>
-          <p:cNvPr id="6" name="Text 3"/>
-          <p:cNvSpPr txBox="1"/>
-          <p:nvPr/>
-        </p:nvSpPr>
-        <p:spPr>
-          <a:xfrm>
-            <a:off x="640080" y="6446520"/>
-            <a:ext cx="8686800" cy="292608"/>
-          </a:xfrm>
-          <a:prstGeom prst="rect">
-            <a:avLst/>
-          </a:prstGeom>
-          <a:noFill/>
-          <a:ln/>
-        </p:spPr>
-        <p:txBody>
-          <a:bodyPr wrap="square" lIns="0" tIns="0" rIns="0" bIns="0" rtlCol="0" anchor="ctr"/>
-          <a:lstStyle/>
-          <a:p>
-            <a:pPr algn="l" indent="0" marL="0">
-              <a:buNone/>
-            </a:pPr>
-            <a:r>
-              <a:rPr lang="en-US" sz="900" dirty="0">
-                <a:solidFill>
-                  <a:srgbClr val="5D5D72"/>
-                </a:solidFill>
-                <a:latin typeface="Calibri" pitchFamily="34" charset="0"/>
-                <a:ea typeface="Calibri" pitchFamily="34" charset="-122"/>
-                <a:cs typeface="Calibri" pitchFamily="34" charset="-120"/>
-              </a:rPr>
-              <a:t>Usman Akram  •  COMSATS University Islamabad</a:t>
-            </a:r>
-            <a:endParaRPr lang="en-US" sz="900" dirty="0"/>
-          </a:p>
-        </p:txBody>
-      </p:sp>
-      <p:sp>
-        <p:nvSpPr>
-          <p:cNvPr id="7" name="Text 4"/>
-          <p:cNvSpPr txBox="1"/>
-          <p:nvPr/>
-        </p:nvSpPr>
-        <p:spPr>
-          <a:xfrm>
-            <a:off x="11155680" y="6446520"/>
-            <a:ext cx="457200" cy="292608"/>
-          </a:xfrm>
-          <a:prstGeom prst="rect">
-            <a:avLst/>
-          </a:prstGeom>
-          <a:noFill/>
-          <a:ln/>
-        </p:spPr>
-        <p:txBody>
-          <a:bodyPr wrap="square" lIns="0" tIns="0" rIns="0" bIns="0" rtlCol="0" anchor="ctr"/>
-          <a:lstStyle/>
-          <a:p>
-            <a:pPr algn="r" indent="0" marL="0">
-              <a:buNone/>
-            </a:pPr>
-            <a:r>
-              <a:rPr lang="en-US" sz="900" dirty="0">
-                <a:solidFill>
-                  <a:srgbClr val="5D5D72"/>
-                </a:solidFill>
-                <a:latin typeface="Calibri" pitchFamily="34" charset="0"/>
-                <a:ea typeface="Calibri" pitchFamily="34" charset="-122"/>
-                <a:cs typeface="Calibri" pitchFamily="34" charset="-120"/>
-              </a:rPr>
-              <a:t>28</a:t>
-            </a:r>
-            <a:endParaRPr lang="en-US" sz="900" dirty="0"/>
+          <p:cNvPr id="30" name="cuinotes-footer-mark"/>
+          <p:cNvSpPr txBox="1"/>
+          <p:nvPr/>
+        </p:nvSpPr>
+        <p:spPr>
+          <a:xfrm>
+            <a:off x="9951720" y="6455664"/>
+            <a:ext cx="2011680" cy="292608"/>
+          </a:xfrm>
+          <a:prstGeom prst="rect">
+            <a:avLst/>
+          </a:prstGeom>
+          <a:noFill/>
+        </p:spPr>
+        <p:txBody>
+          <a:bodyPr wrap="none" lIns="0" rIns="0" tIns="0" bIns="0">
+            <a:spAutoFit/>
+          </a:bodyPr>
+          <a:lstStyle/>
+          <a:p>
+            <a:pPr algn="r"/>
+            <a:r>
+              <a:rPr sz="1000">
+                <a:solidFill>
+                  <a:srgbClr val="8A939B"/>
+                </a:solidFill>
+                <a:hlinkClick r:id="rId3"/>
+              </a:rPr>
+              <a:t>cuinotes.com</a:t>
+            </a:r>
+            <a:r>
+              <a:rPr sz="1000">
+                <a:solidFill>
+                  <a:srgbClr val="8A939B"/>
+                </a:solidFill>
+              </a:rPr>
+              <a:t>  ·  28</a:t>
+            </a:r>
           </a:p>
         </p:txBody>
       </p:sp>
@@ -13106,6 +12507,10 @@
           </a:solidFill>
           <a:ln/>
         </p:spPr>
+        <p:txBody>
+          <a:bodyPr/>
+          <a:p/>
+        </p:txBody>
       </p:sp>
       <p:sp>
         <p:nvSpPr>
@@ -13391,79 +12796,44 @@
       </p:sp>
       <p:sp>
         <p:nvSpPr>
-          <p:cNvPr id="6" name="Text 4"/>
-          <p:cNvSpPr txBox="1"/>
-          <p:nvPr/>
-        </p:nvSpPr>
-        <p:spPr>
-          <a:xfrm>
-            <a:off x="640080" y="6446520"/>
-            <a:ext cx="8686800" cy="292608"/>
-          </a:xfrm>
-          <a:prstGeom prst="rect">
-            <a:avLst/>
-          </a:prstGeom>
-          <a:noFill/>
-          <a:ln/>
-        </p:spPr>
-        <p:txBody>
-          <a:bodyPr wrap="square" lIns="0" tIns="0" rIns="0" bIns="0" rtlCol="0" anchor="ctr"/>
-          <a:lstStyle/>
-          <a:p>
-            <a:pPr algn="l" indent="0" marL="0">
-              <a:buNone/>
-            </a:pPr>
-            <a:r>
-              <a:rPr lang="en-US" sz="900" dirty="0">
-                <a:solidFill>
-                  <a:srgbClr val="5D5D72"/>
-                </a:solidFill>
-                <a:latin typeface="Calibri" pitchFamily="34" charset="0"/>
-                <a:ea typeface="Calibri" pitchFamily="34" charset="-122"/>
-                <a:cs typeface="Calibri" pitchFamily="34" charset="-120"/>
-              </a:rPr>
-              <a:t>Usman Akram  •  COMSATS University Islamabad</a:t>
-            </a:r>
-            <a:endParaRPr lang="en-US" sz="900" dirty="0"/>
-          </a:p>
-        </p:txBody>
-      </p:sp>
-      <p:sp>
-        <p:nvSpPr>
-          <p:cNvPr id="7" name="Text 5"/>
-          <p:cNvSpPr txBox="1"/>
-          <p:nvPr/>
-        </p:nvSpPr>
-        <p:spPr>
-          <a:xfrm>
-            <a:off x="11155680" y="6446520"/>
-            <a:ext cx="457200" cy="292608"/>
-          </a:xfrm>
-          <a:prstGeom prst="rect">
-            <a:avLst/>
-          </a:prstGeom>
-          <a:noFill/>
-          <a:ln/>
-        </p:spPr>
-        <p:txBody>
-          <a:bodyPr wrap="square" lIns="0" tIns="0" rIns="0" bIns="0" rtlCol="0" anchor="ctr"/>
-          <a:lstStyle/>
-          <a:p>
-            <a:pPr algn="r" indent="0" marL="0">
-              <a:buNone/>
-            </a:pPr>
-            <a:r>
-              <a:rPr lang="en-US" sz="900" dirty="0">
-                <a:solidFill>
-                  <a:srgbClr val="5D5D72"/>
-                </a:solidFill>
-                <a:latin typeface="Calibri" pitchFamily="34" charset="0"/>
-                <a:ea typeface="Calibri" pitchFamily="34" charset="-122"/>
-                <a:cs typeface="Calibri" pitchFamily="34" charset="-120"/>
-              </a:rPr>
-              <a:t>29</a:t>
-            </a:r>
-            <a:endParaRPr lang="en-US" sz="900" dirty="0"/>
+          <p:cNvPr id="8" name="cuinotes-footer-mark"/>
+          <p:cNvSpPr txBox="1"/>
+          <p:nvPr/>
+        </p:nvSpPr>
+        <p:spPr>
+          <a:xfrm>
+            <a:off x="9951720" y="6455664"/>
+            <a:ext cx="2011680" cy="292608"/>
+          </a:xfrm>
+          <a:prstGeom prst="rect">
+            <a:avLst/>
+          </a:prstGeom>
+          <a:noFill/>
+        </p:spPr>
+        <p:txBody>
+          <a:bodyPr wrap="none" lIns="0" rIns="0" tIns="0" bIns="0">
+            <a:spAutoFit/>
+          </a:bodyPr>
+          <a:lstStyle/>
+          <a:p>
+            <a:pPr algn="r"/>
+            <a:r>
+              <a:rPr sz="1000">
+                <a:solidFill>
+                  <a:srgbClr val="8A939B"/>
+                </a:solidFill>
+                <a:hlinkClick r:id="rId3"/>
+              </a:rPr>
+              <a:t>cuinotes.com</a:t>
+            </a:r>
+            <a:r>
+              <a:rPr sz="1000">
+                <a:solidFill>
+                  <a:srgbClr val="8A939B"/>
+                </a:solidFill>
+              </a:rPr>
+              <a:t>  ·  29</a:t>
+            </a:r>
           </a:p>
         </p:txBody>
       </p:sp>
@@ -13598,6 +12968,10 @@
           </a:solidFill>
           <a:ln/>
         </p:spPr>
+        <p:txBody>
+          <a:bodyPr/>
+          <a:p/>
+        </p:txBody>
       </p:sp>
       <p:sp>
         <p:nvSpPr>
@@ -13742,79 +13116,44 @@
       </p:sp>
       <p:sp>
         <p:nvSpPr>
-          <p:cNvPr id="7" name="Text 5"/>
-          <p:cNvSpPr txBox="1"/>
-          <p:nvPr/>
-        </p:nvSpPr>
-        <p:spPr>
-          <a:xfrm>
-            <a:off x="640080" y="6446520"/>
-            <a:ext cx="8686800" cy="292608"/>
-          </a:xfrm>
-          <a:prstGeom prst="rect">
-            <a:avLst/>
-          </a:prstGeom>
-          <a:noFill/>
-          <a:ln/>
-        </p:spPr>
-        <p:txBody>
-          <a:bodyPr wrap="square" lIns="0" tIns="0" rIns="0" bIns="0" rtlCol="0" anchor="ctr"/>
-          <a:lstStyle/>
-          <a:p>
-            <a:pPr algn="l" indent="0" marL="0">
-              <a:buNone/>
-            </a:pPr>
-            <a:r>
-              <a:rPr lang="en-US" sz="900" dirty="0">
-                <a:solidFill>
-                  <a:srgbClr val="5D5D72"/>
-                </a:solidFill>
-                <a:latin typeface="Calibri" pitchFamily="34" charset="0"/>
-                <a:ea typeface="Calibri" pitchFamily="34" charset="-122"/>
-                <a:cs typeface="Calibri" pitchFamily="34" charset="-120"/>
-              </a:rPr>
-              <a:t>Usman Akram  •  COMSATS University Islamabad</a:t>
-            </a:r>
-            <a:endParaRPr lang="en-US" sz="900" dirty="0"/>
-          </a:p>
-        </p:txBody>
-      </p:sp>
-      <p:sp>
-        <p:nvSpPr>
-          <p:cNvPr id="8" name="Text 6"/>
-          <p:cNvSpPr txBox="1"/>
-          <p:nvPr/>
-        </p:nvSpPr>
-        <p:spPr>
-          <a:xfrm>
-            <a:off x="11155680" y="6446520"/>
-            <a:ext cx="457200" cy="292608"/>
-          </a:xfrm>
-          <a:prstGeom prst="rect">
-            <a:avLst/>
-          </a:prstGeom>
-          <a:noFill/>
-          <a:ln/>
-        </p:spPr>
-        <p:txBody>
-          <a:bodyPr wrap="square" lIns="0" tIns="0" rIns="0" bIns="0" rtlCol="0" anchor="ctr"/>
-          <a:lstStyle/>
-          <a:p>
-            <a:pPr algn="r" indent="0" marL="0">
-              <a:buNone/>
-            </a:pPr>
-            <a:r>
-              <a:rPr lang="en-US" sz="900" dirty="0">
-                <a:solidFill>
-                  <a:srgbClr val="5D5D72"/>
-                </a:solidFill>
-                <a:latin typeface="Calibri" pitchFamily="34" charset="0"/>
-                <a:ea typeface="Calibri" pitchFamily="34" charset="-122"/>
-                <a:cs typeface="Calibri" pitchFamily="34" charset="-120"/>
-              </a:rPr>
-              <a:t>3</a:t>
-            </a:r>
-            <a:endParaRPr lang="en-US" sz="900" dirty="0"/>
+          <p:cNvPr id="9" name="cuinotes-footer-mark"/>
+          <p:cNvSpPr txBox="1"/>
+          <p:nvPr/>
+        </p:nvSpPr>
+        <p:spPr>
+          <a:xfrm>
+            <a:off x="9951720" y="6455664"/>
+            <a:ext cx="2011680" cy="292608"/>
+          </a:xfrm>
+          <a:prstGeom prst="rect">
+            <a:avLst/>
+          </a:prstGeom>
+          <a:noFill/>
+        </p:spPr>
+        <p:txBody>
+          <a:bodyPr wrap="none" lIns="0" rIns="0" tIns="0" bIns="0">
+            <a:spAutoFit/>
+          </a:bodyPr>
+          <a:lstStyle/>
+          <a:p>
+            <a:pPr algn="r"/>
+            <a:r>
+              <a:rPr sz="1000">
+                <a:solidFill>
+                  <a:srgbClr val="8A939B"/>
+                </a:solidFill>
+                <a:hlinkClick r:id="rId3"/>
+              </a:rPr>
+              <a:t>cuinotes.com</a:t>
+            </a:r>
+            <a:r>
+              <a:rPr sz="1000">
+                <a:solidFill>
+                  <a:srgbClr val="8A939B"/>
+                </a:solidFill>
+              </a:rPr>
+              <a:t>  ·  3</a:t>
+            </a:r>
           </a:p>
         </p:txBody>
       </p:sp>
@@ -13947,6 +13286,10 @@
           </a:solidFill>
           <a:ln/>
         </p:spPr>
+        <p:txBody>
+          <a:bodyPr/>
+          <a:p/>
+        </p:txBody>
       </p:sp>
       <p:sp>
         <p:nvSpPr>
@@ -14045,6 +13388,10 @@
           </a:solidFill>
           <a:ln/>
         </p:spPr>
+        <p:txBody>
+          <a:bodyPr/>
+          <a:p/>
+        </p:txBody>
       </p:sp>
       <p:sp>
         <p:nvSpPr>
@@ -14143,6 +13490,10 @@
           </a:solidFill>
           <a:ln/>
         </p:spPr>
+        <p:txBody>
+          <a:bodyPr/>
+          <a:p/>
+        </p:txBody>
       </p:sp>
       <p:sp>
         <p:nvSpPr>
@@ -14224,79 +13575,44 @@
       </p:sp>
       <p:sp>
         <p:nvSpPr>
-          <p:cNvPr id="13" name="Text 11"/>
-          <p:cNvSpPr txBox="1"/>
-          <p:nvPr/>
-        </p:nvSpPr>
-        <p:spPr>
-          <a:xfrm>
-            <a:off x="640080" y="6446520"/>
-            <a:ext cx="8686800" cy="292608"/>
-          </a:xfrm>
-          <a:prstGeom prst="rect">
-            <a:avLst/>
-          </a:prstGeom>
-          <a:noFill/>
-          <a:ln/>
-        </p:spPr>
-        <p:txBody>
-          <a:bodyPr wrap="square" lIns="0" tIns="0" rIns="0" bIns="0" rtlCol="0" anchor="ctr"/>
-          <a:lstStyle/>
-          <a:p>
-            <a:pPr algn="l" indent="0" marL="0">
-              <a:buNone/>
-            </a:pPr>
-            <a:r>
-              <a:rPr lang="en-US" sz="900" dirty="0">
-                <a:solidFill>
-                  <a:srgbClr val="5D5D72"/>
-                </a:solidFill>
-                <a:latin typeface="Calibri" pitchFamily="34" charset="0"/>
-                <a:ea typeface="Calibri" pitchFamily="34" charset="-122"/>
-                <a:cs typeface="Calibri" pitchFamily="34" charset="-120"/>
-              </a:rPr>
-              <a:t>Usman Akram  •  COMSATS University Islamabad</a:t>
-            </a:r>
-            <a:endParaRPr lang="en-US" sz="900" dirty="0"/>
-          </a:p>
-        </p:txBody>
-      </p:sp>
-      <p:sp>
-        <p:nvSpPr>
-          <p:cNvPr id="14" name="Text 12"/>
-          <p:cNvSpPr txBox="1"/>
-          <p:nvPr/>
-        </p:nvSpPr>
-        <p:spPr>
-          <a:xfrm>
-            <a:off x="11155680" y="6446520"/>
-            <a:ext cx="457200" cy="292608"/>
-          </a:xfrm>
-          <a:prstGeom prst="rect">
-            <a:avLst/>
-          </a:prstGeom>
-          <a:noFill/>
-          <a:ln/>
-        </p:spPr>
-        <p:txBody>
-          <a:bodyPr wrap="square" lIns="0" tIns="0" rIns="0" bIns="0" rtlCol="0" anchor="ctr"/>
-          <a:lstStyle/>
-          <a:p>
-            <a:pPr algn="r" indent="0" marL="0">
-              <a:buNone/>
-            </a:pPr>
-            <a:r>
-              <a:rPr lang="en-US" sz="900" dirty="0">
-                <a:solidFill>
-                  <a:srgbClr val="5D5D72"/>
-                </a:solidFill>
-                <a:latin typeface="Calibri" pitchFamily="34" charset="0"/>
-                <a:ea typeface="Calibri" pitchFamily="34" charset="-122"/>
-                <a:cs typeface="Calibri" pitchFamily="34" charset="-120"/>
-              </a:rPr>
-              <a:t>30</a:t>
-            </a:r>
-            <a:endParaRPr lang="en-US" sz="900" dirty="0"/>
+          <p:cNvPr id="15" name="cuinotes-footer-mark"/>
+          <p:cNvSpPr txBox="1"/>
+          <p:nvPr/>
+        </p:nvSpPr>
+        <p:spPr>
+          <a:xfrm>
+            <a:off x="9951720" y="6455664"/>
+            <a:ext cx="2011680" cy="292608"/>
+          </a:xfrm>
+          <a:prstGeom prst="rect">
+            <a:avLst/>
+          </a:prstGeom>
+          <a:noFill/>
+        </p:spPr>
+        <p:txBody>
+          <a:bodyPr wrap="none" lIns="0" rIns="0" tIns="0" bIns="0">
+            <a:spAutoFit/>
+          </a:bodyPr>
+          <a:lstStyle/>
+          <a:p>
+            <a:pPr algn="r"/>
+            <a:r>
+              <a:rPr sz="1000">
+                <a:solidFill>
+                  <a:srgbClr val="8A939B"/>
+                </a:solidFill>
+                <a:hlinkClick r:id="rId3"/>
+              </a:rPr>
+              <a:t>cuinotes.com</a:t>
+            </a:r>
+            <a:r>
+              <a:rPr sz="1000">
+                <a:solidFill>
+                  <a:srgbClr val="8A939B"/>
+                </a:solidFill>
+              </a:rPr>
+              <a:t>  ·  30</a:t>
+            </a:r>
           </a:p>
         </p:txBody>
       </p:sp>
@@ -14433,6 +13749,10 @@
             <a:tailEnd type="triangle"/>
           </a:ln>
         </p:spPr>
+        <p:txBody>
+          <a:bodyPr/>
+          <a:p/>
+        </p:txBody>
       </p:sp>
       <p:sp>
         <p:nvSpPr>
@@ -14498,6 +13818,10 @@
             <a:tailEnd type="triangle"/>
           </a:ln>
         </p:spPr>
+        <p:txBody>
+          <a:bodyPr/>
+          <a:p/>
+        </p:txBody>
       </p:sp>
       <p:sp>
         <p:nvSpPr>
@@ -14563,6 +13887,10 @@
             <a:tailEnd type="triangle"/>
           </a:ln>
         </p:spPr>
+        <p:txBody>
+          <a:bodyPr/>
+          <a:p/>
+        </p:txBody>
       </p:sp>
       <p:sp>
         <p:nvSpPr>
@@ -14628,6 +13956,10 @@
             <a:tailEnd type="triangle"/>
           </a:ln>
         </p:spPr>
+        <p:txBody>
+          <a:bodyPr/>
+          <a:p/>
+        </p:txBody>
       </p:sp>
       <p:sp>
         <p:nvSpPr>
@@ -14689,6 +14021,10 @@
           </a:solidFill>
           <a:ln/>
         </p:spPr>
+        <p:txBody>
+          <a:bodyPr/>
+          <a:p/>
+        </p:txBody>
       </p:sp>
       <p:sp>
         <p:nvSpPr>
@@ -14771,6 +14107,10 @@
           </a:solidFill>
           <a:ln/>
         </p:spPr>
+        <p:txBody>
+          <a:bodyPr/>
+          <a:p/>
+        </p:txBody>
       </p:sp>
       <p:sp>
         <p:nvSpPr>
@@ -14833,6 +14173,10 @@
           </a:solidFill>
           <a:ln/>
         </p:spPr>
+        <p:txBody>
+          <a:bodyPr/>
+          <a:p/>
+        </p:txBody>
       </p:sp>
       <p:sp>
         <p:nvSpPr>
@@ -14935,6 +14279,10 @@
           </a:solidFill>
           <a:ln/>
         </p:spPr>
+        <p:txBody>
+          <a:bodyPr/>
+          <a:p/>
+        </p:txBody>
       </p:sp>
       <p:sp>
         <p:nvSpPr>
@@ -14997,6 +14345,10 @@
           </a:solidFill>
           <a:ln/>
         </p:spPr>
+        <p:txBody>
+          <a:bodyPr/>
+          <a:p/>
+        </p:txBody>
       </p:sp>
       <p:sp>
         <p:nvSpPr>
@@ -15101,79 +14453,44 @@
       </p:sp>
       <p:sp>
         <p:nvSpPr>
-          <p:cNvPr id="23" name="Text 21"/>
-          <p:cNvSpPr txBox="1"/>
-          <p:nvPr/>
-        </p:nvSpPr>
-        <p:spPr>
-          <a:xfrm>
-            <a:off x="640080" y="6446520"/>
-            <a:ext cx="8686800" cy="292608"/>
-          </a:xfrm>
-          <a:prstGeom prst="rect">
-            <a:avLst/>
-          </a:prstGeom>
-          <a:noFill/>
-          <a:ln/>
-        </p:spPr>
-        <p:txBody>
-          <a:bodyPr wrap="square" lIns="0" tIns="0" rIns="0" bIns="0" rtlCol="0" anchor="ctr"/>
-          <a:lstStyle/>
-          <a:p>
-            <a:pPr algn="l" indent="0" marL="0">
-              <a:buNone/>
-            </a:pPr>
-            <a:r>
-              <a:rPr lang="en-US" sz="900" dirty="0">
-                <a:solidFill>
-                  <a:srgbClr val="5D5D72"/>
-                </a:solidFill>
-                <a:latin typeface="Calibri" pitchFamily="34" charset="0"/>
-                <a:ea typeface="Calibri" pitchFamily="34" charset="-122"/>
-                <a:cs typeface="Calibri" pitchFamily="34" charset="-120"/>
-              </a:rPr>
-              <a:t>Usman Akram  •  COMSATS University Islamabad</a:t>
-            </a:r>
-            <a:endParaRPr lang="en-US" sz="900" dirty="0"/>
-          </a:p>
-        </p:txBody>
-      </p:sp>
-      <p:sp>
-        <p:nvSpPr>
-          <p:cNvPr id="24" name="Text 22"/>
-          <p:cNvSpPr txBox="1"/>
-          <p:nvPr/>
-        </p:nvSpPr>
-        <p:spPr>
-          <a:xfrm>
-            <a:off x="11155680" y="6446520"/>
-            <a:ext cx="457200" cy="292608"/>
-          </a:xfrm>
-          <a:prstGeom prst="rect">
-            <a:avLst/>
-          </a:prstGeom>
-          <a:noFill/>
-          <a:ln/>
-        </p:spPr>
-        <p:txBody>
-          <a:bodyPr wrap="square" lIns="0" tIns="0" rIns="0" bIns="0" rtlCol="0" anchor="ctr"/>
-          <a:lstStyle/>
-          <a:p>
-            <a:pPr algn="r" indent="0" marL="0">
-              <a:buNone/>
-            </a:pPr>
-            <a:r>
-              <a:rPr lang="en-US" sz="900" dirty="0">
-                <a:solidFill>
-                  <a:srgbClr val="5D5D72"/>
-                </a:solidFill>
-                <a:latin typeface="Calibri" pitchFamily="34" charset="0"/>
-                <a:ea typeface="Calibri" pitchFamily="34" charset="-122"/>
-                <a:cs typeface="Calibri" pitchFamily="34" charset="-120"/>
-              </a:rPr>
-              <a:t>31</a:t>
-            </a:r>
-            <a:endParaRPr lang="en-US" sz="900" dirty="0"/>
+          <p:cNvPr id="25" name="cuinotes-footer-mark"/>
+          <p:cNvSpPr txBox="1"/>
+          <p:nvPr/>
+        </p:nvSpPr>
+        <p:spPr>
+          <a:xfrm>
+            <a:off x="9951720" y="6455664"/>
+            <a:ext cx="2011680" cy="292608"/>
+          </a:xfrm>
+          <a:prstGeom prst="rect">
+            <a:avLst/>
+          </a:prstGeom>
+          <a:noFill/>
+        </p:spPr>
+        <p:txBody>
+          <a:bodyPr wrap="none" lIns="0" rIns="0" tIns="0" bIns="0">
+            <a:spAutoFit/>
+          </a:bodyPr>
+          <a:lstStyle/>
+          <a:p>
+            <a:pPr algn="r"/>
+            <a:r>
+              <a:rPr sz="1000">
+                <a:solidFill>
+                  <a:srgbClr val="8A939B"/>
+                </a:solidFill>
+                <a:hlinkClick r:id="rId3"/>
+              </a:rPr>
+              <a:t>cuinotes.com</a:t>
+            </a:r>
+            <a:r>
+              <a:rPr sz="1000">
+                <a:solidFill>
+                  <a:srgbClr val="8A939B"/>
+                </a:solidFill>
+              </a:rPr>
+              <a:t>  ·  31</a:t>
+            </a:r>
           </a:p>
         </p:txBody>
       </p:sp>
@@ -15313,6 +14630,10 @@
             <a:prstDash val="solid"/>
           </a:ln>
         </p:spPr>
+        <p:txBody>
+          <a:bodyPr/>
+          <a:p/>
+        </p:txBody>
       </p:sp>
       <p:sp>
         <p:nvSpPr>
@@ -15394,79 +14715,44 @@
       </p:sp>
       <p:sp>
         <p:nvSpPr>
-          <p:cNvPr id="7" name="Text 5"/>
-          <p:cNvSpPr txBox="1"/>
-          <p:nvPr/>
-        </p:nvSpPr>
-        <p:spPr>
-          <a:xfrm>
-            <a:off x="640080" y="6446520"/>
-            <a:ext cx="8686800" cy="292608"/>
-          </a:xfrm>
-          <a:prstGeom prst="rect">
-            <a:avLst/>
-          </a:prstGeom>
-          <a:noFill/>
-          <a:ln/>
-        </p:spPr>
-        <p:txBody>
-          <a:bodyPr wrap="square" lIns="0" tIns="0" rIns="0" bIns="0" rtlCol="0" anchor="ctr"/>
-          <a:lstStyle/>
-          <a:p>
-            <a:pPr algn="l" indent="0" marL="0">
-              <a:buNone/>
-            </a:pPr>
-            <a:r>
-              <a:rPr lang="en-US" sz="900" dirty="0">
-                <a:solidFill>
-                  <a:srgbClr val="5D5D72"/>
-                </a:solidFill>
-                <a:latin typeface="Calibri" pitchFamily="34" charset="0"/>
-                <a:ea typeface="Calibri" pitchFamily="34" charset="-122"/>
-                <a:cs typeface="Calibri" pitchFamily="34" charset="-120"/>
-              </a:rPr>
-              <a:t>Usman Akram  •  COMSATS University Islamabad</a:t>
-            </a:r>
-            <a:endParaRPr lang="en-US" sz="900" dirty="0"/>
-          </a:p>
-        </p:txBody>
-      </p:sp>
-      <p:sp>
-        <p:nvSpPr>
-          <p:cNvPr id="8" name="Text 6"/>
-          <p:cNvSpPr txBox="1"/>
-          <p:nvPr/>
-        </p:nvSpPr>
-        <p:spPr>
-          <a:xfrm>
-            <a:off x="11155680" y="6446520"/>
-            <a:ext cx="457200" cy="292608"/>
-          </a:xfrm>
-          <a:prstGeom prst="rect">
-            <a:avLst/>
-          </a:prstGeom>
-          <a:noFill/>
-          <a:ln/>
-        </p:spPr>
-        <p:txBody>
-          <a:bodyPr wrap="square" lIns="0" tIns="0" rIns="0" bIns="0" rtlCol="0" anchor="ctr"/>
-          <a:lstStyle/>
-          <a:p>
-            <a:pPr algn="r" indent="0" marL="0">
-              <a:buNone/>
-            </a:pPr>
-            <a:r>
-              <a:rPr lang="en-US" sz="900" dirty="0">
-                <a:solidFill>
-                  <a:srgbClr val="5D5D72"/>
-                </a:solidFill>
-                <a:latin typeface="Calibri" pitchFamily="34" charset="0"/>
-                <a:ea typeface="Calibri" pitchFamily="34" charset="-122"/>
-                <a:cs typeface="Calibri" pitchFamily="34" charset="-120"/>
-              </a:rPr>
-              <a:t>32</a:t>
-            </a:r>
-            <a:endParaRPr lang="en-US" sz="900" dirty="0"/>
+          <p:cNvPr id="9" name="cuinotes-footer-mark"/>
+          <p:cNvSpPr txBox="1"/>
+          <p:nvPr/>
+        </p:nvSpPr>
+        <p:spPr>
+          <a:xfrm>
+            <a:off x="9951720" y="6455664"/>
+            <a:ext cx="2011680" cy="292608"/>
+          </a:xfrm>
+          <a:prstGeom prst="rect">
+            <a:avLst/>
+          </a:prstGeom>
+          <a:noFill/>
+        </p:spPr>
+        <p:txBody>
+          <a:bodyPr wrap="none" lIns="0" rIns="0" tIns="0" bIns="0">
+            <a:spAutoFit/>
+          </a:bodyPr>
+          <a:lstStyle/>
+          <a:p>
+            <a:pPr algn="r"/>
+            <a:r>
+              <a:rPr sz="1000">
+                <a:solidFill>
+                  <a:srgbClr val="8A939B"/>
+                </a:solidFill>
+                <a:hlinkClick r:id="rId3"/>
+              </a:rPr>
+              <a:t>cuinotes.com</a:t>
+            </a:r>
+            <a:r>
+              <a:rPr sz="1000">
+                <a:solidFill>
+                  <a:srgbClr val="8A939B"/>
+                </a:solidFill>
+              </a:rPr>
+              <a:t>  ·  32</a:t>
+            </a:r>
           </a:p>
         </p:txBody>
       </p:sp>
@@ -15599,6 +14885,10 @@
           </a:solidFill>
           <a:ln/>
         </p:spPr>
+        <p:txBody>
+          <a:bodyPr/>
+          <a:p/>
+        </p:txBody>
       </p:sp>
       <p:sp>
         <p:nvSpPr>
@@ -15697,6 +14987,10 @@
           </a:solidFill>
           <a:ln/>
         </p:spPr>
+        <p:txBody>
+          <a:bodyPr/>
+          <a:p/>
+        </p:txBody>
       </p:sp>
       <p:sp>
         <p:nvSpPr>
@@ -15795,6 +15089,10 @@
           </a:solidFill>
           <a:ln/>
         </p:spPr>
+        <p:txBody>
+          <a:bodyPr/>
+          <a:p/>
+        </p:txBody>
       </p:sp>
       <p:sp>
         <p:nvSpPr>
@@ -15893,6 +15191,10 @@
           </a:solidFill>
           <a:ln/>
         </p:spPr>
+        <p:txBody>
+          <a:bodyPr/>
+          <a:p/>
+        </p:txBody>
       </p:sp>
       <p:sp>
         <p:nvSpPr>
@@ -15991,6 +15293,10 @@
           </a:solidFill>
           <a:ln/>
         </p:spPr>
+        <p:txBody>
+          <a:bodyPr/>
+          <a:p/>
+        </p:txBody>
       </p:sp>
       <p:sp>
         <p:nvSpPr>
@@ -16089,6 +15395,10 @@
           </a:solidFill>
           <a:ln/>
         </p:spPr>
+        <p:txBody>
+          <a:bodyPr/>
+          <a:p/>
+        </p:txBody>
       </p:sp>
       <p:sp>
         <p:nvSpPr>
@@ -16170,79 +15480,44 @@
       </p:sp>
       <p:sp>
         <p:nvSpPr>
-          <p:cNvPr id="22" name="Text 20"/>
-          <p:cNvSpPr txBox="1"/>
-          <p:nvPr/>
-        </p:nvSpPr>
-        <p:spPr>
-          <a:xfrm>
-            <a:off x="640080" y="6446520"/>
-            <a:ext cx="8686800" cy="292608"/>
-          </a:xfrm>
-          <a:prstGeom prst="rect">
-            <a:avLst/>
-          </a:prstGeom>
-          <a:noFill/>
-          <a:ln/>
-        </p:spPr>
-        <p:txBody>
-          <a:bodyPr wrap="square" lIns="0" tIns="0" rIns="0" bIns="0" rtlCol="0" anchor="ctr"/>
-          <a:lstStyle/>
-          <a:p>
-            <a:pPr algn="l" indent="0" marL="0">
-              <a:buNone/>
-            </a:pPr>
-            <a:r>
-              <a:rPr lang="en-US" sz="900" dirty="0">
-                <a:solidFill>
-                  <a:srgbClr val="9AA3D8"/>
-                </a:solidFill>
-                <a:latin typeface="Calibri" pitchFamily="34" charset="0"/>
-                <a:ea typeface="Calibri" pitchFamily="34" charset="-122"/>
-                <a:cs typeface="Calibri" pitchFamily="34" charset="-120"/>
-              </a:rPr>
-              <a:t>Usman Akram  •  COMSATS University Islamabad</a:t>
-            </a:r>
-            <a:endParaRPr lang="en-US" sz="900" dirty="0"/>
-          </a:p>
-        </p:txBody>
-      </p:sp>
-      <p:sp>
-        <p:nvSpPr>
-          <p:cNvPr id="23" name="Text 21"/>
-          <p:cNvSpPr txBox="1"/>
-          <p:nvPr/>
-        </p:nvSpPr>
-        <p:spPr>
-          <a:xfrm>
-            <a:off x="11155680" y="6446520"/>
-            <a:ext cx="457200" cy="292608"/>
-          </a:xfrm>
-          <a:prstGeom prst="rect">
-            <a:avLst/>
-          </a:prstGeom>
-          <a:noFill/>
-          <a:ln/>
-        </p:spPr>
-        <p:txBody>
-          <a:bodyPr wrap="square" lIns="0" tIns="0" rIns="0" bIns="0" rtlCol="0" anchor="ctr"/>
-          <a:lstStyle/>
-          <a:p>
-            <a:pPr algn="r" indent="0" marL="0">
-              <a:buNone/>
-            </a:pPr>
-            <a:r>
-              <a:rPr lang="en-US" sz="900" dirty="0">
-                <a:solidFill>
-                  <a:srgbClr val="9AA3D8"/>
-                </a:solidFill>
-                <a:latin typeface="Calibri" pitchFamily="34" charset="0"/>
-                <a:ea typeface="Calibri" pitchFamily="34" charset="-122"/>
-                <a:cs typeface="Calibri" pitchFamily="34" charset="-120"/>
-              </a:rPr>
-              <a:t>33</a:t>
-            </a:r>
-            <a:endParaRPr lang="en-US" sz="900" dirty="0"/>
+          <p:cNvPr id="24" name="cuinotes-footer-mark"/>
+          <p:cNvSpPr txBox="1"/>
+          <p:nvPr/>
+        </p:nvSpPr>
+        <p:spPr>
+          <a:xfrm>
+            <a:off x="9951720" y="6455664"/>
+            <a:ext cx="2011680" cy="292608"/>
+          </a:xfrm>
+          <a:prstGeom prst="rect">
+            <a:avLst/>
+          </a:prstGeom>
+          <a:noFill/>
+        </p:spPr>
+        <p:txBody>
+          <a:bodyPr wrap="none" lIns="0" rIns="0" tIns="0" bIns="0">
+            <a:spAutoFit/>
+          </a:bodyPr>
+          <a:lstStyle/>
+          <a:p>
+            <a:pPr algn="r"/>
+            <a:r>
+              <a:rPr sz="1000">
+                <a:solidFill>
+                  <a:srgbClr val="8A939B"/>
+                </a:solidFill>
+                <a:hlinkClick r:id="rId3"/>
+              </a:rPr>
+              <a:t>cuinotes.com</a:t>
+            </a:r>
+            <a:r>
+              <a:rPr sz="1000">
+                <a:solidFill>
+                  <a:srgbClr val="8A939B"/>
+                </a:solidFill>
+              </a:rPr>
+              <a:t>  ·  33</a:t>
+            </a:r>
           </a:p>
         </p:txBody>
       </p:sp>
@@ -16377,6 +15652,10 @@
           </a:solidFill>
           <a:ln/>
         </p:spPr>
+        <p:txBody>
+          <a:bodyPr/>
+          <a:p/>
+        </p:txBody>
       </p:sp>
       <p:sp>
         <p:nvSpPr>
@@ -16521,79 +15800,44 @@
       </p:sp>
       <p:sp>
         <p:nvSpPr>
-          <p:cNvPr id="7" name="Text 5"/>
-          <p:cNvSpPr txBox="1"/>
-          <p:nvPr/>
-        </p:nvSpPr>
-        <p:spPr>
-          <a:xfrm>
-            <a:off x="640080" y="6446520"/>
-            <a:ext cx="8686800" cy="292608"/>
-          </a:xfrm>
-          <a:prstGeom prst="rect">
-            <a:avLst/>
-          </a:prstGeom>
-          <a:noFill/>
-          <a:ln/>
-        </p:spPr>
-        <p:txBody>
-          <a:bodyPr wrap="square" lIns="0" tIns="0" rIns="0" bIns="0" rtlCol="0" anchor="ctr"/>
-          <a:lstStyle/>
-          <a:p>
-            <a:pPr algn="l" indent="0" marL="0">
-              <a:buNone/>
-            </a:pPr>
-            <a:r>
-              <a:rPr lang="en-US" sz="900" dirty="0">
-                <a:solidFill>
-                  <a:srgbClr val="5D5D72"/>
-                </a:solidFill>
-                <a:latin typeface="Calibri" pitchFamily="34" charset="0"/>
-                <a:ea typeface="Calibri" pitchFamily="34" charset="-122"/>
-                <a:cs typeface="Calibri" pitchFamily="34" charset="-120"/>
-              </a:rPr>
-              <a:t>Usman Akram  •  COMSATS University Islamabad</a:t>
-            </a:r>
-            <a:endParaRPr lang="en-US" sz="900" dirty="0"/>
-          </a:p>
-        </p:txBody>
-      </p:sp>
-      <p:sp>
-        <p:nvSpPr>
-          <p:cNvPr id="8" name="Text 6"/>
-          <p:cNvSpPr txBox="1"/>
-          <p:nvPr/>
-        </p:nvSpPr>
-        <p:spPr>
-          <a:xfrm>
-            <a:off x="11155680" y="6446520"/>
-            <a:ext cx="457200" cy="292608"/>
-          </a:xfrm>
-          <a:prstGeom prst="rect">
-            <a:avLst/>
-          </a:prstGeom>
-          <a:noFill/>
-          <a:ln/>
-        </p:spPr>
-        <p:txBody>
-          <a:bodyPr wrap="square" lIns="0" tIns="0" rIns="0" bIns="0" rtlCol="0" anchor="ctr"/>
-          <a:lstStyle/>
-          <a:p>
-            <a:pPr algn="r" indent="0" marL="0">
-              <a:buNone/>
-            </a:pPr>
-            <a:r>
-              <a:rPr lang="en-US" sz="900" dirty="0">
-                <a:solidFill>
-                  <a:srgbClr val="5D5D72"/>
-                </a:solidFill>
-                <a:latin typeface="Calibri" pitchFamily="34" charset="0"/>
-                <a:ea typeface="Calibri" pitchFamily="34" charset="-122"/>
-                <a:cs typeface="Calibri" pitchFamily="34" charset="-120"/>
-              </a:rPr>
-              <a:t>4</a:t>
-            </a:r>
-            <a:endParaRPr lang="en-US" sz="900" dirty="0"/>
+          <p:cNvPr id="9" name="cuinotes-footer-mark"/>
+          <p:cNvSpPr txBox="1"/>
+          <p:nvPr/>
+        </p:nvSpPr>
+        <p:spPr>
+          <a:xfrm>
+            <a:off x="9951720" y="6455664"/>
+            <a:ext cx="2011680" cy="292608"/>
+          </a:xfrm>
+          <a:prstGeom prst="rect">
+            <a:avLst/>
+          </a:prstGeom>
+          <a:noFill/>
+        </p:spPr>
+        <p:txBody>
+          <a:bodyPr wrap="none" lIns="0" rIns="0" tIns="0" bIns="0">
+            <a:spAutoFit/>
+          </a:bodyPr>
+          <a:lstStyle/>
+          <a:p>
+            <a:pPr algn="r"/>
+            <a:r>
+              <a:rPr sz="1000">
+                <a:solidFill>
+                  <a:srgbClr val="8A939B"/>
+                </a:solidFill>
+                <a:hlinkClick r:id="rId3"/>
+              </a:rPr>
+              <a:t>cuinotes.com</a:t>
+            </a:r>
+            <a:r>
+              <a:rPr sz="1000">
+                <a:solidFill>
+                  <a:srgbClr val="8A939B"/>
+                </a:solidFill>
+              </a:rPr>
+              <a:t>  ·  4</a:t>
+            </a:r>
           </a:p>
         </p:txBody>
       </p:sp>
@@ -16728,6 +15972,10 @@
           </a:solidFill>
           <a:ln/>
         </p:spPr>
+        <p:txBody>
+          <a:bodyPr/>
+          <a:p/>
+        </p:txBody>
       </p:sp>
       <p:sp>
         <p:nvSpPr>
@@ -16864,6 +16112,10 @@
             </a:outerShdw>
           </a:effectLst>
         </p:spPr>
+        <p:txBody>
+          <a:bodyPr/>
+          <a:p/>
+        </p:txBody>
       </p:sp>
       <p:pic>
         <p:nvPicPr>
@@ -16891,79 +16143,44 @@
       </p:pic>
       <p:sp>
         <p:nvSpPr>
-          <p:cNvPr id="8" name="Text 5"/>
-          <p:cNvSpPr txBox="1"/>
-          <p:nvPr/>
-        </p:nvSpPr>
-        <p:spPr>
-          <a:xfrm>
-            <a:off x="640080" y="6446520"/>
-            <a:ext cx="8686800" cy="292608"/>
-          </a:xfrm>
-          <a:prstGeom prst="rect">
-            <a:avLst/>
-          </a:prstGeom>
-          <a:noFill/>
-          <a:ln/>
-        </p:spPr>
-        <p:txBody>
-          <a:bodyPr wrap="square" lIns="0" tIns="0" rIns="0" bIns="0" rtlCol="0" anchor="ctr"/>
-          <a:lstStyle/>
-          <a:p>
-            <a:pPr algn="l" indent="0" marL="0">
-              <a:buNone/>
-            </a:pPr>
-            <a:r>
-              <a:rPr lang="en-US" sz="900" dirty="0">
-                <a:solidFill>
-                  <a:srgbClr val="5D5D72"/>
-                </a:solidFill>
-                <a:latin typeface="Calibri" pitchFamily="34" charset="0"/>
-                <a:ea typeface="Calibri" pitchFamily="34" charset="-122"/>
-                <a:cs typeface="Calibri" pitchFamily="34" charset="-120"/>
-              </a:rPr>
-              <a:t>Usman Akram  •  COMSATS University Islamabad</a:t>
-            </a:r>
-            <a:endParaRPr lang="en-US" sz="900" dirty="0"/>
-          </a:p>
-        </p:txBody>
-      </p:sp>
-      <p:sp>
-        <p:nvSpPr>
-          <p:cNvPr id="9" name="Text 6"/>
-          <p:cNvSpPr txBox="1"/>
-          <p:nvPr/>
-        </p:nvSpPr>
-        <p:spPr>
-          <a:xfrm>
-            <a:off x="11155680" y="6446520"/>
-            <a:ext cx="457200" cy="292608"/>
-          </a:xfrm>
-          <a:prstGeom prst="rect">
-            <a:avLst/>
-          </a:prstGeom>
-          <a:noFill/>
-          <a:ln/>
-        </p:spPr>
-        <p:txBody>
-          <a:bodyPr wrap="square" lIns="0" tIns="0" rIns="0" bIns="0" rtlCol="0" anchor="ctr"/>
-          <a:lstStyle/>
-          <a:p>
-            <a:pPr algn="r" indent="0" marL="0">
-              <a:buNone/>
-            </a:pPr>
-            <a:r>
-              <a:rPr lang="en-US" sz="900" dirty="0">
-                <a:solidFill>
-                  <a:srgbClr val="5D5D72"/>
-                </a:solidFill>
-                <a:latin typeface="Calibri" pitchFamily="34" charset="0"/>
-                <a:ea typeface="Calibri" pitchFamily="34" charset="-122"/>
-                <a:cs typeface="Calibri" pitchFamily="34" charset="-120"/>
-              </a:rPr>
-              <a:t>5</a:t>
-            </a:r>
-            <a:endParaRPr lang="en-US" sz="900" dirty="0"/>
+          <p:cNvPr id="10" name="cuinotes-footer-mark"/>
+          <p:cNvSpPr txBox="1"/>
+          <p:nvPr/>
+        </p:nvSpPr>
+        <p:spPr>
+          <a:xfrm>
+            <a:off x="9951720" y="6455664"/>
+            <a:ext cx="2011680" cy="292608"/>
+          </a:xfrm>
+          <a:prstGeom prst="rect">
+            <a:avLst/>
+          </a:prstGeom>
+          <a:noFill/>
+        </p:spPr>
+        <p:txBody>
+          <a:bodyPr wrap="none" lIns="0" rIns="0" tIns="0" bIns="0">
+            <a:spAutoFit/>
+          </a:bodyPr>
+          <a:lstStyle/>
+          <a:p>
+            <a:pPr algn="r"/>
+            <a:r>
+              <a:rPr sz="1000">
+                <a:solidFill>
+                  <a:srgbClr val="8A939B"/>
+                </a:solidFill>
+                <a:hlinkClick r:id="rId4"/>
+              </a:rPr>
+              <a:t>cuinotes.com</a:t>
+            </a:r>
+            <a:r>
+              <a:rPr sz="1000">
+                <a:solidFill>
+                  <a:srgbClr val="8A939B"/>
+                </a:solidFill>
+              </a:rPr>
+              <a:t>  ·  5</a:t>
+            </a:r>
           </a:p>
         </p:txBody>
       </p:sp>
@@ -17096,6 +16313,10 @@
           </a:solidFill>
           <a:ln/>
         </p:spPr>
+        <p:txBody>
+          <a:bodyPr/>
+          <a:p/>
+        </p:txBody>
       </p:sp>
       <p:sp>
         <p:nvSpPr>
@@ -17194,6 +16415,10 @@
           </a:solidFill>
           <a:ln/>
         </p:spPr>
+        <p:txBody>
+          <a:bodyPr/>
+          <a:p/>
+        </p:txBody>
       </p:sp>
       <p:sp>
         <p:nvSpPr>
@@ -17292,6 +16517,10 @@
           </a:solidFill>
           <a:ln/>
         </p:spPr>
+        <p:txBody>
+          <a:bodyPr/>
+          <a:p/>
+        </p:txBody>
       </p:sp>
       <p:sp>
         <p:nvSpPr>
@@ -17373,79 +16602,44 @@
       </p:sp>
       <p:sp>
         <p:nvSpPr>
-          <p:cNvPr id="13" name="Text 11"/>
-          <p:cNvSpPr txBox="1"/>
-          <p:nvPr/>
-        </p:nvSpPr>
-        <p:spPr>
-          <a:xfrm>
-            <a:off x="640080" y="6446520"/>
-            <a:ext cx="8686800" cy="292608"/>
-          </a:xfrm>
-          <a:prstGeom prst="rect">
-            <a:avLst/>
-          </a:prstGeom>
-          <a:noFill/>
-          <a:ln/>
-        </p:spPr>
-        <p:txBody>
-          <a:bodyPr wrap="square" lIns="0" tIns="0" rIns="0" bIns="0" rtlCol="0" anchor="ctr"/>
-          <a:lstStyle/>
-          <a:p>
-            <a:pPr algn="l" indent="0" marL="0">
-              <a:buNone/>
-            </a:pPr>
-            <a:r>
-              <a:rPr lang="en-US" sz="900" dirty="0">
-                <a:solidFill>
-                  <a:srgbClr val="5D5D72"/>
-                </a:solidFill>
-                <a:latin typeface="Calibri" pitchFamily="34" charset="0"/>
-                <a:ea typeface="Calibri" pitchFamily="34" charset="-122"/>
-                <a:cs typeface="Calibri" pitchFamily="34" charset="-120"/>
-              </a:rPr>
-              <a:t>Usman Akram  •  COMSATS University Islamabad</a:t>
-            </a:r>
-            <a:endParaRPr lang="en-US" sz="900" dirty="0"/>
-          </a:p>
-        </p:txBody>
-      </p:sp>
-      <p:sp>
-        <p:nvSpPr>
-          <p:cNvPr id="14" name="Text 12"/>
-          <p:cNvSpPr txBox="1"/>
-          <p:nvPr/>
-        </p:nvSpPr>
-        <p:spPr>
-          <a:xfrm>
-            <a:off x="11155680" y="6446520"/>
-            <a:ext cx="457200" cy="292608"/>
-          </a:xfrm>
-          <a:prstGeom prst="rect">
-            <a:avLst/>
-          </a:prstGeom>
-          <a:noFill/>
-          <a:ln/>
-        </p:spPr>
-        <p:txBody>
-          <a:bodyPr wrap="square" lIns="0" tIns="0" rIns="0" bIns="0" rtlCol="0" anchor="ctr"/>
-          <a:lstStyle/>
-          <a:p>
-            <a:pPr algn="r" indent="0" marL="0">
-              <a:buNone/>
-            </a:pPr>
-            <a:r>
-              <a:rPr lang="en-US" sz="900" dirty="0">
-                <a:solidFill>
-                  <a:srgbClr val="5D5D72"/>
-                </a:solidFill>
-                <a:latin typeface="Calibri" pitchFamily="34" charset="0"/>
-                <a:ea typeface="Calibri" pitchFamily="34" charset="-122"/>
-                <a:cs typeface="Calibri" pitchFamily="34" charset="-120"/>
-              </a:rPr>
-              <a:t>6</a:t>
-            </a:r>
-            <a:endParaRPr lang="en-US" sz="900" dirty="0"/>
+          <p:cNvPr id="15" name="cuinotes-footer-mark"/>
+          <p:cNvSpPr txBox="1"/>
+          <p:nvPr/>
+        </p:nvSpPr>
+        <p:spPr>
+          <a:xfrm>
+            <a:off x="9951720" y="6455664"/>
+            <a:ext cx="2011680" cy="292608"/>
+          </a:xfrm>
+          <a:prstGeom prst="rect">
+            <a:avLst/>
+          </a:prstGeom>
+          <a:noFill/>
+        </p:spPr>
+        <p:txBody>
+          <a:bodyPr wrap="none" lIns="0" rIns="0" tIns="0" bIns="0">
+            <a:spAutoFit/>
+          </a:bodyPr>
+          <a:lstStyle/>
+          <a:p>
+            <a:pPr algn="r"/>
+            <a:r>
+              <a:rPr sz="1000">
+                <a:solidFill>
+                  <a:srgbClr val="8A939B"/>
+                </a:solidFill>
+                <a:hlinkClick r:id="rId3"/>
+              </a:rPr>
+              <a:t>cuinotes.com</a:t>
+            </a:r>
+            <a:r>
+              <a:rPr sz="1000">
+                <a:solidFill>
+                  <a:srgbClr val="8A939B"/>
+                </a:solidFill>
+              </a:rPr>
+              <a:t>  ·  6</a:t>
+            </a:r>
           </a:p>
         </p:txBody>
       </p:sp>
@@ -17580,6 +16774,10 @@
           </a:solidFill>
           <a:ln/>
         </p:spPr>
+        <p:txBody>
+          <a:bodyPr/>
+          <a:p/>
+        </p:txBody>
       </p:sp>
       <p:sp>
         <p:nvSpPr>
@@ -17677,6 +16875,10 @@
             <a:tailEnd type="triangle"/>
           </a:ln>
         </p:spPr>
+        <p:txBody>
+          <a:bodyPr/>
+          <a:p/>
+        </p:txBody>
       </p:sp>
       <p:sp>
         <p:nvSpPr>
@@ -17699,6 +16901,10 @@
           </a:solidFill>
           <a:ln/>
         </p:spPr>
+        <p:txBody>
+          <a:bodyPr/>
+          <a:p/>
+        </p:txBody>
       </p:sp>
       <p:sp>
         <p:nvSpPr>
@@ -17796,6 +17002,10 @@
             <a:tailEnd type="triangle"/>
           </a:ln>
         </p:spPr>
+        <p:txBody>
+          <a:bodyPr/>
+          <a:p/>
+        </p:txBody>
       </p:sp>
       <p:sp>
         <p:nvSpPr>
@@ -17818,6 +17028,10 @@
           </a:solidFill>
           <a:ln/>
         </p:spPr>
+        <p:txBody>
+          <a:bodyPr/>
+          <a:p/>
+        </p:txBody>
       </p:sp>
       <p:sp>
         <p:nvSpPr>
@@ -17915,6 +17129,10 @@
             <a:tailEnd type="triangle"/>
           </a:ln>
         </p:spPr>
+        <p:txBody>
+          <a:bodyPr/>
+          <a:p/>
+        </p:txBody>
       </p:sp>
       <p:sp>
         <p:nvSpPr>
@@ -17937,6 +17155,10 @@
           </a:solidFill>
           <a:ln/>
         </p:spPr>
+        <p:txBody>
+          <a:bodyPr/>
+          <a:p/>
+        </p:txBody>
       </p:sp>
       <p:sp>
         <p:nvSpPr>
@@ -18034,6 +17256,10 @@
             <a:tailEnd type="triangle"/>
           </a:ln>
         </p:spPr>
+        <p:txBody>
+          <a:bodyPr/>
+          <a:p/>
+        </p:txBody>
       </p:sp>
       <p:sp>
         <p:nvSpPr>
@@ -18056,6 +17282,10 @@
           </a:solidFill>
           <a:ln/>
         </p:spPr>
+        <p:txBody>
+          <a:bodyPr/>
+          <a:p/>
+        </p:txBody>
       </p:sp>
       <p:sp>
         <p:nvSpPr>
@@ -18171,79 +17401,44 @@
       </p:sp>
       <p:sp>
         <p:nvSpPr>
-          <p:cNvPr id="19" name="Text 17"/>
-          <p:cNvSpPr txBox="1"/>
-          <p:nvPr/>
-        </p:nvSpPr>
-        <p:spPr>
-          <a:xfrm>
-            <a:off x="640080" y="6446520"/>
-            <a:ext cx="8686800" cy="292608"/>
-          </a:xfrm>
-          <a:prstGeom prst="rect">
-            <a:avLst/>
-          </a:prstGeom>
-          <a:noFill/>
-          <a:ln/>
-        </p:spPr>
-        <p:txBody>
-          <a:bodyPr wrap="square" lIns="0" tIns="0" rIns="0" bIns="0" rtlCol="0" anchor="ctr"/>
-          <a:lstStyle/>
-          <a:p>
-            <a:pPr algn="l" indent="0" marL="0">
-              <a:buNone/>
-            </a:pPr>
-            <a:r>
-              <a:rPr lang="en-US" sz="900" dirty="0">
-                <a:solidFill>
-                  <a:srgbClr val="5D5D72"/>
-                </a:solidFill>
-                <a:latin typeface="Calibri" pitchFamily="34" charset="0"/>
-                <a:ea typeface="Calibri" pitchFamily="34" charset="-122"/>
-                <a:cs typeface="Calibri" pitchFamily="34" charset="-120"/>
-              </a:rPr>
-              <a:t>Usman Akram  •  COMSATS University Islamabad</a:t>
-            </a:r>
-            <a:endParaRPr lang="en-US" sz="900" dirty="0"/>
-          </a:p>
-        </p:txBody>
-      </p:sp>
-      <p:sp>
-        <p:nvSpPr>
-          <p:cNvPr id="20" name="Text 18"/>
-          <p:cNvSpPr txBox="1"/>
-          <p:nvPr/>
-        </p:nvSpPr>
-        <p:spPr>
-          <a:xfrm>
-            <a:off x="11155680" y="6446520"/>
-            <a:ext cx="457200" cy="292608"/>
-          </a:xfrm>
-          <a:prstGeom prst="rect">
-            <a:avLst/>
-          </a:prstGeom>
-          <a:noFill/>
-          <a:ln/>
-        </p:spPr>
-        <p:txBody>
-          <a:bodyPr wrap="square" lIns="0" tIns="0" rIns="0" bIns="0" rtlCol="0" anchor="ctr"/>
-          <a:lstStyle/>
-          <a:p>
-            <a:pPr algn="r" indent="0" marL="0">
-              <a:buNone/>
-            </a:pPr>
-            <a:r>
-              <a:rPr lang="en-US" sz="900" dirty="0">
-                <a:solidFill>
-                  <a:srgbClr val="5D5D72"/>
-                </a:solidFill>
-                <a:latin typeface="Calibri" pitchFamily="34" charset="0"/>
-                <a:ea typeface="Calibri" pitchFamily="34" charset="-122"/>
-                <a:cs typeface="Calibri" pitchFamily="34" charset="-120"/>
-              </a:rPr>
-              <a:t>7</a:t>
-            </a:r>
-            <a:endParaRPr lang="en-US" sz="900" dirty="0"/>
+          <p:cNvPr id="21" name="cuinotes-footer-mark"/>
+          <p:cNvSpPr txBox="1"/>
+          <p:nvPr/>
+        </p:nvSpPr>
+        <p:spPr>
+          <a:xfrm>
+            <a:off x="9951720" y="6455664"/>
+            <a:ext cx="2011680" cy="292608"/>
+          </a:xfrm>
+          <a:prstGeom prst="rect">
+            <a:avLst/>
+          </a:prstGeom>
+          <a:noFill/>
+        </p:spPr>
+        <p:txBody>
+          <a:bodyPr wrap="none" lIns="0" rIns="0" tIns="0" bIns="0">
+            <a:spAutoFit/>
+          </a:bodyPr>
+          <a:lstStyle/>
+          <a:p>
+            <a:pPr algn="r"/>
+            <a:r>
+              <a:rPr sz="1000">
+                <a:solidFill>
+                  <a:srgbClr val="8A939B"/>
+                </a:solidFill>
+                <a:hlinkClick r:id="rId3"/>
+              </a:rPr>
+              <a:t>cuinotes.com</a:t>
+            </a:r>
+            <a:r>
+              <a:rPr sz="1000">
+                <a:solidFill>
+                  <a:srgbClr val="8A939B"/>
+                </a:solidFill>
+              </a:rPr>
+              <a:t>  ·  7</a:t>
+            </a:r>
           </a:p>
         </p:txBody>
       </p:sp>
@@ -18383,6 +17578,10 @@
             <a:prstDash val="solid"/>
           </a:ln>
         </p:spPr>
+        <p:txBody>
+          <a:bodyPr/>
+          <a:p/>
+        </p:txBody>
       </p:sp>
       <p:sp>
         <p:nvSpPr>
@@ -18464,79 +17663,44 @@
       </p:sp>
       <p:sp>
         <p:nvSpPr>
-          <p:cNvPr id="7" name="Text 5"/>
-          <p:cNvSpPr txBox="1"/>
-          <p:nvPr/>
-        </p:nvSpPr>
-        <p:spPr>
-          <a:xfrm>
-            <a:off x="640080" y="6446520"/>
-            <a:ext cx="8686800" cy="292608"/>
-          </a:xfrm>
-          <a:prstGeom prst="rect">
-            <a:avLst/>
-          </a:prstGeom>
-          <a:noFill/>
-          <a:ln/>
-        </p:spPr>
-        <p:txBody>
-          <a:bodyPr wrap="square" lIns="0" tIns="0" rIns="0" bIns="0" rtlCol="0" anchor="ctr"/>
-          <a:lstStyle/>
-          <a:p>
-            <a:pPr algn="l" indent="0" marL="0">
-              <a:buNone/>
-            </a:pPr>
-            <a:r>
-              <a:rPr lang="en-US" sz="900" dirty="0">
-                <a:solidFill>
-                  <a:srgbClr val="5D5D72"/>
-                </a:solidFill>
-                <a:latin typeface="Calibri" pitchFamily="34" charset="0"/>
-                <a:ea typeface="Calibri" pitchFamily="34" charset="-122"/>
-                <a:cs typeface="Calibri" pitchFamily="34" charset="-120"/>
-              </a:rPr>
-              <a:t>Usman Akram  •  COMSATS University Islamabad</a:t>
-            </a:r>
-            <a:endParaRPr lang="en-US" sz="900" dirty="0"/>
-          </a:p>
-        </p:txBody>
-      </p:sp>
-      <p:sp>
-        <p:nvSpPr>
-          <p:cNvPr id="8" name="Text 6"/>
-          <p:cNvSpPr txBox="1"/>
-          <p:nvPr/>
-        </p:nvSpPr>
-        <p:spPr>
-          <a:xfrm>
-            <a:off x="11155680" y="6446520"/>
-            <a:ext cx="457200" cy="292608"/>
-          </a:xfrm>
-          <a:prstGeom prst="rect">
-            <a:avLst/>
-          </a:prstGeom>
-          <a:noFill/>
-          <a:ln/>
-        </p:spPr>
-        <p:txBody>
-          <a:bodyPr wrap="square" lIns="0" tIns="0" rIns="0" bIns="0" rtlCol="0" anchor="ctr"/>
-          <a:lstStyle/>
-          <a:p>
-            <a:pPr algn="r" indent="0" marL="0">
-              <a:buNone/>
-            </a:pPr>
-            <a:r>
-              <a:rPr lang="en-US" sz="900" dirty="0">
-                <a:solidFill>
-                  <a:srgbClr val="5D5D72"/>
-                </a:solidFill>
-                <a:latin typeface="Calibri" pitchFamily="34" charset="0"/>
-                <a:ea typeface="Calibri" pitchFamily="34" charset="-122"/>
-                <a:cs typeface="Calibri" pitchFamily="34" charset="-120"/>
-              </a:rPr>
-              <a:t>8</a:t>
-            </a:r>
-            <a:endParaRPr lang="en-US" sz="900" dirty="0"/>
+          <p:cNvPr id="9" name="cuinotes-footer-mark"/>
+          <p:cNvSpPr txBox="1"/>
+          <p:nvPr/>
+        </p:nvSpPr>
+        <p:spPr>
+          <a:xfrm>
+            <a:off x="9951720" y="6455664"/>
+            <a:ext cx="2011680" cy="292608"/>
+          </a:xfrm>
+          <a:prstGeom prst="rect">
+            <a:avLst/>
+          </a:prstGeom>
+          <a:noFill/>
+        </p:spPr>
+        <p:txBody>
+          <a:bodyPr wrap="none" lIns="0" rIns="0" tIns="0" bIns="0">
+            <a:spAutoFit/>
+          </a:bodyPr>
+          <a:lstStyle/>
+          <a:p>
+            <a:pPr algn="r"/>
+            <a:r>
+              <a:rPr sz="1000">
+                <a:solidFill>
+                  <a:srgbClr val="8A939B"/>
+                </a:solidFill>
+                <a:hlinkClick r:id="rId3"/>
+              </a:rPr>
+              <a:t>cuinotes.com</a:t>
+            </a:r>
+            <a:r>
+              <a:rPr sz="1000">
+                <a:solidFill>
+                  <a:srgbClr val="8A939B"/>
+                </a:solidFill>
+              </a:rPr>
+              <a:t>  ·  8</a:t>
+            </a:r>
           </a:p>
         </p:txBody>
       </p:sp>
@@ -18669,6 +17833,10 @@
           </a:solidFill>
           <a:ln/>
         </p:spPr>
+        <p:txBody>
+          <a:bodyPr/>
+          <a:p/>
+        </p:txBody>
       </p:sp>
       <p:sp>
         <p:nvSpPr>
@@ -18767,6 +17935,10 @@
           </a:solidFill>
           <a:ln/>
         </p:spPr>
+        <p:txBody>
+          <a:bodyPr/>
+          <a:p/>
+        </p:txBody>
       </p:sp>
       <p:sp>
         <p:nvSpPr>
@@ -18865,6 +18037,10 @@
           </a:solidFill>
           <a:ln/>
         </p:spPr>
+        <p:txBody>
+          <a:bodyPr/>
+          <a:p/>
+        </p:txBody>
       </p:sp>
       <p:sp>
         <p:nvSpPr>
@@ -18946,79 +18122,44 @@
       </p:sp>
       <p:sp>
         <p:nvSpPr>
-          <p:cNvPr id="13" name="Text 11"/>
-          <p:cNvSpPr txBox="1"/>
-          <p:nvPr/>
-        </p:nvSpPr>
-        <p:spPr>
-          <a:xfrm>
-            <a:off x="640080" y="6446520"/>
-            <a:ext cx="8686800" cy="292608"/>
-          </a:xfrm>
-          <a:prstGeom prst="rect">
-            <a:avLst/>
-          </a:prstGeom>
-          <a:noFill/>
-          <a:ln/>
-        </p:spPr>
-        <p:txBody>
-          <a:bodyPr wrap="square" lIns="0" tIns="0" rIns="0" bIns="0" rtlCol="0" anchor="ctr"/>
-          <a:lstStyle/>
-          <a:p>
-            <a:pPr algn="l" indent="0" marL="0">
-              <a:buNone/>
-            </a:pPr>
-            <a:r>
-              <a:rPr lang="en-US" sz="900" dirty="0">
-                <a:solidFill>
-                  <a:srgbClr val="5D5D72"/>
-                </a:solidFill>
-                <a:latin typeface="Calibri" pitchFamily="34" charset="0"/>
-                <a:ea typeface="Calibri" pitchFamily="34" charset="-122"/>
-                <a:cs typeface="Calibri" pitchFamily="34" charset="-120"/>
-              </a:rPr>
-              <a:t>Usman Akram  •  COMSATS University Islamabad</a:t>
-            </a:r>
-            <a:endParaRPr lang="en-US" sz="900" dirty="0"/>
-          </a:p>
-        </p:txBody>
-      </p:sp>
-      <p:sp>
-        <p:nvSpPr>
-          <p:cNvPr id="14" name="Text 12"/>
-          <p:cNvSpPr txBox="1"/>
-          <p:nvPr/>
-        </p:nvSpPr>
-        <p:spPr>
-          <a:xfrm>
-            <a:off x="11155680" y="6446520"/>
-            <a:ext cx="457200" cy="292608"/>
-          </a:xfrm>
-          <a:prstGeom prst="rect">
-            <a:avLst/>
-          </a:prstGeom>
-          <a:noFill/>
-          <a:ln/>
-        </p:spPr>
-        <p:txBody>
-          <a:bodyPr wrap="square" lIns="0" tIns="0" rIns="0" bIns="0" rtlCol="0" anchor="ctr"/>
-          <a:lstStyle/>
-          <a:p>
-            <a:pPr algn="r" indent="0" marL="0">
-              <a:buNone/>
-            </a:pPr>
-            <a:r>
-              <a:rPr lang="en-US" sz="900" dirty="0">
-                <a:solidFill>
-                  <a:srgbClr val="5D5D72"/>
-                </a:solidFill>
-                <a:latin typeface="Calibri" pitchFamily="34" charset="0"/>
-                <a:ea typeface="Calibri" pitchFamily="34" charset="-122"/>
-                <a:cs typeface="Calibri" pitchFamily="34" charset="-120"/>
-              </a:rPr>
-              <a:t>9</a:t>
-            </a:r>
-            <a:endParaRPr lang="en-US" sz="900" dirty="0"/>
+          <p:cNvPr id="15" name="cuinotes-footer-mark"/>
+          <p:cNvSpPr txBox="1"/>
+          <p:nvPr/>
+        </p:nvSpPr>
+        <p:spPr>
+          <a:xfrm>
+            <a:off x="9951720" y="6455664"/>
+            <a:ext cx="2011680" cy="292608"/>
+          </a:xfrm>
+          <a:prstGeom prst="rect">
+            <a:avLst/>
+          </a:prstGeom>
+          <a:noFill/>
+        </p:spPr>
+        <p:txBody>
+          <a:bodyPr wrap="none" lIns="0" rIns="0" tIns="0" bIns="0">
+            <a:spAutoFit/>
+          </a:bodyPr>
+          <a:lstStyle/>
+          <a:p>
+            <a:pPr algn="r"/>
+            <a:r>
+              <a:rPr sz="1000">
+                <a:solidFill>
+                  <a:srgbClr val="8A939B"/>
+                </a:solidFill>
+                <a:hlinkClick r:id="rId3"/>
+              </a:rPr>
+              <a:t>cuinotes.com</a:t>
+            </a:r>
+            <a:r>
+              <a:rPr sz="1000">
+                <a:solidFill>
+                  <a:srgbClr val="8A939B"/>
+                </a:solidFill>
+              </a:rPr>
+              <a:t>  ·  9</a:t>
+            </a:r>
           </a:p>
         </p:txBody>
       </p:sp>

--- a/slides/CSC336-Lecture-15-Async-JavaScript-Promises-and-Fetch.pptx
+++ b/slides/CSC336-Lecture-15-Async-JavaScript-Promises-and-Fetch.pptx
@@ -11,6 +11,7 @@
     <p:sldId id="259" r:id="rId5"/>
     <p:sldId id="260" r:id="rId6"/>
     <p:sldId id="261" r:id="rId7"/>
+    <p:sldId id="289" r:id="rId40"/>
     <p:sldId id="262" r:id="rId8"/>
     <p:sldId id="263" r:id="rId9"/>
     <p:sldId id="264" r:id="rId10"/>
@@ -32,8 +33,10 @@
     <p:sldId id="280" r:id="rId26"/>
     <p:sldId id="281" r:id="rId27"/>
     <p:sldId id="282" r:id="rId28"/>
+    <p:sldId id="290" r:id="rId41"/>
     <p:sldId id="283" r:id="rId29"/>
     <p:sldId id="284" r:id="rId30"/>
+    <p:sldId id="291" r:id="rId42"/>
     <p:sldId id="285" r:id="rId31"/>
     <p:sldId id="286" r:id="rId32"/>
     <p:sldId id="287" r:id="rId33"/>
@@ -4301,7 +4304,7 @@
                   <a:srgbClr val="8A939B"/>
                 </a:solidFill>
               </a:rPr>
-              <a:t>  ·  10</a:t>
+              <a:t>  ·  11</a:t>
             </a:r>
           </a:p>
         </p:txBody>
@@ -4658,7 +4661,7 @@
                   <a:srgbClr val="8A939B"/>
                 </a:solidFill>
               </a:rPr>
-              <a:t>  ·  11</a:t>
+              <a:t>  ·  12</a:t>
             </a:r>
           </a:p>
         </p:txBody>
@@ -5226,7 +5229,7 @@
                   <a:srgbClr val="8A939B"/>
                 </a:solidFill>
               </a:rPr>
-              <a:t>  ·  12</a:t>
+              <a:t>  ·  13</a:t>
             </a:r>
           </a:p>
         </p:txBody>
@@ -5636,7 +5639,7 @@
                   <a:srgbClr val="8A939B"/>
                 </a:solidFill>
               </a:rPr>
-              <a:t>  ·  13</a:t>
+              <a:t>  ·  14</a:t>
             </a:r>
           </a:p>
         </p:txBody>
@@ -6059,7 +6062,7 @@
                   <a:srgbClr val="8A939B"/>
                 </a:solidFill>
               </a:rPr>
-              <a:t>  ·  14</a:t>
+              <a:t>  ·  15</a:t>
             </a:r>
           </a:p>
         </p:txBody>
@@ -6399,7 +6402,7 @@
                   <a:srgbClr val="8A939B"/>
                 </a:solidFill>
               </a:rPr>
-              <a:t>  ·  15</a:t>
+              <a:t>  ·  16</a:t>
             </a:r>
           </a:p>
         </p:txBody>
@@ -6768,7 +6771,7 @@
                   <a:srgbClr val="8A939B"/>
                 </a:solidFill>
               </a:rPr>
-              <a:t>  ·  16</a:t>
+              <a:t>  ·  17</a:t>
             </a:r>
           </a:p>
         </p:txBody>
@@ -7220,7 +7223,7 @@
                   <a:srgbClr val="8A939B"/>
                 </a:solidFill>
               </a:rPr>
-              <a:t>  ·  17</a:t>
+              <a:t>  ·  18</a:t>
             </a:r>
           </a:p>
         </p:txBody>
@@ -7577,7 +7580,7 @@
                   <a:srgbClr val="8A939B"/>
                 </a:solidFill>
               </a:rPr>
-              <a:t>  ·  18</a:t>
+              <a:t>  ·  19</a:t>
             </a:r>
           </a:p>
         </p:txBody>
@@ -7898,7 +7901,7 @@
                   <a:srgbClr val="8A939B"/>
                 </a:solidFill>
               </a:rPr>
-              <a:t>  ·  19</a:t>
+              <a:t>  ·  20</a:t>
             </a:r>
           </a:p>
         </p:txBody>
@@ -8880,7 +8883,7 @@
                   <a:srgbClr val="8A939B"/>
                 </a:solidFill>
               </a:rPr>
-              <a:t>  ·  20</a:t>
+              <a:t>  ·  21</a:t>
             </a:r>
           </a:p>
         </p:txBody>
@@ -9363,7 +9366,7 @@
                   <a:srgbClr val="8A939B"/>
                 </a:solidFill>
               </a:rPr>
-              <a:t>  ·  21</a:t>
+              <a:t>  ·  22</a:t>
             </a:r>
           </a:p>
         </p:txBody>
@@ -9625,7 +9628,7 @@
                   <a:srgbClr val="8A939B"/>
                 </a:solidFill>
               </a:rPr>
-              <a:t>  ·  22</a:t>
+              <a:t>  ·  23</a:t>
             </a:r>
           </a:p>
         </p:txBody>
@@ -10084,7 +10087,7 @@
                   <a:srgbClr val="8A939B"/>
                 </a:solidFill>
               </a:rPr>
-              <a:t>  ·  23</a:t>
+              <a:t>  ·  24</a:t>
             </a:r>
           </a:p>
         </p:txBody>
@@ -10261,7 +10264,7 @@
                 <a:ea typeface="Courier New" pitchFamily="34" charset="-122"/>
                 <a:cs typeface="Courier New" pitchFamily="34" charset="-120"/>
               </a:rPr>
-              <a:t>async function loadStudents() {</a:t>
+              <a:t>async function loadStories() {</a:t>
             </a:r>
             <a:endParaRPr lang="en-US" sz="1400" dirty="0"/>
           </a:p>
@@ -10281,7 +10284,7 @@
                 <a:ea typeface="Courier New" pitchFamily="34" charset="-122"/>
                 <a:cs typeface="Courier New" pitchFamily="34" charset="-120"/>
               </a:rPr>
-              <a:t>  const response = await fetch("https://api.example.com/students");</a:t>
+              <a:t>  const response = await fetch("https://usmanlive.com/wp-json/api/stories");</a:t>
             </a:r>
             <a:endParaRPr lang="en-US" sz="1400" dirty="0"/>
           </a:p>
@@ -10301,7 +10304,7 @@
                 <a:ea typeface="Courier New" pitchFamily="34" charset="-122"/>
                 <a:cs typeface="Courier New" pitchFamily="34" charset="-120"/>
               </a:rPr>
-              <a:t>  const students = await response.json(); // parses the body as JSON</a:t>
+              <a:t>  const stories = await response.json(); // parses the body as JSON</a:t>
             </a:r>
             <a:endParaRPr lang="en-US" sz="1400" dirty="0"/>
           </a:p>
@@ -10321,7 +10324,7 @@
                 <a:ea typeface="Courier New" pitchFamily="34" charset="-122"/>
                 <a:cs typeface="Courier New" pitchFamily="34" charset="-120"/>
               </a:rPr>
-              <a:t>  console.log(students);</a:t>
+              <a:t>  console.log(stories);</a:t>
             </a:r>
             <a:endParaRPr lang="en-US" sz="1400" dirty="0"/>
           </a:p>
@@ -10424,7 +10427,7 @@
                   <a:srgbClr val="8A939B"/>
                 </a:solidFill>
               </a:rPr>
-              <a:t>  ·  24</a:t>
+              <a:t>  ·  25</a:t>
             </a:r>
           </a:p>
         </p:txBody>
@@ -10601,7 +10604,7 @@
                 <a:ea typeface="Courier New" pitchFamily="34" charset="-122"/>
                 <a:cs typeface="Courier New" pitchFamily="34" charset="-120"/>
               </a:rPr>
-              <a:t>async function loadStudents() {</a:t>
+              <a:t>async function loadStories() {</a:t>
             </a:r>
             <a:endParaRPr lang="en-US" sz="1400" dirty="0"/>
           </a:p>
@@ -10621,7 +10624,7 @@
                 <a:ea typeface="Courier New" pitchFamily="34" charset="-122"/>
                 <a:cs typeface="Courier New" pitchFamily="34" charset="-120"/>
               </a:rPr>
-              <a:t>  const response = await fetch("https://api.example.com/students");</a:t>
+              <a:t>  const response = await fetch("https://usmanlive.com/wp-json/api/stories");</a:t>
             </a:r>
             <a:endParaRPr lang="en-US" sz="1400" dirty="0"/>
           </a:p>
@@ -10701,7 +10704,7 @@
                 <a:ea typeface="Courier New" pitchFamily="34" charset="-122"/>
                 <a:cs typeface="Courier New" pitchFamily="34" charset="-120"/>
               </a:rPr>
-              <a:t>  const students = await response.json();</a:t>
+              <a:t>  const stories = await response.json();</a:t>
             </a:r>
             <a:endParaRPr lang="en-US" sz="1400" dirty="0"/>
           </a:p>
@@ -10721,7 +10724,7 @@
                 <a:ea typeface="Courier New" pitchFamily="34" charset="-122"/>
                 <a:cs typeface="Courier New" pitchFamily="34" charset="-120"/>
               </a:rPr>
-              <a:t>  return students;</a:t>
+              <a:t>  return stories;</a:t>
             </a:r>
             <a:endParaRPr lang="en-US" sz="1400" dirty="0"/>
           </a:p>
@@ -10785,7 +10788,7 @@
                   <a:srgbClr val="8A939B"/>
                 </a:solidFill>
               </a:rPr>
-              <a:t>  ·  25</a:t>
+              <a:t>  ·  26</a:t>
             </a:r>
           </a:p>
         </p:txBody>
@@ -11177,7 +11180,7 @@
                   <a:srgbClr val="8A939B"/>
                 </a:solidFill>
               </a:rPr>
-              <a:t>  ·  26</a:t>
+              <a:t>  ·  27</a:t>
             </a:r>
           </a:p>
         </p:txBody>
@@ -11354,7 +11357,7 @@
                 <a:ea typeface="Courier New" pitchFamily="34" charset="-122"/>
                 <a:cs typeface="Courier New" pitchFamily="34" charset="-120"/>
               </a:rPr>
-              <a:t>async function createStudent(newStudent) {</a:t>
+              <a:t>async function createStory(newStory) {</a:t>
             </a:r>
             <a:endParaRPr lang="en-US" sz="1400" dirty="0"/>
           </a:p>
@@ -11374,7 +11377,7 @@
                 <a:ea typeface="Courier New" pitchFamily="34" charset="-122"/>
                 <a:cs typeface="Courier New" pitchFamily="34" charset="-120"/>
               </a:rPr>
-              <a:t>  const response = await fetch("https://api.example.com/students", {</a:t>
+              <a:t>  const response = await fetch("https://usmanlive.com/wp-json/api/stories", {</a:t>
             </a:r>
             <a:endParaRPr lang="en-US" sz="1400" dirty="0"/>
           </a:p>
@@ -11434,7 +11437,7 @@
                 <a:ea typeface="Courier New" pitchFamily="34" charset="-122"/>
                 <a:cs typeface="Courier New" pitchFamily="34" charset="-120"/>
               </a:rPr>
-              <a:t>    body: JSON.stringify(newStudent), // JS object -&gt; JSON text</a:t>
+              <a:t>    body: JSON.stringify(newStory), // { title, content }</a:t>
             </a:r>
             <a:endParaRPr lang="en-US" sz="1400" dirty="0"/>
           </a:p>
@@ -11474,7 +11477,7 @@
                 <a:ea typeface="Courier New" pitchFamily="34" charset="-122"/>
                 <a:cs typeface="Courier New" pitchFamily="34" charset="-120"/>
               </a:rPr>
-              <a:t>  if (!response.ok) throw new Error(`Failed to create student: ${response.status}`);</a:t>
+              <a:t>  if (!response.ok) throw new Error(`Failed to create story: ${response.status}`);</a:t>
             </a:r>
             <a:endParaRPr lang="en-US" sz="1400" dirty="0"/>
           </a:p>
@@ -11597,7 +11600,7 @@
                   <a:srgbClr val="8A939B"/>
                 </a:solidFill>
               </a:rPr>
-              <a:t>  ·  27</a:t>
+              <a:t>  ·  28</a:t>
             </a:r>
           </a:p>
         </p:txBody>
@@ -12371,7 +12374,7 @@
                   <a:srgbClr val="8A939B"/>
                 </a:solidFill>
               </a:rPr>
-              <a:t>  ·  28</a:t>
+              <a:t>  ·  30</a:t>
             </a:r>
           </a:p>
         </p:txBody>
@@ -12548,7 +12551,7 @@
                 <a:ea typeface="Courier New" pitchFamily="34" charset="-122"/>
                 <a:cs typeface="Courier New" pitchFamily="34" charset="-120"/>
               </a:rPr>
-              <a:t>async function fetchAllPages() {</a:t>
+              <a:t>async function fetchDashboardData() {</a:t>
             </a:r>
             <a:endParaRPr lang="en-US" sz="1366" dirty="0"/>
           </a:p>
@@ -12588,7 +12591,7 @@
                 <a:ea typeface="Courier New" pitchFamily="34" charset="-122"/>
                 <a:cs typeface="Courier New" pitchFamily="34" charset="-120"/>
               </a:rPr>
-              <a:t>    const [usersRes, postsRes] = await Promise.all([</a:t>
+              <a:t>    const [storiesRes, countriesRes] = await Promise.all([</a:t>
             </a:r>
             <a:endParaRPr lang="en-US" sz="1366" dirty="0"/>
           </a:p>
@@ -12608,7 +12611,7 @@
                 <a:ea typeface="Courier New" pitchFamily="34" charset="-122"/>
                 <a:cs typeface="Courier New" pitchFamily="34" charset="-120"/>
               </a:rPr>
-              <a:t>      fetch("https://api.example.com/users"),</a:t>
+              <a:t>      fetch("https://usmanlive.com/wp-json/api/stories"),</a:t>
             </a:r>
             <a:endParaRPr lang="en-US" sz="1366" dirty="0"/>
           </a:p>
@@ -12628,7 +12631,7 @@
                 <a:ea typeface="Courier New" pitchFamily="34" charset="-122"/>
                 <a:cs typeface="Courier New" pitchFamily="34" charset="-120"/>
               </a:rPr>
-              <a:t>      fetch("https://api.example.com/posts"),</a:t>
+              <a:t>      fetch("https://usmanlive.com/wp-json/api/countries?q=an"),</a:t>
             </a:r>
             <a:endParaRPr lang="en-US" sz="1366" dirty="0"/>
           </a:p>
@@ -12668,7 +12671,7 @@
                 <a:ea typeface="Courier New" pitchFamily="34" charset="-122"/>
                 <a:cs typeface="Courier New" pitchFamily="34" charset="-120"/>
               </a:rPr>
-              <a:t>    const users = await usersRes.json();</a:t>
+              <a:t>    const stories = await storiesRes.json();</a:t>
             </a:r>
             <a:endParaRPr lang="en-US" sz="1366" dirty="0"/>
           </a:p>
@@ -12688,7 +12691,7 @@
                 <a:ea typeface="Courier New" pitchFamily="34" charset="-122"/>
                 <a:cs typeface="Courier New" pitchFamily="34" charset="-120"/>
               </a:rPr>
-              <a:t>    const posts = await postsRes.json();</a:t>
+              <a:t>    const countries = await countriesRes.json();</a:t>
             </a:r>
             <a:endParaRPr lang="en-US" sz="1366" dirty="0"/>
           </a:p>
@@ -12708,7 +12711,7 @@
                 <a:ea typeface="Courier New" pitchFamily="34" charset="-122"/>
                 <a:cs typeface="Courier New" pitchFamily="34" charset="-120"/>
               </a:rPr>
-              <a:t>    console.log(users, posts);</a:t>
+              <a:t>    console.log(stories, countries);</a:t>
             </a:r>
             <a:endParaRPr lang="en-US" sz="1366" dirty="0"/>
           </a:p>
@@ -12832,7 +12835,7 @@
                   <a:srgbClr val="8A939B"/>
                 </a:solidFill>
               </a:rPr>
-              <a:t>  ·  29</a:t>
+              <a:t>  ·  31</a:t>
             </a:r>
           </a:p>
         </p:txBody>
@@ -13611,7 +13614,7 @@
                   <a:srgbClr val="8A939B"/>
                 </a:solidFill>
               </a:rPr>
-              <a:t>  ·  30</a:t>
+              <a:t>  ·  33</a:t>
             </a:r>
           </a:p>
         </p:txBody>
@@ -14489,7 +14492,7 @@
                   <a:srgbClr val="8A939B"/>
                 </a:solidFill>
               </a:rPr>
-              <a:t>  ·  31</a:t>
+              <a:t>  ·  34</a:t>
             </a:r>
           </a:p>
         </p:txBody>
@@ -14751,7 +14754,7 @@
                   <a:srgbClr val="8A939B"/>
                 </a:solidFill>
               </a:rPr>
-              <a:t>  ·  32</a:t>
+              <a:t>  ·  35</a:t>
             </a:r>
           </a:p>
         </p:txBody>
@@ -15516,7 +15519,1390 @@
                   <a:srgbClr val="8A939B"/>
                 </a:solidFill>
               </a:rPr>
-              <a:t>  ·  33</a:t>
+              <a:t>  ·  36</a:t>
+            </a:r>
+          </a:p>
+        </p:txBody>
+      </p:sp>
+    </p:spTree>
+  </p:cSld>
+  <p:clrMapOvr>
+    <a:masterClrMapping/>
+  </p:clrMapOvr>
+</p:sld>
+</file>
+
+<file path=ppt/slides/slide34.xml><?xml version="1.0" encoding="utf-8"?>
+<p:sld xmlns:a="http://schemas.openxmlformats.org/drawingml/2006/main" xmlns:r="http://schemas.openxmlformats.org/officeDocument/2006/relationships" xmlns:p="http://schemas.openxmlformats.org/presentationml/2006/main">
+  <p:cSld name="Slide 7">
+    <p:bg>
+      <p:bgPr>
+        <a:solidFill>
+          <a:srgbClr val="FFFFFF"/>
+        </a:solidFill>
+      </p:bgPr>
+    </p:bg>
+    <p:spTree>
+      <p:nvGrpSpPr>
+        <p:cNvPr id="1" name=""/>
+        <p:cNvGrpSpPr/>
+        <p:nvPr/>
+      </p:nvGrpSpPr>
+      <p:grpSpPr>
+        <a:xfrm>
+          <a:off x="0" y="0"/>
+          <a:ext cx="0" cy="0"/>
+          <a:chOff x="0" y="0"/>
+          <a:chExt cx="0" cy="0"/>
+        </a:xfrm>
+      </p:grpSpPr>
+      <p:sp>
+        <p:nvSpPr>
+          <p:cNvPr id="2" name="Text 0"/>
+          <p:cNvSpPr txBox="1"/>
+          <p:nvPr/>
+        </p:nvSpPr>
+        <p:spPr>
+          <a:xfrm>
+            <a:off x="640080" y="457200"/>
+            <a:ext cx="10058400" cy="365760"/>
+          </a:xfrm>
+          <a:prstGeom prst="rect">
+            <a:avLst/>
+          </a:prstGeom>
+          <a:noFill/>
+          <a:ln/>
+        </p:spPr>
+        <p:txBody>
+          <a:bodyPr wrap="square" lIns="0" tIns="0" rIns="0" bIns="0" rtlCol="0" anchor="ctr"/>
+          <a:lstStyle/>
+          <a:p>
+            <a:pPr algn="l" indent="0" marL="0">
+              <a:buNone/>
+            </a:pPr>
+            <a:r>
+              <a:rPr lang="en-US" sz="1300" b="1" spc="300" kern="0" dirty="0">
+                <a:solidFill>
+                  <a:srgbClr val="FF8A3D"/>
+                </a:solidFill>
+                <a:latin typeface="Calibri" pitchFamily="34" charset="0"/>
+                <a:ea typeface="Calibri" pitchFamily="34" charset="-122"/>
+                <a:cs typeface="Calibri" pitchFamily="34" charset="-120"/>
+              </a:rPr>
+              <a:t>THE EVENT LOOP</a:t>
+            </a:r>
+            <a:endParaRPr lang="en-US" sz="1300" dirty="0"/>
+          </a:p>
+        </p:txBody>
+      </p:sp>
+      <p:sp>
+        <p:nvSpPr>
+          <p:cNvPr id="3" name="Text 1"/>
+          <p:cNvSpPr txBox="1"/>
+          <p:nvPr/>
+        </p:nvSpPr>
+        <p:spPr>
+          <a:xfrm>
+            <a:off x="640080" y="841248"/>
+            <a:ext cx="10881360" cy="914400"/>
+          </a:xfrm>
+          <a:prstGeom prst="rect">
+            <a:avLst/>
+          </a:prstGeom>
+          <a:noFill/>
+          <a:ln/>
+        </p:spPr>
+        <p:txBody>
+          <a:bodyPr wrap="square" lIns="0" tIns="0" rIns="0" bIns="0" rtlCol="0" anchor="ctr"/>
+          <a:lstStyle/>
+          <a:p>
+            <a:pPr algn="l" indent="0" marL="0">
+              <a:buNone/>
+            </a:pPr>
+            <a:r>
+              <a:rPr lang="en-US" sz="3400" b="1" dirty="0">
+                <a:solidFill>
+                  <a:srgbClr val="2B2B7A"/>
+                </a:solidFill>
+                <a:latin typeface="Cambria" pitchFamily="34" charset="0"/>
+                <a:ea typeface="Cambria" pitchFamily="34" charset="-122"/>
+                <a:cs typeface="Cambria" pitchFamily="34" charset="-120"/>
+              </a:rPr>
+              <a:t>The Moving Parts</a:t>
+            </a:r>
+            <a:endParaRPr lang="en-US" sz="3400" dirty="0"/>
+          </a:p>
+        </p:txBody>
+      </p:sp>
+      <p:sp>
+        <p:nvSpPr>
+          <p:cNvPr id="101" name="Shape 101"/>
+          <p:cNvSpPr/>
+          <p:nvPr/>
+        </p:nvSpPr>
+        <p:spPr>
+          <a:xfrm>
+            <a:off x="900000" y="2150000"/>
+            <a:ext cx="2900000" cy="1300000"/>
+          </a:xfrm>
+          <a:prstGeom prst="roundRect">
+            <a:avLst>
+              <a:gd name="adj" fmla="val 5333"/>
+            </a:avLst>
+          </a:prstGeom>
+          <a:solidFill>
+            <a:srgbClr val="2B2B7A"/>
+          </a:solidFill>
+          <a:ln/>
+        </p:spPr>
+        <p:txBody>
+          <a:bodyPr/>
+          <a:p/>
+        </p:txBody>
+      </p:sp>
+      <p:sp>
+        <p:nvSpPr>
+          <p:cNvPr id="102" name="Text 102"/>
+          <p:cNvSpPr txBox="1"/>
+          <p:nvPr/>
+        </p:nvSpPr>
+        <p:spPr>
+          <a:xfrm>
+            <a:off x="900000" y="2150000"/>
+            <a:ext cx="2900000" cy="1300000"/>
+          </a:xfrm>
+          <a:prstGeom prst="rect">
+            <a:avLst/>
+          </a:prstGeom>
+          <a:noFill/>
+          <a:ln/>
+        </p:spPr>
+        <p:txBody>
+          <a:bodyPr wrap="square" lIns="0" tIns="0" rIns="0" bIns="0" rtlCol="0" anchor="ctr"/>
+          <a:lstStyle/>
+          <a:p>
+            <a:pPr algn="ctr" indent="0" marL="0">
+              <a:buNone/>
+            </a:pPr>
+            <a:r>
+              <a:rPr lang="en-US" sz="1400" b="1" dirty="0">
+                <a:solidFill>
+                  <a:srgbClr val="FFFFFF"/>
+                </a:solidFill>
+                <a:latin typeface="Calibri" pitchFamily="34" charset="0"/>
+                <a:ea typeface="Calibri" pitchFamily="34" charset="-122"/>
+                <a:cs typeface="Calibri" pitchFamily="34" charset="-120"/>
+              </a:rPr>
+              <a:t>Call Stack</a:t>
+            </a:r>
+            <a:endParaRPr lang="en-US" sz="1400" dirty="0"/>
+          </a:p>
+        </p:txBody>
+      </p:sp>
+      <p:sp>
+        <p:nvSpPr>
+          <p:cNvPr id="103" name="Shape 103"/>
+          <p:cNvSpPr/>
+          <p:nvPr/>
+        </p:nvSpPr>
+        <p:spPr>
+          <a:xfrm>
+            <a:off x="4750000" y="2150000"/>
+            <a:ext cx="2900000" cy="1300000"/>
+          </a:xfrm>
+          <a:prstGeom prst="roundRect">
+            <a:avLst>
+              <a:gd name="adj" fmla="val 5333"/>
+            </a:avLst>
+          </a:prstGeom>
+          <a:solidFill>
+            <a:srgbClr val="1E1E4C"/>
+          </a:solidFill>
+          <a:ln/>
+        </p:spPr>
+        <p:txBody>
+          <a:bodyPr/>
+          <a:p/>
+        </p:txBody>
+      </p:sp>
+      <p:sp>
+        <p:nvSpPr>
+          <p:cNvPr id="104" name="Text 104"/>
+          <p:cNvSpPr txBox="1"/>
+          <p:nvPr/>
+        </p:nvSpPr>
+        <p:spPr>
+          <a:xfrm>
+            <a:off x="4750000" y="2150000"/>
+            <a:ext cx="2900000" cy="1300000"/>
+          </a:xfrm>
+          <a:prstGeom prst="rect">
+            <a:avLst/>
+          </a:prstGeom>
+          <a:noFill/>
+          <a:ln/>
+        </p:spPr>
+        <p:txBody>
+          <a:bodyPr wrap="square" lIns="0" tIns="0" rIns="0" bIns="0" rtlCol="0" anchor="ctr"/>
+          <a:lstStyle/>
+          <a:p>
+            <a:pPr algn="ctr" indent="0" marL="0">
+              <a:buNone/>
+            </a:pPr>
+            <a:r>
+              <a:rPr lang="en-US" sz="1400" b="1" dirty="0">
+                <a:solidFill>
+                  <a:srgbClr val="FFFFFF"/>
+                </a:solidFill>
+                <a:latin typeface="Calibri" pitchFamily="34" charset="0"/>
+                <a:ea typeface="Calibri" pitchFamily="34" charset="-122"/>
+                <a:cs typeface="Calibri" pitchFamily="34" charset="-120"/>
+              </a:rPr>
+              <a:t>Web APIs</a:t>
+            </a:r>
+            <a:endParaRPr lang="en-US" sz="1400" dirty="0"/>
+          </a:p>
+          <a:p>
+            <a:pPr algn="ctr" indent="0" marL="0">
+              <a:buNone/>
+            </a:pPr>
+            <a:r>
+              <a:rPr lang="en-US" sz="1100" dirty="0">
+                <a:solidFill>
+                  <a:srgbClr val="C9D3F5"/>
+                </a:solidFill>
+                <a:latin typeface="Calibri" pitchFamily="34" charset="0"/>
+                <a:ea typeface="Calibri" pitchFamily="34" charset="-122"/>
+                <a:cs typeface="Calibri" pitchFamily="34" charset="-120"/>
+              </a:rPr>
+              <a:t>(Browser / Node)</a:t>
+            </a:r>
+            <a:endParaRPr lang="en-US" sz="1100" dirty="0"/>
+          </a:p>
+        </p:txBody>
+      </p:sp>
+      <p:sp>
+        <p:nvSpPr>
+          <p:cNvPr id="105" name="Shape 105"/>
+          <p:cNvSpPr/>
+          <p:nvPr/>
+        </p:nvSpPr>
+        <p:spPr>
+          <a:xfrm>
+            <a:off x="8600000" y="2150000"/>
+            <a:ext cx="2650000" cy="1300000"/>
+          </a:xfrm>
+          <a:prstGeom prst="roundRect">
+            <a:avLst>
+              <a:gd name="adj" fmla="val 5333"/>
+            </a:avLst>
+          </a:prstGeom>
+          <a:solidFill>
+            <a:srgbClr val="FF8A3D"/>
+          </a:solidFill>
+          <a:ln/>
+        </p:spPr>
+        <p:txBody>
+          <a:bodyPr/>
+          <a:p/>
+        </p:txBody>
+      </p:sp>
+      <p:sp>
+        <p:nvSpPr>
+          <p:cNvPr id="106" name="Text 106"/>
+          <p:cNvSpPr txBox="1"/>
+          <p:nvPr/>
+        </p:nvSpPr>
+        <p:spPr>
+          <a:xfrm>
+            <a:off x="8600000" y="2150000"/>
+            <a:ext cx="2650000" cy="1300000"/>
+          </a:xfrm>
+          <a:prstGeom prst="rect">
+            <a:avLst/>
+          </a:prstGeom>
+          <a:noFill/>
+          <a:ln/>
+        </p:spPr>
+        <p:txBody>
+          <a:bodyPr wrap="square" lIns="0" tIns="0" rIns="0" bIns="0" rtlCol="0" anchor="ctr"/>
+          <a:lstStyle/>
+          <a:p>
+            <a:pPr algn="ctr" indent="0" marL="0">
+              <a:buNone/>
+            </a:pPr>
+            <a:r>
+              <a:rPr lang="en-US" sz="1400" b="1" dirty="0">
+                <a:solidFill>
+                  <a:srgbClr val="FFFFFF"/>
+                </a:solidFill>
+                <a:latin typeface="Calibri" pitchFamily="34" charset="0"/>
+                <a:ea typeface="Calibri" pitchFamily="34" charset="-122"/>
+                <a:cs typeface="Calibri" pitchFamily="34" charset="-120"/>
+              </a:rPr>
+              <a:t>Task Queues</a:t>
+            </a:r>
+            <a:endParaRPr lang="en-US" sz="1400" dirty="0"/>
+          </a:p>
+          <a:p>
+            <a:pPr algn="ctr" indent="0" marL="0">
+              <a:buNone/>
+            </a:pPr>
+            <a:r>
+              <a:rPr lang="en-US" sz="1100" dirty="0">
+                <a:solidFill>
+                  <a:srgbClr val="C9D3F5"/>
+                </a:solidFill>
+                <a:latin typeface="Calibri" pitchFamily="34" charset="0"/>
+                <a:ea typeface="Calibri" pitchFamily="34" charset="-122"/>
+                <a:cs typeface="Calibri" pitchFamily="34" charset="-120"/>
+              </a:rPr>
+              <a:t>macro + micro</a:t>
+            </a:r>
+            <a:endParaRPr lang="en-US" sz="1100" dirty="0"/>
+          </a:p>
+        </p:txBody>
+      </p:sp>
+      <p:sp>
+        <p:nvSpPr>
+          <p:cNvPr id="107" name="Line 107"/>
+          <p:cNvSpPr/>
+          <p:nvPr/>
+        </p:nvSpPr>
+        <p:spPr>
+          <a:xfrm>
+            <a:off x="3800000" y="2800000"/>
+            <a:ext cx="950000" cy="0"/>
+          </a:xfrm>
+          <a:prstGeom prst="line">
+            <a:avLst/>
+          </a:prstGeom>
+          <a:noFill/>
+          <a:ln w="25400">
+            <a:solidFill>
+              <a:srgbClr val="5D5D72"/>
+            </a:solidFill>
+            <a:prstDash val="solid"/>
+            <a:headEnd type="none"/>
+            <a:tailEnd type="triangle"/>
+          </a:ln>
+        </p:spPr>
+        <p:txBody>
+          <a:bodyPr/>
+          <a:p/>
+        </p:txBody>
+      </p:sp>
+      <p:sp>
+        <p:nvSpPr>
+          <p:cNvPr id="108" name="Line 108"/>
+          <p:cNvSpPr/>
+          <p:nvPr/>
+        </p:nvSpPr>
+        <p:spPr>
+          <a:xfrm>
+            <a:off x="7650000" y="2800000"/>
+            <a:ext cx="950000" cy="0"/>
+          </a:xfrm>
+          <a:prstGeom prst="line">
+            <a:avLst/>
+          </a:prstGeom>
+          <a:noFill/>
+          <a:ln w="25400">
+            <a:solidFill>
+              <a:srgbClr val="5D5D72"/>
+            </a:solidFill>
+            <a:prstDash val="solid"/>
+            <a:headEnd type="none"/>
+            <a:tailEnd type="triangle"/>
+          </a:ln>
+        </p:spPr>
+        <p:txBody>
+          <a:bodyPr/>
+          <a:p/>
+        </p:txBody>
+      </p:sp>
+      <p:sp>
+        <p:nvSpPr>
+          <p:cNvPr id="109" name="Line 109"/>
+          <p:cNvSpPr/>
+          <p:nvPr/>
+        </p:nvSpPr>
+        <p:spPr>
+          <a:xfrm>
+            <a:off x="9925000" y="3450000"/>
+            <a:ext cx="0" cy="1250000"/>
+          </a:xfrm>
+          <a:prstGeom prst="line">
+            <a:avLst/>
+          </a:prstGeom>
+          <a:noFill/>
+          <a:ln w="25400">
+            <a:solidFill>
+              <a:srgbClr val="5D5D72"/>
+            </a:solidFill>
+            <a:prstDash val="solid"/>
+            <a:headEnd type="none"/>
+            <a:tailEnd type="none"/>
+          </a:ln>
+        </p:spPr>
+        <p:txBody>
+          <a:bodyPr/>
+          <a:p/>
+        </p:txBody>
+      </p:sp>
+      <p:sp>
+        <p:nvSpPr>
+          <p:cNvPr id="110" name="Line 110"/>
+          <p:cNvSpPr/>
+          <p:nvPr/>
+        </p:nvSpPr>
+        <p:spPr>
+          <a:xfrm>
+            <a:off x="2350000" y="4700000"/>
+            <a:ext cx="7575000" cy="0"/>
+          </a:xfrm>
+          <a:prstGeom prst="line">
+            <a:avLst/>
+          </a:prstGeom>
+          <a:noFill/>
+          <a:ln w="25400">
+            <a:solidFill>
+              <a:srgbClr val="5D5D72"/>
+            </a:solidFill>
+            <a:prstDash val="solid"/>
+            <a:headEnd type="none"/>
+            <a:tailEnd type="none"/>
+          </a:ln>
+        </p:spPr>
+        <p:txBody>
+          <a:bodyPr/>
+          <a:p/>
+        </p:txBody>
+      </p:sp>
+      <p:sp>
+        <p:nvSpPr>
+          <p:cNvPr id="111" name="Line 111"/>
+          <p:cNvSpPr/>
+          <p:nvPr/>
+        </p:nvSpPr>
+        <p:spPr>
+          <a:xfrm>
+            <a:off x="2350000" y="3450000"/>
+            <a:ext cx="0" cy="1250000"/>
+          </a:xfrm>
+          <a:prstGeom prst="line">
+            <a:avLst/>
+          </a:prstGeom>
+          <a:noFill/>
+          <a:ln w="25400">
+            <a:solidFill>
+              <a:srgbClr val="5D5D72"/>
+            </a:solidFill>
+            <a:prstDash val="solid"/>
+            <a:headEnd type="triangle"/>
+            <a:tailEnd type="none"/>
+          </a:ln>
+        </p:spPr>
+        <p:txBody>
+          <a:bodyPr/>
+          <a:p/>
+        </p:txBody>
+      </p:sp>
+      <p:sp>
+        <p:nvSpPr>
+          <p:cNvPr id="112" name="Label 112"/>
+          <p:cNvSpPr txBox="1"/>
+          <p:nvPr/>
+        </p:nvSpPr>
+        <p:spPr>
+          <a:xfrm>
+            <a:off x="2320000" y="4220000"/>
+            <a:ext cx="7635000" cy="400000"/>
+          </a:xfrm>
+          <a:prstGeom prst="rect">
+            <a:avLst/>
+          </a:prstGeom>
+          <a:noFill/>
+          <a:ln/>
+        </p:spPr>
+        <p:txBody>
+          <a:bodyPr wrap="square" lIns="18000" tIns="0" rIns="18000" bIns="0" rtlCol="0" anchor="ctr"/>
+          <a:lstStyle/>
+          <a:p>
+            <a:pPr algn="ctr" indent="0" marL="0">
+              <a:buNone/>
+            </a:pPr>
+            <a:r>
+              <a:rPr lang="en-US" sz="1200" b="1" dirty="0">
+                <a:solidFill>
+                  <a:srgbClr val="B9720E"/>
+                </a:solidFill>
+                <a:latin typeface="Calibri" pitchFamily="34" charset="0"/>
+                <a:ea typeface="Calibri" pitchFamily="34" charset="-122"/>
+                <a:cs typeface="Calibri" pitchFamily="34" charset="-120"/>
+              </a:rPr>
+              <a:t>EVENT LOOP — moves the next queued task onto the stack once it's empty</a:t>
+            </a:r>
+            <a:endParaRPr lang="en-US" sz="1200" dirty="0"/>
+          </a:p>
+        </p:txBody>
+      </p:sp>
+      <p:sp>
+        <p:nvSpPr>
+          <p:cNvPr id="6" name="Text 4"/>
+          <p:cNvSpPr txBox="1"/>
+          <p:nvPr/>
+        </p:nvSpPr>
+        <p:spPr>
+          <a:xfrm>
+            <a:off x="640080" y="5750000"/>
+            <a:ext cx="10911535" cy="600000"/>
+          </a:xfrm>
+          <a:prstGeom prst="rect">
+            <a:avLst/>
+          </a:prstGeom>
+          <a:noFill/>
+          <a:ln/>
+        </p:spPr>
+        <p:txBody>
+          <a:bodyPr wrap="square" lIns="0" tIns="0" rIns="0" bIns="0" rtlCol="0" anchor="t"/>
+          <a:lstStyle/>
+          <a:p>
+            <a:pPr indent="0" marL="0">
+              <a:buNone/>
+            </a:pPr>
+            <a:r>
+              <a:rPr lang="en-US" sz="1300" dirty="0">
+                <a:solidFill>
+                  <a:srgbClr val="26262F"/>
+                </a:solidFill>
+                <a:latin typeface="Calibri" pitchFamily="34" charset="0"/>
+                <a:ea typeface="Calibri" pitchFamily="34" charset="-122"/>
+                <a:cs typeface="Calibri" pitchFamily="34" charset="-120"/>
+              </a:rPr>
+              <a:t>Web APIs run async work (timers, fetch, DOM events) off the main thread. When it finishes, the result lands in a queue — the event loop only moves it onto the Call Stack once the stack is completely empty.</a:t>
+            </a:r>
+            <a:endParaRPr lang="en-US" sz="1300" dirty="0"/>
+          </a:p>
+        </p:txBody>
+      </p:sp>
+      <p:sp>
+        <p:nvSpPr>
+          <p:cNvPr id="90" name="cuinotes-footer-mark"/>
+          <p:cNvSpPr txBox="1"/>
+          <p:nvPr/>
+        </p:nvSpPr>
+        <p:spPr>
+          <a:xfrm>
+            <a:off x="9951720" y="6455664"/>
+            <a:ext cx="2011680" cy="292608"/>
+          </a:xfrm>
+          <a:prstGeom prst="rect">
+            <a:avLst/>
+          </a:prstGeom>
+          <a:noFill/>
+        </p:spPr>
+        <p:txBody>
+          <a:bodyPr wrap="none" lIns="0" rIns="0" tIns="0" bIns="0">
+            <a:spAutoFit/>
+          </a:bodyPr>
+          <a:lstStyle/>
+          <a:p>
+            <a:pPr algn="r"/>
+            <a:r>
+              <a:rPr sz="1000">
+                <a:solidFill>
+                  <a:srgbClr val="8A939B"/>
+                </a:solidFill>
+                <a:hlinkClick r:id="rId3"/>
+              </a:rPr>
+              <a:t>cuinotes.com</a:t>
+            </a:r>
+            <a:r>
+              <a:rPr sz="1000">
+                <a:solidFill>
+                  <a:srgbClr val="8A939B"/>
+                </a:solidFill>
+              </a:rPr>
+              <a:t>  ·  7</a:t>
+            </a:r>
+          </a:p>
+        </p:txBody>
+      </p:sp>
+    </p:spTree>
+  </p:cSld>
+  <p:clrMapOvr>
+    <a:masterClrMapping/>
+  </p:clrMapOvr>
+</p:sld>
+</file>
+
+<file path=ppt/slides/slide35.xml><?xml version="1.0" encoding="utf-8"?>
+<p:sld xmlns:a="http://schemas.openxmlformats.org/drawingml/2006/main" xmlns:r="http://schemas.openxmlformats.org/officeDocument/2006/relationships" xmlns:p="http://schemas.openxmlformats.org/presentationml/2006/main">
+  <p:cSld name="Slide 29">
+    <p:bg>
+      <p:bgPr>
+        <a:solidFill>
+          <a:srgbClr val="FFFFFF"/>
+        </a:solidFill>
+      </p:bgPr>
+    </p:bg>
+    <p:spTree>
+      <p:nvGrpSpPr>
+        <p:cNvPr id="1" name=""/>
+        <p:cNvGrpSpPr/>
+        <p:nvPr/>
+      </p:nvGrpSpPr>
+      <p:grpSpPr>
+        <a:xfrm>
+          <a:off x="0" y="0"/>
+          <a:ext cx="0" cy="0"/>
+          <a:chOff x="0" y="0"/>
+          <a:chExt cx="0" cy="0"/>
+        </a:xfrm>
+      </p:grpSpPr>
+      <p:sp>
+        <p:nvSpPr>
+          <p:cNvPr id="2" name="Text 0"/>
+          <p:cNvSpPr txBox="1"/>
+          <p:nvPr/>
+        </p:nvSpPr>
+        <p:spPr>
+          <a:xfrm>
+            <a:off x="640080" y="457200"/>
+            <a:ext cx="10058400" cy="365760"/>
+          </a:xfrm>
+          <a:prstGeom prst="rect">
+            <a:avLst/>
+          </a:prstGeom>
+          <a:noFill/>
+          <a:ln/>
+        </p:spPr>
+        <p:txBody>
+          <a:bodyPr wrap="square" lIns="0" tIns="0" rIns="0" bIns="0" rtlCol="0" anchor="ctr"/>
+          <a:lstStyle/>
+          <a:p>
+            <a:pPr algn="l" indent="0" marL="0">
+              <a:buNone/>
+            </a:pPr>
+            <a:r>
+              <a:rPr lang="en-US" sz="1300" b="1" spc="300" kern="0" dirty="0">
+                <a:solidFill>
+                  <a:srgbClr val="FF8A3D"/>
+                </a:solidFill>
+                <a:latin typeface="Calibri" pitchFamily="34" charset="0"/>
+                <a:ea typeface="Calibri" pitchFamily="34" charset="-122"/>
+                <a:cs typeface="Calibri" pitchFamily="34" charset="-120"/>
+              </a:rPr>
+              <a:t>FETCH API</a:t>
+            </a:r>
+            <a:endParaRPr lang="en-US" sz="1300" dirty="0"/>
+          </a:p>
+        </p:txBody>
+      </p:sp>
+      <p:sp>
+        <p:nvSpPr>
+          <p:cNvPr id="3" name="Text 1"/>
+          <p:cNvSpPr txBox="1"/>
+          <p:nvPr/>
+        </p:nvSpPr>
+        <p:spPr>
+          <a:xfrm>
+            <a:off x="640080" y="841248"/>
+            <a:ext cx="10881360" cy="914400"/>
+          </a:xfrm>
+          <a:prstGeom prst="rect">
+            <a:avLst/>
+          </a:prstGeom>
+          <a:noFill/>
+          <a:ln/>
+        </p:spPr>
+        <p:txBody>
+          <a:bodyPr wrap="square" lIns="0" tIns="0" rIns="0" bIns="0" rtlCol="0" anchor="ctr"/>
+          <a:lstStyle/>
+          <a:p>
+            <a:pPr algn="l" indent="0" marL="0">
+              <a:buNone/>
+            </a:pPr>
+            <a:r>
+              <a:rPr lang="en-US" sz="3400" b="1" dirty="0">
+                <a:solidFill>
+                  <a:srgbClr val="2B2B7A"/>
+                </a:solidFill>
+                <a:latin typeface="Cambria" pitchFamily="34" charset="0"/>
+                <a:ea typeface="Cambria" pitchFamily="34" charset="-122"/>
+                <a:cs typeface="Cambria" pitchFamily="34" charset="-120"/>
+              </a:rPr>
+              <a:t>PUT and DELETE Requests</a:t>
+            </a:r>
+            <a:endParaRPr lang="en-US" sz="3400" dirty="0"/>
+          </a:p>
+        </p:txBody>
+      </p:sp>
+      <p:sp>
+        <p:nvSpPr>
+          <p:cNvPr id="4" name="Shape 2"/>
+          <p:cNvSpPr/>
+          <p:nvPr/>
+        </p:nvSpPr>
+        <p:spPr>
+          <a:xfrm>
+            <a:off x="640080" y="1965960"/>
+            <a:ext cx="10911535" cy="3592068"/>
+          </a:xfrm>
+          <a:prstGeom prst="roundRect">
+            <a:avLst>
+              <a:gd name="adj" fmla="val 3887"/>
+            </a:avLst>
+          </a:prstGeom>
+          <a:solidFill>
+            <a:srgbClr val="1E1E4C"/>
+          </a:solidFill>
+          <a:ln/>
+        </p:spPr>
+        <p:txBody>
+          <a:bodyPr/>
+          <a:p/>
+        </p:txBody>
+      </p:sp>
+      <p:sp>
+        <p:nvSpPr>
+          <p:cNvPr id="5" name="Text 3"/>
+          <p:cNvSpPr txBox="1"/>
+          <p:nvPr/>
+        </p:nvSpPr>
+        <p:spPr>
+          <a:xfrm>
+            <a:off x="960120" y="2194560"/>
+            <a:ext cx="10271455" cy="3134868"/>
+          </a:xfrm>
+          <a:prstGeom prst="rect">
+            <a:avLst/>
+          </a:prstGeom>
+          <a:noFill/>
+          <a:ln/>
+        </p:spPr>
+        <p:txBody>
+          <a:bodyPr wrap="square" lIns="0" tIns="0" rIns="0" bIns="0" rtlCol="0" anchor="t"/>
+          <a:lstStyle/>
+          <a:p>
+            <a:pPr indent="0" marL="0">
+              <a:lnSpc>
+                <a:spcPct val="125000"/>
+              </a:lnSpc>
+              <a:buNone/>
+            </a:pPr>
+            <a:r>
+              <a:rPr lang="en-US" sz="1400" dirty="0">
+                <a:solidFill>
+                  <a:srgbClr val="C9D3F5"/>
+                </a:solidFill>
+                <a:latin typeface="Courier New" pitchFamily="34" charset="0"/>
+                <a:ea typeface="Courier New" pitchFamily="34" charset="-122"/>
+                <a:cs typeface="Courier New" pitchFamily="34" charset="-120"/>
+              </a:rPr>
+              <a:t>const BASE = "https://usmanlive.com/wp-json/api/stories";</a:t>
+            </a:r>
+            <a:endParaRPr lang="en-US" sz="1400" dirty="0"/>
+          </a:p>
+          <a:p>
+            <a:pPr indent="0" marL="0">
+              <a:lnSpc>
+                <a:spcPct val="125000"/>
+              </a:lnSpc>
+              <a:buNone/>
+            </a:pPr>
+            <a:r>
+              <a:rPr lang="en-US" sz="1400" dirty="0">
+                <a:solidFill>
+                  <a:srgbClr val="C9D3F5"/>
+                </a:solidFill>
+                <a:latin typeface="Courier New" pitchFamily="34" charset="0"/>
+                <a:ea typeface="Courier New" pitchFamily="34" charset="-122"/>
+                <a:cs typeface="Courier New" pitchFamily="34" charset="-120"/>
+              </a:rPr>
+              <a:t>async function updateStory(id, updates) {</a:t>
+            </a:r>
+            <a:endParaRPr lang="en-US" sz="1400" dirty="0"/>
+          </a:p>
+          <a:p>
+            <a:pPr indent="0" marL="0">
+              <a:lnSpc>
+                <a:spcPct val="125000"/>
+              </a:lnSpc>
+              <a:buNone/>
+            </a:pPr>
+            <a:r>
+              <a:rPr lang="en-US" sz="1400" dirty="0">
+                <a:solidFill>
+                  <a:srgbClr val="C9D3F5"/>
+                </a:solidFill>
+                <a:latin typeface="Courier New" pitchFamily="34" charset="0"/>
+                <a:ea typeface="Courier New" pitchFamily="34" charset="-122"/>
+                <a:cs typeface="Courier New" pitchFamily="34" charset="-120"/>
+              </a:rPr>
+              <a:t>  return fetch(`${BASE}/${id}`, {</a:t>
+            </a:r>
+            <a:endParaRPr lang="en-US" sz="1400" dirty="0"/>
+          </a:p>
+          <a:p>
+            <a:pPr indent="0" marL="0">
+              <a:lnSpc>
+                <a:spcPct val="125000"/>
+              </a:lnSpc>
+              <a:buNone/>
+            </a:pPr>
+            <a:r>
+              <a:rPr lang="en-US" sz="1400" dirty="0">
+                <a:solidFill>
+                  <a:srgbClr val="C9D3F5"/>
+                </a:solidFill>
+                <a:latin typeface="Courier New" pitchFamily="34" charset="0"/>
+                <a:ea typeface="Courier New" pitchFamily="34" charset="-122"/>
+                <a:cs typeface="Courier New" pitchFamily="34" charset="-120"/>
+              </a:rPr>
+              <a:t>    method: "PUT",</a:t>
+            </a:r>
+            <a:endParaRPr lang="en-US" sz="1400" dirty="0"/>
+          </a:p>
+          <a:p>
+            <a:pPr indent="0" marL="0">
+              <a:lnSpc>
+                <a:spcPct val="125000"/>
+              </a:lnSpc>
+              <a:buNone/>
+            </a:pPr>
+            <a:r>
+              <a:rPr lang="en-US" sz="1400" dirty="0">
+                <a:solidFill>
+                  <a:srgbClr val="C9D3F5"/>
+                </a:solidFill>
+                <a:latin typeface="Courier New" pitchFamily="34" charset="0"/>
+                <a:ea typeface="Courier New" pitchFamily="34" charset="-122"/>
+                <a:cs typeface="Courier New" pitchFamily="34" charset="-120"/>
+              </a:rPr>
+              <a:t>    headers: { "Content-Type": "application/json" },</a:t>
+            </a:r>
+            <a:endParaRPr lang="en-US" sz="1400" dirty="0"/>
+          </a:p>
+          <a:p>
+            <a:pPr indent="0" marL="0">
+              <a:lnSpc>
+                <a:spcPct val="125000"/>
+              </a:lnSpc>
+              <a:buNone/>
+            </a:pPr>
+            <a:r>
+              <a:rPr lang="en-US" sz="1400" dirty="0">
+                <a:solidFill>
+                  <a:srgbClr val="C9D3F5"/>
+                </a:solidFill>
+                <a:latin typeface="Courier New" pitchFamily="34" charset="0"/>
+                <a:ea typeface="Courier New" pitchFamily="34" charset="-122"/>
+                <a:cs typeface="Courier New" pitchFamily="34" charset="-120"/>
+              </a:rPr>
+              <a:t>    body: JSON.stringify(updates), // { title, content }</a:t>
+            </a:r>
+            <a:endParaRPr lang="en-US" sz="1400" dirty="0"/>
+          </a:p>
+          <a:p>
+            <a:pPr indent="0" marL="0">
+              <a:lnSpc>
+                <a:spcPct val="125000"/>
+              </a:lnSpc>
+              <a:buNone/>
+            </a:pPr>
+            <a:r>
+              <a:rPr lang="en-US" sz="1400" dirty="0">
+                <a:solidFill>
+                  <a:srgbClr val="C9D3F5"/>
+                </a:solidFill>
+                <a:latin typeface="Courier New" pitchFamily="34" charset="0"/>
+                <a:ea typeface="Courier New" pitchFamily="34" charset="-122"/>
+                <a:cs typeface="Courier New" pitchFamily="34" charset="-120"/>
+              </a:rPr>
+              <a:t>  }).then(res =&gt; res.json());</a:t>
+            </a:r>
+            <a:endParaRPr lang="en-US" sz="1400" dirty="0"/>
+          </a:p>
+          <a:p>
+            <a:pPr indent="0" marL="0">
+              <a:lnSpc>
+                <a:spcPct val="125000"/>
+              </a:lnSpc>
+              <a:buNone/>
+            </a:pPr>
+            <a:r>
+              <a:rPr lang="en-US" sz="1400" dirty="0">
+                <a:solidFill>
+                  <a:srgbClr val="C9D3F5"/>
+                </a:solidFill>
+                <a:latin typeface="Courier New" pitchFamily="34" charset="0"/>
+                <a:ea typeface="Courier New" pitchFamily="34" charset="-122"/>
+                <a:cs typeface="Courier New" pitchFamily="34" charset="-120"/>
+              </a:rPr>
+              <a:t>}</a:t>
+            </a:r>
+            <a:endParaRPr lang="en-US" sz="1400" dirty="0"/>
+          </a:p>
+          <a:p>
+            <a:pPr indent="0" marL="0">
+              <a:lnSpc>
+                <a:spcPct val="125000"/>
+              </a:lnSpc>
+              <a:buNone/>
+            </a:pPr>
+            <a:r>
+              <a:rPr lang="en-US" sz="1400" dirty="0">
+                <a:solidFill>
+                  <a:srgbClr val="C9D3F5"/>
+                </a:solidFill>
+                <a:latin typeface="Courier New" pitchFamily="34" charset="0"/>
+                <a:ea typeface="Courier New" pitchFamily="34" charset="-122"/>
+                <a:cs typeface="Courier New" pitchFamily="34" charset="-120"/>
+              </a:rPr>
+              <a:t>async function deleteStory(id) {</a:t>
+            </a:r>
+            <a:endParaRPr lang="en-US" sz="1400" dirty="0"/>
+          </a:p>
+          <a:p>
+            <a:pPr indent="0" marL="0">
+              <a:lnSpc>
+                <a:spcPct val="125000"/>
+              </a:lnSpc>
+              <a:buNone/>
+            </a:pPr>
+            <a:r>
+              <a:rPr lang="en-US" sz="1400" dirty="0">
+                <a:solidFill>
+                  <a:srgbClr val="C9D3F5"/>
+                </a:solidFill>
+                <a:latin typeface="Courier New" pitchFamily="34" charset="0"/>
+                <a:ea typeface="Courier New" pitchFamily="34" charset="-122"/>
+                <a:cs typeface="Courier New" pitchFamily="34" charset="-120"/>
+              </a:rPr>
+              <a:t>  return fetch(`${BASE}/${id}`, { method: "DELETE" });</a:t>
+            </a:r>
+            <a:endParaRPr lang="en-US" sz="1400" dirty="0"/>
+          </a:p>
+          <a:p>
+            <a:pPr indent="0" marL="0">
+              <a:lnSpc>
+                <a:spcPct val="125000"/>
+              </a:lnSpc>
+              <a:buNone/>
+            </a:pPr>
+            <a:r>
+              <a:rPr lang="en-US" sz="1400" dirty="0">
+                <a:solidFill>
+                  <a:srgbClr val="C9D3F5"/>
+                </a:solidFill>
+                <a:latin typeface="Courier New" pitchFamily="34" charset="0"/>
+                <a:ea typeface="Courier New" pitchFamily="34" charset="-122"/>
+                <a:cs typeface="Courier New" pitchFamily="34" charset="-120"/>
+              </a:rPr>
+              <a:t>}</a:t>
+            </a:r>
+            <a:endParaRPr lang="en-US" sz="1400" dirty="0"/>
+          </a:p>
+        </p:txBody>
+      </p:sp>
+      <p:sp>
+        <p:nvSpPr>
+          <p:cNvPr id="6" name="Text 4"/>
+          <p:cNvSpPr txBox="1"/>
+          <p:nvPr/>
+        </p:nvSpPr>
+        <p:spPr>
+          <a:xfrm>
+            <a:off x="640080" y="5786628"/>
+            <a:ext cx="10911535" cy="519036"/>
+          </a:xfrm>
+          <a:prstGeom prst="rect">
+            <a:avLst/>
+          </a:prstGeom>
+          <a:noFill/>
+          <a:ln/>
+        </p:spPr>
+        <p:txBody>
+          <a:bodyPr wrap="square" lIns="0" tIns="0" rIns="0" bIns="0" rtlCol="0" anchor="t"/>
+          <a:lstStyle/>
+          <a:p>
+            <a:pPr indent="0" marL="0">
+              <a:buNone/>
+            </a:pPr>
+            <a:r>
+              <a:rPr lang="en-US" sz="1300" dirty="0">
+                <a:solidFill>
+                  <a:srgbClr val="26262F"/>
+                </a:solidFill>
+                <a:latin typeface="Calibri" pitchFamily="34" charset="0"/>
+                <a:ea typeface="Calibri" pitchFamily="34" charset="-122"/>
+                <a:cs typeface="Calibri" pitchFamily="34" charset="-120"/>
+              </a:rPr>
+              <a:t>PUT updates an existing resource at its own URL; DELETE removes it. Both, like POST, need the resource's :id in the URL — GET and POST are only half of CRUD.</a:t>
+            </a:r>
+            <a:endParaRPr lang="en-US" sz="1300" dirty="0"/>
+          </a:p>
+        </p:txBody>
+      </p:sp>
+      <p:sp>
+        <p:nvSpPr>
+          <p:cNvPr id="90" name="cuinotes-footer-mark"/>
+          <p:cNvSpPr txBox="1"/>
+          <p:nvPr/>
+        </p:nvSpPr>
+        <p:spPr>
+          <a:xfrm>
+            <a:off x="9951720" y="6455664"/>
+            <a:ext cx="2011680" cy="292608"/>
+          </a:xfrm>
+          <a:prstGeom prst="rect">
+            <a:avLst/>
+          </a:prstGeom>
+          <a:noFill/>
+        </p:spPr>
+        <p:txBody>
+          <a:bodyPr wrap="none" lIns="0" rIns="0" tIns="0" bIns="0">
+            <a:spAutoFit/>
+          </a:bodyPr>
+          <a:lstStyle/>
+          <a:p>
+            <a:pPr algn="r"/>
+            <a:r>
+              <a:rPr sz="1000">
+                <a:solidFill>
+                  <a:srgbClr val="8A939B"/>
+                </a:solidFill>
+                <a:hlinkClick r:id="rId3"/>
+              </a:rPr>
+              <a:t>cuinotes.com</a:t>
+            </a:r>
+            <a:r>
+              <a:rPr sz="1000">
+                <a:solidFill>
+                  <a:srgbClr val="8A939B"/>
+                </a:solidFill>
+              </a:rPr>
+              <a:t>  ·  29</a:t>
+            </a:r>
+          </a:p>
+        </p:txBody>
+      </p:sp>
+    </p:spTree>
+  </p:cSld>
+  <p:clrMapOvr>
+    <a:masterClrMapping/>
+  </p:clrMapOvr>
+</p:sld>
+</file>
+
+<file path=ppt/slides/slide36.xml><?xml version="1.0" encoding="utf-8"?>
+<p:sld xmlns:a="http://schemas.openxmlformats.org/drawingml/2006/main" xmlns:r="http://schemas.openxmlformats.org/officeDocument/2006/relationships" xmlns:p="http://schemas.openxmlformats.org/presentationml/2006/main">
+  <p:cSld name="Slide 32">
+    <p:bg>
+      <p:bgPr>
+        <a:solidFill>
+          <a:srgbClr val="FFFFFF"/>
+        </a:solidFill>
+      </p:bgPr>
+    </p:bg>
+    <p:spTree>
+      <p:nvGrpSpPr>
+        <p:cNvPr id="1" name=""/>
+        <p:cNvGrpSpPr/>
+        <p:nvPr/>
+      </p:nvGrpSpPr>
+      <p:grpSpPr>
+        <a:xfrm>
+          <a:off x="0" y="0"/>
+          <a:ext cx="0" cy="0"/>
+          <a:chOff x="0" y="0"/>
+          <a:chExt cx="0" cy="0"/>
+        </a:xfrm>
+      </p:grpSpPr>
+      <p:sp>
+        <p:nvSpPr>
+          <p:cNvPr id="2" name="Text 0"/>
+          <p:cNvSpPr txBox="1"/>
+          <p:nvPr/>
+        </p:nvSpPr>
+        <p:spPr>
+          <a:xfrm>
+            <a:off x="640080" y="457200"/>
+            <a:ext cx="10058400" cy="365760"/>
+          </a:xfrm>
+          <a:prstGeom prst="rect">
+            <a:avLst/>
+          </a:prstGeom>
+          <a:noFill/>
+          <a:ln/>
+        </p:spPr>
+        <p:txBody>
+          <a:bodyPr wrap="square" lIns="0" tIns="0" rIns="0" bIns="0" rtlCol="0" anchor="ctr"/>
+          <a:lstStyle/>
+          <a:p>
+            <a:pPr algn="l" indent="0" marL="0">
+              <a:buNone/>
+            </a:pPr>
+            <a:r>
+              <a:rPr lang="en-US" sz="1300" b="1" spc="300" kern="0" dirty="0">
+                <a:solidFill>
+                  <a:srgbClr val="FF8A3D"/>
+                </a:solidFill>
+                <a:latin typeface="Calibri" pitchFamily="34" charset="0"/>
+                <a:ea typeface="Calibri" pitchFamily="34" charset="-122"/>
+                <a:cs typeface="Calibri" pitchFamily="34" charset="-120"/>
+              </a:rPr>
+              <a:t>FETCH API</a:t>
+            </a:r>
+            <a:endParaRPr lang="en-US" sz="1300" dirty="0"/>
+          </a:p>
+        </p:txBody>
+      </p:sp>
+      <p:sp>
+        <p:nvSpPr>
+          <p:cNvPr id="3" name="Text 1"/>
+          <p:cNvSpPr txBox="1"/>
+          <p:nvPr/>
+        </p:nvSpPr>
+        <p:spPr>
+          <a:xfrm>
+            <a:off x="640080" y="841248"/>
+            <a:ext cx="10881360" cy="914400"/>
+          </a:xfrm>
+          <a:prstGeom prst="rect">
+            <a:avLst/>
+          </a:prstGeom>
+          <a:noFill/>
+          <a:ln/>
+        </p:spPr>
+        <p:txBody>
+          <a:bodyPr wrap="square" lIns="0" tIns="0" rIns="0" bIns="0" rtlCol="0" anchor="ctr"/>
+          <a:lstStyle/>
+          <a:p>
+            <a:pPr algn="l" indent="0" marL="0">
+              <a:buNone/>
+            </a:pPr>
+            <a:r>
+              <a:rPr lang="en-US" sz="3400" b="1" dirty="0">
+                <a:solidFill>
+                  <a:srgbClr val="2B2B7A"/>
+                </a:solidFill>
+                <a:latin typeface="Cambria" pitchFamily="34" charset="0"/>
+                <a:ea typeface="Cambria" pitchFamily="34" charset="-122"/>
+                <a:cs typeface="Cambria" pitchFamily="34" charset="-120"/>
+              </a:rPr>
+              <a:t>Try the Full CRUD Example</a:t>
+            </a:r>
+            <a:endParaRPr lang="en-US" sz="3400" dirty="0"/>
+          </a:p>
+        </p:txBody>
+      </p:sp>
+      <p:sp>
+        <p:nvSpPr>
+          <p:cNvPr id="4" name="Shape 2"/>
+          <p:cNvSpPr/>
+          <p:nvPr/>
+        </p:nvSpPr>
+        <p:spPr>
+          <a:xfrm>
+            <a:off x="640080" y="1965960"/>
+            <a:ext cx="10911535" cy="2606040"/>
+          </a:xfrm>
+          <a:prstGeom prst="roundRect">
+            <a:avLst>
+              <a:gd name="adj" fmla="val 3887"/>
+            </a:avLst>
+          </a:prstGeom>
+          <a:solidFill>
+            <a:srgbClr val="1E1E4C"/>
+          </a:solidFill>
+          <a:ln/>
+        </p:spPr>
+        <p:txBody>
+          <a:bodyPr/>
+          <a:p/>
+        </p:txBody>
+      </p:sp>
+      <p:sp>
+        <p:nvSpPr>
+          <p:cNvPr id="2194560" name="Link2194560"/>
+          <p:cNvSpPr txBox="1"/>
+          <p:nvPr/>
+        </p:nvSpPr>
+        <p:spPr>
+          <a:xfrm>
+            <a:off x="960120" y="2194560"/>
+            <a:ext cx="10271455" cy="700000"/>
+          </a:xfrm>
+          <a:prstGeom prst="rect">
+            <a:avLst/>
+          </a:prstGeom>
+          <a:noFill/>
+          <a:ln/>
+        </p:spPr>
+        <p:txBody>
+          <a:bodyPr wrap="square" lIns="0" tIns="0" rIns="0" bIns="0" rtlCol="0" anchor="t"/>
+          <a:lstStyle/>
+          <a:p>
+            <a:pPr indent="0" marL="0">
+              <a:buNone/>
+            </a:pPr>
+            <a:r>
+              <a:rPr lang="en-US" sz="1500" b="1" dirty="0">
+                <a:solidFill>
+                  <a:srgbClr val="FFFFFF"/>
+                </a:solidFill>
+                <a:latin typeface="Calibri" pitchFamily="34" charset="0"/>
+              </a:rPr>
+              <a:t>API Documentation &amp; Endpoint Reference</a:t>
+            </a:r>
+          </a:p>
+          <a:p>
+            <a:pPr indent="0" marL="0">
+              <a:buNone/>
+            </a:pPr>
+            <a:r>
+              <a:rPr lang="en-US" sz="1400" u="sng" dirty="0">
+                <a:solidFill>
+                  <a:srgbClr val="35E7C4"/>
+                </a:solidFill>
+                <a:latin typeface="Courier New" pitchFamily="34" charset="0"/>
+                <a:hlinkClick r:id="rId10"/>
+              </a:rPr>
+              <a:t>usmanlive.com/fake-stories-restful-api</a:t>
+            </a:r>
+          </a:p>
+        </p:txBody>
+      </p:sp>
+      <p:sp>
+        <p:nvSpPr>
+          <p:cNvPr id="3200000" name="Link3200000"/>
+          <p:cNvSpPr txBox="1"/>
+          <p:nvPr/>
+        </p:nvSpPr>
+        <p:spPr>
+          <a:xfrm>
+            <a:off x="960120" y="3200000"/>
+            <a:ext cx="10271455" cy="700000"/>
+          </a:xfrm>
+          <a:prstGeom prst="rect">
+            <a:avLst/>
+          </a:prstGeom>
+          <a:noFill/>
+          <a:ln/>
+        </p:spPr>
+        <p:txBody>
+          <a:bodyPr wrap="square" lIns="0" tIns="0" rIns="0" bIns="0" rtlCol="0" anchor="t"/>
+          <a:lstStyle/>
+          <a:p>
+            <a:pPr indent="0" marL="0">
+              <a:buNone/>
+            </a:pPr>
+            <a:r>
+              <a:rPr lang="en-US" sz="1500" b="1" dirty="0">
+                <a:solidFill>
+                  <a:srgbClr val="FFFFFF"/>
+                </a:solidFill>
+                <a:latin typeface="Calibri" pitchFamily="34" charset="0"/>
+              </a:rPr>
+              <a:t>Live CRUD Demo (jQuery/Bootstrap, using this exact API)</a:t>
+            </a:r>
+          </a:p>
+          <a:p>
+            <a:pPr indent="0" marL="0">
+              <a:buNone/>
+            </a:pPr>
+            <a:r>
+              <a:rPr lang="en-US" sz="1400" u="sng" dirty="0">
+                <a:solidFill>
+                  <a:srgbClr val="35E7C4"/>
+                </a:solidFill>
+                <a:latin typeface="Courier New" pitchFamily="34" charset="0"/>
+                <a:hlinkClick r:id="rId11"/>
+              </a:rPr>
+              <a:t>ajaxcrud.usmanlive.com</a:t>
+            </a:r>
+          </a:p>
+        </p:txBody>
+      </p:sp>
+      <p:sp>
+        <p:nvSpPr>
+          <p:cNvPr id="6" name="Text 4"/>
+          <p:cNvSpPr txBox="1"/>
+          <p:nvPr/>
+        </p:nvSpPr>
+        <p:spPr>
+          <a:xfrm>
+            <a:off x="640080" y="4800000"/>
+            <a:ext cx="10911535" cy="1000000"/>
+          </a:xfrm>
+          <a:prstGeom prst="rect">
+            <a:avLst/>
+          </a:prstGeom>
+          <a:noFill/>
+          <a:ln/>
+        </p:spPr>
+        <p:txBody>
+          <a:bodyPr wrap="square" lIns="0" tIns="0" rIns="0" bIns="0" rtlCol="0" anchor="t"/>
+          <a:lstStyle/>
+          <a:p>
+            <a:pPr indent="0" marL="0">
+              <a:buNone/>
+            </a:pPr>
+            <a:r>
+              <a:rPr lang="en-US" sz="1300" dirty="0">
+                <a:solidFill>
+                  <a:srgbClr val="26262F"/>
+                </a:solidFill>
+                <a:latin typeface="Calibri" pitchFamily="34" charset="0"/>
+              </a:rPr>
+              <a:t>Every fetch example in this section talks to a real practice API built for this course — GET, POST, PUT, and DELETE all work against it.</a:t>
+            </a:r>
+            <a:endParaRPr lang="en-US" sz="1300" dirty="0"/>
+          </a:p>
+        </p:txBody>
+      </p:sp>
+      <p:sp>
+        <p:nvSpPr>
+          <p:cNvPr id="90" name="cuinotes-footer-mark"/>
+          <p:cNvSpPr txBox="1"/>
+          <p:nvPr/>
+        </p:nvSpPr>
+        <p:spPr>
+          <a:xfrm>
+            <a:off x="9951720" y="6455664"/>
+            <a:ext cx="2011680" cy="292608"/>
+          </a:xfrm>
+          <a:prstGeom prst="rect">
+            <a:avLst/>
+          </a:prstGeom>
+          <a:noFill/>
+        </p:spPr>
+        <p:txBody>
+          <a:bodyPr wrap="none" lIns="0" rIns="0" tIns="0" bIns="0">
+            <a:spAutoFit/>
+          </a:bodyPr>
+          <a:lstStyle/>
+          <a:p>
+            <a:pPr algn="r"/>
+            <a:r>
+              <a:rPr sz="1000">
+                <a:solidFill>
+                  <a:srgbClr val="8A939B"/>
+                </a:solidFill>
+                <a:hlinkClick r:id="rId3"/>
+              </a:rPr>
+              <a:t>cuinotes.com</a:t>
+            </a:r>
+            <a:r>
+              <a:rPr sz="1000">
+                <a:solidFill>
+                  <a:srgbClr val="8A939B"/>
+                </a:solidFill>
+              </a:rPr>
+              <a:t>  ·  32</a:t>
             </a:r>
           </a:p>
         </p:txBody>
@@ -17437,7 +18823,7 @@
                   <a:srgbClr val="8A939B"/>
                 </a:solidFill>
               </a:rPr>
-              <a:t>  ·  7</a:t>
+              <a:t>  ·  8</a:t>
             </a:r>
           </a:p>
         </p:txBody>
@@ -17699,7 +19085,7 @@
                   <a:srgbClr val="8A939B"/>
                 </a:solidFill>
               </a:rPr>
-              <a:t>  ·  8</a:t>
+              <a:t>  ·  9</a:t>
             </a:r>
           </a:p>
         </p:txBody>
@@ -18158,7 +19544,7 @@
                   <a:srgbClr val="8A939B"/>
                 </a:solidFill>
               </a:rPr>
-              <a:t>  ·  9</a:t>
+              <a:t>  ·  10</a:t>
             </a:r>
           </a:p>
         </p:txBody>

--- a/slides/CSC336-Lecture-15-Async-JavaScript-Promises-and-Fetch.pptx
+++ b/slides/CSC336-Lecture-15-Async-JavaScript-Promises-and-Fetch.pptx
@@ -4075,9 +4075,13 @@
             </a:avLst>
           </a:prstGeom>
           <a:solidFill>
-            <a:srgbClr val="1E1E4C"/>
+            <a:srgbClr val="F7F8F9"/>
           </a:solidFill>
-          <a:ln/>
+          <a:ln w="9525">
+            <a:solidFill>
+              <a:srgbClr val="D0D5DD"/>
+            </a:solidFill>
+          </a:ln>
         </p:spPr>
         <p:txBody>
           <a:bodyPr/>
@@ -4114,7 +4118,7 @@
             <a:r>
               <a:rPr lang="en-US" sz="1400" dirty="0">
                 <a:solidFill>
-                  <a:srgbClr val="C9D3F5"/>
+                  <a:srgbClr val="1F2429"/>
                 </a:solidFill>
                 <a:latin typeface="Courier New" pitchFamily="34" charset="0"/>
                 <a:ea typeface="Courier New" pitchFamily="34" charset="-122"/>
@@ -4134,7 +4138,7 @@
             <a:r>
               <a:rPr lang="en-US" sz="1400" dirty="0">
                 <a:solidFill>
-                  <a:srgbClr val="C9D3F5"/>
+                  <a:srgbClr val="1F2429"/>
                 </a:solidFill>
                 <a:latin typeface="Courier New" pitchFamily="34" charset="0"/>
                 <a:ea typeface="Courier New" pitchFamily="34" charset="-122"/>
@@ -4154,7 +4158,7 @@
             <a:r>
               <a:rPr lang="en-US" sz="1400" dirty="0">
                 <a:solidFill>
-                  <a:srgbClr val="C9D3F5"/>
+                  <a:srgbClr val="1F2429"/>
                 </a:solidFill>
                 <a:latin typeface="Courier New" pitchFamily="34" charset="0"/>
                 <a:ea typeface="Courier New" pitchFamily="34" charset="-122"/>
@@ -4174,7 +4178,7 @@
             <a:r>
               <a:rPr lang="en-US" sz="1400" dirty="0">
                 <a:solidFill>
-                  <a:srgbClr val="C9D3F5"/>
+                  <a:srgbClr val="1F2429"/>
                 </a:solidFill>
                 <a:latin typeface="Courier New" pitchFamily="34" charset="0"/>
                 <a:ea typeface="Courier New" pitchFamily="34" charset="-122"/>
@@ -4194,7 +4198,7 @@
             <a:r>
               <a:rPr lang="en-US" sz="1400" dirty="0">
                 <a:solidFill>
-                  <a:srgbClr val="C9D3F5"/>
+                  <a:srgbClr val="1F2429"/>
                 </a:solidFill>
                 <a:latin typeface="Courier New" pitchFamily="34" charset="0"/>
                 <a:ea typeface="Courier New" pitchFamily="34" charset="-122"/>
@@ -4214,7 +4218,7 @@
             <a:r>
               <a:rPr lang="en-US" sz="1400" dirty="0">
                 <a:solidFill>
-                  <a:srgbClr val="C9D3F5"/>
+                  <a:srgbClr val="1F2429"/>
                 </a:solidFill>
                 <a:latin typeface="Courier New" pitchFamily="34" charset="0"/>
                 <a:ea typeface="Courier New" pitchFamily="34" charset="-122"/>
@@ -4234,7 +4238,7 @@
             <a:r>
               <a:rPr lang="en-US" sz="1400" dirty="0">
                 <a:solidFill>
-                  <a:srgbClr val="C9D3F5"/>
+                  <a:srgbClr val="1F2429"/>
                 </a:solidFill>
                 <a:latin typeface="Courier New" pitchFamily="34" charset="0"/>
                 <a:ea typeface="Courier New" pitchFamily="34" charset="-122"/>
@@ -4254,7 +4258,7 @@
             <a:r>
               <a:rPr lang="en-US" sz="1400" dirty="0">
                 <a:solidFill>
-                  <a:srgbClr val="C9D3F5"/>
+                  <a:srgbClr val="1F2429"/>
                 </a:solidFill>
                 <a:latin typeface="Courier New" pitchFamily="34" charset="0"/>
                 <a:ea typeface="Courier New" pitchFamily="34" charset="-122"/>
@@ -5361,9 +5365,13 @@
             </a:avLst>
           </a:prstGeom>
           <a:solidFill>
-            <a:srgbClr val="1E1E4C"/>
+            <a:srgbClr val="F7F8F9"/>
           </a:solidFill>
-          <a:ln/>
+          <a:ln w="9525">
+            <a:solidFill>
+              <a:srgbClr val="D0D5DD"/>
+            </a:solidFill>
+          </a:ln>
         </p:spPr>
         <p:txBody>
           <a:bodyPr/>
@@ -5400,7 +5408,7 @@
             <a:r>
               <a:rPr lang="en-US" sz="1400" dirty="0">
                 <a:solidFill>
-                  <a:srgbClr val="C9D3F5"/>
+                  <a:srgbClr val="1F2429"/>
                 </a:solidFill>
                 <a:latin typeface="Courier New" pitchFamily="34" charset="0"/>
                 <a:ea typeface="Courier New" pitchFamily="34" charset="-122"/>
@@ -5420,7 +5428,7 @@
             <a:r>
               <a:rPr lang="en-US" sz="1400" dirty="0">
                 <a:solidFill>
-                  <a:srgbClr val="C9D3F5"/>
+                  <a:srgbClr val="1F2429"/>
                 </a:solidFill>
                 <a:latin typeface="Courier New" pitchFamily="34" charset="0"/>
                 <a:ea typeface="Courier New" pitchFamily="34" charset="-122"/>
@@ -5440,7 +5448,7 @@
             <a:r>
               <a:rPr lang="en-US" sz="1400" dirty="0">
                 <a:solidFill>
-                  <a:srgbClr val="C9D3F5"/>
+                  <a:srgbClr val="1F2429"/>
                 </a:solidFill>
                 <a:latin typeface="Courier New" pitchFamily="34" charset="0"/>
                 <a:ea typeface="Courier New" pitchFamily="34" charset="-122"/>
@@ -5460,7 +5468,7 @@
             <a:r>
               <a:rPr lang="en-US" sz="1400" dirty="0">
                 <a:solidFill>
-                  <a:srgbClr val="C9D3F5"/>
+                  <a:srgbClr val="1F2429"/>
                 </a:solidFill>
                 <a:latin typeface="Courier New" pitchFamily="34" charset="0"/>
                 <a:ea typeface="Courier New" pitchFamily="34" charset="-122"/>
@@ -5480,7 +5488,7 @@
             <a:r>
               <a:rPr lang="en-US" sz="1400" dirty="0">
                 <a:solidFill>
-                  <a:srgbClr val="C9D3F5"/>
+                  <a:srgbClr val="1F2429"/>
                 </a:solidFill>
                 <a:latin typeface="Courier New" pitchFamily="34" charset="0"/>
                 <a:ea typeface="Courier New" pitchFamily="34" charset="-122"/>
@@ -5500,7 +5508,7 @@
             <a:r>
               <a:rPr lang="en-US" sz="1400" dirty="0">
                 <a:solidFill>
-                  <a:srgbClr val="C9D3F5"/>
+                  <a:srgbClr val="1F2429"/>
                 </a:solidFill>
                 <a:latin typeface="Courier New" pitchFamily="34" charset="0"/>
                 <a:ea typeface="Courier New" pitchFamily="34" charset="-122"/>
@@ -5529,7 +5537,7 @@
             <a:r>
               <a:rPr lang="en-US" sz="1400" dirty="0">
                 <a:solidFill>
-                  <a:srgbClr val="C9D3F5"/>
+                  <a:srgbClr val="1F2429"/>
                 </a:solidFill>
                 <a:latin typeface="Courier New" pitchFamily="34" charset="0"/>
                 <a:ea typeface="Courier New" pitchFamily="34" charset="-122"/>
@@ -5549,7 +5557,7 @@
             <a:r>
               <a:rPr lang="en-US" sz="1400" dirty="0">
                 <a:solidFill>
-                  <a:srgbClr val="C9D3F5"/>
+                  <a:srgbClr val="1F2429"/>
                 </a:solidFill>
                 <a:latin typeface="Courier New" pitchFamily="34" charset="0"/>
                 <a:ea typeface="Courier New" pitchFamily="34" charset="-122"/>
@@ -5569,7 +5577,7 @@
             <a:r>
               <a:rPr lang="en-US" sz="1400" dirty="0">
                 <a:solidFill>
-                  <a:srgbClr val="C9D3F5"/>
+                  <a:srgbClr val="1F2429"/>
                 </a:solidFill>
                 <a:latin typeface="Courier New" pitchFamily="34" charset="0"/>
                 <a:ea typeface="Courier New" pitchFamily="34" charset="-122"/>
@@ -5589,7 +5597,7 @@
             <a:r>
               <a:rPr lang="en-US" sz="1400" dirty="0">
                 <a:solidFill>
-                  <a:srgbClr val="C9D3F5"/>
+                  <a:srgbClr val="1F2429"/>
                 </a:solidFill>
                 <a:latin typeface="Courier New" pitchFamily="34" charset="0"/>
                 <a:ea typeface="Courier New" pitchFamily="34" charset="-122"/>
@@ -5771,9 +5779,13 @@
             </a:avLst>
           </a:prstGeom>
           <a:solidFill>
-            <a:srgbClr val="1E1E4C"/>
+            <a:srgbClr val="F7F8F9"/>
           </a:solidFill>
-          <a:ln/>
+          <a:ln w="9525">
+            <a:solidFill>
+              <a:srgbClr val="D0D5DD"/>
+            </a:solidFill>
+          </a:ln>
         </p:spPr>
         <p:txBody>
           <a:bodyPr/>
@@ -5810,7 +5822,7 @@
             <a:r>
               <a:rPr lang="en-US" sz="1300" dirty="0">
                 <a:solidFill>
-                  <a:srgbClr val="C9D3F5"/>
+                  <a:srgbClr val="1F2429"/>
                 </a:solidFill>
                 <a:latin typeface="Courier New" pitchFamily="34" charset="0"/>
                 <a:ea typeface="Courier New" pitchFamily="34" charset="-122"/>
@@ -5830,7 +5842,7 @@
             <a:r>
               <a:rPr lang="en-US" sz="1300" dirty="0">
                 <a:solidFill>
-                  <a:srgbClr val="C9D3F5"/>
+                  <a:srgbClr val="1F2429"/>
                 </a:solidFill>
                 <a:latin typeface="Courier New" pitchFamily="34" charset="0"/>
                 <a:ea typeface="Courier New" pitchFamily="34" charset="-122"/>
@@ -5850,7 +5862,7 @@
             <a:r>
               <a:rPr lang="en-US" sz="1300" dirty="0">
                 <a:solidFill>
-                  <a:srgbClr val="C9D3F5"/>
+                  <a:srgbClr val="1F2429"/>
                 </a:solidFill>
                 <a:latin typeface="Courier New" pitchFamily="34" charset="0"/>
                 <a:ea typeface="Courier New" pitchFamily="34" charset="-122"/>
@@ -5870,7 +5882,7 @@
             <a:r>
               <a:rPr lang="en-US" sz="1300" dirty="0">
                 <a:solidFill>
-                  <a:srgbClr val="C9D3F5"/>
+                  <a:srgbClr val="1F2429"/>
                 </a:solidFill>
                 <a:latin typeface="Courier New" pitchFamily="34" charset="0"/>
                 <a:ea typeface="Courier New" pitchFamily="34" charset="-122"/>
@@ -5890,7 +5902,7 @@
             <a:r>
               <a:rPr lang="en-US" sz="1300" dirty="0">
                 <a:solidFill>
-                  <a:srgbClr val="C9D3F5"/>
+                  <a:srgbClr val="1F2429"/>
                 </a:solidFill>
                 <a:latin typeface="Courier New" pitchFamily="34" charset="0"/>
                 <a:ea typeface="Courier New" pitchFamily="34" charset="-122"/>
@@ -5910,7 +5922,7 @@
             <a:r>
               <a:rPr lang="en-US" sz="1300" dirty="0">
                 <a:solidFill>
-                  <a:srgbClr val="C9D3F5"/>
+                  <a:srgbClr val="1F2429"/>
                 </a:solidFill>
                 <a:latin typeface="Courier New" pitchFamily="34" charset="0"/>
                 <a:ea typeface="Courier New" pitchFamily="34" charset="-122"/>
@@ -5930,7 +5942,7 @@
             <a:r>
               <a:rPr lang="en-US" sz="1300" dirty="0">
                 <a:solidFill>
-                  <a:srgbClr val="C9D3F5"/>
+                  <a:srgbClr val="1F2429"/>
                 </a:solidFill>
                 <a:latin typeface="Courier New" pitchFamily="34" charset="0"/>
                 <a:ea typeface="Courier New" pitchFamily="34" charset="-122"/>
@@ -5950,7 +5962,7 @@
             <a:r>
               <a:rPr lang="en-US" sz="1300" dirty="0">
                 <a:solidFill>
-                  <a:srgbClr val="C9D3F5"/>
+                  <a:srgbClr val="1F2429"/>
                 </a:solidFill>
                 <a:latin typeface="Courier New" pitchFamily="34" charset="0"/>
                 <a:ea typeface="Courier New" pitchFamily="34" charset="-122"/>
@@ -6194,9 +6206,13 @@
             </a:avLst>
           </a:prstGeom>
           <a:solidFill>
-            <a:srgbClr val="1E1E4C"/>
+            <a:srgbClr val="F7F8F9"/>
           </a:solidFill>
-          <a:ln/>
+          <a:ln w="9525">
+            <a:solidFill>
+              <a:srgbClr val="D0D5DD"/>
+            </a:solidFill>
+          </a:ln>
         </p:spPr>
         <p:txBody>
           <a:bodyPr/>
@@ -6233,7 +6249,7 @@
             <a:r>
               <a:rPr lang="en-US" sz="1400" dirty="0">
                 <a:solidFill>
-                  <a:srgbClr val="C9D3F5"/>
+                  <a:srgbClr val="1F2429"/>
                 </a:solidFill>
                 <a:latin typeface="Courier New" pitchFamily="34" charset="0"/>
                 <a:ea typeface="Courier New" pitchFamily="34" charset="-122"/>
@@ -6253,7 +6269,7 @@
             <a:r>
               <a:rPr lang="en-US" sz="1400" dirty="0">
                 <a:solidFill>
-                  <a:srgbClr val="C9D3F5"/>
+                  <a:srgbClr val="1F2429"/>
                 </a:solidFill>
                 <a:latin typeface="Courier New" pitchFamily="34" charset="0"/>
                 <a:ea typeface="Courier New" pitchFamily="34" charset="-122"/>
@@ -6273,7 +6289,7 @@
             <a:r>
               <a:rPr lang="en-US" sz="1400" dirty="0">
                 <a:solidFill>
-                  <a:srgbClr val="C9D3F5"/>
+                  <a:srgbClr val="1F2429"/>
                 </a:solidFill>
                 <a:latin typeface="Courier New" pitchFamily="34" charset="0"/>
                 <a:ea typeface="Courier New" pitchFamily="34" charset="-122"/>
@@ -6293,7 +6309,7 @@
             <a:r>
               <a:rPr lang="en-US" sz="1400" dirty="0">
                 <a:solidFill>
-                  <a:srgbClr val="C9D3F5"/>
+                  <a:srgbClr val="1F2429"/>
                 </a:solidFill>
                 <a:latin typeface="Courier New" pitchFamily="34" charset="0"/>
                 <a:ea typeface="Courier New" pitchFamily="34" charset="-122"/>
@@ -6313,7 +6329,7 @@
             <a:r>
               <a:rPr lang="en-US" sz="1400" dirty="0">
                 <a:solidFill>
-                  <a:srgbClr val="C9D3F5"/>
+                  <a:srgbClr val="1F2429"/>
                 </a:solidFill>
                 <a:latin typeface="Courier New" pitchFamily="34" charset="0"/>
                 <a:ea typeface="Courier New" pitchFamily="34" charset="-122"/>
@@ -6534,9 +6550,13 @@
             </a:avLst>
           </a:prstGeom>
           <a:solidFill>
-            <a:srgbClr val="1E1E4C"/>
+            <a:srgbClr val="F7F8F9"/>
           </a:solidFill>
-          <a:ln/>
+          <a:ln w="9525">
+            <a:solidFill>
+              <a:srgbClr val="D0D5DD"/>
+            </a:solidFill>
+          </a:ln>
         </p:spPr>
         <p:txBody>
           <a:bodyPr/>
@@ -6573,7 +6593,7 @@
             <a:r>
               <a:rPr lang="en-US" sz="1400" dirty="0">
                 <a:solidFill>
-                  <a:srgbClr val="C9D3F5"/>
+                  <a:srgbClr val="1F2429"/>
                 </a:solidFill>
                 <a:latin typeface="Courier New" pitchFamily="34" charset="0"/>
                 <a:ea typeface="Courier New" pitchFamily="34" charset="-122"/>
@@ -6593,7 +6613,7 @@
             <a:r>
               <a:rPr lang="en-US" sz="1400" dirty="0">
                 <a:solidFill>
-                  <a:srgbClr val="C9D3F5"/>
+                  <a:srgbClr val="1F2429"/>
                 </a:solidFill>
                 <a:latin typeface="Courier New" pitchFamily="34" charset="0"/>
                 <a:ea typeface="Courier New" pitchFamily="34" charset="-122"/>
@@ -6613,7 +6633,7 @@
             <a:r>
               <a:rPr lang="en-US" sz="1400" dirty="0">
                 <a:solidFill>
-                  <a:srgbClr val="C9D3F5"/>
+                  <a:srgbClr val="1F2429"/>
                 </a:solidFill>
                 <a:latin typeface="Courier New" pitchFamily="34" charset="0"/>
                 <a:ea typeface="Courier New" pitchFamily="34" charset="-122"/>
@@ -6642,7 +6662,7 @@
             <a:r>
               <a:rPr lang="en-US" sz="1400" dirty="0">
                 <a:solidFill>
-                  <a:srgbClr val="C9D3F5"/>
+                  <a:srgbClr val="1F2429"/>
                 </a:solidFill>
                 <a:latin typeface="Courier New" pitchFamily="34" charset="0"/>
                 <a:ea typeface="Courier New" pitchFamily="34" charset="-122"/>
@@ -6662,7 +6682,7 @@
             <a:r>
               <a:rPr lang="en-US" sz="1400" dirty="0">
                 <a:solidFill>
-                  <a:srgbClr val="C9D3F5"/>
+                  <a:srgbClr val="1F2429"/>
                 </a:solidFill>
                 <a:latin typeface="Courier New" pitchFamily="34" charset="0"/>
                 <a:ea typeface="Courier New" pitchFamily="34" charset="-122"/>
@@ -6682,7 +6702,7 @@
             <a:r>
               <a:rPr lang="en-US" sz="1400" dirty="0">
                 <a:solidFill>
-                  <a:srgbClr val="C9D3F5"/>
+                  <a:srgbClr val="1F2429"/>
                 </a:solidFill>
                 <a:latin typeface="Courier New" pitchFamily="34" charset="0"/>
                 <a:ea typeface="Courier New" pitchFamily="34" charset="-122"/>
@@ -6903,9 +6923,13 @@
             </a:avLst>
           </a:prstGeom>
           <a:solidFill>
-            <a:srgbClr val="1E1E4C"/>
+            <a:srgbClr val="F7F8F9"/>
           </a:solidFill>
-          <a:ln/>
+          <a:ln w="9525">
+            <a:solidFill>
+              <a:srgbClr val="D0D5DD"/>
+            </a:solidFill>
+          </a:ln>
         </p:spPr>
         <p:txBody>
           <a:bodyPr/>
@@ -6942,7 +6966,7 @@
             <a:r>
               <a:rPr lang="en-US" sz="1300" dirty="0">
                 <a:solidFill>
-                  <a:srgbClr val="C9D3F5"/>
+                  <a:srgbClr val="1F2429"/>
                 </a:solidFill>
                 <a:latin typeface="Courier New" pitchFamily="34" charset="0"/>
                 <a:ea typeface="Courier New" pitchFamily="34" charset="-122"/>
@@ -6962,7 +6986,7 @@
             <a:r>
               <a:rPr lang="en-US" sz="1300" dirty="0">
                 <a:solidFill>
-                  <a:srgbClr val="C9D3F5"/>
+                  <a:srgbClr val="1F2429"/>
                 </a:solidFill>
                 <a:latin typeface="Courier New" pitchFamily="34" charset="0"/>
                 <a:ea typeface="Courier New" pitchFamily="34" charset="-122"/>
@@ -6982,7 +7006,7 @@
             <a:r>
               <a:rPr lang="en-US" sz="1300" dirty="0">
                 <a:solidFill>
-                  <a:srgbClr val="C9D3F5"/>
+                  <a:srgbClr val="1F2429"/>
                 </a:solidFill>
                 <a:latin typeface="Courier New" pitchFamily="34" charset="0"/>
                 <a:ea typeface="Courier New" pitchFamily="34" charset="-122"/>
@@ -7002,7 +7026,7 @@
             <a:r>
               <a:rPr lang="en-US" sz="1300" dirty="0">
                 <a:solidFill>
-                  <a:srgbClr val="C9D3F5"/>
+                  <a:srgbClr val="1F2429"/>
                 </a:solidFill>
                 <a:latin typeface="Courier New" pitchFamily="34" charset="0"/>
                 <a:ea typeface="Courier New" pitchFamily="34" charset="-122"/>
@@ -7022,7 +7046,7 @@
             <a:r>
               <a:rPr lang="en-US" sz="1300" dirty="0">
                 <a:solidFill>
-                  <a:srgbClr val="C9D3F5"/>
+                  <a:srgbClr val="1F2429"/>
                 </a:solidFill>
                 <a:latin typeface="Courier New" pitchFamily="34" charset="0"/>
                 <a:ea typeface="Courier New" pitchFamily="34" charset="-122"/>
@@ -7042,7 +7066,7 @@
             <a:r>
               <a:rPr lang="en-US" sz="1300" dirty="0">
                 <a:solidFill>
-                  <a:srgbClr val="C9D3F5"/>
+                  <a:srgbClr val="1F2429"/>
                 </a:solidFill>
                 <a:latin typeface="Courier New" pitchFamily="34" charset="0"/>
                 <a:ea typeface="Courier New" pitchFamily="34" charset="-122"/>
@@ -7071,7 +7095,7 @@
             <a:r>
               <a:rPr lang="en-US" sz="1300" dirty="0">
                 <a:solidFill>
-                  <a:srgbClr val="C9D3F5"/>
+                  <a:srgbClr val="1F2429"/>
                 </a:solidFill>
                 <a:latin typeface="Courier New" pitchFamily="34" charset="0"/>
                 <a:ea typeface="Courier New" pitchFamily="34" charset="-122"/>
@@ -7091,7 +7115,7 @@
             <a:r>
               <a:rPr lang="en-US" sz="1300" dirty="0">
                 <a:solidFill>
-                  <a:srgbClr val="C9D3F5"/>
+                  <a:srgbClr val="1F2429"/>
                 </a:solidFill>
                 <a:latin typeface="Courier New" pitchFamily="34" charset="0"/>
                 <a:ea typeface="Courier New" pitchFamily="34" charset="-122"/>
@@ -7111,7 +7135,7 @@
             <a:r>
               <a:rPr lang="en-US" sz="1300" dirty="0">
                 <a:solidFill>
-                  <a:srgbClr val="C9D3F5"/>
+                  <a:srgbClr val="1F2429"/>
                 </a:solidFill>
                 <a:latin typeface="Courier New" pitchFamily="34" charset="0"/>
                 <a:ea typeface="Courier New" pitchFamily="34" charset="-122"/>
@@ -7712,9 +7736,13 @@
             </a:avLst>
           </a:prstGeom>
           <a:solidFill>
-            <a:srgbClr val="1E1E4C"/>
+            <a:srgbClr val="F7F8F9"/>
           </a:solidFill>
-          <a:ln/>
+          <a:ln w="9525">
+            <a:solidFill>
+              <a:srgbClr val="D0D5DD"/>
+            </a:solidFill>
+          </a:ln>
         </p:spPr>
         <p:txBody>
           <a:bodyPr/>
@@ -7751,7 +7779,7 @@
             <a:r>
               <a:rPr lang="en-US" sz="1400" dirty="0">
                 <a:solidFill>
-                  <a:srgbClr val="C9D3F5"/>
+                  <a:srgbClr val="1F2429"/>
                 </a:solidFill>
                 <a:latin typeface="Courier New" pitchFamily="34" charset="0"/>
                 <a:ea typeface="Courier New" pitchFamily="34" charset="-122"/>
@@ -7771,7 +7799,7 @@
             <a:r>
               <a:rPr lang="en-US" sz="1400" dirty="0">
                 <a:solidFill>
-                  <a:srgbClr val="C9D3F5"/>
+                  <a:srgbClr val="1F2429"/>
                 </a:solidFill>
                 <a:latin typeface="Courier New" pitchFamily="34" charset="0"/>
                 <a:ea typeface="Courier New" pitchFamily="34" charset="-122"/>
@@ -7791,7 +7819,7 @@
             <a:r>
               <a:rPr lang="en-US" sz="1400" dirty="0">
                 <a:solidFill>
-                  <a:srgbClr val="C9D3F5"/>
+                  <a:srgbClr val="1F2429"/>
                 </a:solidFill>
                 <a:latin typeface="Courier New" pitchFamily="34" charset="0"/>
                 <a:ea typeface="Courier New" pitchFamily="34" charset="-122"/>
@@ -7811,7 +7839,7 @@
             <a:r>
               <a:rPr lang="en-US" sz="1400" dirty="0">
                 <a:solidFill>
-                  <a:srgbClr val="C9D3F5"/>
+                  <a:srgbClr val="1F2429"/>
                 </a:solidFill>
                 <a:latin typeface="Courier New" pitchFamily="34" charset="0"/>
                 <a:ea typeface="Courier New" pitchFamily="34" charset="-122"/>
@@ -7831,7 +7859,7 @@
             <a:r>
               <a:rPr lang="en-US" sz="1400" dirty="0">
                 <a:solidFill>
-                  <a:srgbClr val="C9D3F5"/>
+                  <a:srgbClr val="1F2429"/>
                 </a:solidFill>
                 <a:latin typeface="Courier New" pitchFamily="34" charset="0"/>
                 <a:ea typeface="Courier New" pitchFamily="34" charset="-122"/>
@@ -7851,7 +7879,7 @@
             <a:r>
               <a:rPr lang="en-US" sz="1400" dirty="0">
                 <a:solidFill>
-                  <a:srgbClr val="C9D3F5"/>
+                  <a:srgbClr val="1F2429"/>
                 </a:solidFill>
                 <a:latin typeface="Courier New" pitchFamily="34" charset="0"/>
                 <a:ea typeface="Courier New" pitchFamily="34" charset="-122"/>
@@ -8594,9 +8622,13 @@
             </a:avLst>
           </a:prstGeom>
           <a:solidFill>
-            <a:srgbClr val="1E1E4C"/>
+            <a:srgbClr val="F7F8F9"/>
           </a:solidFill>
-          <a:ln/>
+          <a:ln w="9525">
+            <a:solidFill>
+              <a:srgbClr val="D0D5DD"/>
+            </a:solidFill>
+          </a:ln>
         </p:spPr>
         <p:txBody>
           <a:bodyPr/>
@@ -8633,7 +8665,7 @@
             <a:r>
               <a:rPr lang="en-US" sz="1400" dirty="0">
                 <a:solidFill>
-                  <a:srgbClr val="C9D3F5"/>
+                  <a:srgbClr val="1F2429"/>
                 </a:solidFill>
                 <a:latin typeface="Courier New" pitchFamily="34" charset="0"/>
                 <a:ea typeface="Courier New" pitchFamily="34" charset="-122"/>
@@ -8653,7 +8685,7 @@
             <a:r>
               <a:rPr lang="en-US" sz="1400" dirty="0">
                 <a:solidFill>
-                  <a:srgbClr val="C9D3F5"/>
+                  <a:srgbClr val="1F2429"/>
                 </a:solidFill>
                 <a:latin typeface="Courier New" pitchFamily="34" charset="0"/>
                 <a:ea typeface="Courier New" pitchFamily="34" charset="-122"/>
@@ -8673,7 +8705,7 @@
             <a:r>
               <a:rPr lang="en-US" sz="1400" dirty="0">
                 <a:solidFill>
-                  <a:srgbClr val="C9D3F5"/>
+                  <a:srgbClr val="1F2429"/>
                 </a:solidFill>
                 <a:latin typeface="Courier New" pitchFamily="34" charset="0"/>
                 <a:ea typeface="Courier New" pitchFamily="34" charset="-122"/>
@@ -8693,7 +8725,7 @@
             <a:r>
               <a:rPr lang="en-US" sz="1400" dirty="0">
                 <a:solidFill>
-                  <a:srgbClr val="C9D3F5"/>
+                  <a:srgbClr val="1F2429"/>
                 </a:solidFill>
                 <a:latin typeface="Courier New" pitchFamily="34" charset="0"/>
                 <a:ea typeface="Courier New" pitchFamily="34" charset="-122"/>
@@ -8713,7 +8745,7 @@
             <a:r>
               <a:rPr lang="en-US" sz="1400" dirty="0">
                 <a:solidFill>
-                  <a:srgbClr val="C9D3F5"/>
+                  <a:srgbClr val="1F2429"/>
                 </a:solidFill>
                 <a:latin typeface="Courier New" pitchFamily="34" charset="0"/>
                 <a:ea typeface="Courier New" pitchFamily="34" charset="-122"/>
@@ -8733,7 +8765,7 @@
             <a:r>
               <a:rPr lang="en-US" sz="1400" dirty="0">
                 <a:solidFill>
-                  <a:srgbClr val="C9D3F5"/>
+                  <a:srgbClr val="1F2429"/>
                 </a:solidFill>
                 <a:latin typeface="Courier New" pitchFamily="34" charset="0"/>
                 <a:ea typeface="Courier New" pitchFamily="34" charset="-122"/>
@@ -8753,7 +8785,7 @@
             <a:r>
               <a:rPr lang="en-US" sz="1400" dirty="0">
                 <a:solidFill>
-                  <a:srgbClr val="C9D3F5"/>
+                  <a:srgbClr val="1F2429"/>
                 </a:solidFill>
                 <a:latin typeface="Courier New" pitchFamily="34" charset="0"/>
                 <a:ea typeface="Courier New" pitchFamily="34" charset="-122"/>
@@ -8773,7 +8805,7 @@
             <a:r>
               <a:rPr lang="en-US" sz="1400" dirty="0">
                 <a:solidFill>
-                  <a:srgbClr val="C9D3F5"/>
+                  <a:srgbClr val="1F2429"/>
                 </a:solidFill>
                 <a:latin typeface="Courier New" pitchFamily="34" charset="0"/>
                 <a:ea typeface="Courier New" pitchFamily="34" charset="-122"/>
@@ -8793,7 +8825,7 @@
             <a:r>
               <a:rPr lang="en-US" sz="1400" dirty="0">
                 <a:solidFill>
-                  <a:srgbClr val="C9D3F5"/>
+                  <a:srgbClr val="1F2429"/>
                 </a:solidFill>
                 <a:latin typeface="Courier New" pitchFamily="34" charset="0"/>
                 <a:ea typeface="Courier New" pitchFamily="34" charset="-122"/>
@@ -8813,7 +8845,7 @@
             <a:r>
               <a:rPr lang="en-US" sz="1400" dirty="0">
                 <a:solidFill>
-                  <a:srgbClr val="C9D3F5"/>
+                  <a:srgbClr val="1F2429"/>
                 </a:solidFill>
                 <a:latin typeface="Courier New" pitchFamily="34" charset="0"/>
                 <a:ea typeface="Courier New" pitchFamily="34" charset="-122"/>
@@ -8833,7 +8865,7 @@
             <a:r>
               <a:rPr lang="en-US" sz="1400" dirty="0">
                 <a:solidFill>
-                  <a:srgbClr val="C9D3F5"/>
+                  <a:srgbClr val="1F2429"/>
                 </a:solidFill>
                 <a:latin typeface="Courier New" pitchFamily="34" charset="0"/>
                 <a:ea typeface="Courier New" pitchFamily="34" charset="-122"/>
@@ -9015,9 +9047,13 @@
             </a:avLst>
           </a:prstGeom>
           <a:solidFill>
-            <a:srgbClr val="1E1E4C"/>
+            <a:srgbClr val="F7F8F9"/>
           </a:solidFill>
-          <a:ln/>
+          <a:ln w="9525">
+            <a:solidFill>
+              <a:srgbClr val="D0D5DD"/>
+            </a:solidFill>
+          </a:ln>
         </p:spPr>
         <p:txBody>
           <a:bodyPr/>
@@ -9054,7 +9090,7 @@
             <a:r>
               <a:rPr lang="en-US" sz="1300" dirty="0">
                 <a:solidFill>
-                  <a:srgbClr val="C9D3F5"/>
+                  <a:srgbClr val="1F2429"/>
                 </a:solidFill>
                 <a:latin typeface="Courier New" pitchFamily="34" charset="0"/>
                 <a:ea typeface="Courier New" pitchFamily="34" charset="-122"/>
@@ -9074,7 +9110,7 @@
             <a:r>
               <a:rPr lang="en-US" sz="1300" dirty="0">
                 <a:solidFill>
-                  <a:srgbClr val="C9D3F5"/>
+                  <a:srgbClr val="1F2429"/>
                 </a:solidFill>
                 <a:latin typeface="Courier New" pitchFamily="34" charset="0"/>
                 <a:ea typeface="Courier New" pitchFamily="34" charset="-122"/>
@@ -9094,7 +9130,7 @@
             <a:r>
               <a:rPr lang="en-US" sz="1300" dirty="0">
                 <a:solidFill>
-                  <a:srgbClr val="C9D3F5"/>
+                  <a:srgbClr val="1F2429"/>
                 </a:solidFill>
                 <a:latin typeface="Courier New" pitchFamily="34" charset="0"/>
                 <a:ea typeface="Courier New" pitchFamily="34" charset="-122"/>
@@ -9114,7 +9150,7 @@
             <a:r>
               <a:rPr lang="en-US" sz="1300" dirty="0">
                 <a:solidFill>
-                  <a:srgbClr val="C9D3F5"/>
+                  <a:srgbClr val="1F2429"/>
                 </a:solidFill>
                 <a:latin typeface="Courier New" pitchFamily="34" charset="0"/>
                 <a:ea typeface="Courier New" pitchFamily="34" charset="-122"/>
@@ -9134,7 +9170,7 @@
             <a:r>
               <a:rPr lang="en-US" sz="1300" dirty="0">
                 <a:solidFill>
-                  <a:srgbClr val="C9D3F5"/>
+                  <a:srgbClr val="1F2429"/>
                 </a:solidFill>
                 <a:latin typeface="Courier New" pitchFamily="34" charset="0"/>
                 <a:ea typeface="Courier New" pitchFamily="34" charset="-122"/>
@@ -9154,7 +9190,7 @@
             <a:r>
               <a:rPr lang="en-US" sz="1300" dirty="0">
                 <a:solidFill>
-                  <a:srgbClr val="C9D3F5"/>
+                  <a:srgbClr val="1F2429"/>
                 </a:solidFill>
                 <a:latin typeface="Courier New" pitchFamily="34" charset="0"/>
                 <a:ea typeface="Courier New" pitchFamily="34" charset="-122"/>
@@ -9174,7 +9210,7 @@
             <a:r>
               <a:rPr lang="en-US" sz="1300" dirty="0">
                 <a:solidFill>
-                  <a:srgbClr val="C9D3F5"/>
+                  <a:srgbClr val="1F2429"/>
                 </a:solidFill>
                 <a:latin typeface="Courier New" pitchFamily="34" charset="0"/>
                 <a:ea typeface="Courier New" pitchFamily="34" charset="-122"/>
@@ -9194,7 +9230,7 @@
             <a:r>
               <a:rPr lang="en-US" sz="1300" dirty="0">
                 <a:solidFill>
-                  <a:srgbClr val="C9D3F5"/>
+                  <a:srgbClr val="1F2429"/>
                 </a:solidFill>
                 <a:latin typeface="Courier New" pitchFamily="34" charset="0"/>
                 <a:ea typeface="Courier New" pitchFamily="34" charset="-122"/>
@@ -9214,7 +9250,7 @@
             <a:r>
               <a:rPr lang="en-US" sz="1300" dirty="0">
                 <a:solidFill>
-                  <a:srgbClr val="C9D3F5"/>
+                  <a:srgbClr val="1F2429"/>
                 </a:solidFill>
                 <a:latin typeface="Courier New" pitchFamily="34" charset="0"/>
                 <a:ea typeface="Courier New" pitchFamily="34" charset="-122"/>
@@ -9234,7 +9270,7 @@
             <a:r>
               <a:rPr lang="en-US" sz="1300" dirty="0">
                 <a:solidFill>
-                  <a:srgbClr val="C9D3F5"/>
+                  <a:srgbClr val="1F2429"/>
                 </a:solidFill>
                 <a:latin typeface="Courier New" pitchFamily="34" charset="0"/>
                 <a:ea typeface="Courier New" pitchFamily="34" charset="-122"/>
@@ -9254,7 +9290,7 @@
             <a:r>
               <a:rPr lang="en-US" sz="1300" dirty="0">
                 <a:solidFill>
-                  <a:srgbClr val="C9D3F5"/>
+                  <a:srgbClr val="1F2429"/>
                 </a:solidFill>
                 <a:latin typeface="Courier New" pitchFamily="34" charset="0"/>
                 <a:ea typeface="Courier New" pitchFamily="34" charset="-122"/>
@@ -9490,7 +9526,7 @@
         <p:spPr>
           <a:xfrm>
             <a:off x="640080" y="1965960"/>
-            <a:ext cx="10911535" cy="1554480"/>
+            <a:ext cx="10911535" cy="3657600"/>
           </a:xfrm>
           <a:prstGeom prst="roundRect">
             <a:avLst>
@@ -9521,7 +9557,7 @@
         <p:spPr>
           <a:xfrm>
             <a:off x="868680" y="2103120"/>
-            <a:ext cx="10454335" cy="274320"/>
+            <a:ext cx="10454335" cy="400000"/>
           </a:xfrm>
           <a:prstGeom prst="rect">
             <a:avLst/>
@@ -9537,7 +9573,7 @@
               <a:buNone/>
             </a:pPr>
             <a:r>
-              <a:rPr lang="en-US" sz="1000" b="1" spc="200" kern="0" dirty="0">
+              <a:rPr lang="en-US" sz="1800" b="1" spc="200" kern="0" dirty="0">
                 <a:solidFill>
                   <a:srgbClr val="1F7A46"/>
                 </a:solidFill>
@@ -9547,7 +9583,7 @@
               </a:rPr>
               <a:t>TIP</a:t>
             </a:r>
-            <a:endParaRPr lang="en-US" sz="1000" dirty="0"/>
+            <a:endParaRPr lang="en-US" sz="1800" dirty="0"/>
           </a:p>
         </p:txBody>
       </p:sp>
@@ -9559,24 +9595,24 @@
         </p:nvSpPr>
         <p:spPr>
           <a:xfrm>
-            <a:off x="868680" y="2404872"/>
-            <a:ext cx="10454335" cy="960120"/>
-          </a:xfrm>
-          <a:prstGeom prst="rect">
-            <a:avLst/>
-          </a:prstGeom>
-          <a:noFill/>
-          <a:ln/>
-        </p:spPr>
-        <p:txBody>
-          <a:bodyPr wrap="square" lIns="0" tIns="0" rIns="0" bIns="0" rtlCol="0" anchor="t"/>
+            <a:off x="868680" y="2795960"/>
+            <a:ext cx="10454335" cy="2800000"/>
+          </a:xfrm>
+          <a:prstGeom prst="rect">
+            <a:avLst/>
+          </a:prstGeom>
+          <a:noFill/>
+          <a:ln/>
+        </p:spPr>
+        <p:txBody>
+          <a:bodyPr wrap="square" lIns="0" tIns="0" rIns="0" bIns="0" rtlCol="0" anchor="ctr"/>
           <a:lstStyle/>
           <a:p>
             <a:pPr indent="0" marL="0">
               <a:buNone/>
             </a:pPr>
             <a:r>
-              <a:rPr lang="en-US" sz="1250" dirty="0">
+              <a:rPr lang="en-US" sz="2800" dirty="0">
                 <a:solidFill>
                   <a:srgbClr val="26262F"/>
                 </a:solidFill>
@@ -9586,7 +9622,7 @@
               </a:rPr>
               <a:t>They do the same job -- async/await is just easier to read, especially with multiple sequential steps and conditional logic. You will see both styles in real codebases, but prefer async/await for new code you write.</a:t>
             </a:r>
-            <a:endParaRPr lang="en-US" sz="1250" dirty="0"/>
+            <a:endParaRPr lang="en-US" sz="2800" dirty="0"/>
           </a:p>
         </p:txBody>
       </p:sp>
@@ -10219,9 +10255,13 @@
             </a:avLst>
           </a:prstGeom>
           <a:solidFill>
-            <a:srgbClr val="1E1E4C"/>
+            <a:srgbClr val="F7F8F9"/>
           </a:solidFill>
-          <a:ln/>
+          <a:ln w="9525">
+            <a:solidFill>
+              <a:srgbClr val="D0D5DD"/>
+            </a:solidFill>
+          </a:ln>
         </p:spPr>
         <p:txBody>
           <a:bodyPr/>
@@ -10258,7 +10298,7 @@
             <a:r>
               <a:rPr lang="en-US" sz="1400" dirty="0">
                 <a:solidFill>
-                  <a:srgbClr val="C9D3F5"/>
+                  <a:srgbClr val="1F2429"/>
                 </a:solidFill>
                 <a:latin typeface="Courier New" pitchFamily="34" charset="0"/>
                 <a:ea typeface="Courier New" pitchFamily="34" charset="-122"/>
@@ -10278,7 +10318,7 @@
             <a:r>
               <a:rPr lang="en-US" sz="1400" dirty="0">
                 <a:solidFill>
-                  <a:srgbClr val="C9D3F5"/>
+                  <a:srgbClr val="1F2429"/>
                 </a:solidFill>
                 <a:latin typeface="Courier New" pitchFamily="34" charset="0"/>
                 <a:ea typeface="Courier New" pitchFamily="34" charset="-122"/>
@@ -10298,7 +10338,7 @@
             <a:r>
               <a:rPr lang="en-US" sz="1400" dirty="0">
                 <a:solidFill>
-                  <a:srgbClr val="C9D3F5"/>
+                  <a:srgbClr val="1F2429"/>
                 </a:solidFill>
                 <a:latin typeface="Courier New" pitchFamily="34" charset="0"/>
                 <a:ea typeface="Courier New" pitchFamily="34" charset="-122"/>
@@ -10318,7 +10358,7 @@
             <a:r>
               <a:rPr lang="en-US" sz="1400" dirty="0">
                 <a:solidFill>
-                  <a:srgbClr val="C9D3F5"/>
+                  <a:srgbClr val="1F2429"/>
                 </a:solidFill>
                 <a:latin typeface="Courier New" pitchFamily="34" charset="0"/>
                 <a:ea typeface="Courier New" pitchFamily="34" charset="-122"/>
@@ -10338,7 +10378,7 @@
             <a:r>
               <a:rPr lang="en-US" sz="1400" dirty="0">
                 <a:solidFill>
-                  <a:srgbClr val="C9D3F5"/>
+                  <a:srgbClr val="1F2429"/>
                 </a:solidFill>
                 <a:latin typeface="Courier New" pitchFamily="34" charset="0"/>
                 <a:ea typeface="Courier New" pitchFamily="34" charset="-122"/>
@@ -10559,9 +10599,13 @@
             </a:avLst>
           </a:prstGeom>
           <a:solidFill>
-            <a:srgbClr val="1E1E4C"/>
+            <a:srgbClr val="F7F8F9"/>
           </a:solidFill>
-          <a:ln/>
+          <a:ln w="9525">
+            <a:solidFill>
+              <a:srgbClr val="D0D5DD"/>
+            </a:solidFill>
+          </a:ln>
         </p:spPr>
         <p:txBody>
           <a:bodyPr/>
@@ -10598,7 +10642,7 @@
             <a:r>
               <a:rPr lang="en-US" sz="1400" dirty="0">
                 <a:solidFill>
-                  <a:srgbClr val="C9D3F5"/>
+                  <a:srgbClr val="1F2429"/>
                 </a:solidFill>
                 <a:latin typeface="Courier New" pitchFamily="34" charset="0"/>
                 <a:ea typeface="Courier New" pitchFamily="34" charset="-122"/>
@@ -10618,7 +10662,7 @@
             <a:r>
               <a:rPr lang="en-US" sz="1400" dirty="0">
                 <a:solidFill>
-                  <a:srgbClr val="C9D3F5"/>
+                  <a:srgbClr val="1F2429"/>
                 </a:solidFill>
                 <a:latin typeface="Courier New" pitchFamily="34" charset="0"/>
                 <a:ea typeface="Courier New" pitchFamily="34" charset="-122"/>
@@ -10638,7 +10682,7 @@
             <a:r>
               <a:rPr lang="en-US" sz="1400" dirty="0">
                 <a:solidFill>
-                  <a:srgbClr val="C9D3F5"/>
+                  <a:srgbClr val="1F2429"/>
                 </a:solidFill>
                 <a:latin typeface="Courier New" pitchFamily="34" charset="0"/>
                 <a:ea typeface="Courier New" pitchFamily="34" charset="-122"/>
@@ -10658,7 +10702,7 @@
             <a:r>
               <a:rPr lang="en-US" sz="1400" dirty="0">
                 <a:solidFill>
-                  <a:srgbClr val="C9D3F5"/>
+                  <a:srgbClr val="1F2429"/>
                 </a:solidFill>
                 <a:latin typeface="Courier New" pitchFamily="34" charset="0"/>
                 <a:ea typeface="Courier New" pitchFamily="34" charset="-122"/>
@@ -10678,7 +10722,7 @@
             <a:r>
               <a:rPr lang="en-US" sz="1400" dirty="0">
                 <a:solidFill>
-                  <a:srgbClr val="C9D3F5"/>
+                  <a:srgbClr val="1F2429"/>
                 </a:solidFill>
                 <a:latin typeface="Courier New" pitchFamily="34" charset="0"/>
                 <a:ea typeface="Courier New" pitchFamily="34" charset="-122"/>
@@ -10698,7 +10742,7 @@
             <a:r>
               <a:rPr lang="en-US" sz="1400" dirty="0">
                 <a:solidFill>
-                  <a:srgbClr val="C9D3F5"/>
+                  <a:srgbClr val="1F2429"/>
                 </a:solidFill>
                 <a:latin typeface="Courier New" pitchFamily="34" charset="0"/>
                 <a:ea typeface="Courier New" pitchFamily="34" charset="-122"/>
@@ -10718,7 +10762,7 @@
             <a:r>
               <a:rPr lang="en-US" sz="1400" dirty="0">
                 <a:solidFill>
-                  <a:srgbClr val="C9D3F5"/>
+                  <a:srgbClr val="1F2429"/>
                 </a:solidFill>
                 <a:latin typeface="Courier New" pitchFamily="34" charset="0"/>
                 <a:ea typeface="Courier New" pitchFamily="34" charset="-122"/>
@@ -10738,7 +10782,7 @@
             <a:r>
               <a:rPr lang="en-US" sz="1400" dirty="0">
                 <a:solidFill>
-                  <a:srgbClr val="C9D3F5"/>
+                  <a:srgbClr val="1F2429"/>
                 </a:solidFill>
                 <a:latin typeface="Courier New" pitchFamily="34" charset="0"/>
                 <a:ea typeface="Courier New" pitchFamily="34" charset="-122"/>
@@ -10920,9 +10964,13 @@
             </a:avLst>
           </a:prstGeom>
           <a:solidFill>
-            <a:srgbClr val="1E1E4C"/>
+            <a:srgbClr val="F7F8F9"/>
           </a:solidFill>
-          <a:ln/>
+          <a:ln w="9525">
+            <a:solidFill>
+              <a:srgbClr val="D0D5DD"/>
+            </a:solidFill>
+          </a:ln>
         </p:spPr>
         <p:txBody>
           <a:bodyPr/>
@@ -10959,7 +11007,7 @@
             <a:r>
               <a:rPr lang="en-US" sz="1300" dirty="0">
                 <a:solidFill>
-                  <a:srgbClr val="C9D3F5"/>
+                  <a:srgbClr val="1F2429"/>
                 </a:solidFill>
                 <a:latin typeface="Courier New" pitchFamily="34" charset="0"/>
                 <a:ea typeface="Courier New" pitchFamily="34" charset="-122"/>
@@ -10979,7 +11027,7 @@
             <a:r>
               <a:rPr lang="en-US" sz="1300" dirty="0">
                 <a:solidFill>
-                  <a:srgbClr val="C9D3F5"/>
+                  <a:srgbClr val="1F2429"/>
                 </a:solidFill>
                 <a:latin typeface="Courier New" pitchFamily="34" charset="0"/>
                 <a:ea typeface="Courier New" pitchFamily="34" charset="-122"/>
@@ -10999,7 +11047,7 @@
             <a:r>
               <a:rPr lang="en-US" sz="1300" dirty="0">
                 <a:solidFill>
-                  <a:srgbClr val="C9D3F5"/>
+                  <a:srgbClr val="1F2429"/>
                 </a:solidFill>
                 <a:latin typeface="Courier New" pitchFamily="34" charset="0"/>
                 <a:ea typeface="Courier New" pitchFamily="34" charset="-122"/>
@@ -11019,7 +11067,7 @@
             <a:r>
               <a:rPr lang="en-US" sz="1300" dirty="0">
                 <a:solidFill>
-                  <a:srgbClr val="C9D3F5"/>
+                  <a:srgbClr val="1F2429"/>
                 </a:solidFill>
                 <a:latin typeface="Courier New" pitchFamily="34" charset="0"/>
                 <a:ea typeface="Courier New" pitchFamily="34" charset="-122"/>
@@ -11048,7 +11096,7 @@
             <a:r>
               <a:rPr lang="en-US" sz="1300" dirty="0">
                 <a:solidFill>
-                  <a:srgbClr val="C9D3F5"/>
+                  <a:srgbClr val="1F2429"/>
                 </a:solidFill>
                 <a:latin typeface="Courier New" pitchFamily="34" charset="0"/>
                 <a:ea typeface="Courier New" pitchFamily="34" charset="-122"/>
@@ -11068,7 +11116,7 @@
             <a:r>
               <a:rPr lang="en-US" sz="1300" dirty="0">
                 <a:solidFill>
-                  <a:srgbClr val="C9D3F5"/>
+                  <a:srgbClr val="1F2429"/>
                 </a:solidFill>
                 <a:latin typeface="Courier New" pitchFamily="34" charset="0"/>
                 <a:ea typeface="Courier New" pitchFamily="34" charset="-122"/>
@@ -11312,9 +11360,13 @@
             </a:avLst>
           </a:prstGeom>
           <a:solidFill>
-            <a:srgbClr val="1E1E4C"/>
+            <a:srgbClr val="F7F8F9"/>
           </a:solidFill>
-          <a:ln/>
+          <a:ln w="9525">
+            <a:solidFill>
+              <a:srgbClr val="D0D5DD"/>
+            </a:solidFill>
+          </a:ln>
         </p:spPr>
         <p:txBody>
           <a:bodyPr/>
@@ -11351,7 +11403,7 @@
             <a:r>
               <a:rPr lang="en-US" sz="1400" dirty="0">
                 <a:solidFill>
-                  <a:srgbClr val="C9D3F5"/>
+                  <a:srgbClr val="1F2429"/>
                 </a:solidFill>
                 <a:latin typeface="Courier New" pitchFamily="34" charset="0"/>
                 <a:ea typeface="Courier New" pitchFamily="34" charset="-122"/>
@@ -11371,7 +11423,7 @@
             <a:r>
               <a:rPr lang="en-US" sz="1400" dirty="0">
                 <a:solidFill>
-                  <a:srgbClr val="C9D3F5"/>
+                  <a:srgbClr val="1F2429"/>
                 </a:solidFill>
                 <a:latin typeface="Courier New" pitchFamily="34" charset="0"/>
                 <a:ea typeface="Courier New" pitchFamily="34" charset="-122"/>
@@ -11391,7 +11443,7 @@
             <a:r>
               <a:rPr lang="en-US" sz="1400" dirty="0">
                 <a:solidFill>
-                  <a:srgbClr val="C9D3F5"/>
+                  <a:srgbClr val="1F2429"/>
                 </a:solidFill>
                 <a:latin typeface="Courier New" pitchFamily="34" charset="0"/>
                 <a:ea typeface="Courier New" pitchFamily="34" charset="-122"/>
@@ -11411,7 +11463,7 @@
             <a:r>
               <a:rPr lang="en-US" sz="1400" dirty="0">
                 <a:solidFill>
-                  <a:srgbClr val="C9D3F5"/>
+                  <a:srgbClr val="1F2429"/>
                 </a:solidFill>
                 <a:latin typeface="Courier New" pitchFamily="34" charset="0"/>
                 <a:ea typeface="Courier New" pitchFamily="34" charset="-122"/>
@@ -11431,7 +11483,7 @@
             <a:r>
               <a:rPr lang="en-US" sz="1400" dirty="0">
                 <a:solidFill>
-                  <a:srgbClr val="C9D3F5"/>
+                  <a:srgbClr val="1F2429"/>
                 </a:solidFill>
                 <a:latin typeface="Courier New" pitchFamily="34" charset="0"/>
                 <a:ea typeface="Courier New" pitchFamily="34" charset="-122"/>
@@ -11451,7 +11503,7 @@
             <a:r>
               <a:rPr lang="en-US" sz="1400" dirty="0">
                 <a:solidFill>
-                  <a:srgbClr val="C9D3F5"/>
+                  <a:srgbClr val="1F2429"/>
                 </a:solidFill>
                 <a:latin typeface="Courier New" pitchFamily="34" charset="0"/>
                 <a:ea typeface="Courier New" pitchFamily="34" charset="-122"/>
@@ -11471,7 +11523,7 @@
             <a:r>
               <a:rPr lang="en-US" sz="1400" dirty="0">
                 <a:solidFill>
-                  <a:srgbClr val="C9D3F5"/>
+                  <a:srgbClr val="1F2429"/>
                 </a:solidFill>
                 <a:latin typeface="Courier New" pitchFamily="34" charset="0"/>
                 <a:ea typeface="Courier New" pitchFamily="34" charset="-122"/>
@@ -11491,7 +11543,7 @@
             <a:r>
               <a:rPr lang="en-US" sz="1400" dirty="0">
                 <a:solidFill>
-                  <a:srgbClr val="C9D3F5"/>
+                  <a:srgbClr val="1F2429"/>
                 </a:solidFill>
                 <a:latin typeface="Courier New" pitchFamily="34" charset="0"/>
                 <a:ea typeface="Courier New" pitchFamily="34" charset="-122"/>
@@ -11511,7 +11563,7 @@
             <a:r>
               <a:rPr lang="en-US" sz="1400" dirty="0">
                 <a:solidFill>
-                  <a:srgbClr val="C9D3F5"/>
+                  <a:srgbClr val="1F2429"/>
                 </a:solidFill>
                 <a:latin typeface="Courier New" pitchFamily="34" charset="0"/>
                 <a:ea typeface="Courier New" pitchFamily="34" charset="-122"/>
@@ -12506,9 +12558,13 @@
             </a:avLst>
           </a:prstGeom>
           <a:solidFill>
-            <a:srgbClr val="1E1E4C"/>
+            <a:srgbClr val="F7F8F9"/>
           </a:solidFill>
-          <a:ln/>
+          <a:ln w="9525">
+            <a:solidFill>
+              <a:srgbClr val="D0D5DD"/>
+            </a:solidFill>
+          </a:ln>
         </p:spPr>
         <p:txBody>
           <a:bodyPr/>
@@ -12545,7 +12601,7 @@
             <a:r>
               <a:rPr lang="en-US" sz="1366" dirty="0">
                 <a:solidFill>
-                  <a:srgbClr val="C9D3F5"/>
+                  <a:srgbClr val="1F2429"/>
                 </a:solidFill>
                 <a:latin typeface="Courier New" pitchFamily="34" charset="0"/>
                 <a:ea typeface="Courier New" pitchFamily="34" charset="-122"/>
@@ -12565,7 +12621,7 @@
             <a:r>
               <a:rPr lang="en-US" sz="1366" dirty="0">
                 <a:solidFill>
-                  <a:srgbClr val="C9D3F5"/>
+                  <a:srgbClr val="1F2429"/>
                 </a:solidFill>
                 <a:latin typeface="Courier New" pitchFamily="34" charset="0"/>
                 <a:ea typeface="Courier New" pitchFamily="34" charset="-122"/>
@@ -12585,7 +12641,7 @@
             <a:r>
               <a:rPr lang="en-US" sz="1366" dirty="0">
                 <a:solidFill>
-                  <a:srgbClr val="C9D3F5"/>
+                  <a:srgbClr val="1F2429"/>
                 </a:solidFill>
                 <a:latin typeface="Courier New" pitchFamily="34" charset="0"/>
                 <a:ea typeface="Courier New" pitchFamily="34" charset="-122"/>
@@ -12605,7 +12661,7 @@
             <a:r>
               <a:rPr lang="en-US" sz="1366" dirty="0">
                 <a:solidFill>
-                  <a:srgbClr val="C9D3F5"/>
+                  <a:srgbClr val="1F2429"/>
                 </a:solidFill>
                 <a:latin typeface="Courier New" pitchFamily="34" charset="0"/>
                 <a:ea typeface="Courier New" pitchFamily="34" charset="-122"/>
@@ -12625,7 +12681,7 @@
             <a:r>
               <a:rPr lang="en-US" sz="1366" dirty="0">
                 <a:solidFill>
-                  <a:srgbClr val="C9D3F5"/>
+                  <a:srgbClr val="1F2429"/>
                 </a:solidFill>
                 <a:latin typeface="Courier New" pitchFamily="34" charset="0"/>
                 <a:ea typeface="Courier New" pitchFamily="34" charset="-122"/>
@@ -12645,7 +12701,7 @@
             <a:r>
               <a:rPr lang="en-US" sz="1366" dirty="0">
                 <a:solidFill>
-                  <a:srgbClr val="C9D3F5"/>
+                  <a:srgbClr val="1F2429"/>
                 </a:solidFill>
                 <a:latin typeface="Courier New" pitchFamily="34" charset="0"/>
                 <a:ea typeface="Courier New" pitchFamily="34" charset="-122"/>
@@ -12665,7 +12721,7 @@
             <a:r>
               <a:rPr lang="en-US" sz="1366" dirty="0">
                 <a:solidFill>
-                  <a:srgbClr val="C9D3F5"/>
+                  <a:srgbClr val="1F2429"/>
                 </a:solidFill>
                 <a:latin typeface="Courier New" pitchFamily="34" charset="0"/>
                 <a:ea typeface="Courier New" pitchFamily="34" charset="-122"/>
@@ -12685,7 +12741,7 @@
             <a:r>
               <a:rPr lang="en-US" sz="1366" dirty="0">
                 <a:solidFill>
-                  <a:srgbClr val="C9D3F5"/>
+                  <a:srgbClr val="1F2429"/>
                 </a:solidFill>
                 <a:latin typeface="Courier New" pitchFamily="34" charset="0"/>
                 <a:ea typeface="Courier New" pitchFamily="34" charset="-122"/>
@@ -12705,7 +12761,7 @@
             <a:r>
               <a:rPr lang="en-US" sz="1366" dirty="0">
                 <a:solidFill>
-                  <a:srgbClr val="C9D3F5"/>
+                  <a:srgbClr val="1F2429"/>
                 </a:solidFill>
                 <a:latin typeface="Courier New" pitchFamily="34" charset="0"/>
                 <a:ea typeface="Courier New" pitchFamily="34" charset="-122"/>
@@ -12725,7 +12781,7 @@
             <a:r>
               <a:rPr lang="en-US" sz="1366" dirty="0">
                 <a:solidFill>
-                  <a:srgbClr val="C9D3F5"/>
+                  <a:srgbClr val="1F2429"/>
                 </a:solidFill>
                 <a:latin typeface="Courier New" pitchFamily="34" charset="0"/>
                 <a:ea typeface="Courier New" pitchFamily="34" charset="-122"/>
@@ -12745,7 +12801,7 @@
             <a:r>
               <a:rPr lang="en-US" sz="1366" dirty="0">
                 <a:solidFill>
-                  <a:srgbClr val="C9D3F5"/>
+                  <a:srgbClr val="1F2429"/>
                 </a:solidFill>
                 <a:latin typeface="Courier New" pitchFamily="34" charset="0"/>
                 <a:ea typeface="Courier New" pitchFamily="34" charset="-122"/>
@@ -12765,7 +12821,7 @@
             <a:r>
               <a:rPr lang="en-US" sz="1366" dirty="0">
                 <a:solidFill>
-                  <a:srgbClr val="C9D3F5"/>
+                  <a:srgbClr val="1F2429"/>
                 </a:solidFill>
                 <a:latin typeface="Courier New" pitchFamily="34" charset="0"/>
                 <a:ea typeface="Courier New" pitchFamily="34" charset="-122"/>
@@ -12785,7 +12841,7 @@
             <a:r>
               <a:rPr lang="en-US" sz="1366" dirty="0">
                 <a:solidFill>
-                  <a:srgbClr val="C9D3F5"/>
+                  <a:srgbClr val="1F2429"/>
                 </a:solidFill>
                 <a:latin typeface="Courier New" pitchFamily="34" charset="0"/>
                 <a:ea typeface="Courier New" pitchFamily="34" charset="-122"/>
@@ -12967,9 +13023,13 @@
             </a:avLst>
           </a:prstGeom>
           <a:solidFill>
-            <a:srgbClr val="1E1E4C"/>
+            <a:srgbClr val="F7F8F9"/>
           </a:solidFill>
-          <a:ln/>
+          <a:ln w="9525">
+            <a:solidFill>
+              <a:srgbClr val="D0D5DD"/>
+            </a:solidFill>
+          </a:ln>
         </p:spPr>
         <p:txBody>
           <a:bodyPr/>
@@ -13006,7 +13066,7 @@
             <a:r>
               <a:rPr lang="en-US" sz="1400" dirty="0">
                 <a:solidFill>
-                  <a:srgbClr val="C9D3F5"/>
+                  <a:srgbClr val="1F2429"/>
                 </a:solidFill>
                 <a:latin typeface="Courier New" pitchFamily="34" charset="0"/>
                 <a:ea typeface="Courier New" pitchFamily="34" charset="-122"/>
@@ -13026,7 +13086,7 @@
             <a:r>
               <a:rPr lang="en-US" sz="1400" dirty="0">
                 <a:solidFill>
-                  <a:srgbClr val="C9D3F5"/>
+                  <a:srgbClr val="1F2429"/>
                 </a:solidFill>
                 <a:latin typeface="Courier New" pitchFamily="34" charset="0"/>
                 <a:ea typeface="Courier New" pitchFamily="34" charset="-122"/>
@@ -13046,7 +13106,7 @@
             <a:r>
               <a:rPr lang="en-US" sz="1400" dirty="0">
                 <a:solidFill>
-                  <a:srgbClr val="C9D3F5"/>
+                  <a:srgbClr val="1F2429"/>
                 </a:solidFill>
                 <a:latin typeface="Courier New" pitchFamily="34" charset="0"/>
                 <a:ea typeface="Courier New" pitchFamily="34" charset="-122"/>
@@ -13066,7 +13126,7 @@
             <a:r>
               <a:rPr lang="en-US" sz="1400" dirty="0">
                 <a:solidFill>
-                  <a:srgbClr val="C9D3F5"/>
+                  <a:srgbClr val="1F2429"/>
                 </a:solidFill>
                 <a:latin typeface="Courier New" pitchFamily="34" charset="0"/>
                 <a:ea typeface="Courier New" pitchFamily="34" charset="-122"/>
@@ -14616,7 +14676,7 @@
         <p:spPr>
           <a:xfrm>
             <a:off x="640080" y="1965960"/>
-            <a:ext cx="10911535" cy="1737360"/>
+            <a:ext cx="10911535" cy="3657600"/>
           </a:xfrm>
           <a:prstGeom prst="roundRect">
             <a:avLst>
@@ -14647,7 +14707,7 @@
         <p:spPr>
           <a:xfrm>
             <a:off x="868680" y="2103120"/>
-            <a:ext cx="10454335" cy="274320"/>
+            <a:ext cx="10454335" cy="400000"/>
           </a:xfrm>
           <a:prstGeom prst="rect">
             <a:avLst/>
@@ -14663,7 +14723,7 @@
               <a:buNone/>
             </a:pPr>
             <a:r>
-              <a:rPr lang="en-US" sz="1000" b="1" spc="200" kern="0" dirty="0">
+              <a:rPr lang="en-US" sz="1800" b="1" spc="200" kern="0" dirty="0">
                 <a:solidFill>
                   <a:srgbClr val="8A3A12"/>
                 </a:solidFill>
@@ -14673,7 +14733,7 @@
               </a:rPr>
               <a:t>WARNING</a:t>
             </a:r>
-            <a:endParaRPr lang="en-US" sz="1000" dirty="0"/>
+            <a:endParaRPr lang="en-US" sz="1800" dirty="0"/>
           </a:p>
         </p:txBody>
       </p:sp>
@@ -14685,24 +14745,24 @@
         </p:nvSpPr>
         <p:spPr>
           <a:xfrm>
-            <a:off x="868680" y="2404872"/>
-            <a:ext cx="10454335" cy="1143000"/>
-          </a:xfrm>
-          <a:prstGeom prst="rect">
-            <a:avLst/>
-          </a:prstGeom>
-          <a:noFill/>
-          <a:ln/>
-        </p:spPr>
-        <p:txBody>
-          <a:bodyPr wrap="square" lIns="0" tIns="0" rIns="0" bIns="0" rtlCol="0" anchor="t"/>
+            <a:off x="868680" y="2795960"/>
+            <a:ext cx="10454335" cy="2782400"/>
+          </a:xfrm>
+          <a:prstGeom prst="rect">
+            <a:avLst/>
+          </a:prstGeom>
+          <a:noFill/>
+          <a:ln/>
+        </p:spPr>
+        <p:txBody>
+          <a:bodyPr wrap="square" lIns="0" tIns="0" rIns="0" bIns="0" rtlCol="0" anchor="ctr"/>
           <a:lstStyle/>
           <a:p>
             <a:pPr indent="0" marL="0">
               <a:buNone/>
             </a:pPr>
             <a:r>
-              <a:rPr lang="en-US" sz="1250" dirty="0">
+              <a:rPr lang="en-US" sz="2800" dirty="0">
                 <a:solidFill>
                   <a:srgbClr val="26262F"/>
                 </a:solidFill>
@@ -14712,7 +14772,7 @@
               </a:rPr>
               <a:t>If you see a CORS error, the fix belongs on the server (adding the right Access-Control-Allow-Origin header), not in your fetch call. You'll work with server configuration, including CORS, starting in Unit 5.</a:t>
             </a:r>
-            <a:endParaRPr lang="en-US" sz="1250" dirty="0"/>
+            <a:endParaRPr lang="en-US" sz="2800" dirty="0"/>
           </a:p>
         </p:txBody>
       </p:sp>
@@ -16256,9 +16316,13 @@
             </a:avLst>
           </a:prstGeom>
           <a:solidFill>
-            <a:srgbClr val="1E1E4C"/>
+            <a:srgbClr val="F7F8F9"/>
           </a:solidFill>
-          <a:ln/>
+          <a:ln w="9525">
+            <a:solidFill>
+              <a:srgbClr val="D0D5DD"/>
+            </a:solidFill>
+          </a:ln>
         </p:spPr>
         <p:txBody>
           <a:bodyPr/>
@@ -16295,7 +16359,7 @@
             <a:r>
               <a:rPr lang="en-US" sz="1400" dirty="0">
                 <a:solidFill>
-                  <a:srgbClr val="C9D3F5"/>
+                  <a:srgbClr val="1F2429"/>
                 </a:solidFill>
                 <a:latin typeface="Courier New" pitchFamily="34" charset="0"/>
                 <a:ea typeface="Courier New" pitchFamily="34" charset="-122"/>
@@ -16315,7 +16379,7 @@
             <a:r>
               <a:rPr lang="en-US" sz="1400" dirty="0">
                 <a:solidFill>
-                  <a:srgbClr val="C9D3F5"/>
+                  <a:srgbClr val="1F2429"/>
                 </a:solidFill>
                 <a:latin typeface="Courier New" pitchFamily="34" charset="0"/>
                 <a:ea typeface="Courier New" pitchFamily="34" charset="-122"/>
@@ -16335,7 +16399,7 @@
             <a:r>
               <a:rPr lang="en-US" sz="1400" dirty="0">
                 <a:solidFill>
-                  <a:srgbClr val="C9D3F5"/>
+                  <a:srgbClr val="1F2429"/>
                 </a:solidFill>
                 <a:latin typeface="Courier New" pitchFamily="34" charset="0"/>
                 <a:ea typeface="Courier New" pitchFamily="34" charset="-122"/>
@@ -16355,7 +16419,7 @@
             <a:r>
               <a:rPr lang="en-US" sz="1400" dirty="0">
                 <a:solidFill>
-                  <a:srgbClr val="C9D3F5"/>
+                  <a:srgbClr val="1F2429"/>
                 </a:solidFill>
                 <a:latin typeface="Courier New" pitchFamily="34" charset="0"/>
                 <a:ea typeface="Courier New" pitchFamily="34" charset="-122"/>
@@ -16375,7 +16439,7 @@
             <a:r>
               <a:rPr lang="en-US" sz="1400" dirty="0">
                 <a:solidFill>
-                  <a:srgbClr val="C9D3F5"/>
+                  <a:srgbClr val="1F2429"/>
                 </a:solidFill>
                 <a:latin typeface="Courier New" pitchFamily="34" charset="0"/>
                 <a:ea typeface="Courier New" pitchFamily="34" charset="-122"/>
@@ -16395,7 +16459,7 @@
             <a:r>
               <a:rPr lang="en-US" sz="1400" dirty="0">
                 <a:solidFill>
-                  <a:srgbClr val="C9D3F5"/>
+                  <a:srgbClr val="1F2429"/>
                 </a:solidFill>
                 <a:latin typeface="Courier New" pitchFamily="34" charset="0"/>
                 <a:ea typeface="Courier New" pitchFamily="34" charset="-122"/>
@@ -16415,7 +16479,7 @@
             <a:r>
               <a:rPr lang="en-US" sz="1400" dirty="0">
                 <a:solidFill>
-                  <a:srgbClr val="C9D3F5"/>
+                  <a:srgbClr val="1F2429"/>
                 </a:solidFill>
                 <a:latin typeface="Courier New" pitchFamily="34" charset="0"/>
                 <a:ea typeface="Courier New" pitchFamily="34" charset="-122"/>
@@ -16435,7 +16499,7 @@
             <a:r>
               <a:rPr lang="en-US" sz="1400" dirty="0">
                 <a:solidFill>
-                  <a:srgbClr val="C9D3F5"/>
+                  <a:srgbClr val="1F2429"/>
                 </a:solidFill>
                 <a:latin typeface="Courier New" pitchFamily="34" charset="0"/>
                 <a:ea typeface="Courier New" pitchFamily="34" charset="-122"/>
@@ -16455,7 +16519,7 @@
             <a:r>
               <a:rPr lang="en-US" sz="1400" dirty="0">
                 <a:solidFill>
-                  <a:srgbClr val="C9D3F5"/>
+                  <a:srgbClr val="1F2429"/>
                 </a:solidFill>
                 <a:latin typeface="Courier New" pitchFamily="34" charset="0"/>
                 <a:ea typeface="Courier New" pitchFamily="34" charset="-122"/>
@@ -16475,7 +16539,7 @@
             <a:r>
               <a:rPr lang="en-US" sz="1400" dirty="0">
                 <a:solidFill>
-                  <a:srgbClr val="C9D3F5"/>
+                  <a:srgbClr val="1F2429"/>
                 </a:solidFill>
                 <a:latin typeface="Courier New" pitchFamily="34" charset="0"/>
                 <a:ea typeface="Courier New" pitchFamily="34" charset="-122"/>
@@ -16495,7 +16559,7 @@
             <a:r>
               <a:rPr lang="en-US" sz="1400" dirty="0">
                 <a:solidFill>
-                  <a:srgbClr val="C9D3F5"/>
+                  <a:srgbClr val="1F2429"/>
                 </a:solidFill>
                 <a:latin typeface="Courier New" pitchFamily="34" charset="0"/>
                 <a:ea typeface="Courier New" pitchFamily="34" charset="-122"/>
@@ -17034,9 +17098,13 @@
             </a:avLst>
           </a:prstGeom>
           <a:solidFill>
-            <a:srgbClr val="1E1E4C"/>
+            <a:srgbClr val="F7F8F9"/>
           </a:solidFill>
-          <a:ln/>
+          <a:ln w="9525">
+            <a:solidFill>
+              <a:srgbClr val="D0D5DD"/>
+            </a:solidFill>
+          </a:ln>
         </p:spPr>
         <p:txBody>
           <a:bodyPr/>
@@ -17073,7 +17141,7 @@
             <a:r>
               <a:rPr lang="en-US" sz="1400" dirty="0">
                 <a:solidFill>
-                  <a:srgbClr val="C9D3F5"/>
+                  <a:srgbClr val="1F2429"/>
                 </a:solidFill>
                 <a:latin typeface="Courier New" pitchFamily="34" charset="0"/>
                 <a:ea typeface="Courier New" pitchFamily="34" charset="-122"/>
@@ -17093,7 +17161,7 @@
             <a:r>
               <a:rPr lang="en-US" sz="1400" dirty="0">
                 <a:solidFill>
-                  <a:srgbClr val="C9D3F5"/>
+                  <a:srgbClr val="1F2429"/>
                 </a:solidFill>
                 <a:latin typeface="Courier New" pitchFamily="34" charset="0"/>
                 <a:ea typeface="Courier New" pitchFamily="34" charset="-122"/>
@@ -17113,7 +17181,7 @@
             <a:r>
               <a:rPr lang="en-US" sz="1400" dirty="0">
                 <a:solidFill>
-                  <a:srgbClr val="C9D3F5"/>
+                  <a:srgbClr val="1F2429"/>
                 </a:solidFill>
                 <a:latin typeface="Courier New" pitchFamily="34" charset="0"/>
                 <a:ea typeface="Courier New" pitchFamily="34" charset="-122"/>
@@ -17133,7 +17201,7 @@
             <a:r>
               <a:rPr lang="en-US" sz="1400" dirty="0">
                 <a:solidFill>
-                  <a:srgbClr val="C9D3F5"/>
+                  <a:srgbClr val="1F2429"/>
                 </a:solidFill>
                 <a:latin typeface="Courier New" pitchFamily="34" charset="0"/>
                 <a:ea typeface="Courier New" pitchFamily="34" charset="-122"/>
@@ -17354,9 +17422,13 @@
             </a:avLst>
           </a:prstGeom>
           <a:solidFill>
-            <a:srgbClr val="1E1E4C"/>
+            <a:srgbClr val="F7F8F9"/>
           </a:solidFill>
-          <a:ln/>
+          <a:ln w="9525">
+            <a:solidFill>
+              <a:srgbClr val="D0D5DD"/>
+            </a:solidFill>
+          </a:ln>
         </p:spPr>
         <p:txBody>
           <a:bodyPr/>
@@ -17393,7 +17465,7 @@
             <a:r>
               <a:rPr lang="en-US" sz="1300" dirty="0">
                 <a:solidFill>
-                  <a:srgbClr val="C9D3F5"/>
+                  <a:srgbClr val="1F2429"/>
                 </a:solidFill>
                 <a:latin typeface="Courier New" pitchFamily="34" charset="0"/>
                 <a:ea typeface="Courier New" pitchFamily="34" charset="-122"/>
@@ -17413,7 +17485,7 @@
             <a:r>
               <a:rPr lang="en-US" sz="1300" dirty="0">
                 <a:solidFill>
-                  <a:srgbClr val="C9D3F5"/>
+                  <a:srgbClr val="1F2429"/>
                 </a:solidFill>
                 <a:latin typeface="Courier New" pitchFamily="34" charset="0"/>
                 <a:ea typeface="Courier New" pitchFamily="34" charset="-122"/>
@@ -17433,7 +17505,7 @@
             <a:r>
               <a:rPr lang="en-US" sz="1300" dirty="0">
                 <a:solidFill>
-                  <a:srgbClr val="C9D3F5"/>
+                  <a:srgbClr val="1F2429"/>
                 </a:solidFill>
                 <a:latin typeface="Courier New" pitchFamily="34" charset="0"/>
                 <a:ea typeface="Courier New" pitchFamily="34" charset="-122"/>
@@ -17453,7 +17525,7 @@
             <a:r>
               <a:rPr lang="en-US" sz="1300" dirty="0">
                 <a:solidFill>
-                  <a:srgbClr val="C9D3F5"/>
+                  <a:srgbClr val="1F2429"/>
                 </a:solidFill>
                 <a:latin typeface="Courier New" pitchFamily="34" charset="0"/>
                 <a:ea typeface="Courier New" pitchFamily="34" charset="-122"/>
@@ -18947,7 +19019,7 @@
         <p:spPr>
           <a:xfrm>
             <a:off x="640080" y="1965960"/>
-            <a:ext cx="10911535" cy="1737360"/>
+            <a:ext cx="10911535" cy="3657600"/>
           </a:xfrm>
           <a:prstGeom prst="roundRect">
             <a:avLst>
@@ -18978,7 +19050,7 @@
         <p:spPr>
           <a:xfrm>
             <a:off x="868680" y="2103120"/>
-            <a:ext cx="10454335" cy="274320"/>
+            <a:ext cx="10454335" cy="400000"/>
           </a:xfrm>
           <a:prstGeom prst="rect">
             <a:avLst/>
@@ -18994,7 +19066,7 @@
               <a:buNone/>
             </a:pPr>
             <a:r>
-              <a:rPr lang="en-US" sz="1000" b="1" spc="200" kern="0" dirty="0">
+              <a:rPr lang="en-US" sz="1800" b="1" spc="200" kern="0" dirty="0">
                 <a:solidFill>
                   <a:srgbClr val="33459E"/>
                 </a:solidFill>
@@ -19004,7 +19076,7 @@
               </a:rPr>
               <a:t>NOTE</a:t>
             </a:r>
-            <a:endParaRPr lang="en-US" sz="1000" dirty="0"/>
+            <a:endParaRPr lang="en-US" sz="1800" dirty="0"/>
           </a:p>
         </p:txBody>
       </p:sp>
@@ -19016,24 +19088,24 @@
         </p:nvSpPr>
         <p:spPr>
           <a:xfrm>
-            <a:off x="868680" y="2404872"/>
-            <a:ext cx="10454335" cy="1143000"/>
-          </a:xfrm>
-          <a:prstGeom prst="rect">
-            <a:avLst/>
-          </a:prstGeom>
-          <a:noFill/>
-          <a:ln/>
-        </p:spPr>
-        <p:txBody>
-          <a:bodyPr wrap="square" lIns="0" tIns="0" rIns="0" bIns="0" rtlCol="0" anchor="t"/>
+            <a:off x="868680" y="2795960"/>
+            <a:ext cx="10454335" cy="2800000"/>
+          </a:xfrm>
+          <a:prstGeom prst="rect">
+            <a:avLst/>
+          </a:prstGeom>
+          <a:noFill/>
+          <a:ln/>
+        </p:spPr>
+        <p:txBody>
+          <a:bodyPr wrap="square" lIns="0" tIns="0" rIns="0" bIns="0" rtlCol="0" anchor="ctr"/>
           <a:lstStyle/>
           <a:p>
             <a:pPr indent="0" marL="0">
               <a:buNone/>
             </a:pPr>
             <a:r>
-              <a:rPr lang="en-US" sz="1250" dirty="0">
+              <a:rPr lang="en-US" sz="2800" dirty="0">
                 <a:solidFill>
                   <a:srgbClr val="26262F"/>
                 </a:solidFill>
@@ -19043,7 +19115,7 @@
               </a:rPr>
               <a:t>Promise callbacks (.then, async/await) go into a special microtask queue that the event loop always empties completely before it looks at the regular task queue (where setTimeout callbacks live). This is why Promise.resolve().then(...) scheduled after setTimeout(..., 0) usually still runs first.</a:t>
             </a:r>
-            <a:endParaRPr lang="en-US" sz="1250" dirty="0"/>
+            <a:endParaRPr lang="en-US" sz="2800" dirty="0"/>
           </a:p>
         </p:txBody>
       </p:sp>

--- a/slides/CSC336-Lecture-15-Async-JavaScript-Promises-and-Fetch.pptx
+++ b/slides/CSC336-Lecture-15-Async-JavaScript-Promises-and-Fetch.pptx
@@ -29,6 +29,9 @@
     <p:sldId id="276" r:id="rId22"/>
     <p:sldId id="277" r:id="rId23"/>
     <p:sldId id="278" r:id="rId24"/>
+    <p:sldId id="292" r:id="rId43"/>
+    <p:sldId id="293" r:id="rId44"/>
+    <p:sldId id="294" r:id="rId45"/>
     <p:sldId id="279" r:id="rId25"/>
     <p:sldId id="280" r:id="rId26"/>
     <p:sldId id="281" r:id="rId27"/>
@@ -8446,6 +8449,108 @@
                 <a:ea typeface="Calibri" pitchFamily="34" charset="-122"/>
                 <a:cs typeface="Calibri" pitchFamily="34" charset="-120"/>
               </a:rPr>
+              <a:t>REST APIs and HTTP methods (GET/POST/PUT/PATCH/DELETE), with a real example API</a:t>
+            </a:r>
+            <a:endParaRPr lang="en-US" sz="1500" dirty="0"/>
+          </a:p>
+        </p:txBody>
+      </p:sp>
+      <p:sp>
+        <p:nvSpPr>
+          <p:cNvPr id="30" name="Shape 30"/>
+          <p:cNvSpPr/>
+          <p:nvPr/>
+        </p:nvSpPr>
+        <p:spPr>
+          <a:xfrm>
+            <a:off x="685800" y="5257800"/>
+            <a:ext cx="457200" cy="457200"/>
+          </a:xfrm>
+          <a:prstGeom prst="ellipse">
+            <a:avLst/>
+          </a:prstGeom>
+          <a:solidFill>
+            <a:srgbClr val="FF8A3D"/>
+          </a:solidFill>
+          <a:ln/>
+        </p:spPr>
+        <p:txBody>
+          <a:bodyPr/>
+          <a:p/>
+        </p:txBody>
+      </p:sp>
+      <p:sp>
+        <p:nvSpPr>
+          <p:cNvPr id="31" name="Text 31"/>
+          <p:cNvSpPr txBox="1"/>
+          <p:nvPr/>
+        </p:nvSpPr>
+        <p:spPr>
+          <a:xfrm>
+            <a:off x="685800" y="5257800"/>
+            <a:ext cx="457200" cy="457200"/>
+          </a:xfrm>
+          <a:prstGeom prst="rect">
+            <a:avLst/>
+          </a:prstGeom>
+          <a:noFill/>
+          <a:ln/>
+        </p:spPr>
+        <p:txBody>
+          <a:bodyPr wrap="square" lIns="0" tIns="0" rIns="0" bIns="0" rtlCol="0" anchor="ctr"/>
+          <a:lstStyle/>
+          <a:p>
+            <a:pPr algn="ctr" indent="0" marL="0">
+              <a:buNone/>
+            </a:pPr>
+            <a:r>
+              <a:rPr lang="en-US" sz="1500" b="1" dirty="0">
+                <a:solidFill>
+                  <a:srgbClr val="FFFFFF"/>
+                </a:solidFill>
+                <a:latin typeface="Calibri" pitchFamily="34" charset="0"/>
+                <a:ea typeface="Calibri" pitchFamily="34" charset="-122"/>
+                <a:cs typeface="Calibri" pitchFamily="34" charset="-120"/>
+              </a:rPr>
+              <a:t>5</a:t>
+            </a:r>
+            <a:endParaRPr lang="en-US" sz="1500" dirty="0"/>
+          </a:p>
+        </p:txBody>
+      </p:sp>
+      <p:sp>
+        <p:nvSpPr>
+          <p:cNvPr id="32" name="Text 32"/>
+          <p:cNvSpPr txBox="1"/>
+          <p:nvPr/>
+        </p:nvSpPr>
+        <p:spPr>
+          <a:xfrm>
+            <a:off x="1371600" y="5184648"/>
+            <a:ext cx="10180015" cy="640080"/>
+          </a:xfrm>
+          <a:prstGeom prst="rect">
+            <a:avLst/>
+          </a:prstGeom>
+          <a:noFill/>
+          <a:ln/>
+        </p:spPr>
+        <p:txBody>
+          <a:bodyPr wrap="square" lIns="0" tIns="0" rIns="0" bIns="0" rtlCol="0" anchor="ctr"/>
+          <a:lstStyle/>
+          <a:p>
+            <a:pPr indent="0" marL="0">
+              <a:buNone/>
+            </a:pPr>
+            <a:r>
+              <a:rPr lang="en-US" sz="1500" dirty="0">
+                <a:solidFill>
+                  <a:srgbClr val="26262F"/>
+                </a:solidFill>
+                <a:latin typeface="Calibri" pitchFamily="34" charset="0"/>
+                <a:ea typeface="Calibri" pitchFamily="34" charset="-122"/>
+                <a:cs typeface="Calibri" pitchFamily="34" charset="-120"/>
+              </a:rPr>
               <a:t>Making real network requests with the Fetch API: GET/POST, headers, response parsing, and CORS</a:t>
             </a:r>
             <a:endParaRPr lang="en-US" sz="1500" dirty="0"/>
@@ -10467,7 +10572,7 @@
                   <a:srgbClr val="8A939B"/>
                 </a:solidFill>
               </a:rPr>
-              <a:t>  ·  25</a:t>
+              <a:t>  ·  28</a:t>
             </a:r>
           </a:p>
         </p:txBody>
@@ -10832,7 +10937,7 @@
                   <a:srgbClr val="8A939B"/>
                 </a:solidFill>
               </a:rPr>
-              <a:t>  ·  26</a:t>
+              <a:t>  ·  29</a:t>
             </a:r>
           </a:p>
         </p:txBody>
@@ -11228,7 +11333,7 @@
                   <a:srgbClr val="8A939B"/>
                 </a:solidFill>
               </a:rPr>
-              <a:t>  ·  27</a:t>
+              <a:t>  ·  30</a:t>
             </a:r>
           </a:p>
         </p:txBody>
@@ -11652,7 +11757,7 @@
                   <a:srgbClr val="8A939B"/>
                 </a:solidFill>
               </a:rPr>
-              <a:t>  ·  28</a:t>
+              <a:t>  ·  31</a:t>
             </a:r>
           </a:p>
         </p:txBody>
@@ -12426,7 +12531,7 @@
                   <a:srgbClr val="8A939B"/>
                 </a:solidFill>
               </a:rPr>
-              <a:t>  ·  30</a:t>
+              <a:t>  ·  33</a:t>
             </a:r>
           </a:p>
         </p:txBody>
@@ -12891,7 +12996,7 @@
                   <a:srgbClr val="8A939B"/>
                 </a:solidFill>
               </a:rPr>
-              <a:t>  ·  31</a:t>
+              <a:t>  ·  34</a:t>
             </a:r>
           </a:p>
         </p:txBody>
@@ -13674,7 +13779,7 @@
                   <a:srgbClr val="8A939B"/>
                 </a:solidFill>
               </a:rPr>
-              <a:t>  ·  33</a:t>
+              <a:t>  ·  36</a:t>
             </a:r>
           </a:p>
         </p:txBody>
@@ -14552,7 +14657,7 @@
                   <a:srgbClr val="8A939B"/>
                 </a:solidFill>
               </a:rPr>
-              <a:t>  ·  34</a:t>
+              <a:t>  ·  37</a:t>
             </a:r>
           </a:p>
         </p:txBody>
@@ -14814,7 +14919,7 @@
                   <a:srgbClr val="8A939B"/>
                 </a:solidFill>
               </a:rPr>
-              <a:t>  ·  35</a:t>
+              <a:t>  ·  38</a:t>
             </a:r>
           </a:p>
         </p:txBody>
@@ -14923,7 +15028,7 @@
                 <a:ea typeface="Cambria" pitchFamily="34" charset="-122"/>
                 <a:cs typeface="Cambria" pitchFamily="34" charset="-120"/>
               </a:rPr>
-              <a:t>Lecture 15 in Six Points</a:t>
+              <a:t>Lecture 15 in Seven Points</a:t>
             </a:r>
             <a:endParaRPr lang="en-US" sz="3400" dirty="0"/>
           </a:p>
@@ -14931,7 +15036,7 @@
       </p:sp>
       <p:sp>
         <p:nvSpPr>
-          <p:cNvPr id="4" name="Shape 2"/>
+          <p:cNvPr id="40" name="Shape 40"/>
           <p:cNvSpPr/>
           <p:nvPr/>
         </p:nvSpPr>
@@ -14955,7 +15060,7 @@
       </p:sp>
       <p:sp>
         <p:nvSpPr>
-          <p:cNvPr id="5" name="Text 3"/>
+          <p:cNvPr id="41" name="Text 41"/>
           <p:cNvSpPr txBox="1"/>
           <p:nvPr/>
         </p:nvSpPr>
@@ -14994,7 +15099,7 @@
       </p:sp>
       <p:sp>
         <p:nvSpPr>
-          <p:cNvPr id="6" name="Text 4"/>
+          <p:cNvPr id="42" name="Text 42"/>
           <p:cNvSpPr txBox="1"/>
           <p:nvPr/>
         </p:nvSpPr>
@@ -15033,13 +15138,13 @@
       </p:sp>
       <p:sp>
         <p:nvSpPr>
-          <p:cNvPr id="7" name="Shape 5"/>
+          <p:cNvPr id="43" name="Shape 43"/>
           <p:cNvSpPr/>
           <p:nvPr/>
         </p:nvSpPr>
         <p:spPr>
           <a:xfrm>
-            <a:off x="822960" y="2956560"/>
+            <a:off x="822960" y="2865200"/>
             <a:ext cx="438912" cy="438912"/>
           </a:xfrm>
           <a:prstGeom prst="ellipse">
@@ -15057,13 +15162,13 @@
       </p:sp>
       <p:sp>
         <p:nvSpPr>
-          <p:cNvPr id="8" name="Text 6"/>
+          <p:cNvPr id="44" name="Text 44"/>
           <p:cNvSpPr txBox="1"/>
           <p:nvPr/>
         </p:nvSpPr>
         <p:spPr>
           <a:xfrm>
-            <a:off x="822960" y="2956560"/>
+            <a:off x="822960" y="2865200"/>
             <a:ext cx="438912" cy="438912"/>
           </a:xfrm>
           <a:prstGeom prst="rect">
@@ -15096,13 +15201,13 @@
       </p:sp>
       <p:sp>
         <p:nvSpPr>
-          <p:cNvPr id="9" name="Text 7"/>
+          <p:cNvPr id="45" name="Text 45"/>
           <p:cNvSpPr txBox="1"/>
           <p:nvPr/>
         </p:nvSpPr>
         <p:spPr>
           <a:xfrm>
-            <a:off x="1463040" y="2865120"/>
+            <a:off x="1463040" y="2773760"/>
             <a:ext cx="10058400" cy="624840"/>
           </a:xfrm>
           <a:prstGeom prst="rect">
@@ -15135,13 +15240,13 @@
       </p:sp>
       <p:sp>
         <p:nvSpPr>
-          <p:cNvPr id="10" name="Shape 8"/>
+          <p:cNvPr id="46" name="Shape 46"/>
           <p:cNvSpPr/>
           <p:nvPr/>
         </p:nvSpPr>
         <p:spPr>
           <a:xfrm>
-            <a:off x="822960" y="3627120"/>
+            <a:off x="822960" y="3444400"/>
             <a:ext cx="438912" cy="438912"/>
           </a:xfrm>
           <a:prstGeom prst="ellipse">
@@ -15159,13 +15264,13 @@
       </p:sp>
       <p:sp>
         <p:nvSpPr>
-          <p:cNvPr id="11" name="Text 9"/>
+          <p:cNvPr id="47" name="Text 47"/>
           <p:cNvSpPr txBox="1"/>
           <p:nvPr/>
         </p:nvSpPr>
         <p:spPr>
           <a:xfrm>
-            <a:off x="822960" y="3627120"/>
+            <a:off x="822960" y="3444400"/>
             <a:ext cx="438912" cy="438912"/>
           </a:xfrm>
           <a:prstGeom prst="rect">
@@ -15198,13 +15303,13 @@
       </p:sp>
       <p:sp>
         <p:nvSpPr>
-          <p:cNvPr id="12" name="Text 10"/>
+          <p:cNvPr id="48" name="Text 48"/>
           <p:cNvSpPr txBox="1"/>
           <p:nvPr/>
         </p:nvSpPr>
         <p:spPr>
           <a:xfrm>
-            <a:off x="1463040" y="3535680"/>
+            <a:off x="1463040" y="3352960"/>
             <a:ext cx="10058400" cy="624840"/>
           </a:xfrm>
           <a:prstGeom prst="rect">
@@ -15237,13 +15342,13 @@
       </p:sp>
       <p:sp>
         <p:nvSpPr>
-          <p:cNvPr id="13" name="Shape 11"/>
+          <p:cNvPr id="49" name="Shape 49"/>
           <p:cNvSpPr/>
           <p:nvPr/>
         </p:nvSpPr>
         <p:spPr>
           <a:xfrm>
-            <a:off x="822960" y="4297680"/>
+            <a:off x="822960" y="4023600"/>
             <a:ext cx="438912" cy="438912"/>
           </a:xfrm>
           <a:prstGeom prst="ellipse">
@@ -15261,13 +15366,13 @@
       </p:sp>
       <p:sp>
         <p:nvSpPr>
-          <p:cNvPr id="14" name="Text 12"/>
+          <p:cNvPr id="50" name="Text 50"/>
           <p:cNvSpPr txBox="1"/>
           <p:nvPr/>
         </p:nvSpPr>
         <p:spPr>
           <a:xfrm>
-            <a:off x="822960" y="4297680"/>
+            <a:off x="822960" y="4023600"/>
             <a:ext cx="438912" cy="438912"/>
           </a:xfrm>
           <a:prstGeom prst="rect">
@@ -15300,13 +15405,13 @@
       </p:sp>
       <p:sp>
         <p:nvSpPr>
-          <p:cNvPr id="15" name="Text 13"/>
+          <p:cNvPr id="51" name="Text 51"/>
           <p:cNvSpPr txBox="1"/>
           <p:nvPr/>
         </p:nvSpPr>
         <p:spPr>
           <a:xfrm>
-            <a:off x="1463040" y="4206240"/>
+            <a:off x="1463040" y="3932160"/>
             <a:ext cx="10058400" cy="624840"/>
           </a:xfrm>
           <a:prstGeom prst="rect">
@@ -15339,13 +15444,13 @@
       </p:sp>
       <p:sp>
         <p:nvSpPr>
-          <p:cNvPr id="16" name="Shape 14"/>
+          <p:cNvPr id="52" name="Shape 52"/>
           <p:cNvSpPr/>
           <p:nvPr/>
         </p:nvSpPr>
         <p:spPr>
           <a:xfrm>
-            <a:off x="822960" y="4968240"/>
+            <a:off x="822960" y="4602800"/>
             <a:ext cx="438912" cy="438912"/>
           </a:xfrm>
           <a:prstGeom prst="ellipse">
@@ -15363,13 +15468,13 @@
       </p:sp>
       <p:sp>
         <p:nvSpPr>
-          <p:cNvPr id="17" name="Text 15"/>
+          <p:cNvPr id="53" name="Text 53"/>
           <p:cNvSpPr txBox="1"/>
           <p:nvPr/>
         </p:nvSpPr>
         <p:spPr>
           <a:xfrm>
-            <a:off x="822960" y="4968240"/>
+            <a:off x="822960" y="4602800"/>
             <a:ext cx="438912" cy="438912"/>
           </a:xfrm>
           <a:prstGeom prst="rect">
@@ -15402,13 +15507,13 @@
       </p:sp>
       <p:sp>
         <p:nvSpPr>
-          <p:cNvPr id="18" name="Text 16"/>
+          <p:cNvPr id="54" name="Text 54"/>
           <p:cNvSpPr txBox="1"/>
           <p:nvPr/>
         </p:nvSpPr>
         <p:spPr>
           <a:xfrm>
-            <a:off x="1463040" y="4876800"/>
+            <a:off x="1463040" y="4511360"/>
             <a:ext cx="10058400" cy="624840"/>
           </a:xfrm>
           <a:prstGeom prst="rect">
@@ -15441,13 +15546,13 @@
       </p:sp>
       <p:sp>
         <p:nvSpPr>
-          <p:cNvPr id="19" name="Shape 17"/>
+          <p:cNvPr id="55" name="Shape 55"/>
           <p:cNvSpPr/>
           <p:nvPr/>
         </p:nvSpPr>
         <p:spPr>
           <a:xfrm>
-            <a:off x="822960" y="5638800"/>
+            <a:off x="822960" y="5182000"/>
             <a:ext cx="438912" cy="438912"/>
           </a:xfrm>
           <a:prstGeom prst="ellipse">
@@ -15465,13 +15570,13 @@
       </p:sp>
       <p:sp>
         <p:nvSpPr>
-          <p:cNvPr id="20" name="Text 18"/>
+          <p:cNvPr id="56" name="Text 56"/>
           <p:cNvSpPr txBox="1"/>
           <p:nvPr/>
         </p:nvSpPr>
         <p:spPr>
           <a:xfrm>
-            <a:off x="822960" y="5638800"/>
+            <a:off x="822960" y="5182000"/>
             <a:ext cx="438912" cy="438912"/>
           </a:xfrm>
           <a:prstGeom prst="rect">
@@ -15504,13 +15609,13 @@
       </p:sp>
       <p:sp>
         <p:nvSpPr>
-          <p:cNvPr id="21" name="Text 19"/>
+          <p:cNvPr id="57" name="Text 57"/>
           <p:cNvSpPr txBox="1"/>
           <p:nvPr/>
         </p:nvSpPr>
         <p:spPr>
           <a:xfrm>
-            <a:off x="1463040" y="5547360"/>
+            <a:off x="1463040" y="5090560"/>
             <a:ext cx="10058400" cy="624840"/>
           </a:xfrm>
           <a:prstGeom prst="rect">
@@ -15535,6 +15640,108 @@
                 <a:ea typeface="Calibri" pitchFamily="34" charset="-122"/>
                 <a:cs typeface="Calibri" pitchFamily="34" charset="-120"/>
               </a:rPr>
+              <a:t>A REST API uses the HTTP method, not the URL, to say what to do -- GET reads, POST creates, PUT/PATCH update, DELETE removes.</a:t>
+            </a:r>
+            <a:endParaRPr lang="en-US" sz="1250" dirty="0"/>
+          </a:p>
+        </p:txBody>
+      </p:sp>
+      <p:sp>
+        <p:nvSpPr>
+          <p:cNvPr id="58" name="Shape 58"/>
+          <p:cNvSpPr/>
+          <p:nvPr/>
+        </p:nvSpPr>
+        <p:spPr>
+          <a:xfrm>
+            <a:off x="822960" y="5761200"/>
+            <a:ext cx="438912" cy="438912"/>
+          </a:xfrm>
+          <a:prstGeom prst="ellipse">
+            <a:avLst/>
+          </a:prstGeom>
+          <a:solidFill>
+            <a:srgbClr val="FF8A3D"/>
+          </a:solidFill>
+          <a:ln/>
+        </p:spPr>
+        <p:txBody>
+          <a:bodyPr/>
+          <a:p/>
+        </p:txBody>
+      </p:sp>
+      <p:sp>
+        <p:nvSpPr>
+          <p:cNvPr id="59" name="Text 59"/>
+          <p:cNvSpPr txBox="1"/>
+          <p:nvPr/>
+        </p:nvSpPr>
+        <p:spPr>
+          <a:xfrm>
+            <a:off x="822960" y="5761200"/>
+            <a:ext cx="438912" cy="438912"/>
+          </a:xfrm>
+          <a:prstGeom prst="rect">
+            <a:avLst/>
+          </a:prstGeom>
+          <a:noFill/>
+          <a:ln/>
+        </p:spPr>
+        <p:txBody>
+          <a:bodyPr wrap="square" lIns="0" tIns="0" rIns="0" bIns="0" rtlCol="0" anchor="ctr"/>
+          <a:lstStyle/>
+          <a:p>
+            <a:pPr algn="ctr" indent="0" marL="0">
+              <a:buNone/>
+            </a:pPr>
+            <a:r>
+              <a:rPr lang="en-US" sz="1500" b="1" dirty="0">
+                <a:solidFill>
+                  <a:srgbClr val="FFFFFF"/>
+                </a:solidFill>
+                <a:latin typeface="Calibri" pitchFamily="34" charset="0"/>
+                <a:ea typeface="Calibri" pitchFamily="34" charset="-122"/>
+                <a:cs typeface="Calibri" pitchFamily="34" charset="-120"/>
+              </a:rPr>
+              <a:t>7</a:t>
+            </a:r>
+            <a:endParaRPr lang="en-US" sz="1500" dirty="0"/>
+          </a:p>
+        </p:txBody>
+      </p:sp>
+      <p:sp>
+        <p:nvSpPr>
+          <p:cNvPr id="60" name="Text 60"/>
+          <p:cNvSpPr txBox="1"/>
+          <p:nvPr/>
+        </p:nvSpPr>
+        <p:spPr>
+          <a:xfrm>
+            <a:off x="1463040" y="5669760"/>
+            <a:ext cx="10058400" cy="624840"/>
+          </a:xfrm>
+          <a:prstGeom prst="rect">
+            <a:avLst/>
+          </a:prstGeom>
+          <a:noFill/>
+          <a:ln/>
+        </p:spPr>
+        <p:txBody>
+          <a:bodyPr wrap="square" lIns="0" tIns="0" rIns="0" bIns="0" rtlCol="0" anchor="ctr"/>
+          <a:lstStyle/>
+          <a:p>
+            <a:pPr indent="0" marL="0">
+              <a:buNone/>
+            </a:pPr>
+            <a:r>
+              <a:rPr lang="en-US" sz="1250" dirty="0">
+                <a:solidFill>
+                  <a:srgbClr val="C9D3F5"/>
+                </a:solidFill>
+                <a:latin typeface="Calibri" pitchFamily="34" charset="0"/>
+                <a:ea typeface="Calibri" pitchFamily="34" charset="-122"/>
+                <a:cs typeface="Calibri" pitchFamily="34" charset="-120"/>
+              </a:rPr>
               <a:t>fetch() rejects only on true network failure, not on HTTP error codes -- always check response.ok; CORS is a browser rule enforced via response headers, fixable only on the server.</a:t>
             </a:r>
             <a:endParaRPr lang="en-US" sz="1250" dirty="0"/>
@@ -15579,7 +15786,7 @@
                   <a:srgbClr val="8A939B"/>
                 </a:solidFill>
               </a:rPr>
-              <a:t>  ·  36</a:t>
+              <a:t>  ·  39</a:t>
             </a:r>
           </a:p>
         </p:txBody>
@@ -16648,7 +16855,7 @@
                   <a:srgbClr val="8A939B"/>
                 </a:solidFill>
               </a:rPr>
-              <a:t>  ·  29</a:t>
+              <a:t>  ·  32</a:t>
             </a:r>
           </a:p>
         </p:txBody>
@@ -16966,7 +17173,4005 @@
                   <a:srgbClr val="8A939B"/>
                 </a:solidFill>
               </a:rPr>
-              <a:t>  ·  32</a:t>
+              <a:t>  ·  35</a:t>
+            </a:r>
+          </a:p>
+        </p:txBody>
+      </p:sp>
+    </p:spTree>
+  </p:cSld>
+  <p:clrMapOvr>
+    <a:masterClrMapping/>
+  </p:clrMapOvr>
+</p:sld>
+</file>
+
+<file path=ppt/slides/slide37.xml><?xml version="1.0" encoding="utf-8"?>
+<p:sld xmlns:a="http://schemas.openxmlformats.org/drawingml/2006/main" xmlns:r="http://schemas.openxmlformats.org/officeDocument/2006/relationships" xmlns:p="http://schemas.openxmlformats.org/presentationml/2006/main">
+  <p:cSld name="Slide 28">
+    <p:bg>
+      <p:bgPr>
+        <a:solidFill>
+          <a:srgbClr val="FFFFFF"/>
+        </a:solidFill>
+      </p:bgPr>
+    </p:bg>
+    <p:spTree>
+      <p:nvGrpSpPr>
+        <p:cNvPr id="1" name=""/>
+        <p:cNvGrpSpPr/>
+        <p:nvPr/>
+      </p:nvGrpSpPr>
+      <p:grpSpPr>
+        <a:xfrm>
+          <a:off x="0" y="0"/>
+          <a:ext cx="0" cy="0"/>
+          <a:chOff x="0" y="0"/>
+          <a:chExt cx="0" cy="0"/>
+        </a:xfrm>
+      </p:grpSpPr>
+      <p:sp>
+        <p:nvSpPr>
+          <p:cNvPr id="2" name="Text 0"/>
+          <p:cNvSpPr txBox="1"/>
+          <p:nvPr/>
+        </p:nvSpPr>
+        <p:spPr>
+          <a:xfrm>
+            <a:off x="640080" y="457200"/>
+            <a:ext cx="10058400" cy="365760"/>
+          </a:xfrm>
+          <a:prstGeom prst="rect">
+            <a:avLst/>
+          </a:prstGeom>
+          <a:noFill/>
+          <a:ln/>
+        </p:spPr>
+        <p:txBody>
+          <a:bodyPr wrap="square" lIns="0" tIns="0" rIns="0" bIns="0" rtlCol="0" anchor="ctr"/>
+          <a:lstStyle/>
+          <a:p>
+            <a:pPr algn="l" indent="0" marL="0">
+              <a:buNone/>
+            </a:pPr>
+            <a:r>
+              <a:rPr lang="en-US" sz="1300" b="1" spc="300" kern="0" dirty="0">
+                <a:solidFill>
+                  <a:srgbClr val="FF8A3D"/>
+                </a:solidFill>
+                <a:latin typeface="Calibri" pitchFamily="34" charset="0"/>
+                <a:ea typeface="Calibri" pitchFamily="34" charset="-122"/>
+                <a:cs typeface="Calibri" pitchFamily="34" charset="-120"/>
+              </a:rPr>
+              <a:t>REST APIS AND HTTP METHODS</a:t>
+            </a:r>
+            <a:endParaRPr lang="en-US" sz="1300" dirty="0"/>
+          </a:p>
+        </p:txBody>
+      </p:sp>
+      <p:sp>
+        <p:nvSpPr>
+          <p:cNvPr id="3" name="Text 1"/>
+          <p:cNvSpPr txBox="1"/>
+          <p:nvPr/>
+        </p:nvSpPr>
+        <p:spPr>
+          <a:xfrm>
+            <a:off x="640080" y="841248"/>
+            <a:ext cx="10881360" cy="914400"/>
+          </a:xfrm>
+          <a:prstGeom prst="rect">
+            <a:avLst/>
+          </a:prstGeom>
+          <a:noFill/>
+          <a:ln/>
+        </p:spPr>
+        <p:txBody>
+          <a:bodyPr wrap="square" lIns="0" tIns="0" rIns="0" bIns="0" rtlCol="0" anchor="ctr"/>
+          <a:lstStyle/>
+          <a:p>
+            <a:pPr algn="l" indent="0" marL="0">
+              <a:buNone/>
+            </a:pPr>
+            <a:r>
+              <a:rPr lang="en-US" sz="3400" b="1" dirty="0">
+                <a:solidFill>
+                  <a:srgbClr val="2B2B7A"/>
+                </a:solidFill>
+                <a:latin typeface="Cambria" pitchFamily="34" charset="0"/>
+                <a:ea typeface="Cambria" pitchFamily="34" charset="-122"/>
+                <a:cs typeface="Cambria" pitchFamily="34" charset="-120"/>
+              </a:rPr>
+              <a:t>HTTP Methods Map to CRUD</a:t>
+            </a:r>
+            <a:endParaRPr lang="en-US" sz="3400" dirty="0"/>
+          </a:p>
+        </p:txBody>
+      </p:sp>
+      <p:graphicFrame>
+        <p:nvGraphicFramePr>
+          <p:cNvPr id="29" name="Table 0"/>
+          <p:cNvGraphicFramePr>
+            <a:graphicFrameLocks noGrp="1"/>
+          </p:cNvGraphicFramePr>
+          <p:nvPr>
+            <p:extLst>
+              <p:ext uri="{D42A27DB-BD31-4B8C-83A1-F6EECF244321}">
+                <p14:modId xmlns:p14="http://schemas.microsoft.com/office/powerpoint/2010/main" val="1579011935"/>
+              </p:ext>
+            </p:extLst>
+          </p:nvPr>
+        </p:nvGraphicFramePr>
+        <p:xfrm>
+          <a:off x="640080" y="1965960"/>
+          <a:ext cx="10911535" cy="3401568"/>
+        </p:xfrm>
+        <a:graphic>
+          <a:graphicData uri="http://schemas.openxmlformats.org/drawingml/2006/table">
+            <a:tbl>
+              <a:tblPr/>
+              <a:tblGrid>
+                <a:gridCol w="1800000"/>
+                <a:gridCol w="1800000"/>
+                <a:gridCol w="5811535"/>
+                <a:gridCol w="1500000"/>
+              </a:tblGrid>
+              <a:tr h="566928">
+                <a:tc>
+                  <a:txBody>
+                    <a:bodyPr/>
+                    <a:lstStyle/>
+                    <a:p>
+                      <a:pPr algn="ctr" indent="0" marL="0">
+                        <a:buNone/>
+                      </a:pPr>
+                      <a:r>
+                        <a:rPr lang="en-US" sz="1200" b="1" dirty="0">
+                          <a:solidFill>
+                            <a:srgbClr val="FFFFFF"/>
+                          </a:solidFill>
+                          <a:latin typeface="Calibri" pitchFamily="34" charset="0"/>
+                          <a:ea typeface="Calibri" pitchFamily="34" charset="-122"/>
+                          <a:cs typeface="Calibri" pitchFamily="34" charset="-120"/>
+                        </a:rPr>
+                        <a:t>Method</a:t>
+                      </a:r>
+                      <a:endParaRPr lang="en-US" sz="1200" dirty="0">
+                        <a:latin typeface="Calibri" charset="0"/>
+                        <a:ea typeface="Calibri" charset="0"/>
+                        <a:cs typeface="Calibri" charset="0"/>
+                      </a:endParaRPr>
+                    </a:p>
+                  </a:txBody>
+                  <a:tcPr marL="91440" marR="91440" marT="45720" marB="45720" anchor="ctr">
+                    <a:lnL w="12700" cap="flat" cmpd="sng" algn="ctr">
+                      <a:solidFill>
+                        <a:srgbClr val="D8D8E6"/>
+                      </a:solidFill>
+                      <a:prstDash val="solid"/>
+                      <a:round/>
+                      <a:headEnd type="none" w="med" len="med"/>
+                      <a:tailEnd type="none" w="med" len="med"/>
+                    </a:lnL>
+                    <a:lnR w="12700" cap="flat" cmpd="sng" algn="ctr">
+                      <a:solidFill>
+                        <a:srgbClr val="D8D8E6"/>
+                      </a:solidFill>
+                      <a:prstDash val="solid"/>
+                      <a:round/>
+                      <a:headEnd type="none" w="med" len="med"/>
+                      <a:tailEnd type="none" w="med" len="med"/>
+                    </a:lnR>
+                    <a:lnT w="12700" cap="flat" cmpd="sng" algn="ctr">
+                      <a:solidFill>
+                        <a:srgbClr val="D8D8E6"/>
+                      </a:solidFill>
+                      <a:prstDash val="solid"/>
+                      <a:round/>
+                      <a:headEnd type="none" w="med" len="med"/>
+                      <a:tailEnd type="none" w="med" len="med"/>
+                    </a:lnT>
+                    <a:lnB w="12700" cap="flat" cmpd="sng" algn="ctr">
+                      <a:solidFill>
+                        <a:srgbClr val="D8D8E6"/>
+                      </a:solidFill>
+                      <a:prstDash val="solid"/>
+                      <a:round/>
+                      <a:headEnd type="none" w="med" len="med"/>
+                      <a:tailEnd type="none" w="med" len="med"/>
+                    </a:lnB>
+                    <a:solidFill>
+                      <a:srgbClr val="2B2B7A"/>
+                    </a:solidFill>
+                  </a:tcPr>
+                </a:tc>
+                <a:tc>
+                  <a:txBody>
+                    <a:bodyPr/>
+                    <a:lstStyle/>
+                    <a:p>
+                      <a:pPr algn="ctr" indent="0" marL="0">
+                        <a:buNone/>
+                      </a:pPr>
+                      <a:r>
+                        <a:rPr lang="en-US" sz="1200" b="1" dirty="0">
+                          <a:solidFill>
+                            <a:srgbClr val="FFFFFF"/>
+                          </a:solidFill>
+                          <a:latin typeface="Calibri" pitchFamily="34" charset="0"/>
+                          <a:ea typeface="Calibri" pitchFamily="34" charset="-122"/>
+                          <a:cs typeface="Calibri" pitchFamily="34" charset="-120"/>
+                        </a:rPr>
+                        <a:t>CRUD</a:t>
+                      </a:r>
+                      <a:endParaRPr lang="en-US" sz="1200" dirty="0">
+                        <a:latin typeface="Calibri" charset="0"/>
+                        <a:ea typeface="Calibri" charset="0"/>
+                        <a:cs typeface="Calibri" charset="0"/>
+                      </a:endParaRPr>
+                    </a:p>
+                  </a:txBody>
+                  <a:tcPr marL="91440" marR="91440" marT="45720" marB="45720" anchor="ctr">
+                    <a:lnL w="12700" cap="flat" cmpd="sng" algn="ctr">
+                      <a:solidFill>
+                        <a:srgbClr val="D8D8E6"/>
+                      </a:solidFill>
+                      <a:prstDash val="solid"/>
+                      <a:round/>
+                      <a:headEnd type="none" w="med" len="med"/>
+                      <a:tailEnd type="none" w="med" len="med"/>
+                    </a:lnL>
+                    <a:lnR w="12700" cap="flat" cmpd="sng" algn="ctr">
+                      <a:solidFill>
+                        <a:srgbClr val="D8D8E6"/>
+                      </a:solidFill>
+                      <a:prstDash val="solid"/>
+                      <a:round/>
+                      <a:headEnd type="none" w="med" len="med"/>
+                      <a:tailEnd type="none" w="med" len="med"/>
+                    </a:lnR>
+                    <a:lnT w="12700" cap="flat" cmpd="sng" algn="ctr">
+                      <a:solidFill>
+                        <a:srgbClr val="D8D8E6"/>
+                      </a:solidFill>
+                      <a:prstDash val="solid"/>
+                      <a:round/>
+                      <a:headEnd type="none" w="med" len="med"/>
+                      <a:tailEnd type="none" w="med" len="med"/>
+                    </a:lnT>
+                    <a:lnB w="12700" cap="flat" cmpd="sng" algn="ctr">
+                      <a:solidFill>
+                        <a:srgbClr val="D8D8E6"/>
+                      </a:solidFill>
+                      <a:prstDash val="solid"/>
+                      <a:round/>
+                      <a:headEnd type="none" w="med" len="med"/>
+                      <a:tailEnd type="none" w="med" len="med"/>
+                    </a:lnB>
+                    <a:solidFill>
+                      <a:srgbClr val="2B2B7A"/>
+                    </a:solidFill>
+                  </a:tcPr>
+                </a:tc>
+                <a:tc>
+                  <a:txBody>
+                    <a:bodyPr/>
+                    <a:lstStyle/>
+                    <a:p>
+                      <a:pPr algn="l" indent="0" marL="0">
+                        <a:buNone/>
+                      </a:pPr>
+                      <a:r>
+                        <a:rPr lang="en-US" sz="1200" b="1" dirty="0">
+                          <a:solidFill>
+                            <a:srgbClr val="FFFFFF"/>
+                          </a:solidFill>
+                          <a:latin typeface="Calibri" pitchFamily="34" charset="0"/>
+                          <a:ea typeface="Calibri" pitchFamily="34" charset="-122"/>
+                          <a:cs typeface="Calibri" pitchFamily="34" charset="-120"/>
+                        </a:rPr>
+                        <a:t>Typical Use</a:t>
+                      </a:r>
+                      <a:endParaRPr lang="en-US" sz="1200" dirty="0">
+                        <a:latin typeface="Calibri" charset="0"/>
+                        <a:ea typeface="Calibri" charset="0"/>
+                        <a:cs typeface="Calibri" charset="0"/>
+                      </a:endParaRPr>
+                    </a:p>
+                  </a:txBody>
+                  <a:tcPr marL="91440" marR="91440" marT="45720" marB="45720" anchor="ctr">
+                    <a:lnL w="12700" cap="flat" cmpd="sng" algn="ctr">
+                      <a:solidFill>
+                        <a:srgbClr val="D8D8E6"/>
+                      </a:solidFill>
+                      <a:prstDash val="solid"/>
+                      <a:round/>
+                      <a:headEnd type="none" w="med" len="med"/>
+                      <a:tailEnd type="none" w="med" len="med"/>
+                    </a:lnL>
+                    <a:lnR w="12700" cap="flat" cmpd="sng" algn="ctr">
+                      <a:solidFill>
+                        <a:srgbClr val="D8D8E6"/>
+                      </a:solidFill>
+                      <a:prstDash val="solid"/>
+                      <a:round/>
+                      <a:headEnd type="none" w="med" len="med"/>
+                      <a:tailEnd type="none" w="med" len="med"/>
+                    </a:lnR>
+                    <a:lnT w="12700" cap="flat" cmpd="sng" algn="ctr">
+                      <a:solidFill>
+                        <a:srgbClr val="D8D8E6"/>
+                      </a:solidFill>
+                      <a:prstDash val="solid"/>
+                      <a:round/>
+                      <a:headEnd type="none" w="med" len="med"/>
+                      <a:tailEnd type="none" w="med" len="med"/>
+                    </a:lnT>
+                    <a:lnB w="12700" cap="flat" cmpd="sng" algn="ctr">
+                      <a:solidFill>
+                        <a:srgbClr val="D8D8E6"/>
+                      </a:solidFill>
+                      <a:prstDash val="solid"/>
+                      <a:round/>
+                      <a:headEnd type="none" w="med" len="med"/>
+                      <a:tailEnd type="none" w="med" len="med"/>
+                    </a:lnB>
+                    <a:solidFill>
+                      <a:srgbClr val="2B2B7A"/>
+                    </a:solidFill>
+                  </a:tcPr>
+                </a:tc>
+                <a:tc>
+                  <a:txBody>
+                    <a:bodyPr/>
+                    <a:lstStyle/>
+                    <a:p>
+                      <a:pPr algn="ctr" indent="0" marL="0">
+                        <a:buNone/>
+                      </a:pPr>
+                      <a:r>
+                        <a:rPr lang="en-US" sz="1200" b="1" dirty="0">
+                          <a:solidFill>
+                            <a:srgbClr val="FFFFFF"/>
+                          </a:solidFill>
+                          <a:latin typeface="Calibri" pitchFamily="34" charset="0"/>
+                          <a:ea typeface="Calibri" pitchFamily="34" charset="-122"/>
+                          <a:cs typeface="Calibri" pitchFamily="34" charset="-120"/>
+                        </a:rPr>
+                        <a:t>Body?</a:t>
+                      </a:r>
+                      <a:endParaRPr lang="en-US" sz="1200" dirty="0">
+                        <a:latin typeface="Calibri" charset="0"/>
+                        <a:ea typeface="Calibri" charset="0"/>
+                        <a:cs typeface="Calibri" charset="0"/>
+                      </a:endParaRPr>
+                    </a:p>
+                  </a:txBody>
+                  <a:tcPr marL="91440" marR="91440" marT="45720" marB="45720" anchor="ctr">
+                    <a:lnL w="12700" cap="flat" cmpd="sng" algn="ctr">
+                      <a:solidFill>
+                        <a:srgbClr val="D8D8E6"/>
+                      </a:solidFill>
+                      <a:prstDash val="solid"/>
+                      <a:round/>
+                      <a:headEnd type="none" w="med" len="med"/>
+                      <a:tailEnd type="none" w="med" len="med"/>
+                    </a:lnL>
+                    <a:lnR w="12700" cap="flat" cmpd="sng" algn="ctr">
+                      <a:solidFill>
+                        <a:srgbClr val="D8D8E6"/>
+                      </a:solidFill>
+                      <a:prstDash val="solid"/>
+                      <a:round/>
+                      <a:headEnd type="none" w="med" len="med"/>
+                      <a:tailEnd type="none" w="med" len="med"/>
+                    </a:lnR>
+                    <a:lnT w="12700" cap="flat" cmpd="sng" algn="ctr">
+                      <a:solidFill>
+                        <a:srgbClr val="D8D8E6"/>
+                      </a:solidFill>
+                      <a:prstDash val="solid"/>
+                      <a:round/>
+                      <a:headEnd type="none" w="med" len="med"/>
+                      <a:tailEnd type="none" w="med" len="med"/>
+                    </a:lnT>
+                    <a:lnB w="12700" cap="flat" cmpd="sng" algn="ctr">
+                      <a:solidFill>
+                        <a:srgbClr val="D8D8E6"/>
+                      </a:solidFill>
+                      <a:prstDash val="solid"/>
+                      <a:round/>
+                      <a:headEnd type="none" w="med" len="med"/>
+                      <a:tailEnd type="none" w="med" len="med"/>
+                    </a:lnB>
+                    <a:solidFill>
+                      <a:srgbClr val="2B2B7A"/>
+                    </a:solidFill>
+                  </a:tcPr>
+                </a:tc>
+              </a:tr>
+              <a:tr h="566928">
+                <a:tc>
+                  <a:txBody>
+                    <a:bodyPr/>
+                    <a:lstStyle/>
+                    <a:p>
+                      <a:pPr algn="ctr" indent="0" marL="0">
+                        <a:buNone/>
+                      </a:pPr>
+                      <a:r>
+                        <a:rPr lang="en-US" sz="1200" b="1" dirty="0">
+                          <a:solidFill>
+                            <a:srgbClr val="26262F"/>
+                          </a:solidFill>
+                          <a:latin typeface="Calibri" pitchFamily="34" charset="0"/>
+                          <a:ea typeface="Calibri" pitchFamily="34" charset="-122"/>
+                          <a:cs typeface="Calibri" pitchFamily="34" charset="-120"/>
+                        </a:rPr>
+                        <a:t>GET</a:t>
+                      </a:r>
+                      <a:endParaRPr lang="en-US" sz="1200" dirty="0">
+                        <a:latin typeface="Calibri" charset="0"/>
+                        <a:ea typeface="Calibri" charset="0"/>
+                        <a:cs typeface="Calibri" charset="0"/>
+                      </a:endParaRPr>
+                    </a:p>
+                  </a:txBody>
+                  <a:tcPr marL="91440" marR="91440" marT="45720" marB="45720" anchor="ctr">
+                    <a:lnL w="12700" cap="flat" cmpd="sng" algn="ctr">
+                      <a:solidFill>
+                        <a:srgbClr val="D8D8E6"/>
+                      </a:solidFill>
+                      <a:prstDash val="solid"/>
+                      <a:round/>
+                      <a:headEnd type="none" w="med" len="med"/>
+                      <a:tailEnd type="none" w="med" len="med"/>
+                    </a:lnL>
+                    <a:lnR w="12700" cap="flat" cmpd="sng" algn="ctr">
+                      <a:solidFill>
+                        <a:srgbClr val="D8D8E6"/>
+                      </a:solidFill>
+                      <a:prstDash val="solid"/>
+                      <a:round/>
+                      <a:headEnd type="none" w="med" len="med"/>
+                      <a:tailEnd type="none" w="med" len="med"/>
+                    </a:lnR>
+                    <a:lnT w="12700" cap="flat" cmpd="sng" algn="ctr">
+                      <a:solidFill>
+                        <a:srgbClr val="D8D8E6"/>
+                      </a:solidFill>
+                      <a:prstDash val="solid"/>
+                      <a:round/>
+                      <a:headEnd type="none" w="med" len="med"/>
+                      <a:tailEnd type="none" w="med" len="med"/>
+                    </a:lnT>
+                    <a:lnB w="12700" cap="flat" cmpd="sng" algn="ctr">
+                      <a:solidFill>
+                        <a:srgbClr val="D8D8E6"/>
+                      </a:solidFill>
+                      <a:prstDash val="solid"/>
+                      <a:round/>
+                      <a:headEnd type="none" w="med" len="med"/>
+                      <a:tailEnd type="none" w="med" len="med"/>
+                    </a:lnB>
+                    <a:solidFill>
+                      <a:srgbClr val="FFFFFF"/>
+                    </a:solidFill>
+                  </a:tcPr>
+                </a:tc>
+                <a:tc>
+                  <a:txBody>
+                    <a:bodyPr/>
+                    <a:lstStyle/>
+                    <a:p>
+                      <a:pPr algn="ctr" indent="0" marL="0">
+                        <a:buNone/>
+                      </a:pPr>
+                      <a:r>
+                        <a:rPr lang="en-US" sz="1200" dirty="0">
+                          <a:solidFill>
+                            <a:srgbClr val="26262F"/>
+                          </a:solidFill>
+                          <a:latin typeface="Calibri" pitchFamily="34" charset="0"/>
+                          <a:ea typeface="Calibri" pitchFamily="34" charset="-122"/>
+                          <a:cs typeface="Calibri" pitchFamily="34" charset="-120"/>
+                        </a:rPr>
+                        <a:t>Read</a:t>
+                      </a:r>
+                      <a:endParaRPr lang="en-US" sz="1200" dirty="0">
+                        <a:latin typeface="Calibri" charset="0"/>
+                        <a:ea typeface="Calibri" charset="0"/>
+                        <a:cs typeface="Calibri" charset="0"/>
+                      </a:endParaRPr>
+                    </a:p>
+                  </a:txBody>
+                  <a:tcPr marL="91440" marR="91440" marT="45720" marB="45720" anchor="ctr">
+                    <a:lnL w="12700" cap="flat" cmpd="sng" algn="ctr">
+                      <a:solidFill>
+                        <a:srgbClr val="D8D8E6"/>
+                      </a:solidFill>
+                      <a:prstDash val="solid"/>
+                      <a:round/>
+                      <a:headEnd type="none" w="med" len="med"/>
+                      <a:tailEnd type="none" w="med" len="med"/>
+                    </a:lnL>
+                    <a:lnR w="12700" cap="flat" cmpd="sng" algn="ctr">
+                      <a:solidFill>
+                        <a:srgbClr val="D8D8E6"/>
+                      </a:solidFill>
+                      <a:prstDash val="solid"/>
+                      <a:round/>
+                      <a:headEnd type="none" w="med" len="med"/>
+                      <a:tailEnd type="none" w="med" len="med"/>
+                    </a:lnR>
+                    <a:lnT w="12700" cap="flat" cmpd="sng" algn="ctr">
+                      <a:solidFill>
+                        <a:srgbClr val="D8D8E6"/>
+                      </a:solidFill>
+                      <a:prstDash val="solid"/>
+                      <a:round/>
+                      <a:headEnd type="none" w="med" len="med"/>
+                      <a:tailEnd type="none" w="med" len="med"/>
+                    </a:lnT>
+                    <a:lnB w="12700" cap="flat" cmpd="sng" algn="ctr">
+                      <a:solidFill>
+                        <a:srgbClr val="D8D8E6"/>
+                      </a:solidFill>
+                      <a:prstDash val="solid"/>
+                      <a:round/>
+                      <a:headEnd type="none" w="med" len="med"/>
+                      <a:tailEnd type="none" w="med" len="med"/>
+                    </a:lnB>
+                    <a:solidFill>
+                      <a:srgbClr val="FFFFFF"/>
+                    </a:solidFill>
+                  </a:tcPr>
+                </a:tc>
+                <a:tc>
+                  <a:txBody>
+                    <a:bodyPr/>
+                    <a:lstStyle/>
+                    <a:p>
+                      <a:pPr algn="l" indent="0" marL="0">
+                        <a:buNone/>
+                      </a:pPr>
+                      <a:r>
+                        <a:rPr lang="en-US" sz="1200" dirty="0">
+                          <a:solidFill>
+                            <a:srgbClr val="26262F"/>
+                          </a:solidFill>
+                          <a:latin typeface="Calibri" pitchFamily="34" charset="0"/>
+                          <a:ea typeface="Calibri" pitchFamily="34" charset="-122"/>
+                          <a:cs typeface="Calibri" pitchFamily="34" charset="-120"/>
+                        </a:rPr>
+                        <a:t>Fetch one resource or a whole collection</a:t>
+                      </a:r>
+                      <a:endParaRPr lang="en-US" sz="1200" dirty="0">
+                        <a:latin typeface="Calibri" charset="0"/>
+                        <a:ea typeface="Calibri" charset="0"/>
+                        <a:cs typeface="Calibri" charset="0"/>
+                      </a:endParaRPr>
+                    </a:p>
+                  </a:txBody>
+                  <a:tcPr marL="91440" marR="91440" marT="45720" marB="45720" anchor="ctr">
+                    <a:lnL w="12700" cap="flat" cmpd="sng" algn="ctr">
+                      <a:solidFill>
+                        <a:srgbClr val="D8D8E6"/>
+                      </a:solidFill>
+                      <a:prstDash val="solid"/>
+                      <a:round/>
+                      <a:headEnd type="none" w="med" len="med"/>
+                      <a:tailEnd type="none" w="med" len="med"/>
+                    </a:lnL>
+                    <a:lnR w="12700" cap="flat" cmpd="sng" algn="ctr">
+                      <a:solidFill>
+                        <a:srgbClr val="D8D8E6"/>
+                      </a:solidFill>
+                      <a:prstDash val="solid"/>
+                      <a:round/>
+                      <a:headEnd type="none" w="med" len="med"/>
+                      <a:tailEnd type="none" w="med" len="med"/>
+                    </a:lnR>
+                    <a:lnT w="12700" cap="flat" cmpd="sng" algn="ctr">
+                      <a:solidFill>
+                        <a:srgbClr val="D8D8E6"/>
+                      </a:solidFill>
+                      <a:prstDash val="solid"/>
+                      <a:round/>
+                      <a:headEnd type="none" w="med" len="med"/>
+                      <a:tailEnd type="none" w="med" len="med"/>
+                    </a:lnT>
+                    <a:lnB w="12700" cap="flat" cmpd="sng" algn="ctr">
+                      <a:solidFill>
+                        <a:srgbClr val="D8D8E6"/>
+                      </a:solidFill>
+                      <a:prstDash val="solid"/>
+                      <a:round/>
+                      <a:headEnd type="none" w="med" len="med"/>
+                      <a:tailEnd type="none" w="med" len="med"/>
+                    </a:lnB>
+                    <a:solidFill>
+                      <a:srgbClr val="FFFFFF"/>
+                    </a:solidFill>
+                  </a:tcPr>
+                </a:tc>
+                <a:tc>
+                  <a:txBody>
+                    <a:bodyPr/>
+                    <a:lstStyle/>
+                    <a:p>
+                      <a:pPr algn="ctr" indent="0" marL="0">
+                        <a:buNone/>
+                      </a:pPr>
+                      <a:r>
+                        <a:rPr lang="en-US" sz="1200" dirty="0">
+                          <a:solidFill>
+                            <a:srgbClr val="26262F"/>
+                          </a:solidFill>
+                          <a:latin typeface="Calibri" pitchFamily="34" charset="0"/>
+                          <a:ea typeface="Calibri" pitchFamily="34" charset="-122"/>
+                          <a:cs typeface="Calibri" pitchFamily="34" charset="-120"/>
+                        </a:rPr>
+                        <a:t>No</a:t>
+                      </a:r>
+                      <a:endParaRPr lang="en-US" sz="1200" dirty="0">
+                        <a:latin typeface="Calibri" charset="0"/>
+                        <a:ea typeface="Calibri" charset="0"/>
+                        <a:cs typeface="Calibri" charset="0"/>
+                      </a:endParaRPr>
+                    </a:p>
+                  </a:txBody>
+                  <a:tcPr marL="91440" marR="91440" marT="45720" marB="45720" anchor="ctr">
+                    <a:lnL w="12700" cap="flat" cmpd="sng" algn="ctr">
+                      <a:solidFill>
+                        <a:srgbClr val="D8D8E6"/>
+                      </a:solidFill>
+                      <a:prstDash val="solid"/>
+                      <a:round/>
+                      <a:headEnd type="none" w="med" len="med"/>
+                      <a:tailEnd type="none" w="med" len="med"/>
+                    </a:lnL>
+                    <a:lnR w="12700" cap="flat" cmpd="sng" algn="ctr">
+                      <a:solidFill>
+                        <a:srgbClr val="D8D8E6"/>
+                      </a:solidFill>
+                      <a:prstDash val="solid"/>
+                      <a:round/>
+                      <a:headEnd type="none" w="med" len="med"/>
+                      <a:tailEnd type="none" w="med" len="med"/>
+                    </a:lnR>
+                    <a:lnT w="12700" cap="flat" cmpd="sng" algn="ctr">
+                      <a:solidFill>
+                        <a:srgbClr val="D8D8E6"/>
+                      </a:solidFill>
+                      <a:prstDash val="solid"/>
+                      <a:round/>
+                      <a:headEnd type="none" w="med" len="med"/>
+                      <a:tailEnd type="none" w="med" len="med"/>
+                    </a:lnT>
+                    <a:lnB w="12700" cap="flat" cmpd="sng" algn="ctr">
+                      <a:solidFill>
+                        <a:srgbClr val="D8D8E6"/>
+                      </a:solidFill>
+                      <a:prstDash val="solid"/>
+                      <a:round/>
+                      <a:headEnd type="none" w="med" len="med"/>
+                      <a:tailEnd type="none" w="med" len="med"/>
+                    </a:lnB>
+                    <a:solidFill>
+                      <a:srgbClr val="FFFFFF"/>
+                    </a:solidFill>
+                  </a:tcPr>
+                </a:tc>
+              </a:tr>
+              <a:tr h="566928">
+                <a:tc>
+                  <a:txBody>
+                    <a:bodyPr/>
+                    <a:lstStyle/>
+                    <a:p>
+                      <a:pPr algn="ctr" indent="0" marL="0">
+                        <a:buNone/>
+                      </a:pPr>
+                      <a:r>
+                        <a:rPr lang="en-US" sz="1200" b="1" dirty="0">
+                          <a:solidFill>
+                            <a:srgbClr val="26262F"/>
+                          </a:solidFill>
+                          <a:latin typeface="Calibri" pitchFamily="34" charset="0"/>
+                          <a:ea typeface="Calibri" pitchFamily="34" charset="-122"/>
+                          <a:cs typeface="Calibri" pitchFamily="34" charset="-120"/>
+                        </a:rPr>
+                        <a:t>POST</a:t>
+                      </a:r>
+                      <a:endParaRPr lang="en-US" sz="1200" dirty="0">
+                        <a:latin typeface="Calibri" charset="0"/>
+                        <a:ea typeface="Calibri" charset="0"/>
+                        <a:cs typeface="Calibri" charset="0"/>
+                      </a:endParaRPr>
+                    </a:p>
+                  </a:txBody>
+                  <a:tcPr marL="91440" marR="91440" marT="45720" marB="45720" anchor="ctr">
+                    <a:lnL w="12700" cap="flat" cmpd="sng" algn="ctr">
+                      <a:solidFill>
+                        <a:srgbClr val="D8D8E6"/>
+                      </a:solidFill>
+                      <a:prstDash val="solid"/>
+                      <a:round/>
+                      <a:headEnd type="none" w="med" len="med"/>
+                      <a:tailEnd type="none" w="med" len="med"/>
+                    </a:lnL>
+                    <a:lnR w="12700" cap="flat" cmpd="sng" algn="ctr">
+                      <a:solidFill>
+                        <a:srgbClr val="D8D8E6"/>
+                      </a:solidFill>
+                      <a:prstDash val="solid"/>
+                      <a:round/>
+                      <a:headEnd type="none" w="med" len="med"/>
+                      <a:tailEnd type="none" w="med" len="med"/>
+                    </a:lnR>
+                    <a:lnT w="12700" cap="flat" cmpd="sng" algn="ctr">
+                      <a:solidFill>
+                        <a:srgbClr val="D8D8E6"/>
+                      </a:solidFill>
+                      <a:prstDash val="solid"/>
+                      <a:round/>
+                      <a:headEnd type="none" w="med" len="med"/>
+                      <a:tailEnd type="none" w="med" len="med"/>
+                    </a:lnT>
+                    <a:lnB w="12700" cap="flat" cmpd="sng" algn="ctr">
+                      <a:solidFill>
+                        <a:srgbClr val="D8D8E6"/>
+                      </a:solidFill>
+                      <a:prstDash val="solid"/>
+                      <a:round/>
+                      <a:headEnd type="none" w="med" len="med"/>
+                      <a:tailEnd type="none" w="med" len="med"/>
+                    </a:lnB>
+                    <a:solidFill>
+                      <a:srgbClr val="FFFFFF"/>
+                    </a:solidFill>
+                  </a:tcPr>
+                </a:tc>
+                <a:tc>
+                  <a:txBody>
+                    <a:bodyPr/>
+                    <a:lstStyle/>
+                    <a:p>
+                      <a:pPr algn="ctr" indent="0" marL="0">
+                        <a:buNone/>
+                      </a:pPr>
+                      <a:r>
+                        <a:rPr lang="en-US" sz="1200" dirty="0">
+                          <a:solidFill>
+                            <a:srgbClr val="26262F"/>
+                          </a:solidFill>
+                          <a:latin typeface="Calibri" pitchFamily="34" charset="0"/>
+                          <a:ea typeface="Calibri" pitchFamily="34" charset="-122"/>
+                          <a:cs typeface="Calibri" pitchFamily="34" charset="-120"/>
+                        </a:rPr>
+                        <a:t>Create</a:t>
+                      </a:r>
+                      <a:endParaRPr lang="en-US" sz="1200" dirty="0">
+                        <a:latin typeface="Calibri" charset="0"/>
+                        <a:ea typeface="Calibri" charset="0"/>
+                        <a:cs typeface="Calibri" charset="0"/>
+                      </a:endParaRPr>
+                    </a:p>
+                  </a:txBody>
+                  <a:tcPr marL="91440" marR="91440" marT="45720" marB="45720" anchor="ctr">
+                    <a:lnL w="12700" cap="flat" cmpd="sng" algn="ctr">
+                      <a:solidFill>
+                        <a:srgbClr val="D8D8E6"/>
+                      </a:solidFill>
+                      <a:prstDash val="solid"/>
+                      <a:round/>
+                      <a:headEnd type="none" w="med" len="med"/>
+                      <a:tailEnd type="none" w="med" len="med"/>
+                    </a:lnL>
+                    <a:lnR w="12700" cap="flat" cmpd="sng" algn="ctr">
+                      <a:solidFill>
+                        <a:srgbClr val="D8D8E6"/>
+                      </a:solidFill>
+                      <a:prstDash val="solid"/>
+                      <a:round/>
+                      <a:headEnd type="none" w="med" len="med"/>
+                      <a:tailEnd type="none" w="med" len="med"/>
+                    </a:lnR>
+                    <a:lnT w="12700" cap="flat" cmpd="sng" algn="ctr">
+                      <a:solidFill>
+                        <a:srgbClr val="D8D8E6"/>
+                      </a:solidFill>
+                      <a:prstDash val="solid"/>
+                      <a:round/>
+                      <a:headEnd type="none" w="med" len="med"/>
+                      <a:tailEnd type="none" w="med" len="med"/>
+                    </a:lnT>
+                    <a:lnB w="12700" cap="flat" cmpd="sng" algn="ctr">
+                      <a:solidFill>
+                        <a:srgbClr val="D8D8E6"/>
+                      </a:solidFill>
+                      <a:prstDash val="solid"/>
+                      <a:round/>
+                      <a:headEnd type="none" w="med" len="med"/>
+                      <a:tailEnd type="none" w="med" len="med"/>
+                    </a:lnB>
+                    <a:solidFill>
+                      <a:srgbClr val="FFFFFF"/>
+                    </a:solidFill>
+                  </a:tcPr>
+                </a:tc>
+                <a:tc>
+                  <a:txBody>
+                    <a:bodyPr/>
+                    <a:lstStyle/>
+                    <a:p>
+                      <a:pPr algn="l" indent="0" marL="0">
+                        <a:buNone/>
+                      </a:pPr>
+                      <a:r>
+                        <a:rPr lang="en-US" sz="1200" dirty="0">
+                          <a:solidFill>
+                            <a:srgbClr val="26262F"/>
+                          </a:solidFill>
+                          <a:latin typeface="Calibri" pitchFamily="34" charset="0"/>
+                          <a:ea typeface="Calibri" pitchFamily="34" charset="-122"/>
+                          <a:cs typeface="Calibri" pitchFamily="34" charset="-120"/>
+                        </a:rPr>
+                        <a:t>Add a brand-new resource</a:t>
+                      </a:r>
+                      <a:endParaRPr lang="en-US" sz="1200" dirty="0">
+                        <a:latin typeface="Calibri" charset="0"/>
+                        <a:ea typeface="Calibri" charset="0"/>
+                        <a:cs typeface="Calibri" charset="0"/>
+                      </a:endParaRPr>
+                    </a:p>
+                  </a:txBody>
+                  <a:tcPr marL="91440" marR="91440" marT="45720" marB="45720" anchor="ctr">
+                    <a:lnL w="12700" cap="flat" cmpd="sng" algn="ctr">
+                      <a:solidFill>
+                        <a:srgbClr val="D8D8E6"/>
+                      </a:solidFill>
+                      <a:prstDash val="solid"/>
+                      <a:round/>
+                      <a:headEnd type="none" w="med" len="med"/>
+                      <a:tailEnd type="none" w="med" len="med"/>
+                    </a:lnL>
+                    <a:lnR w="12700" cap="flat" cmpd="sng" algn="ctr">
+                      <a:solidFill>
+                        <a:srgbClr val="D8D8E6"/>
+                      </a:solidFill>
+                      <a:prstDash val="solid"/>
+                      <a:round/>
+                      <a:headEnd type="none" w="med" len="med"/>
+                      <a:tailEnd type="none" w="med" len="med"/>
+                    </a:lnR>
+                    <a:lnT w="12700" cap="flat" cmpd="sng" algn="ctr">
+                      <a:solidFill>
+                        <a:srgbClr val="D8D8E6"/>
+                      </a:solidFill>
+                      <a:prstDash val="solid"/>
+                      <a:round/>
+                      <a:headEnd type="none" w="med" len="med"/>
+                      <a:tailEnd type="none" w="med" len="med"/>
+                    </a:lnT>
+                    <a:lnB w="12700" cap="flat" cmpd="sng" algn="ctr">
+                      <a:solidFill>
+                        <a:srgbClr val="D8D8E6"/>
+                      </a:solidFill>
+                      <a:prstDash val="solid"/>
+                      <a:round/>
+                      <a:headEnd type="none" w="med" len="med"/>
+                      <a:tailEnd type="none" w="med" len="med"/>
+                    </a:lnB>
+                    <a:solidFill>
+                      <a:srgbClr val="FFFFFF"/>
+                    </a:solidFill>
+                  </a:tcPr>
+                </a:tc>
+                <a:tc>
+                  <a:txBody>
+                    <a:bodyPr/>
+                    <a:lstStyle/>
+                    <a:p>
+                      <a:pPr algn="ctr" indent="0" marL="0">
+                        <a:buNone/>
+                      </a:pPr>
+                      <a:r>
+                        <a:rPr lang="en-US" sz="1200" dirty="0">
+                          <a:solidFill>
+                            <a:srgbClr val="26262F"/>
+                          </a:solidFill>
+                          <a:latin typeface="Calibri" pitchFamily="34" charset="0"/>
+                          <a:ea typeface="Calibri" pitchFamily="34" charset="-122"/>
+                          <a:cs typeface="Calibri" pitchFamily="34" charset="-120"/>
+                        </a:rPr>
+                        <a:t>Yes</a:t>
+                      </a:r>
+                      <a:endParaRPr lang="en-US" sz="1200" dirty="0">
+                        <a:latin typeface="Calibri" charset="0"/>
+                        <a:ea typeface="Calibri" charset="0"/>
+                        <a:cs typeface="Calibri" charset="0"/>
+                      </a:endParaRPr>
+                    </a:p>
+                  </a:txBody>
+                  <a:tcPr marL="91440" marR="91440" marT="45720" marB="45720" anchor="ctr">
+                    <a:lnL w="12700" cap="flat" cmpd="sng" algn="ctr">
+                      <a:solidFill>
+                        <a:srgbClr val="D8D8E6"/>
+                      </a:solidFill>
+                      <a:prstDash val="solid"/>
+                      <a:round/>
+                      <a:headEnd type="none" w="med" len="med"/>
+                      <a:tailEnd type="none" w="med" len="med"/>
+                    </a:lnL>
+                    <a:lnR w="12700" cap="flat" cmpd="sng" algn="ctr">
+                      <a:solidFill>
+                        <a:srgbClr val="D8D8E6"/>
+                      </a:solidFill>
+                      <a:prstDash val="solid"/>
+                      <a:round/>
+                      <a:headEnd type="none" w="med" len="med"/>
+                      <a:tailEnd type="none" w="med" len="med"/>
+                    </a:lnR>
+                    <a:lnT w="12700" cap="flat" cmpd="sng" algn="ctr">
+                      <a:solidFill>
+                        <a:srgbClr val="D8D8E6"/>
+                      </a:solidFill>
+                      <a:prstDash val="solid"/>
+                      <a:round/>
+                      <a:headEnd type="none" w="med" len="med"/>
+                      <a:tailEnd type="none" w="med" len="med"/>
+                    </a:lnT>
+                    <a:lnB w="12700" cap="flat" cmpd="sng" algn="ctr">
+                      <a:solidFill>
+                        <a:srgbClr val="D8D8E6"/>
+                      </a:solidFill>
+                      <a:prstDash val="solid"/>
+                      <a:round/>
+                      <a:headEnd type="none" w="med" len="med"/>
+                      <a:tailEnd type="none" w="med" len="med"/>
+                    </a:lnB>
+                    <a:solidFill>
+                      <a:srgbClr val="FFFFFF"/>
+                    </a:solidFill>
+                  </a:tcPr>
+                </a:tc>
+              </a:tr>
+              <a:tr h="566928">
+                <a:tc>
+                  <a:txBody>
+                    <a:bodyPr/>
+                    <a:lstStyle/>
+                    <a:p>
+                      <a:pPr algn="ctr" indent="0" marL="0">
+                        <a:buNone/>
+                      </a:pPr>
+                      <a:r>
+                        <a:rPr lang="en-US" sz="1200" b="1" dirty="0">
+                          <a:solidFill>
+                            <a:srgbClr val="26262F"/>
+                          </a:solidFill>
+                          <a:latin typeface="Calibri" pitchFamily="34" charset="0"/>
+                          <a:ea typeface="Calibri" pitchFamily="34" charset="-122"/>
+                          <a:cs typeface="Calibri" pitchFamily="34" charset="-120"/>
+                        </a:rPr>
+                        <a:t>PUT</a:t>
+                      </a:r>
+                      <a:endParaRPr lang="en-US" sz="1200" dirty="0">
+                        <a:latin typeface="Calibri" charset="0"/>
+                        <a:ea typeface="Calibri" charset="0"/>
+                        <a:cs typeface="Calibri" charset="0"/>
+                      </a:endParaRPr>
+                    </a:p>
+                  </a:txBody>
+                  <a:tcPr marL="91440" marR="91440" marT="45720" marB="45720" anchor="ctr">
+                    <a:lnL w="12700" cap="flat" cmpd="sng" algn="ctr">
+                      <a:solidFill>
+                        <a:srgbClr val="D8D8E6"/>
+                      </a:solidFill>
+                      <a:prstDash val="solid"/>
+                      <a:round/>
+                      <a:headEnd type="none" w="med" len="med"/>
+                      <a:tailEnd type="none" w="med" len="med"/>
+                    </a:lnL>
+                    <a:lnR w="12700" cap="flat" cmpd="sng" algn="ctr">
+                      <a:solidFill>
+                        <a:srgbClr val="D8D8E6"/>
+                      </a:solidFill>
+                      <a:prstDash val="solid"/>
+                      <a:round/>
+                      <a:headEnd type="none" w="med" len="med"/>
+                      <a:tailEnd type="none" w="med" len="med"/>
+                    </a:lnR>
+                    <a:lnT w="12700" cap="flat" cmpd="sng" algn="ctr">
+                      <a:solidFill>
+                        <a:srgbClr val="D8D8E6"/>
+                      </a:solidFill>
+                      <a:prstDash val="solid"/>
+                      <a:round/>
+                      <a:headEnd type="none" w="med" len="med"/>
+                      <a:tailEnd type="none" w="med" len="med"/>
+                    </a:lnT>
+                    <a:lnB w="12700" cap="flat" cmpd="sng" algn="ctr">
+                      <a:solidFill>
+                        <a:srgbClr val="D8D8E6"/>
+                      </a:solidFill>
+                      <a:prstDash val="solid"/>
+                      <a:round/>
+                      <a:headEnd type="none" w="med" len="med"/>
+                      <a:tailEnd type="none" w="med" len="med"/>
+                    </a:lnB>
+                    <a:solidFill>
+                      <a:srgbClr val="FFFFFF"/>
+                    </a:solidFill>
+                  </a:tcPr>
+                </a:tc>
+                <a:tc>
+                  <a:txBody>
+                    <a:bodyPr/>
+                    <a:lstStyle/>
+                    <a:p>
+                      <a:pPr algn="ctr" indent="0" marL="0">
+                        <a:buNone/>
+                      </a:pPr>
+                      <a:r>
+                        <a:rPr lang="en-US" sz="1200" dirty="0">
+                          <a:solidFill>
+                            <a:srgbClr val="26262F"/>
+                          </a:solidFill>
+                          <a:latin typeface="Calibri" pitchFamily="34" charset="0"/>
+                          <a:ea typeface="Calibri" pitchFamily="34" charset="-122"/>
+                          <a:cs typeface="Calibri" pitchFamily="34" charset="-120"/>
+                        </a:rPr>
+                        <a:t>Update</a:t>
+                      </a:r>
+                      <a:endParaRPr lang="en-US" sz="1200" dirty="0">
+                        <a:latin typeface="Calibri" charset="0"/>
+                        <a:ea typeface="Calibri" charset="0"/>
+                        <a:cs typeface="Calibri" charset="0"/>
+                      </a:endParaRPr>
+                    </a:p>
+                  </a:txBody>
+                  <a:tcPr marL="91440" marR="91440" marT="45720" marB="45720" anchor="ctr">
+                    <a:lnL w="12700" cap="flat" cmpd="sng" algn="ctr">
+                      <a:solidFill>
+                        <a:srgbClr val="D8D8E6"/>
+                      </a:solidFill>
+                      <a:prstDash val="solid"/>
+                      <a:round/>
+                      <a:headEnd type="none" w="med" len="med"/>
+                      <a:tailEnd type="none" w="med" len="med"/>
+                    </a:lnL>
+                    <a:lnR w="12700" cap="flat" cmpd="sng" algn="ctr">
+                      <a:solidFill>
+                        <a:srgbClr val="D8D8E6"/>
+                      </a:solidFill>
+                      <a:prstDash val="solid"/>
+                      <a:round/>
+                      <a:headEnd type="none" w="med" len="med"/>
+                      <a:tailEnd type="none" w="med" len="med"/>
+                    </a:lnR>
+                    <a:lnT w="12700" cap="flat" cmpd="sng" algn="ctr">
+                      <a:solidFill>
+                        <a:srgbClr val="D8D8E6"/>
+                      </a:solidFill>
+                      <a:prstDash val="solid"/>
+                      <a:round/>
+                      <a:headEnd type="none" w="med" len="med"/>
+                      <a:tailEnd type="none" w="med" len="med"/>
+                    </a:lnT>
+                    <a:lnB w="12700" cap="flat" cmpd="sng" algn="ctr">
+                      <a:solidFill>
+                        <a:srgbClr val="D8D8E6"/>
+                      </a:solidFill>
+                      <a:prstDash val="solid"/>
+                      <a:round/>
+                      <a:headEnd type="none" w="med" len="med"/>
+                      <a:tailEnd type="none" w="med" len="med"/>
+                    </a:lnB>
+                    <a:solidFill>
+                      <a:srgbClr val="FFFFFF"/>
+                    </a:solidFill>
+                  </a:tcPr>
+                </a:tc>
+                <a:tc>
+                  <a:txBody>
+                    <a:bodyPr/>
+                    <a:lstStyle/>
+                    <a:p>
+                      <a:pPr algn="l" indent="0" marL="0">
+                        <a:buNone/>
+                      </a:pPr>
+                      <a:r>
+                        <a:rPr lang="en-US" sz="1200" dirty="0">
+                          <a:solidFill>
+                            <a:srgbClr val="26262F"/>
+                          </a:solidFill>
+                          <a:latin typeface="Calibri" pitchFamily="34" charset="0"/>
+                          <a:ea typeface="Calibri" pitchFamily="34" charset="-122"/>
+                          <a:cs typeface="Calibri" pitchFamily="34" charset="-120"/>
+                        </a:rPr>
+                        <a:t>Replace a resource's fields entirely</a:t>
+                      </a:r>
+                      <a:endParaRPr lang="en-US" sz="1200" dirty="0">
+                        <a:latin typeface="Calibri" charset="0"/>
+                        <a:ea typeface="Calibri" charset="0"/>
+                        <a:cs typeface="Calibri" charset="0"/>
+                      </a:endParaRPr>
+                    </a:p>
+                  </a:txBody>
+                  <a:tcPr marL="91440" marR="91440" marT="45720" marB="45720" anchor="ctr">
+                    <a:lnL w="12700" cap="flat" cmpd="sng" algn="ctr">
+                      <a:solidFill>
+                        <a:srgbClr val="D8D8E6"/>
+                      </a:solidFill>
+                      <a:prstDash val="solid"/>
+                      <a:round/>
+                      <a:headEnd type="none" w="med" len="med"/>
+                      <a:tailEnd type="none" w="med" len="med"/>
+                    </a:lnL>
+                    <a:lnR w="12700" cap="flat" cmpd="sng" algn="ctr">
+                      <a:solidFill>
+                        <a:srgbClr val="D8D8E6"/>
+                      </a:solidFill>
+                      <a:prstDash val="solid"/>
+                      <a:round/>
+                      <a:headEnd type="none" w="med" len="med"/>
+                      <a:tailEnd type="none" w="med" len="med"/>
+                    </a:lnR>
+                    <a:lnT w="12700" cap="flat" cmpd="sng" algn="ctr">
+                      <a:solidFill>
+                        <a:srgbClr val="D8D8E6"/>
+                      </a:solidFill>
+                      <a:prstDash val="solid"/>
+                      <a:round/>
+                      <a:headEnd type="none" w="med" len="med"/>
+                      <a:tailEnd type="none" w="med" len="med"/>
+                    </a:lnT>
+                    <a:lnB w="12700" cap="flat" cmpd="sng" algn="ctr">
+                      <a:solidFill>
+                        <a:srgbClr val="D8D8E6"/>
+                      </a:solidFill>
+                      <a:prstDash val="solid"/>
+                      <a:round/>
+                      <a:headEnd type="none" w="med" len="med"/>
+                      <a:tailEnd type="none" w="med" len="med"/>
+                    </a:lnB>
+                    <a:solidFill>
+                      <a:srgbClr val="FFFFFF"/>
+                    </a:solidFill>
+                  </a:tcPr>
+                </a:tc>
+                <a:tc>
+                  <a:txBody>
+                    <a:bodyPr/>
+                    <a:lstStyle/>
+                    <a:p>
+                      <a:pPr algn="ctr" indent="0" marL="0">
+                        <a:buNone/>
+                      </a:pPr>
+                      <a:r>
+                        <a:rPr lang="en-US" sz="1200" dirty="0">
+                          <a:solidFill>
+                            <a:srgbClr val="26262F"/>
+                          </a:solidFill>
+                          <a:latin typeface="Calibri" pitchFamily="34" charset="0"/>
+                          <a:ea typeface="Calibri" pitchFamily="34" charset="-122"/>
+                          <a:cs typeface="Calibri" pitchFamily="34" charset="-120"/>
+                        </a:rPr>
+                        <a:t>Yes</a:t>
+                      </a:r>
+                      <a:endParaRPr lang="en-US" sz="1200" dirty="0">
+                        <a:latin typeface="Calibri" charset="0"/>
+                        <a:ea typeface="Calibri" charset="0"/>
+                        <a:cs typeface="Calibri" charset="0"/>
+                      </a:endParaRPr>
+                    </a:p>
+                  </a:txBody>
+                  <a:tcPr marL="91440" marR="91440" marT="45720" marB="45720" anchor="ctr">
+                    <a:lnL w="12700" cap="flat" cmpd="sng" algn="ctr">
+                      <a:solidFill>
+                        <a:srgbClr val="D8D8E6"/>
+                      </a:solidFill>
+                      <a:prstDash val="solid"/>
+                      <a:round/>
+                      <a:headEnd type="none" w="med" len="med"/>
+                      <a:tailEnd type="none" w="med" len="med"/>
+                    </a:lnL>
+                    <a:lnR w="12700" cap="flat" cmpd="sng" algn="ctr">
+                      <a:solidFill>
+                        <a:srgbClr val="D8D8E6"/>
+                      </a:solidFill>
+                      <a:prstDash val="solid"/>
+                      <a:round/>
+                      <a:headEnd type="none" w="med" len="med"/>
+                      <a:tailEnd type="none" w="med" len="med"/>
+                    </a:lnR>
+                    <a:lnT w="12700" cap="flat" cmpd="sng" algn="ctr">
+                      <a:solidFill>
+                        <a:srgbClr val="D8D8E6"/>
+                      </a:solidFill>
+                      <a:prstDash val="solid"/>
+                      <a:round/>
+                      <a:headEnd type="none" w="med" len="med"/>
+                      <a:tailEnd type="none" w="med" len="med"/>
+                    </a:lnT>
+                    <a:lnB w="12700" cap="flat" cmpd="sng" algn="ctr">
+                      <a:solidFill>
+                        <a:srgbClr val="D8D8E6"/>
+                      </a:solidFill>
+                      <a:prstDash val="solid"/>
+                      <a:round/>
+                      <a:headEnd type="none" w="med" len="med"/>
+                      <a:tailEnd type="none" w="med" len="med"/>
+                    </a:lnB>
+                    <a:solidFill>
+                      <a:srgbClr val="FFFFFF"/>
+                    </a:solidFill>
+                  </a:tcPr>
+                </a:tc>
+              </a:tr>
+              <a:tr h="566928">
+                <a:tc>
+                  <a:txBody>
+                    <a:bodyPr/>
+                    <a:lstStyle/>
+                    <a:p>
+                      <a:pPr algn="ctr" indent="0" marL="0">
+                        <a:buNone/>
+                      </a:pPr>
+                      <a:r>
+                        <a:rPr lang="en-US" sz="1200" b="1" dirty="0">
+                          <a:solidFill>
+                            <a:srgbClr val="26262F"/>
+                          </a:solidFill>
+                          <a:latin typeface="Calibri" pitchFamily="34" charset="0"/>
+                          <a:ea typeface="Calibri" pitchFamily="34" charset="-122"/>
+                          <a:cs typeface="Calibri" pitchFamily="34" charset="-120"/>
+                        </a:rPr>
+                        <a:t>PATCH</a:t>
+                      </a:r>
+                      <a:endParaRPr lang="en-US" sz="1200" dirty="0">
+                        <a:latin typeface="Calibri" charset="0"/>
+                        <a:ea typeface="Calibri" charset="0"/>
+                        <a:cs typeface="Calibri" charset="0"/>
+                      </a:endParaRPr>
+                    </a:p>
+                  </a:txBody>
+                  <a:tcPr marL="91440" marR="91440" marT="45720" marB="45720" anchor="ctr">
+                    <a:lnL w="12700" cap="flat" cmpd="sng" algn="ctr">
+                      <a:solidFill>
+                        <a:srgbClr val="D8D8E6"/>
+                      </a:solidFill>
+                      <a:prstDash val="solid"/>
+                      <a:round/>
+                      <a:headEnd type="none" w="med" len="med"/>
+                      <a:tailEnd type="none" w="med" len="med"/>
+                    </a:lnL>
+                    <a:lnR w="12700" cap="flat" cmpd="sng" algn="ctr">
+                      <a:solidFill>
+                        <a:srgbClr val="D8D8E6"/>
+                      </a:solidFill>
+                      <a:prstDash val="solid"/>
+                      <a:round/>
+                      <a:headEnd type="none" w="med" len="med"/>
+                      <a:tailEnd type="none" w="med" len="med"/>
+                    </a:lnR>
+                    <a:lnT w="12700" cap="flat" cmpd="sng" algn="ctr">
+                      <a:solidFill>
+                        <a:srgbClr val="D8D8E6"/>
+                      </a:solidFill>
+                      <a:prstDash val="solid"/>
+                      <a:round/>
+                      <a:headEnd type="none" w="med" len="med"/>
+                      <a:tailEnd type="none" w="med" len="med"/>
+                    </a:lnT>
+                    <a:lnB w="12700" cap="flat" cmpd="sng" algn="ctr">
+                      <a:solidFill>
+                        <a:srgbClr val="D8D8E6"/>
+                      </a:solidFill>
+                      <a:prstDash val="solid"/>
+                      <a:round/>
+                      <a:headEnd type="none" w="med" len="med"/>
+                      <a:tailEnd type="none" w="med" len="med"/>
+                    </a:lnB>
+                    <a:solidFill>
+                      <a:srgbClr val="FFFFFF"/>
+                    </a:solidFill>
+                  </a:tcPr>
+                </a:tc>
+                <a:tc>
+                  <a:txBody>
+                    <a:bodyPr/>
+                    <a:lstStyle/>
+                    <a:p>
+                      <a:pPr algn="ctr" indent="0" marL="0">
+                        <a:buNone/>
+                      </a:pPr>
+                      <a:r>
+                        <a:rPr lang="en-US" sz="1200" dirty="0">
+                          <a:solidFill>
+                            <a:srgbClr val="26262F"/>
+                          </a:solidFill>
+                          <a:latin typeface="Calibri" pitchFamily="34" charset="0"/>
+                          <a:ea typeface="Calibri" pitchFamily="34" charset="-122"/>
+                          <a:cs typeface="Calibri" pitchFamily="34" charset="-120"/>
+                        </a:rPr>
+                        <a:t>Update</a:t>
+                      </a:r>
+                      <a:endParaRPr lang="en-US" sz="1200" dirty="0">
+                        <a:latin typeface="Calibri" charset="0"/>
+                        <a:ea typeface="Calibri" charset="0"/>
+                        <a:cs typeface="Calibri" charset="0"/>
+                      </a:endParaRPr>
+                    </a:p>
+                  </a:txBody>
+                  <a:tcPr marL="91440" marR="91440" marT="45720" marB="45720" anchor="ctr">
+                    <a:lnL w="12700" cap="flat" cmpd="sng" algn="ctr">
+                      <a:solidFill>
+                        <a:srgbClr val="D8D8E6"/>
+                      </a:solidFill>
+                      <a:prstDash val="solid"/>
+                      <a:round/>
+                      <a:headEnd type="none" w="med" len="med"/>
+                      <a:tailEnd type="none" w="med" len="med"/>
+                    </a:lnL>
+                    <a:lnR w="12700" cap="flat" cmpd="sng" algn="ctr">
+                      <a:solidFill>
+                        <a:srgbClr val="D8D8E6"/>
+                      </a:solidFill>
+                      <a:prstDash val="solid"/>
+                      <a:round/>
+                      <a:headEnd type="none" w="med" len="med"/>
+                      <a:tailEnd type="none" w="med" len="med"/>
+                    </a:lnR>
+                    <a:lnT w="12700" cap="flat" cmpd="sng" algn="ctr">
+                      <a:solidFill>
+                        <a:srgbClr val="D8D8E6"/>
+                      </a:solidFill>
+                      <a:prstDash val="solid"/>
+                      <a:round/>
+                      <a:headEnd type="none" w="med" len="med"/>
+                      <a:tailEnd type="none" w="med" len="med"/>
+                    </a:lnT>
+                    <a:lnB w="12700" cap="flat" cmpd="sng" algn="ctr">
+                      <a:solidFill>
+                        <a:srgbClr val="D8D8E6"/>
+                      </a:solidFill>
+                      <a:prstDash val="solid"/>
+                      <a:round/>
+                      <a:headEnd type="none" w="med" len="med"/>
+                      <a:tailEnd type="none" w="med" len="med"/>
+                    </a:lnB>
+                    <a:solidFill>
+                      <a:srgbClr val="FFFFFF"/>
+                    </a:solidFill>
+                  </a:tcPr>
+                </a:tc>
+                <a:tc>
+                  <a:txBody>
+                    <a:bodyPr/>
+                    <a:lstStyle/>
+                    <a:p>
+                      <a:pPr algn="l" indent="0" marL="0">
+                        <a:buNone/>
+                      </a:pPr>
+                      <a:r>
+                        <a:rPr lang="en-US" sz="1200" dirty="0">
+                          <a:solidFill>
+                            <a:srgbClr val="26262F"/>
+                          </a:solidFill>
+                          <a:latin typeface="Calibri" pitchFamily="34" charset="0"/>
+                          <a:ea typeface="Calibri" pitchFamily="34" charset="-122"/>
+                          <a:cs typeface="Calibri" pitchFamily="34" charset="-120"/>
+                        </a:rPr>
+                        <a:t>Change only some of a resource's fields</a:t>
+                      </a:r>
+                      <a:endParaRPr lang="en-US" sz="1200" dirty="0">
+                        <a:latin typeface="Calibri" charset="0"/>
+                        <a:ea typeface="Calibri" charset="0"/>
+                        <a:cs typeface="Calibri" charset="0"/>
+                      </a:endParaRPr>
+                    </a:p>
+                  </a:txBody>
+                  <a:tcPr marL="91440" marR="91440" marT="45720" marB="45720" anchor="ctr">
+                    <a:lnL w="12700" cap="flat" cmpd="sng" algn="ctr">
+                      <a:solidFill>
+                        <a:srgbClr val="D8D8E6"/>
+                      </a:solidFill>
+                      <a:prstDash val="solid"/>
+                      <a:round/>
+                      <a:headEnd type="none" w="med" len="med"/>
+                      <a:tailEnd type="none" w="med" len="med"/>
+                    </a:lnL>
+                    <a:lnR w="12700" cap="flat" cmpd="sng" algn="ctr">
+                      <a:solidFill>
+                        <a:srgbClr val="D8D8E6"/>
+                      </a:solidFill>
+                      <a:prstDash val="solid"/>
+                      <a:round/>
+                      <a:headEnd type="none" w="med" len="med"/>
+                      <a:tailEnd type="none" w="med" len="med"/>
+                    </a:lnR>
+                    <a:lnT w="12700" cap="flat" cmpd="sng" algn="ctr">
+                      <a:solidFill>
+                        <a:srgbClr val="D8D8E6"/>
+                      </a:solidFill>
+                      <a:prstDash val="solid"/>
+                      <a:round/>
+                      <a:headEnd type="none" w="med" len="med"/>
+                      <a:tailEnd type="none" w="med" len="med"/>
+                    </a:lnT>
+                    <a:lnB w="12700" cap="flat" cmpd="sng" algn="ctr">
+                      <a:solidFill>
+                        <a:srgbClr val="D8D8E6"/>
+                      </a:solidFill>
+                      <a:prstDash val="solid"/>
+                      <a:round/>
+                      <a:headEnd type="none" w="med" len="med"/>
+                      <a:tailEnd type="none" w="med" len="med"/>
+                    </a:lnB>
+                    <a:solidFill>
+                      <a:srgbClr val="FFFFFF"/>
+                    </a:solidFill>
+                  </a:tcPr>
+                </a:tc>
+                <a:tc>
+                  <a:txBody>
+                    <a:bodyPr/>
+                    <a:lstStyle/>
+                    <a:p>
+                      <a:pPr algn="ctr" indent="0" marL="0">
+                        <a:buNone/>
+                      </a:pPr>
+                      <a:r>
+                        <a:rPr lang="en-US" sz="1200" dirty="0">
+                          <a:solidFill>
+                            <a:srgbClr val="26262F"/>
+                          </a:solidFill>
+                          <a:latin typeface="Calibri" pitchFamily="34" charset="0"/>
+                          <a:ea typeface="Calibri" pitchFamily="34" charset="-122"/>
+                          <a:cs typeface="Calibri" pitchFamily="34" charset="-120"/>
+                        </a:rPr>
+                        <a:t>Yes</a:t>
+                      </a:r>
+                      <a:endParaRPr lang="en-US" sz="1200" dirty="0">
+                        <a:latin typeface="Calibri" charset="0"/>
+                        <a:ea typeface="Calibri" charset="0"/>
+                        <a:cs typeface="Calibri" charset="0"/>
+                      </a:endParaRPr>
+                    </a:p>
+                  </a:txBody>
+                  <a:tcPr marL="91440" marR="91440" marT="45720" marB="45720" anchor="ctr">
+                    <a:lnL w="12700" cap="flat" cmpd="sng" algn="ctr">
+                      <a:solidFill>
+                        <a:srgbClr val="D8D8E6"/>
+                      </a:solidFill>
+                      <a:prstDash val="solid"/>
+                      <a:round/>
+                      <a:headEnd type="none" w="med" len="med"/>
+                      <a:tailEnd type="none" w="med" len="med"/>
+                    </a:lnL>
+                    <a:lnR w="12700" cap="flat" cmpd="sng" algn="ctr">
+                      <a:solidFill>
+                        <a:srgbClr val="D8D8E6"/>
+                      </a:solidFill>
+                      <a:prstDash val="solid"/>
+                      <a:round/>
+                      <a:headEnd type="none" w="med" len="med"/>
+                      <a:tailEnd type="none" w="med" len="med"/>
+                    </a:lnR>
+                    <a:lnT w="12700" cap="flat" cmpd="sng" algn="ctr">
+                      <a:solidFill>
+                        <a:srgbClr val="D8D8E6"/>
+                      </a:solidFill>
+                      <a:prstDash val="solid"/>
+                      <a:round/>
+                      <a:headEnd type="none" w="med" len="med"/>
+                      <a:tailEnd type="none" w="med" len="med"/>
+                    </a:lnT>
+                    <a:lnB w="12700" cap="flat" cmpd="sng" algn="ctr">
+                      <a:solidFill>
+                        <a:srgbClr val="D8D8E6"/>
+                      </a:solidFill>
+                      <a:prstDash val="solid"/>
+                      <a:round/>
+                      <a:headEnd type="none" w="med" len="med"/>
+                      <a:tailEnd type="none" w="med" len="med"/>
+                    </a:lnB>
+                    <a:solidFill>
+                      <a:srgbClr val="FFFFFF"/>
+                    </a:solidFill>
+                  </a:tcPr>
+                </a:tc>
+              </a:tr>
+              <a:tr h="566928">
+                <a:tc>
+                  <a:txBody>
+                    <a:bodyPr/>
+                    <a:lstStyle/>
+                    <a:p>
+                      <a:pPr algn="ctr" indent="0" marL="0">
+                        <a:buNone/>
+                      </a:pPr>
+                      <a:r>
+                        <a:rPr lang="en-US" sz="1200" b="1" dirty="0">
+                          <a:solidFill>
+                            <a:srgbClr val="26262F"/>
+                          </a:solidFill>
+                          <a:latin typeface="Calibri" pitchFamily="34" charset="0"/>
+                          <a:ea typeface="Calibri" pitchFamily="34" charset="-122"/>
+                          <a:cs typeface="Calibri" pitchFamily="34" charset="-120"/>
+                        </a:rPr>
+                        <a:t>DELETE</a:t>
+                      </a:r>
+                      <a:endParaRPr lang="en-US" sz="1200" dirty="0">
+                        <a:latin typeface="Calibri" charset="0"/>
+                        <a:ea typeface="Calibri" charset="0"/>
+                        <a:cs typeface="Calibri" charset="0"/>
+                      </a:endParaRPr>
+                    </a:p>
+                  </a:txBody>
+                  <a:tcPr marL="91440" marR="91440" marT="45720" marB="45720" anchor="ctr">
+                    <a:lnL w="12700" cap="flat" cmpd="sng" algn="ctr">
+                      <a:solidFill>
+                        <a:srgbClr val="D8D8E6"/>
+                      </a:solidFill>
+                      <a:prstDash val="solid"/>
+                      <a:round/>
+                      <a:headEnd type="none" w="med" len="med"/>
+                      <a:tailEnd type="none" w="med" len="med"/>
+                    </a:lnL>
+                    <a:lnR w="12700" cap="flat" cmpd="sng" algn="ctr">
+                      <a:solidFill>
+                        <a:srgbClr val="D8D8E6"/>
+                      </a:solidFill>
+                      <a:prstDash val="solid"/>
+                      <a:round/>
+                      <a:headEnd type="none" w="med" len="med"/>
+                      <a:tailEnd type="none" w="med" len="med"/>
+                    </a:lnR>
+                    <a:lnT w="12700" cap="flat" cmpd="sng" algn="ctr">
+                      <a:solidFill>
+                        <a:srgbClr val="D8D8E6"/>
+                      </a:solidFill>
+                      <a:prstDash val="solid"/>
+                      <a:round/>
+                      <a:headEnd type="none" w="med" len="med"/>
+                      <a:tailEnd type="none" w="med" len="med"/>
+                    </a:lnT>
+                    <a:lnB w="12700" cap="flat" cmpd="sng" algn="ctr">
+                      <a:solidFill>
+                        <a:srgbClr val="D8D8E6"/>
+                      </a:solidFill>
+                      <a:prstDash val="solid"/>
+                      <a:round/>
+                      <a:headEnd type="none" w="med" len="med"/>
+                      <a:tailEnd type="none" w="med" len="med"/>
+                    </a:lnB>
+                    <a:solidFill>
+                      <a:srgbClr val="FFFFFF"/>
+                    </a:solidFill>
+                  </a:tcPr>
+                </a:tc>
+                <a:tc>
+                  <a:txBody>
+                    <a:bodyPr/>
+                    <a:lstStyle/>
+                    <a:p>
+                      <a:pPr algn="ctr" indent="0" marL="0">
+                        <a:buNone/>
+                      </a:pPr>
+                      <a:r>
+                        <a:rPr lang="en-US" sz="1200" dirty="0">
+                          <a:solidFill>
+                            <a:srgbClr val="26262F"/>
+                          </a:solidFill>
+                          <a:latin typeface="Calibri" pitchFamily="34" charset="0"/>
+                          <a:ea typeface="Calibri" pitchFamily="34" charset="-122"/>
+                          <a:cs typeface="Calibri" pitchFamily="34" charset="-120"/>
+                        </a:rPr>
+                        <a:t>Delete</a:t>
+                      </a:r>
+                      <a:endParaRPr lang="en-US" sz="1200" dirty="0">
+                        <a:latin typeface="Calibri" charset="0"/>
+                        <a:ea typeface="Calibri" charset="0"/>
+                        <a:cs typeface="Calibri" charset="0"/>
+                      </a:endParaRPr>
+                    </a:p>
+                  </a:txBody>
+                  <a:tcPr marL="91440" marR="91440" marT="45720" marB="45720" anchor="ctr">
+                    <a:lnL w="12700" cap="flat" cmpd="sng" algn="ctr">
+                      <a:solidFill>
+                        <a:srgbClr val="D8D8E6"/>
+                      </a:solidFill>
+                      <a:prstDash val="solid"/>
+                      <a:round/>
+                      <a:headEnd type="none" w="med" len="med"/>
+                      <a:tailEnd type="none" w="med" len="med"/>
+                    </a:lnL>
+                    <a:lnR w="12700" cap="flat" cmpd="sng" algn="ctr">
+                      <a:solidFill>
+                        <a:srgbClr val="D8D8E6"/>
+                      </a:solidFill>
+                      <a:prstDash val="solid"/>
+                      <a:round/>
+                      <a:headEnd type="none" w="med" len="med"/>
+                      <a:tailEnd type="none" w="med" len="med"/>
+                    </a:lnR>
+                    <a:lnT w="12700" cap="flat" cmpd="sng" algn="ctr">
+                      <a:solidFill>
+                        <a:srgbClr val="D8D8E6"/>
+                      </a:solidFill>
+                      <a:prstDash val="solid"/>
+                      <a:round/>
+                      <a:headEnd type="none" w="med" len="med"/>
+                      <a:tailEnd type="none" w="med" len="med"/>
+                    </a:lnT>
+                    <a:lnB w="12700" cap="flat" cmpd="sng" algn="ctr">
+                      <a:solidFill>
+                        <a:srgbClr val="D8D8E6"/>
+                      </a:solidFill>
+                      <a:prstDash val="solid"/>
+                      <a:round/>
+                      <a:headEnd type="none" w="med" len="med"/>
+                      <a:tailEnd type="none" w="med" len="med"/>
+                    </a:lnB>
+                    <a:solidFill>
+                      <a:srgbClr val="FFFFFF"/>
+                    </a:solidFill>
+                  </a:tcPr>
+                </a:tc>
+                <a:tc>
+                  <a:txBody>
+                    <a:bodyPr/>
+                    <a:lstStyle/>
+                    <a:p>
+                      <a:pPr algn="l" indent="0" marL="0">
+                        <a:buNone/>
+                      </a:pPr>
+                      <a:r>
+                        <a:rPr lang="en-US" sz="1200" dirty="0">
+                          <a:solidFill>
+                            <a:srgbClr val="26262F"/>
+                          </a:solidFill>
+                          <a:latin typeface="Calibri" pitchFamily="34" charset="0"/>
+                          <a:ea typeface="Calibri" pitchFamily="34" charset="-122"/>
+                          <a:cs typeface="Calibri" pitchFamily="34" charset="-120"/>
+                        </a:rPr>
+                        <a:t>Remove a resource</a:t>
+                      </a:r>
+                      <a:endParaRPr lang="en-US" sz="1200" dirty="0">
+                        <a:latin typeface="Calibri" charset="0"/>
+                        <a:ea typeface="Calibri" charset="0"/>
+                        <a:cs typeface="Calibri" charset="0"/>
+                      </a:endParaRPr>
+                    </a:p>
+                  </a:txBody>
+                  <a:tcPr marL="91440" marR="91440" marT="45720" marB="45720" anchor="ctr">
+                    <a:lnL w="12700" cap="flat" cmpd="sng" algn="ctr">
+                      <a:solidFill>
+                        <a:srgbClr val="D8D8E6"/>
+                      </a:solidFill>
+                      <a:prstDash val="solid"/>
+                      <a:round/>
+                      <a:headEnd type="none" w="med" len="med"/>
+                      <a:tailEnd type="none" w="med" len="med"/>
+                    </a:lnL>
+                    <a:lnR w="12700" cap="flat" cmpd="sng" algn="ctr">
+                      <a:solidFill>
+                        <a:srgbClr val="D8D8E6"/>
+                      </a:solidFill>
+                      <a:prstDash val="solid"/>
+                      <a:round/>
+                      <a:headEnd type="none" w="med" len="med"/>
+                      <a:tailEnd type="none" w="med" len="med"/>
+                    </a:lnR>
+                    <a:lnT w="12700" cap="flat" cmpd="sng" algn="ctr">
+                      <a:solidFill>
+                        <a:srgbClr val="D8D8E6"/>
+                      </a:solidFill>
+                      <a:prstDash val="solid"/>
+                      <a:round/>
+                      <a:headEnd type="none" w="med" len="med"/>
+                      <a:tailEnd type="none" w="med" len="med"/>
+                    </a:lnT>
+                    <a:lnB w="12700" cap="flat" cmpd="sng" algn="ctr">
+                      <a:solidFill>
+                        <a:srgbClr val="D8D8E6"/>
+                      </a:solidFill>
+                      <a:prstDash val="solid"/>
+                      <a:round/>
+                      <a:headEnd type="none" w="med" len="med"/>
+                      <a:tailEnd type="none" w="med" len="med"/>
+                    </a:lnB>
+                    <a:solidFill>
+                      <a:srgbClr val="FFFFFF"/>
+                    </a:solidFill>
+                  </a:tcPr>
+                </a:tc>
+                <a:tc>
+                  <a:txBody>
+                    <a:bodyPr/>
+                    <a:lstStyle/>
+                    <a:p>
+                      <a:pPr algn="ctr" indent="0" marL="0">
+                        <a:buNone/>
+                      </a:pPr>
+                      <a:r>
+                        <a:rPr lang="en-US" sz="1200" dirty="0">
+                          <a:solidFill>
+                            <a:srgbClr val="26262F"/>
+                          </a:solidFill>
+                          <a:latin typeface="Calibri" pitchFamily="34" charset="0"/>
+                          <a:ea typeface="Calibri" pitchFamily="34" charset="-122"/>
+                          <a:cs typeface="Calibri" pitchFamily="34" charset="-120"/>
+                        </a:rPr>
+                        <a:t>No</a:t>
+                      </a:r>
+                      <a:endParaRPr lang="en-US" sz="1200" dirty="0">
+                        <a:latin typeface="Calibri" charset="0"/>
+                        <a:ea typeface="Calibri" charset="0"/>
+                        <a:cs typeface="Calibri" charset="0"/>
+                      </a:endParaRPr>
+                    </a:p>
+                  </a:txBody>
+                  <a:tcPr marL="91440" marR="91440" marT="45720" marB="45720" anchor="ctr">
+                    <a:lnL w="12700" cap="flat" cmpd="sng" algn="ctr">
+                      <a:solidFill>
+                        <a:srgbClr val="D8D8E6"/>
+                      </a:solidFill>
+                      <a:prstDash val="solid"/>
+                      <a:round/>
+                      <a:headEnd type="none" w="med" len="med"/>
+                      <a:tailEnd type="none" w="med" len="med"/>
+                    </a:lnL>
+                    <a:lnR w="12700" cap="flat" cmpd="sng" algn="ctr">
+                      <a:solidFill>
+                        <a:srgbClr val="D8D8E6"/>
+                      </a:solidFill>
+                      <a:prstDash val="solid"/>
+                      <a:round/>
+                      <a:headEnd type="none" w="med" len="med"/>
+                      <a:tailEnd type="none" w="med" len="med"/>
+                    </a:lnR>
+                    <a:lnT w="12700" cap="flat" cmpd="sng" algn="ctr">
+                      <a:solidFill>
+                        <a:srgbClr val="D8D8E6"/>
+                      </a:solidFill>
+                      <a:prstDash val="solid"/>
+                      <a:round/>
+                      <a:headEnd type="none" w="med" len="med"/>
+                      <a:tailEnd type="none" w="med" len="med"/>
+                    </a:lnT>
+                    <a:lnB w="12700" cap="flat" cmpd="sng" algn="ctr">
+                      <a:solidFill>
+                        <a:srgbClr val="D8D8E6"/>
+                      </a:solidFill>
+                      <a:prstDash val="solid"/>
+                      <a:round/>
+                      <a:headEnd type="none" w="med" len="med"/>
+                      <a:tailEnd type="none" w="med" len="med"/>
+                    </a:lnB>
+                    <a:solidFill>
+                      <a:srgbClr val="FFFFFF"/>
+                    </a:solidFill>
+                  </a:tcPr>
+                </a:tc>
+              </a:tr>
+            </a:tbl>
+          </a:graphicData>
+        </a:graphic>
+      </p:graphicFrame>
+      <p:sp>
+        <p:nvSpPr>
+          <p:cNvPr id="5" name="Text 2"/>
+          <p:cNvSpPr txBox="1"/>
+          <p:nvPr/>
+        </p:nvSpPr>
+        <p:spPr>
+          <a:xfrm>
+            <a:off x="640080" y="6035040"/>
+            <a:ext cx="10911535" cy="365760"/>
+          </a:xfrm>
+          <a:prstGeom prst="rect">
+            <a:avLst/>
+          </a:prstGeom>
+          <a:noFill/>
+          <a:ln/>
+        </p:spPr>
+        <p:txBody>
+          <a:bodyPr wrap="square" lIns="0" tIns="0" rIns="0" bIns="0" rtlCol="0" anchor="ctr"/>
+          <a:lstStyle/>
+          <a:p>
+            <a:pPr indent="0" marL="0">
+              <a:buNone/>
+            </a:pPr>
+            <a:r>
+              <a:rPr lang="en-US" sz="1150" i="1" dirty="0">
+                <a:solidFill>
+                  <a:srgbClr val="5D5D72"/>
+                </a:solidFill>
+                <a:latin typeface="Calibri" pitchFamily="34" charset="0"/>
+                <a:ea typeface="Calibri" pitchFamily="34" charset="-122"/>
+                <a:cs typeface="Calibri" pitchFamily="34" charset="-120"/>
+              </a:rPr>
+              <a:t>The same URL does something different depending on the method -- GET /stories/5 reads it, PUT /stories/5 replaces it, DELETE /stories/5 removes it.</a:t>
+            </a:r>
+            <a:endParaRPr lang="en-US" sz="1150" dirty="0"/>
+          </a:p>
+        </p:txBody>
+      </p:sp>
+      <p:sp>
+        <p:nvSpPr>
+          <p:cNvPr id="30" name="cuinotes-footer-mark"/>
+          <p:cNvSpPr txBox="1"/>
+          <p:nvPr/>
+        </p:nvSpPr>
+        <p:spPr>
+          <a:xfrm>
+            <a:off x="9951720" y="6455664"/>
+            <a:ext cx="2011680" cy="292608"/>
+          </a:xfrm>
+          <a:prstGeom prst="rect">
+            <a:avLst/>
+          </a:prstGeom>
+          <a:noFill/>
+        </p:spPr>
+        <p:txBody>
+          <a:bodyPr wrap="none" lIns="0" rIns="0" tIns="0" bIns="0">
+            <a:spAutoFit/>
+          </a:bodyPr>
+          <a:lstStyle/>
+          <a:p>
+            <a:pPr algn="r"/>
+            <a:r>
+              <a:rPr sz="1000">
+                <a:solidFill>
+                  <a:srgbClr val="8A939B"/>
+                </a:solidFill>
+                <a:hlinkClick r:id="rId3"/>
+              </a:rPr>
+              <a:t>cuinotes.com</a:t>
+            </a:r>
+            <a:r>
+              <a:rPr sz="1000">
+                <a:solidFill>
+                  <a:srgbClr val="8A939B"/>
+                </a:solidFill>
+              </a:rPr>
+              <a:t>  ·  25</a:t>
+            </a:r>
+          </a:p>
+        </p:txBody>
+      </p:sp>
+    </p:spTree>
+  </p:cSld>
+  <p:clrMapOvr>
+    <a:masterClrMapping/>
+  </p:clrMapOvr>
+</p:sld>
+</file>
+
+<file path=ppt/slides/slide38.xml><?xml version="1.0" encoding="utf-8"?>
+<p:sld xmlns:a="http://schemas.openxmlformats.org/drawingml/2006/main" xmlns:r="http://schemas.openxmlformats.org/officeDocument/2006/relationships" xmlns:p="http://schemas.openxmlformats.org/presentationml/2006/main">
+  <p:cSld name="Slide 28">
+    <p:bg>
+      <p:bgPr>
+        <a:solidFill>
+          <a:srgbClr val="FFFFFF"/>
+        </a:solidFill>
+      </p:bgPr>
+    </p:bg>
+    <p:spTree>
+      <p:nvGrpSpPr>
+        <p:cNvPr id="1" name=""/>
+        <p:cNvGrpSpPr/>
+        <p:nvPr/>
+      </p:nvGrpSpPr>
+      <p:grpSpPr>
+        <a:xfrm>
+          <a:off x="0" y="0"/>
+          <a:ext cx="0" cy="0"/>
+          <a:chOff x="0" y="0"/>
+          <a:chExt cx="0" cy="0"/>
+        </a:xfrm>
+      </p:grpSpPr>
+      <p:sp>
+        <p:nvSpPr>
+          <p:cNvPr id="2" name="Text 0"/>
+          <p:cNvSpPr txBox="1"/>
+          <p:nvPr/>
+        </p:nvSpPr>
+        <p:spPr>
+          <a:xfrm>
+            <a:off x="640080" y="457200"/>
+            <a:ext cx="10058400" cy="365760"/>
+          </a:xfrm>
+          <a:prstGeom prst="rect">
+            <a:avLst/>
+          </a:prstGeom>
+          <a:noFill/>
+          <a:ln/>
+        </p:spPr>
+        <p:txBody>
+          <a:bodyPr wrap="square" lIns="0" tIns="0" rIns="0" bIns="0" rtlCol="0" anchor="ctr"/>
+          <a:lstStyle/>
+          <a:p>
+            <a:pPr algn="l" indent="0" marL="0">
+              <a:buNone/>
+            </a:pPr>
+            <a:r>
+              <a:rPr lang="en-US" sz="1300" b="1" spc="300" kern="0" dirty="0">
+                <a:solidFill>
+                  <a:srgbClr val="FF8A3D"/>
+                </a:solidFill>
+                <a:latin typeface="Calibri" pitchFamily="34" charset="0"/>
+                <a:ea typeface="Calibri" pitchFamily="34" charset="-122"/>
+                <a:cs typeface="Calibri" pitchFamily="34" charset="-120"/>
+              </a:rPr>
+              <a:t>REST APIS AND HTTP METHODS</a:t>
+            </a:r>
+            <a:endParaRPr lang="en-US" sz="1300" dirty="0"/>
+          </a:p>
+        </p:txBody>
+      </p:sp>
+      <p:sp>
+        <p:nvSpPr>
+          <p:cNvPr id="3" name="Text 1"/>
+          <p:cNvSpPr txBox="1"/>
+          <p:nvPr/>
+        </p:nvSpPr>
+        <p:spPr>
+          <a:xfrm>
+            <a:off x="640080" y="841248"/>
+            <a:ext cx="10881360" cy="914400"/>
+          </a:xfrm>
+          <a:prstGeom prst="rect">
+            <a:avLst/>
+          </a:prstGeom>
+          <a:noFill/>
+          <a:ln/>
+        </p:spPr>
+        <p:txBody>
+          <a:bodyPr wrap="square" lIns="0" tIns="0" rIns="0" bIns="0" rtlCol="0" anchor="ctr"/>
+          <a:lstStyle/>
+          <a:p>
+            <a:pPr algn="l" indent="0" marL="0">
+              <a:buNone/>
+            </a:pPr>
+            <a:r>
+              <a:rPr lang="en-US" sz="3400" b="1" dirty="0">
+                <a:solidFill>
+                  <a:srgbClr val="2B2B7A"/>
+                </a:solidFill>
+                <a:latin typeface="Cambria" pitchFamily="34" charset="0"/>
+                <a:ea typeface="Cambria" pitchFamily="34" charset="-122"/>
+                <a:cs typeface="Cambria" pitchFamily="34" charset="-120"/>
+              </a:rPr>
+              <a:t>A Real Example: the Fake Stories API</a:t>
+            </a:r>
+            <a:endParaRPr lang="en-US" sz="3400" dirty="0"/>
+          </a:p>
+        </p:txBody>
+      </p:sp>
+      <p:graphicFrame>
+        <p:nvGraphicFramePr>
+          <p:cNvPr id="29" name="Table 0"/>
+          <p:cNvGraphicFramePr>
+            <a:graphicFrameLocks noGrp="1"/>
+          </p:cNvGraphicFramePr>
+          <p:nvPr>
+            <p:extLst>
+              <p:ext uri="{D42A27DB-BD31-4B8C-83A1-F6EECF244321}">
+                <p14:modId xmlns:p14="http://schemas.microsoft.com/office/powerpoint/2010/main" val="1579011935"/>
+              </p:ext>
+            </p:extLst>
+          </p:nvPr>
+        </p:nvGraphicFramePr>
+        <p:xfrm>
+          <a:off x="640080" y="1965960"/>
+          <a:ext cx="10911535" cy="3401568"/>
+        </p:xfrm>
+        <a:graphic>
+          <a:graphicData uri="http://schemas.openxmlformats.org/drawingml/2006/table">
+            <a:tbl>
+              <a:tblPr/>
+              <a:tblGrid>
+                <a:gridCol w="1400000"/>
+                <a:gridCol w="2311535"/>
+                <a:gridCol w="3200000"/>
+                <a:gridCol w="4000000"/>
+              </a:tblGrid>
+              <a:tr h="566928">
+                <a:tc>
+                  <a:txBody>
+                    <a:bodyPr/>
+                    <a:lstStyle/>
+                    <a:p>
+                      <a:pPr algn="ctr" indent="0" marL="0">
+                        <a:buNone/>
+                      </a:pPr>
+                      <a:r>
+                        <a:rPr lang="en-US" sz="1200" b="1" dirty="0">
+                          <a:solidFill>
+                            <a:srgbClr val="FFFFFF"/>
+                          </a:solidFill>
+                          <a:latin typeface="Calibri" pitchFamily="34" charset="0"/>
+                          <a:ea typeface="Calibri" pitchFamily="34" charset="-122"/>
+                          <a:cs typeface="Calibri" pitchFamily="34" charset="-120"/>
+                        </a:rPr>
+                        <a:t>Method</a:t>
+                      </a:r>
+                      <a:endParaRPr lang="en-US" sz="1200" dirty="0">
+                        <a:latin typeface="Calibri" charset="0"/>
+                        <a:ea typeface="Calibri" charset="0"/>
+                        <a:cs typeface="Calibri" charset="0"/>
+                      </a:endParaRPr>
+                    </a:p>
+                  </a:txBody>
+                  <a:tcPr marL="91440" marR="91440" marT="45720" marB="45720" anchor="ctr">
+                    <a:lnL w="12700" cap="flat" cmpd="sng" algn="ctr">
+                      <a:solidFill>
+                        <a:srgbClr val="D8D8E6"/>
+                      </a:solidFill>
+                      <a:prstDash val="solid"/>
+                      <a:round/>
+                      <a:headEnd type="none" w="med" len="med"/>
+                      <a:tailEnd type="none" w="med" len="med"/>
+                    </a:lnL>
+                    <a:lnR w="12700" cap="flat" cmpd="sng" algn="ctr">
+                      <a:solidFill>
+                        <a:srgbClr val="D8D8E6"/>
+                      </a:solidFill>
+                      <a:prstDash val="solid"/>
+                      <a:round/>
+                      <a:headEnd type="none" w="med" len="med"/>
+                      <a:tailEnd type="none" w="med" len="med"/>
+                    </a:lnR>
+                    <a:lnT w="12700" cap="flat" cmpd="sng" algn="ctr">
+                      <a:solidFill>
+                        <a:srgbClr val="D8D8E6"/>
+                      </a:solidFill>
+                      <a:prstDash val="solid"/>
+                      <a:round/>
+                      <a:headEnd type="none" w="med" len="med"/>
+                      <a:tailEnd type="none" w="med" len="med"/>
+                    </a:lnT>
+                    <a:lnB w="12700" cap="flat" cmpd="sng" algn="ctr">
+                      <a:solidFill>
+                        <a:srgbClr val="D8D8E6"/>
+                      </a:solidFill>
+                      <a:prstDash val="solid"/>
+                      <a:round/>
+                      <a:headEnd type="none" w="med" len="med"/>
+                      <a:tailEnd type="none" w="med" len="med"/>
+                    </a:lnB>
+                    <a:solidFill>
+                      <a:srgbClr val="2B2B7A"/>
+                    </a:solidFill>
+                  </a:tcPr>
+                </a:tc>
+                <a:tc>
+                  <a:txBody>
+                    <a:bodyPr/>
+                    <a:lstStyle/>
+                    <a:p>
+                      <a:pPr algn="l" indent="0" marL="0">
+                        <a:buNone/>
+                      </a:pPr>
+                      <a:r>
+                        <a:rPr lang="en-US" sz="1200" b="1" dirty="0">
+                          <a:solidFill>
+                            <a:srgbClr val="FFFFFF"/>
+                          </a:solidFill>
+                          <a:latin typeface="Calibri" pitchFamily="34" charset="0"/>
+                          <a:ea typeface="Calibri" pitchFamily="34" charset="-122"/>
+                          <a:cs typeface="Calibri" pitchFamily="34" charset="-120"/>
+                        </a:rPr>
+                        <a:t>Endpoint</a:t>
+                      </a:r>
+                      <a:endParaRPr lang="en-US" sz="1200" dirty="0">
+                        <a:latin typeface="Calibri" charset="0"/>
+                        <a:ea typeface="Calibri" charset="0"/>
+                        <a:cs typeface="Calibri" charset="0"/>
+                      </a:endParaRPr>
+                    </a:p>
+                  </a:txBody>
+                  <a:tcPr marL="91440" marR="91440" marT="45720" marB="45720" anchor="ctr">
+                    <a:lnL w="12700" cap="flat" cmpd="sng" algn="ctr">
+                      <a:solidFill>
+                        <a:srgbClr val="D8D8E6"/>
+                      </a:solidFill>
+                      <a:prstDash val="solid"/>
+                      <a:round/>
+                      <a:headEnd type="none" w="med" len="med"/>
+                      <a:tailEnd type="none" w="med" len="med"/>
+                    </a:lnL>
+                    <a:lnR w="12700" cap="flat" cmpd="sng" algn="ctr">
+                      <a:solidFill>
+                        <a:srgbClr val="D8D8E6"/>
+                      </a:solidFill>
+                      <a:prstDash val="solid"/>
+                      <a:round/>
+                      <a:headEnd type="none" w="med" len="med"/>
+                      <a:tailEnd type="none" w="med" len="med"/>
+                    </a:lnR>
+                    <a:lnT w="12700" cap="flat" cmpd="sng" algn="ctr">
+                      <a:solidFill>
+                        <a:srgbClr val="D8D8E6"/>
+                      </a:solidFill>
+                      <a:prstDash val="solid"/>
+                      <a:round/>
+                      <a:headEnd type="none" w="med" len="med"/>
+                      <a:tailEnd type="none" w="med" len="med"/>
+                    </a:lnT>
+                    <a:lnB w="12700" cap="flat" cmpd="sng" algn="ctr">
+                      <a:solidFill>
+                        <a:srgbClr val="D8D8E6"/>
+                      </a:solidFill>
+                      <a:prstDash val="solid"/>
+                      <a:round/>
+                      <a:headEnd type="none" w="med" len="med"/>
+                      <a:tailEnd type="none" w="med" len="med"/>
+                    </a:lnB>
+                    <a:solidFill>
+                      <a:srgbClr val="2B2B7A"/>
+                    </a:solidFill>
+                  </a:tcPr>
+                </a:tc>
+                <a:tc>
+                  <a:txBody>
+                    <a:bodyPr/>
+                    <a:lstStyle/>
+                    <a:p>
+                      <a:pPr algn="l" indent="0" marL="0">
+                        <a:buNone/>
+                      </a:pPr>
+                      <a:r>
+                        <a:rPr lang="en-US" sz="1200" b="1" dirty="0">
+                          <a:solidFill>
+                            <a:srgbClr val="FFFFFF"/>
+                          </a:solidFill>
+                          <a:latin typeface="Calibri" pitchFamily="34" charset="0"/>
+                          <a:ea typeface="Calibri" pitchFamily="34" charset="-122"/>
+                          <a:cs typeface="Calibri" pitchFamily="34" charset="-120"/>
+                        </a:rPr>
+                        <a:t>Body</a:t>
+                      </a:r>
+                      <a:endParaRPr lang="en-US" sz="1200" dirty="0">
+                        <a:latin typeface="Calibri" charset="0"/>
+                        <a:ea typeface="Calibri" charset="0"/>
+                        <a:cs typeface="Calibri" charset="0"/>
+                      </a:endParaRPr>
+                    </a:p>
+                  </a:txBody>
+                  <a:tcPr marL="91440" marR="91440" marT="45720" marB="45720" anchor="ctr">
+                    <a:lnL w="12700" cap="flat" cmpd="sng" algn="ctr">
+                      <a:solidFill>
+                        <a:srgbClr val="D8D8E6"/>
+                      </a:solidFill>
+                      <a:prstDash val="solid"/>
+                      <a:round/>
+                      <a:headEnd type="none" w="med" len="med"/>
+                      <a:tailEnd type="none" w="med" len="med"/>
+                    </a:lnL>
+                    <a:lnR w="12700" cap="flat" cmpd="sng" algn="ctr">
+                      <a:solidFill>
+                        <a:srgbClr val="D8D8E6"/>
+                      </a:solidFill>
+                      <a:prstDash val="solid"/>
+                      <a:round/>
+                      <a:headEnd type="none" w="med" len="med"/>
+                      <a:tailEnd type="none" w="med" len="med"/>
+                    </a:lnR>
+                    <a:lnT w="12700" cap="flat" cmpd="sng" algn="ctr">
+                      <a:solidFill>
+                        <a:srgbClr val="D8D8E6"/>
+                      </a:solidFill>
+                      <a:prstDash val="solid"/>
+                      <a:round/>
+                      <a:headEnd type="none" w="med" len="med"/>
+                      <a:tailEnd type="none" w="med" len="med"/>
+                    </a:lnT>
+                    <a:lnB w="12700" cap="flat" cmpd="sng" algn="ctr">
+                      <a:solidFill>
+                        <a:srgbClr val="D8D8E6"/>
+                      </a:solidFill>
+                      <a:prstDash val="solid"/>
+                      <a:round/>
+                      <a:headEnd type="none" w="med" len="med"/>
+                      <a:tailEnd type="none" w="med" len="med"/>
+                    </a:lnB>
+                    <a:solidFill>
+                      <a:srgbClr val="2B2B7A"/>
+                    </a:solidFill>
+                  </a:tcPr>
+                </a:tc>
+                <a:tc>
+                  <a:txBody>
+                    <a:bodyPr/>
+                    <a:lstStyle/>
+                    <a:p>
+                      <a:pPr algn="l" indent="0" marL="0">
+                        <a:buNone/>
+                      </a:pPr>
+                      <a:r>
+                        <a:rPr lang="en-US" sz="1200" b="1" dirty="0">
+                          <a:solidFill>
+                            <a:srgbClr val="FFFFFF"/>
+                          </a:solidFill>
+                          <a:latin typeface="Calibri" pitchFamily="34" charset="0"/>
+                          <a:ea typeface="Calibri" pitchFamily="34" charset="-122"/>
+                          <a:cs typeface="Calibri" pitchFamily="34" charset="-120"/>
+                        </a:rPr>
+                        <a:t>Returns</a:t>
+                      </a:r>
+                      <a:endParaRPr lang="en-US" sz="1200" dirty="0">
+                        <a:latin typeface="Calibri" charset="0"/>
+                        <a:ea typeface="Calibri" charset="0"/>
+                        <a:cs typeface="Calibri" charset="0"/>
+                      </a:endParaRPr>
+                    </a:p>
+                  </a:txBody>
+                  <a:tcPr marL="91440" marR="91440" marT="45720" marB="45720" anchor="ctr">
+                    <a:lnL w="12700" cap="flat" cmpd="sng" algn="ctr">
+                      <a:solidFill>
+                        <a:srgbClr val="D8D8E6"/>
+                      </a:solidFill>
+                      <a:prstDash val="solid"/>
+                      <a:round/>
+                      <a:headEnd type="none" w="med" len="med"/>
+                      <a:tailEnd type="none" w="med" len="med"/>
+                    </a:lnL>
+                    <a:lnR w="12700" cap="flat" cmpd="sng" algn="ctr">
+                      <a:solidFill>
+                        <a:srgbClr val="D8D8E6"/>
+                      </a:solidFill>
+                      <a:prstDash val="solid"/>
+                      <a:round/>
+                      <a:headEnd type="none" w="med" len="med"/>
+                      <a:tailEnd type="none" w="med" len="med"/>
+                    </a:lnR>
+                    <a:lnT w="12700" cap="flat" cmpd="sng" algn="ctr">
+                      <a:solidFill>
+                        <a:srgbClr val="D8D8E6"/>
+                      </a:solidFill>
+                      <a:prstDash val="solid"/>
+                      <a:round/>
+                      <a:headEnd type="none" w="med" len="med"/>
+                      <a:tailEnd type="none" w="med" len="med"/>
+                    </a:lnT>
+                    <a:lnB w="12700" cap="flat" cmpd="sng" algn="ctr">
+                      <a:solidFill>
+                        <a:srgbClr val="D8D8E6"/>
+                      </a:solidFill>
+                      <a:prstDash val="solid"/>
+                      <a:round/>
+                      <a:headEnd type="none" w="med" len="med"/>
+                      <a:tailEnd type="none" w="med" len="med"/>
+                    </a:lnB>
+                    <a:solidFill>
+                      <a:srgbClr val="2B2B7A"/>
+                    </a:solidFill>
+                  </a:tcPr>
+                </a:tc>
+              </a:tr>
+              <a:tr h="566928">
+                <a:tc>
+                  <a:txBody>
+                    <a:bodyPr/>
+                    <a:lstStyle/>
+                    <a:p>
+                      <a:pPr algn="ctr" indent="0" marL="0">
+                        <a:buNone/>
+                      </a:pPr>
+                      <a:r>
+                        <a:rPr lang="en-US" sz="1150" b="1" dirty="0">
+                          <a:solidFill>
+                            <a:srgbClr val="26262F"/>
+                          </a:solidFill>
+                          <a:latin typeface="Calibri" pitchFamily="34" charset="0"/>
+                          <a:ea typeface="Calibri" pitchFamily="34" charset="-122"/>
+                          <a:cs typeface="Calibri" pitchFamily="34" charset="-120"/>
+                        </a:rPr>
+                        <a:t>GET</a:t>
+                      </a:r>
+                      <a:endParaRPr lang="en-US" sz="1150" dirty="0">
+                        <a:latin typeface="Calibri" charset="0"/>
+                        <a:ea typeface="Calibri" charset="0"/>
+                        <a:cs typeface="Calibri" charset="0"/>
+                      </a:endParaRPr>
+                    </a:p>
+                  </a:txBody>
+                  <a:tcPr marL="91440" marR="91440" marT="45720" marB="45720" anchor="ctr">
+                    <a:lnL w="12700" cap="flat" cmpd="sng" algn="ctr">
+                      <a:solidFill>
+                        <a:srgbClr val="D8D8E6"/>
+                      </a:solidFill>
+                      <a:prstDash val="solid"/>
+                      <a:round/>
+                      <a:headEnd type="none" w="med" len="med"/>
+                      <a:tailEnd type="none" w="med" len="med"/>
+                    </a:lnL>
+                    <a:lnR w="12700" cap="flat" cmpd="sng" algn="ctr">
+                      <a:solidFill>
+                        <a:srgbClr val="D8D8E6"/>
+                      </a:solidFill>
+                      <a:prstDash val="solid"/>
+                      <a:round/>
+                      <a:headEnd type="none" w="med" len="med"/>
+                      <a:tailEnd type="none" w="med" len="med"/>
+                    </a:lnR>
+                    <a:lnT w="12700" cap="flat" cmpd="sng" algn="ctr">
+                      <a:solidFill>
+                        <a:srgbClr val="D8D8E6"/>
+                      </a:solidFill>
+                      <a:prstDash val="solid"/>
+                      <a:round/>
+                      <a:headEnd type="none" w="med" len="med"/>
+                      <a:tailEnd type="none" w="med" len="med"/>
+                    </a:lnT>
+                    <a:lnB w="12700" cap="flat" cmpd="sng" algn="ctr">
+                      <a:solidFill>
+                        <a:srgbClr val="D8D8E6"/>
+                      </a:solidFill>
+                      <a:prstDash val="solid"/>
+                      <a:round/>
+                      <a:headEnd type="none" w="med" len="med"/>
+                      <a:tailEnd type="none" w="med" len="med"/>
+                    </a:lnB>
+                    <a:solidFill>
+                      <a:srgbClr val="FFFFFF"/>
+                    </a:solidFill>
+                  </a:tcPr>
+                </a:tc>
+                <a:tc>
+                  <a:txBody>
+                    <a:bodyPr/>
+                    <a:lstStyle/>
+                    <a:p>
+                      <a:pPr algn="l" indent="0" marL="0">
+                        <a:buNone/>
+                      </a:pPr>
+                      <a:r>
+                        <a:rPr lang="en-US" sz="1150" dirty="0">
+                          <a:solidFill>
+                            <a:srgbClr val="26262F"/>
+                          </a:solidFill>
+                          <a:latin typeface="Courier New" pitchFamily="34" charset="0"/>
+                          <a:ea typeface="Courier New" pitchFamily="34" charset="-122"/>
+                          <a:cs typeface="Courier New" pitchFamily="34" charset="-120"/>
+                        </a:rPr>
+                        <a:t>/stories</a:t>
+                      </a:r>
+                      <a:endParaRPr lang="en-US" sz="1150" dirty="0">
+                        <a:latin typeface="Courier New" charset="0"/>
+                        <a:ea typeface="Courier New" charset="0"/>
+                        <a:cs typeface="Courier New" charset="0"/>
+                      </a:endParaRPr>
+                    </a:p>
+                  </a:txBody>
+                  <a:tcPr marL="91440" marR="91440" marT="45720" marB="45720" anchor="ctr">
+                    <a:lnL w="12700" cap="flat" cmpd="sng" algn="ctr">
+                      <a:solidFill>
+                        <a:srgbClr val="D8D8E6"/>
+                      </a:solidFill>
+                      <a:prstDash val="solid"/>
+                      <a:round/>
+                      <a:headEnd type="none" w="med" len="med"/>
+                      <a:tailEnd type="none" w="med" len="med"/>
+                    </a:lnL>
+                    <a:lnR w="12700" cap="flat" cmpd="sng" algn="ctr">
+                      <a:solidFill>
+                        <a:srgbClr val="D8D8E6"/>
+                      </a:solidFill>
+                      <a:prstDash val="solid"/>
+                      <a:round/>
+                      <a:headEnd type="none" w="med" len="med"/>
+                      <a:tailEnd type="none" w="med" len="med"/>
+                    </a:lnR>
+                    <a:lnT w="12700" cap="flat" cmpd="sng" algn="ctr">
+                      <a:solidFill>
+                        <a:srgbClr val="D8D8E6"/>
+                      </a:solidFill>
+                      <a:prstDash val="solid"/>
+                      <a:round/>
+                      <a:headEnd type="none" w="med" len="med"/>
+                      <a:tailEnd type="none" w="med" len="med"/>
+                    </a:lnT>
+                    <a:lnB w="12700" cap="flat" cmpd="sng" algn="ctr">
+                      <a:solidFill>
+                        <a:srgbClr val="D8D8E6"/>
+                      </a:solidFill>
+                      <a:prstDash val="solid"/>
+                      <a:round/>
+                      <a:headEnd type="none" w="med" len="med"/>
+                      <a:tailEnd type="none" w="med" len="med"/>
+                    </a:lnB>
+                    <a:solidFill>
+                      <a:srgbClr val="FFFFFF"/>
+                    </a:solidFill>
+                  </a:tcPr>
+                </a:tc>
+                <a:tc>
+                  <a:txBody>
+                    <a:bodyPr/>
+                    <a:lstStyle/>
+                    <a:p>
+                      <a:pPr algn="l" indent="0" marL="0">
+                        <a:buNone/>
+                      </a:pPr>
+                      <a:r>
+                        <a:rPr lang="en-US" sz="1100" dirty="0">
+                          <a:solidFill>
+                            <a:srgbClr val="26262F"/>
+                          </a:solidFill>
+                          <a:latin typeface="Calibri" pitchFamily="34" charset="0"/>
+                          <a:ea typeface="Calibri" pitchFamily="34" charset="-122"/>
+                          <a:cs typeface="Calibri" pitchFamily="34" charset="-120"/>
+                        </a:rPr>
+                        <a:t>--</a:t>
+                      </a:r>
+                      <a:endParaRPr lang="en-US" sz="1100" dirty="0">
+                        <a:latin typeface="Calibri" charset="0"/>
+                        <a:ea typeface="Calibri" charset="0"/>
+                        <a:cs typeface="Calibri" charset="0"/>
+                      </a:endParaRPr>
+                    </a:p>
+                  </a:txBody>
+                  <a:tcPr marL="91440" marR="91440" marT="45720" marB="45720" anchor="ctr">
+                    <a:lnL w="12700" cap="flat" cmpd="sng" algn="ctr">
+                      <a:solidFill>
+                        <a:srgbClr val="D8D8E6"/>
+                      </a:solidFill>
+                      <a:prstDash val="solid"/>
+                      <a:round/>
+                      <a:headEnd type="none" w="med" len="med"/>
+                      <a:tailEnd type="none" w="med" len="med"/>
+                    </a:lnL>
+                    <a:lnR w="12700" cap="flat" cmpd="sng" algn="ctr">
+                      <a:solidFill>
+                        <a:srgbClr val="D8D8E6"/>
+                      </a:solidFill>
+                      <a:prstDash val="solid"/>
+                      <a:round/>
+                      <a:headEnd type="none" w="med" len="med"/>
+                      <a:tailEnd type="none" w="med" len="med"/>
+                    </a:lnR>
+                    <a:lnT w="12700" cap="flat" cmpd="sng" algn="ctr">
+                      <a:solidFill>
+                        <a:srgbClr val="D8D8E6"/>
+                      </a:solidFill>
+                      <a:prstDash val="solid"/>
+                      <a:round/>
+                      <a:headEnd type="none" w="med" len="med"/>
+                      <a:tailEnd type="none" w="med" len="med"/>
+                    </a:lnT>
+                    <a:lnB w="12700" cap="flat" cmpd="sng" algn="ctr">
+                      <a:solidFill>
+                        <a:srgbClr val="D8D8E6"/>
+                      </a:solidFill>
+                      <a:prstDash val="solid"/>
+                      <a:round/>
+                      <a:headEnd type="none" w="med" len="med"/>
+                      <a:tailEnd type="none" w="med" len="med"/>
+                    </a:lnB>
+                    <a:solidFill>
+                      <a:srgbClr val="FFFFFF"/>
+                    </a:solidFill>
+                  </a:tcPr>
+                </a:tc>
+                <a:tc>
+                  <a:txBody>
+                    <a:bodyPr/>
+                    <a:lstStyle/>
+                    <a:p>
+                      <a:pPr algn="l" indent="0" marL="0">
+                        <a:buNone/>
+                      </a:pPr>
+                      <a:r>
+                        <a:rPr lang="en-US" sz="1100" dirty="0">
+                          <a:solidFill>
+                            <a:srgbClr val="26262F"/>
+                          </a:solidFill>
+                          <a:latin typeface="Calibri" pitchFamily="34" charset="0"/>
+                          <a:ea typeface="Calibri" pitchFamily="34" charset="-122"/>
+                          <a:cs typeface="Calibri" pitchFamily="34" charset="-120"/>
+                        </a:rPr>
+                        <a:t>An array of every story</a:t>
+                      </a:r>
+                      <a:endParaRPr lang="en-US" sz="1100" dirty="0">
+                        <a:latin typeface="Calibri" charset="0"/>
+                        <a:ea typeface="Calibri" charset="0"/>
+                        <a:cs typeface="Calibri" charset="0"/>
+                      </a:endParaRPr>
+                    </a:p>
+                  </a:txBody>
+                  <a:tcPr marL="91440" marR="91440" marT="45720" marB="45720" anchor="ctr">
+                    <a:lnL w="12700" cap="flat" cmpd="sng" algn="ctr">
+                      <a:solidFill>
+                        <a:srgbClr val="D8D8E6"/>
+                      </a:solidFill>
+                      <a:prstDash val="solid"/>
+                      <a:round/>
+                      <a:headEnd type="none" w="med" len="med"/>
+                      <a:tailEnd type="none" w="med" len="med"/>
+                    </a:lnL>
+                    <a:lnR w="12700" cap="flat" cmpd="sng" algn="ctr">
+                      <a:solidFill>
+                        <a:srgbClr val="D8D8E6"/>
+                      </a:solidFill>
+                      <a:prstDash val="solid"/>
+                      <a:round/>
+                      <a:headEnd type="none" w="med" len="med"/>
+                      <a:tailEnd type="none" w="med" len="med"/>
+                    </a:lnR>
+                    <a:lnT w="12700" cap="flat" cmpd="sng" algn="ctr">
+                      <a:solidFill>
+                        <a:srgbClr val="D8D8E6"/>
+                      </a:solidFill>
+                      <a:prstDash val="solid"/>
+                      <a:round/>
+                      <a:headEnd type="none" w="med" len="med"/>
+                      <a:tailEnd type="none" w="med" len="med"/>
+                    </a:lnT>
+                    <a:lnB w="12700" cap="flat" cmpd="sng" algn="ctr">
+                      <a:solidFill>
+                        <a:srgbClr val="D8D8E6"/>
+                      </a:solidFill>
+                      <a:prstDash val="solid"/>
+                      <a:round/>
+                      <a:headEnd type="none" w="med" len="med"/>
+                      <a:tailEnd type="none" w="med" len="med"/>
+                    </a:lnB>
+                    <a:solidFill>
+                      <a:srgbClr val="FFFFFF"/>
+                    </a:solidFill>
+                  </a:tcPr>
+                </a:tc>
+              </a:tr>
+              <a:tr h="566928">
+                <a:tc>
+                  <a:txBody>
+                    <a:bodyPr/>
+                    <a:lstStyle/>
+                    <a:p>
+                      <a:pPr algn="ctr" indent="0" marL="0">
+                        <a:buNone/>
+                      </a:pPr>
+                      <a:r>
+                        <a:rPr lang="en-US" sz="1150" b="1" dirty="0">
+                          <a:solidFill>
+                            <a:srgbClr val="26262F"/>
+                          </a:solidFill>
+                          <a:latin typeface="Calibri" pitchFamily="34" charset="0"/>
+                          <a:ea typeface="Calibri" pitchFamily="34" charset="-122"/>
+                          <a:cs typeface="Calibri" pitchFamily="34" charset="-120"/>
+                        </a:rPr>
+                        <a:t>GET</a:t>
+                      </a:r>
+                      <a:endParaRPr lang="en-US" sz="1150" dirty="0">
+                        <a:latin typeface="Calibri" charset="0"/>
+                        <a:ea typeface="Calibri" charset="0"/>
+                        <a:cs typeface="Calibri" charset="0"/>
+                      </a:endParaRPr>
+                    </a:p>
+                  </a:txBody>
+                  <a:tcPr marL="91440" marR="91440" marT="45720" marB="45720" anchor="ctr">
+                    <a:lnL w="12700" cap="flat" cmpd="sng" algn="ctr">
+                      <a:solidFill>
+                        <a:srgbClr val="D8D8E6"/>
+                      </a:solidFill>
+                      <a:prstDash val="solid"/>
+                      <a:round/>
+                      <a:headEnd type="none" w="med" len="med"/>
+                      <a:tailEnd type="none" w="med" len="med"/>
+                    </a:lnL>
+                    <a:lnR w="12700" cap="flat" cmpd="sng" algn="ctr">
+                      <a:solidFill>
+                        <a:srgbClr val="D8D8E6"/>
+                      </a:solidFill>
+                      <a:prstDash val="solid"/>
+                      <a:round/>
+                      <a:headEnd type="none" w="med" len="med"/>
+                      <a:tailEnd type="none" w="med" len="med"/>
+                    </a:lnR>
+                    <a:lnT w="12700" cap="flat" cmpd="sng" algn="ctr">
+                      <a:solidFill>
+                        <a:srgbClr val="D8D8E6"/>
+                      </a:solidFill>
+                      <a:prstDash val="solid"/>
+                      <a:round/>
+                      <a:headEnd type="none" w="med" len="med"/>
+                      <a:tailEnd type="none" w="med" len="med"/>
+                    </a:lnT>
+                    <a:lnB w="12700" cap="flat" cmpd="sng" algn="ctr">
+                      <a:solidFill>
+                        <a:srgbClr val="D8D8E6"/>
+                      </a:solidFill>
+                      <a:prstDash val="solid"/>
+                      <a:round/>
+                      <a:headEnd type="none" w="med" len="med"/>
+                      <a:tailEnd type="none" w="med" len="med"/>
+                    </a:lnB>
+                    <a:solidFill>
+                      <a:srgbClr val="FFFFFF"/>
+                    </a:solidFill>
+                  </a:tcPr>
+                </a:tc>
+                <a:tc>
+                  <a:txBody>
+                    <a:bodyPr/>
+                    <a:lstStyle/>
+                    <a:p>
+                      <a:pPr algn="l" indent="0" marL="0">
+                        <a:buNone/>
+                      </a:pPr>
+                      <a:r>
+                        <a:rPr lang="en-US" sz="1150" dirty="0">
+                          <a:solidFill>
+                            <a:srgbClr val="26262F"/>
+                          </a:solidFill>
+                          <a:latin typeface="Courier New" pitchFamily="34" charset="0"/>
+                          <a:ea typeface="Courier New" pitchFamily="34" charset="-122"/>
+                          <a:cs typeface="Courier New" pitchFamily="34" charset="-120"/>
+                        </a:rPr>
+                        <a:t>/stories/:id</a:t>
+                      </a:r>
+                      <a:endParaRPr lang="en-US" sz="1150" dirty="0">
+                        <a:latin typeface="Courier New" charset="0"/>
+                        <a:ea typeface="Courier New" charset="0"/>
+                        <a:cs typeface="Courier New" charset="0"/>
+                      </a:endParaRPr>
+                    </a:p>
+                  </a:txBody>
+                  <a:tcPr marL="91440" marR="91440" marT="45720" marB="45720" anchor="ctr">
+                    <a:lnL w="12700" cap="flat" cmpd="sng" algn="ctr">
+                      <a:solidFill>
+                        <a:srgbClr val="D8D8E6"/>
+                      </a:solidFill>
+                      <a:prstDash val="solid"/>
+                      <a:round/>
+                      <a:headEnd type="none" w="med" len="med"/>
+                      <a:tailEnd type="none" w="med" len="med"/>
+                    </a:lnL>
+                    <a:lnR w="12700" cap="flat" cmpd="sng" algn="ctr">
+                      <a:solidFill>
+                        <a:srgbClr val="D8D8E6"/>
+                      </a:solidFill>
+                      <a:prstDash val="solid"/>
+                      <a:round/>
+                      <a:headEnd type="none" w="med" len="med"/>
+                      <a:tailEnd type="none" w="med" len="med"/>
+                    </a:lnR>
+                    <a:lnT w="12700" cap="flat" cmpd="sng" algn="ctr">
+                      <a:solidFill>
+                        <a:srgbClr val="D8D8E6"/>
+                      </a:solidFill>
+                      <a:prstDash val="solid"/>
+                      <a:round/>
+                      <a:headEnd type="none" w="med" len="med"/>
+                      <a:tailEnd type="none" w="med" len="med"/>
+                    </a:lnT>
+                    <a:lnB w="12700" cap="flat" cmpd="sng" algn="ctr">
+                      <a:solidFill>
+                        <a:srgbClr val="D8D8E6"/>
+                      </a:solidFill>
+                      <a:prstDash val="solid"/>
+                      <a:round/>
+                      <a:headEnd type="none" w="med" len="med"/>
+                      <a:tailEnd type="none" w="med" len="med"/>
+                    </a:lnB>
+                    <a:solidFill>
+                      <a:srgbClr val="FFFFFF"/>
+                    </a:solidFill>
+                  </a:tcPr>
+                </a:tc>
+                <a:tc>
+                  <a:txBody>
+                    <a:bodyPr/>
+                    <a:lstStyle/>
+                    <a:p>
+                      <a:pPr algn="l" indent="0" marL="0">
+                        <a:buNone/>
+                      </a:pPr>
+                      <a:r>
+                        <a:rPr lang="en-US" sz="1100" dirty="0">
+                          <a:solidFill>
+                            <a:srgbClr val="26262F"/>
+                          </a:solidFill>
+                          <a:latin typeface="Calibri" pitchFamily="34" charset="0"/>
+                          <a:ea typeface="Calibri" pitchFamily="34" charset="-122"/>
+                          <a:cs typeface="Calibri" pitchFamily="34" charset="-120"/>
+                        </a:rPr>
+                        <a:t>--</a:t>
+                      </a:r>
+                      <a:endParaRPr lang="en-US" sz="1100" dirty="0">
+                        <a:latin typeface="Calibri" charset="0"/>
+                        <a:ea typeface="Calibri" charset="0"/>
+                        <a:cs typeface="Calibri" charset="0"/>
+                      </a:endParaRPr>
+                    </a:p>
+                  </a:txBody>
+                  <a:tcPr marL="91440" marR="91440" marT="45720" marB="45720" anchor="ctr">
+                    <a:lnL w="12700" cap="flat" cmpd="sng" algn="ctr">
+                      <a:solidFill>
+                        <a:srgbClr val="D8D8E6"/>
+                      </a:solidFill>
+                      <a:prstDash val="solid"/>
+                      <a:round/>
+                      <a:headEnd type="none" w="med" len="med"/>
+                      <a:tailEnd type="none" w="med" len="med"/>
+                    </a:lnL>
+                    <a:lnR w="12700" cap="flat" cmpd="sng" algn="ctr">
+                      <a:solidFill>
+                        <a:srgbClr val="D8D8E6"/>
+                      </a:solidFill>
+                      <a:prstDash val="solid"/>
+                      <a:round/>
+                      <a:headEnd type="none" w="med" len="med"/>
+                      <a:tailEnd type="none" w="med" len="med"/>
+                    </a:lnR>
+                    <a:lnT w="12700" cap="flat" cmpd="sng" algn="ctr">
+                      <a:solidFill>
+                        <a:srgbClr val="D8D8E6"/>
+                      </a:solidFill>
+                      <a:prstDash val="solid"/>
+                      <a:round/>
+                      <a:headEnd type="none" w="med" len="med"/>
+                      <a:tailEnd type="none" w="med" len="med"/>
+                    </a:lnT>
+                    <a:lnB w="12700" cap="flat" cmpd="sng" algn="ctr">
+                      <a:solidFill>
+                        <a:srgbClr val="D8D8E6"/>
+                      </a:solidFill>
+                      <a:prstDash val="solid"/>
+                      <a:round/>
+                      <a:headEnd type="none" w="med" len="med"/>
+                      <a:tailEnd type="none" w="med" len="med"/>
+                    </a:lnB>
+                    <a:solidFill>
+                      <a:srgbClr val="FFFFFF"/>
+                    </a:solidFill>
+                  </a:tcPr>
+                </a:tc>
+                <a:tc>
+                  <a:txBody>
+                    <a:bodyPr/>
+                    <a:lstStyle/>
+                    <a:p>
+                      <a:pPr algn="l" indent="0" marL="0">
+                        <a:buNone/>
+                      </a:pPr>
+                      <a:r>
+                        <a:rPr lang="en-US" sz="1100" dirty="0">
+                          <a:solidFill>
+                            <a:srgbClr val="26262F"/>
+                          </a:solidFill>
+                          <a:latin typeface="Calibri" pitchFamily="34" charset="0"/>
+                          <a:ea typeface="Calibri" pitchFamily="34" charset="-122"/>
+                          <a:cs typeface="Calibri" pitchFamily="34" charset="-120"/>
+                        </a:rPr>
+                        <a:t>One story, or a 404 if it doesn't exist</a:t>
+                      </a:r>
+                      <a:endParaRPr lang="en-US" sz="1100" dirty="0">
+                        <a:latin typeface="Calibri" charset="0"/>
+                        <a:ea typeface="Calibri" charset="0"/>
+                        <a:cs typeface="Calibri" charset="0"/>
+                      </a:endParaRPr>
+                    </a:p>
+                  </a:txBody>
+                  <a:tcPr marL="91440" marR="91440" marT="45720" marB="45720" anchor="ctr">
+                    <a:lnL w="12700" cap="flat" cmpd="sng" algn="ctr">
+                      <a:solidFill>
+                        <a:srgbClr val="D8D8E6"/>
+                      </a:solidFill>
+                      <a:prstDash val="solid"/>
+                      <a:round/>
+                      <a:headEnd type="none" w="med" len="med"/>
+                      <a:tailEnd type="none" w="med" len="med"/>
+                    </a:lnL>
+                    <a:lnR w="12700" cap="flat" cmpd="sng" algn="ctr">
+                      <a:solidFill>
+                        <a:srgbClr val="D8D8E6"/>
+                      </a:solidFill>
+                      <a:prstDash val="solid"/>
+                      <a:round/>
+                      <a:headEnd type="none" w="med" len="med"/>
+                      <a:tailEnd type="none" w="med" len="med"/>
+                    </a:lnR>
+                    <a:lnT w="12700" cap="flat" cmpd="sng" algn="ctr">
+                      <a:solidFill>
+                        <a:srgbClr val="D8D8E6"/>
+                      </a:solidFill>
+                      <a:prstDash val="solid"/>
+                      <a:round/>
+                      <a:headEnd type="none" w="med" len="med"/>
+                      <a:tailEnd type="none" w="med" len="med"/>
+                    </a:lnT>
+                    <a:lnB w="12700" cap="flat" cmpd="sng" algn="ctr">
+                      <a:solidFill>
+                        <a:srgbClr val="D8D8E6"/>
+                      </a:solidFill>
+                      <a:prstDash val="solid"/>
+                      <a:round/>
+                      <a:headEnd type="none" w="med" len="med"/>
+                      <a:tailEnd type="none" w="med" len="med"/>
+                    </a:lnB>
+                    <a:solidFill>
+                      <a:srgbClr val="FFFFFF"/>
+                    </a:solidFill>
+                  </a:tcPr>
+                </a:tc>
+              </a:tr>
+              <a:tr h="566928">
+                <a:tc>
+                  <a:txBody>
+                    <a:bodyPr/>
+                    <a:lstStyle/>
+                    <a:p>
+                      <a:pPr algn="ctr" indent="0" marL="0">
+                        <a:buNone/>
+                      </a:pPr>
+                      <a:r>
+                        <a:rPr lang="en-US" sz="1150" b="1" dirty="0">
+                          <a:solidFill>
+                            <a:srgbClr val="26262F"/>
+                          </a:solidFill>
+                          <a:latin typeface="Calibri" pitchFamily="34" charset="0"/>
+                          <a:ea typeface="Calibri" pitchFamily="34" charset="-122"/>
+                          <a:cs typeface="Calibri" pitchFamily="34" charset="-120"/>
+                        </a:rPr>
+                        <a:t>POST</a:t>
+                      </a:r>
+                      <a:endParaRPr lang="en-US" sz="1150" dirty="0">
+                        <a:latin typeface="Calibri" charset="0"/>
+                        <a:ea typeface="Calibri" charset="0"/>
+                        <a:cs typeface="Calibri" charset="0"/>
+                      </a:endParaRPr>
+                    </a:p>
+                  </a:txBody>
+                  <a:tcPr marL="91440" marR="91440" marT="45720" marB="45720" anchor="ctr">
+                    <a:lnL w="12700" cap="flat" cmpd="sng" algn="ctr">
+                      <a:solidFill>
+                        <a:srgbClr val="D8D8E6"/>
+                      </a:solidFill>
+                      <a:prstDash val="solid"/>
+                      <a:round/>
+                      <a:headEnd type="none" w="med" len="med"/>
+                      <a:tailEnd type="none" w="med" len="med"/>
+                    </a:lnL>
+                    <a:lnR w="12700" cap="flat" cmpd="sng" algn="ctr">
+                      <a:solidFill>
+                        <a:srgbClr val="D8D8E6"/>
+                      </a:solidFill>
+                      <a:prstDash val="solid"/>
+                      <a:round/>
+                      <a:headEnd type="none" w="med" len="med"/>
+                      <a:tailEnd type="none" w="med" len="med"/>
+                    </a:lnR>
+                    <a:lnT w="12700" cap="flat" cmpd="sng" algn="ctr">
+                      <a:solidFill>
+                        <a:srgbClr val="D8D8E6"/>
+                      </a:solidFill>
+                      <a:prstDash val="solid"/>
+                      <a:round/>
+                      <a:headEnd type="none" w="med" len="med"/>
+                      <a:tailEnd type="none" w="med" len="med"/>
+                    </a:lnT>
+                    <a:lnB w="12700" cap="flat" cmpd="sng" algn="ctr">
+                      <a:solidFill>
+                        <a:srgbClr val="D8D8E6"/>
+                      </a:solidFill>
+                      <a:prstDash val="solid"/>
+                      <a:round/>
+                      <a:headEnd type="none" w="med" len="med"/>
+                      <a:tailEnd type="none" w="med" len="med"/>
+                    </a:lnB>
+                    <a:solidFill>
+                      <a:srgbClr val="FFFFFF"/>
+                    </a:solidFill>
+                  </a:tcPr>
+                </a:tc>
+                <a:tc>
+                  <a:txBody>
+                    <a:bodyPr/>
+                    <a:lstStyle/>
+                    <a:p>
+                      <a:pPr algn="l" indent="0" marL="0">
+                        <a:buNone/>
+                      </a:pPr>
+                      <a:r>
+                        <a:rPr lang="en-US" sz="1150" dirty="0">
+                          <a:solidFill>
+                            <a:srgbClr val="26262F"/>
+                          </a:solidFill>
+                          <a:latin typeface="Courier New" pitchFamily="34" charset="0"/>
+                          <a:ea typeface="Courier New" pitchFamily="34" charset="-122"/>
+                          <a:cs typeface="Courier New" pitchFamily="34" charset="-120"/>
+                        </a:rPr>
+                        <a:t>/stories</a:t>
+                      </a:r>
+                      <a:endParaRPr lang="en-US" sz="1150" dirty="0">
+                        <a:latin typeface="Courier New" charset="0"/>
+                        <a:ea typeface="Courier New" charset="0"/>
+                        <a:cs typeface="Courier New" charset="0"/>
+                      </a:endParaRPr>
+                    </a:p>
+                  </a:txBody>
+                  <a:tcPr marL="91440" marR="91440" marT="45720" marB="45720" anchor="ctr">
+                    <a:lnL w="12700" cap="flat" cmpd="sng" algn="ctr">
+                      <a:solidFill>
+                        <a:srgbClr val="D8D8E6"/>
+                      </a:solidFill>
+                      <a:prstDash val="solid"/>
+                      <a:round/>
+                      <a:headEnd type="none" w="med" len="med"/>
+                      <a:tailEnd type="none" w="med" len="med"/>
+                    </a:lnL>
+                    <a:lnR w="12700" cap="flat" cmpd="sng" algn="ctr">
+                      <a:solidFill>
+                        <a:srgbClr val="D8D8E6"/>
+                      </a:solidFill>
+                      <a:prstDash val="solid"/>
+                      <a:round/>
+                      <a:headEnd type="none" w="med" len="med"/>
+                      <a:tailEnd type="none" w="med" len="med"/>
+                    </a:lnR>
+                    <a:lnT w="12700" cap="flat" cmpd="sng" algn="ctr">
+                      <a:solidFill>
+                        <a:srgbClr val="D8D8E6"/>
+                      </a:solidFill>
+                      <a:prstDash val="solid"/>
+                      <a:round/>
+                      <a:headEnd type="none" w="med" len="med"/>
+                      <a:tailEnd type="none" w="med" len="med"/>
+                    </a:lnT>
+                    <a:lnB w="12700" cap="flat" cmpd="sng" algn="ctr">
+                      <a:solidFill>
+                        <a:srgbClr val="D8D8E6"/>
+                      </a:solidFill>
+                      <a:prstDash val="solid"/>
+                      <a:round/>
+                      <a:headEnd type="none" w="med" len="med"/>
+                      <a:tailEnd type="none" w="med" len="med"/>
+                    </a:lnB>
+                    <a:solidFill>
+                      <a:srgbClr val="FFFFFF"/>
+                    </a:solidFill>
+                  </a:tcPr>
+                </a:tc>
+                <a:tc>
+                  <a:txBody>
+                    <a:bodyPr/>
+                    <a:lstStyle/>
+                    <a:p>
+                      <a:pPr algn="l" indent="0" marL="0">
+                        <a:buNone/>
+                      </a:pPr>
+                      <a:r>
+                        <a:rPr lang="en-US" sz="1100" dirty="0">
+                          <a:solidFill>
+                            <a:srgbClr val="26262F"/>
+                          </a:solidFill>
+                          <a:latin typeface="Courier New" pitchFamily="34" charset="0"/>
+                          <a:ea typeface="Courier New" pitchFamily="34" charset="-122"/>
+                          <a:cs typeface="Courier New" pitchFamily="34" charset="-120"/>
+                        </a:rPr>
+                        <a:t>{title, content}</a:t>
+                      </a:r>
+                      <a:endParaRPr lang="en-US" sz="1100" dirty="0">
+                        <a:latin typeface="Courier New" charset="0"/>
+                        <a:ea typeface="Courier New" charset="0"/>
+                        <a:cs typeface="Courier New" charset="0"/>
+                      </a:endParaRPr>
+                    </a:p>
+                  </a:txBody>
+                  <a:tcPr marL="91440" marR="91440" marT="45720" marB="45720" anchor="ctr">
+                    <a:lnL w="12700" cap="flat" cmpd="sng" algn="ctr">
+                      <a:solidFill>
+                        <a:srgbClr val="D8D8E6"/>
+                      </a:solidFill>
+                      <a:prstDash val="solid"/>
+                      <a:round/>
+                      <a:headEnd type="none" w="med" len="med"/>
+                      <a:tailEnd type="none" w="med" len="med"/>
+                    </a:lnL>
+                    <a:lnR w="12700" cap="flat" cmpd="sng" algn="ctr">
+                      <a:solidFill>
+                        <a:srgbClr val="D8D8E6"/>
+                      </a:solidFill>
+                      <a:prstDash val="solid"/>
+                      <a:round/>
+                      <a:headEnd type="none" w="med" len="med"/>
+                      <a:tailEnd type="none" w="med" len="med"/>
+                    </a:lnR>
+                    <a:lnT w="12700" cap="flat" cmpd="sng" algn="ctr">
+                      <a:solidFill>
+                        <a:srgbClr val="D8D8E6"/>
+                      </a:solidFill>
+                      <a:prstDash val="solid"/>
+                      <a:round/>
+                      <a:headEnd type="none" w="med" len="med"/>
+                      <a:tailEnd type="none" w="med" len="med"/>
+                    </a:lnT>
+                    <a:lnB w="12700" cap="flat" cmpd="sng" algn="ctr">
+                      <a:solidFill>
+                        <a:srgbClr val="D8D8E6"/>
+                      </a:solidFill>
+                      <a:prstDash val="solid"/>
+                      <a:round/>
+                      <a:headEnd type="none" w="med" len="med"/>
+                      <a:tailEnd type="none" w="med" len="med"/>
+                    </a:lnB>
+                    <a:solidFill>
+                      <a:srgbClr val="FFFFFF"/>
+                    </a:solidFill>
+                  </a:tcPr>
+                </a:tc>
+                <a:tc>
+                  <a:txBody>
+                    <a:bodyPr/>
+                    <a:lstStyle/>
+                    <a:p>
+                      <a:pPr algn="l" indent="0" marL="0">
+                        <a:buNone/>
+                      </a:pPr>
+                      <a:r>
+                        <a:rPr lang="en-US" sz="1100" dirty="0">
+                          <a:solidFill>
+                            <a:srgbClr val="26262F"/>
+                          </a:solidFill>
+                          <a:latin typeface="Courier New" pitchFamily="34" charset="0"/>
+                          <a:ea typeface="Courier New" pitchFamily="34" charset="-122"/>
+                          <a:cs typeface="Courier New" pitchFamily="34" charset="-120"/>
+                        </a:rPr>
+                        <a:t>{message, story_id}</a:t>
+                      </a:r>
+                      <a:endParaRPr lang="en-US" sz="1100" dirty="0">
+                        <a:latin typeface="Courier New" charset="0"/>
+                        <a:ea typeface="Courier New" charset="0"/>
+                        <a:cs typeface="Courier New" charset="0"/>
+                      </a:endParaRPr>
+                    </a:p>
+                  </a:txBody>
+                  <a:tcPr marL="91440" marR="91440" marT="45720" marB="45720" anchor="ctr">
+                    <a:lnL w="12700" cap="flat" cmpd="sng" algn="ctr">
+                      <a:solidFill>
+                        <a:srgbClr val="D8D8E6"/>
+                      </a:solidFill>
+                      <a:prstDash val="solid"/>
+                      <a:round/>
+                      <a:headEnd type="none" w="med" len="med"/>
+                      <a:tailEnd type="none" w="med" len="med"/>
+                    </a:lnL>
+                    <a:lnR w="12700" cap="flat" cmpd="sng" algn="ctr">
+                      <a:solidFill>
+                        <a:srgbClr val="D8D8E6"/>
+                      </a:solidFill>
+                      <a:prstDash val="solid"/>
+                      <a:round/>
+                      <a:headEnd type="none" w="med" len="med"/>
+                      <a:tailEnd type="none" w="med" len="med"/>
+                    </a:lnR>
+                    <a:lnT w="12700" cap="flat" cmpd="sng" algn="ctr">
+                      <a:solidFill>
+                        <a:srgbClr val="D8D8E6"/>
+                      </a:solidFill>
+                      <a:prstDash val="solid"/>
+                      <a:round/>
+                      <a:headEnd type="none" w="med" len="med"/>
+                      <a:tailEnd type="none" w="med" len="med"/>
+                    </a:lnT>
+                    <a:lnB w="12700" cap="flat" cmpd="sng" algn="ctr">
+                      <a:solidFill>
+                        <a:srgbClr val="D8D8E6"/>
+                      </a:solidFill>
+                      <a:prstDash val="solid"/>
+                      <a:round/>
+                      <a:headEnd type="none" w="med" len="med"/>
+                      <a:tailEnd type="none" w="med" len="med"/>
+                    </a:lnB>
+                    <a:solidFill>
+                      <a:srgbClr val="FFFFFF"/>
+                    </a:solidFill>
+                  </a:tcPr>
+                </a:tc>
+              </a:tr>
+              <a:tr h="566928">
+                <a:tc>
+                  <a:txBody>
+                    <a:bodyPr/>
+                    <a:lstStyle/>
+                    <a:p>
+                      <a:pPr algn="ctr" indent="0" marL="0">
+                        <a:buNone/>
+                      </a:pPr>
+                      <a:r>
+                        <a:rPr lang="en-US" sz="1150" b="1" dirty="0">
+                          <a:solidFill>
+                            <a:srgbClr val="26262F"/>
+                          </a:solidFill>
+                          <a:latin typeface="Calibri" pitchFamily="34" charset="0"/>
+                          <a:ea typeface="Calibri" pitchFamily="34" charset="-122"/>
+                          <a:cs typeface="Calibri" pitchFamily="34" charset="-120"/>
+                        </a:rPr>
+                        <a:t>PUT</a:t>
+                      </a:r>
+                      <a:endParaRPr lang="en-US" sz="1150" dirty="0">
+                        <a:latin typeface="Calibri" charset="0"/>
+                        <a:ea typeface="Calibri" charset="0"/>
+                        <a:cs typeface="Calibri" charset="0"/>
+                      </a:endParaRPr>
+                    </a:p>
+                  </a:txBody>
+                  <a:tcPr marL="91440" marR="91440" marT="45720" marB="45720" anchor="ctr">
+                    <a:lnL w="12700" cap="flat" cmpd="sng" algn="ctr">
+                      <a:solidFill>
+                        <a:srgbClr val="D8D8E6"/>
+                      </a:solidFill>
+                      <a:prstDash val="solid"/>
+                      <a:round/>
+                      <a:headEnd type="none" w="med" len="med"/>
+                      <a:tailEnd type="none" w="med" len="med"/>
+                    </a:lnL>
+                    <a:lnR w="12700" cap="flat" cmpd="sng" algn="ctr">
+                      <a:solidFill>
+                        <a:srgbClr val="D8D8E6"/>
+                      </a:solidFill>
+                      <a:prstDash val="solid"/>
+                      <a:round/>
+                      <a:headEnd type="none" w="med" len="med"/>
+                      <a:tailEnd type="none" w="med" len="med"/>
+                    </a:lnR>
+                    <a:lnT w="12700" cap="flat" cmpd="sng" algn="ctr">
+                      <a:solidFill>
+                        <a:srgbClr val="D8D8E6"/>
+                      </a:solidFill>
+                      <a:prstDash val="solid"/>
+                      <a:round/>
+                      <a:headEnd type="none" w="med" len="med"/>
+                      <a:tailEnd type="none" w="med" len="med"/>
+                    </a:lnT>
+                    <a:lnB w="12700" cap="flat" cmpd="sng" algn="ctr">
+                      <a:solidFill>
+                        <a:srgbClr val="D8D8E6"/>
+                      </a:solidFill>
+                      <a:prstDash val="solid"/>
+                      <a:round/>
+                      <a:headEnd type="none" w="med" len="med"/>
+                      <a:tailEnd type="none" w="med" len="med"/>
+                    </a:lnB>
+                    <a:solidFill>
+                      <a:srgbClr val="FFFFFF"/>
+                    </a:solidFill>
+                  </a:tcPr>
+                </a:tc>
+                <a:tc>
+                  <a:txBody>
+                    <a:bodyPr/>
+                    <a:lstStyle/>
+                    <a:p>
+                      <a:pPr algn="l" indent="0" marL="0">
+                        <a:buNone/>
+                      </a:pPr>
+                      <a:r>
+                        <a:rPr lang="en-US" sz="1150" dirty="0">
+                          <a:solidFill>
+                            <a:srgbClr val="26262F"/>
+                          </a:solidFill>
+                          <a:latin typeface="Courier New" pitchFamily="34" charset="0"/>
+                          <a:ea typeface="Courier New" pitchFamily="34" charset="-122"/>
+                          <a:cs typeface="Courier New" pitchFamily="34" charset="-120"/>
+                        </a:rPr>
+                        <a:t>/stories/:id</a:t>
+                      </a:r>
+                      <a:endParaRPr lang="en-US" sz="1150" dirty="0">
+                        <a:latin typeface="Courier New" charset="0"/>
+                        <a:ea typeface="Courier New" charset="0"/>
+                        <a:cs typeface="Courier New" charset="0"/>
+                      </a:endParaRPr>
+                    </a:p>
+                  </a:txBody>
+                  <a:tcPr marL="91440" marR="91440" marT="45720" marB="45720" anchor="ctr">
+                    <a:lnL w="12700" cap="flat" cmpd="sng" algn="ctr">
+                      <a:solidFill>
+                        <a:srgbClr val="D8D8E6"/>
+                      </a:solidFill>
+                      <a:prstDash val="solid"/>
+                      <a:round/>
+                      <a:headEnd type="none" w="med" len="med"/>
+                      <a:tailEnd type="none" w="med" len="med"/>
+                    </a:lnL>
+                    <a:lnR w="12700" cap="flat" cmpd="sng" algn="ctr">
+                      <a:solidFill>
+                        <a:srgbClr val="D8D8E6"/>
+                      </a:solidFill>
+                      <a:prstDash val="solid"/>
+                      <a:round/>
+                      <a:headEnd type="none" w="med" len="med"/>
+                      <a:tailEnd type="none" w="med" len="med"/>
+                    </a:lnR>
+                    <a:lnT w="12700" cap="flat" cmpd="sng" algn="ctr">
+                      <a:solidFill>
+                        <a:srgbClr val="D8D8E6"/>
+                      </a:solidFill>
+                      <a:prstDash val="solid"/>
+                      <a:round/>
+                      <a:headEnd type="none" w="med" len="med"/>
+                      <a:tailEnd type="none" w="med" len="med"/>
+                    </a:lnT>
+                    <a:lnB w="12700" cap="flat" cmpd="sng" algn="ctr">
+                      <a:solidFill>
+                        <a:srgbClr val="D8D8E6"/>
+                      </a:solidFill>
+                      <a:prstDash val="solid"/>
+                      <a:round/>
+                      <a:headEnd type="none" w="med" len="med"/>
+                      <a:tailEnd type="none" w="med" len="med"/>
+                    </a:lnB>
+                    <a:solidFill>
+                      <a:srgbClr val="FFFFFF"/>
+                    </a:solidFill>
+                  </a:tcPr>
+                </a:tc>
+                <a:tc>
+                  <a:txBody>
+                    <a:bodyPr/>
+                    <a:lstStyle/>
+                    <a:p>
+                      <a:pPr algn="l" indent="0" marL="0">
+                        <a:buNone/>
+                      </a:pPr>
+                      <a:r>
+                        <a:rPr lang="en-US" sz="1100" dirty="0">
+                          <a:solidFill>
+                            <a:srgbClr val="26262F"/>
+                          </a:solidFill>
+                          <a:latin typeface="Courier New" pitchFamily="34" charset="0"/>
+                          <a:ea typeface="Courier New" pitchFamily="34" charset="-122"/>
+                          <a:cs typeface="Courier New" pitchFamily="34" charset="-120"/>
+                        </a:rPr>
+                        <a:t>{title, content}</a:t>
+                      </a:r>
+                      <a:endParaRPr lang="en-US" sz="1100" dirty="0">
+                        <a:latin typeface="Courier New" charset="0"/>
+                        <a:ea typeface="Courier New" charset="0"/>
+                        <a:cs typeface="Courier New" charset="0"/>
+                      </a:endParaRPr>
+                    </a:p>
+                  </a:txBody>
+                  <a:tcPr marL="91440" marR="91440" marT="45720" marB="45720" anchor="ctr">
+                    <a:lnL w="12700" cap="flat" cmpd="sng" algn="ctr">
+                      <a:solidFill>
+                        <a:srgbClr val="D8D8E6"/>
+                      </a:solidFill>
+                      <a:prstDash val="solid"/>
+                      <a:round/>
+                      <a:headEnd type="none" w="med" len="med"/>
+                      <a:tailEnd type="none" w="med" len="med"/>
+                    </a:lnL>
+                    <a:lnR w="12700" cap="flat" cmpd="sng" algn="ctr">
+                      <a:solidFill>
+                        <a:srgbClr val="D8D8E6"/>
+                      </a:solidFill>
+                      <a:prstDash val="solid"/>
+                      <a:round/>
+                      <a:headEnd type="none" w="med" len="med"/>
+                      <a:tailEnd type="none" w="med" len="med"/>
+                    </a:lnR>
+                    <a:lnT w="12700" cap="flat" cmpd="sng" algn="ctr">
+                      <a:solidFill>
+                        <a:srgbClr val="D8D8E6"/>
+                      </a:solidFill>
+                      <a:prstDash val="solid"/>
+                      <a:round/>
+                      <a:headEnd type="none" w="med" len="med"/>
+                      <a:tailEnd type="none" w="med" len="med"/>
+                    </a:lnT>
+                    <a:lnB w="12700" cap="flat" cmpd="sng" algn="ctr">
+                      <a:solidFill>
+                        <a:srgbClr val="D8D8E6"/>
+                      </a:solidFill>
+                      <a:prstDash val="solid"/>
+                      <a:round/>
+                      <a:headEnd type="none" w="med" len="med"/>
+                      <a:tailEnd type="none" w="med" len="med"/>
+                    </a:lnB>
+                    <a:solidFill>
+                      <a:srgbClr val="FFFFFF"/>
+                    </a:solidFill>
+                  </a:tcPr>
+                </a:tc>
+                <a:tc>
+                  <a:txBody>
+                    <a:bodyPr/>
+                    <a:lstStyle/>
+                    <a:p>
+                      <a:pPr algn="l" indent="0" marL="0">
+                        <a:buNone/>
+                      </a:pPr>
+                      <a:r>
+                        <a:rPr lang="en-US" sz="1100" dirty="0">
+                          <a:solidFill>
+                            <a:srgbClr val="26262F"/>
+                          </a:solidFill>
+                          <a:latin typeface="Courier New" pitchFamily="34" charset="0"/>
+                          <a:ea typeface="Courier New" pitchFamily="34" charset="-122"/>
+                          <a:cs typeface="Courier New" pitchFamily="34" charset="-120"/>
+                        </a:rPr>
+                        <a:t>{message}</a:t>
+                      </a:r>
+                      <a:endParaRPr lang="en-US" sz="1100" dirty="0">
+                        <a:latin typeface="Courier New" charset="0"/>
+                        <a:ea typeface="Courier New" charset="0"/>
+                        <a:cs typeface="Courier New" charset="0"/>
+                      </a:endParaRPr>
+                    </a:p>
+                  </a:txBody>
+                  <a:tcPr marL="91440" marR="91440" marT="45720" marB="45720" anchor="ctr">
+                    <a:lnL w="12700" cap="flat" cmpd="sng" algn="ctr">
+                      <a:solidFill>
+                        <a:srgbClr val="D8D8E6"/>
+                      </a:solidFill>
+                      <a:prstDash val="solid"/>
+                      <a:round/>
+                      <a:headEnd type="none" w="med" len="med"/>
+                      <a:tailEnd type="none" w="med" len="med"/>
+                    </a:lnL>
+                    <a:lnR w="12700" cap="flat" cmpd="sng" algn="ctr">
+                      <a:solidFill>
+                        <a:srgbClr val="D8D8E6"/>
+                      </a:solidFill>
+                      <a:prstDash val="solid"/>
+                      <a:round/>
+                      <a:headEnd type="none" w="med" len="med"/>
+                      <a:tailEnd type="none" w="med" len="med"/>
+                    </a:lnR>
+                    <a:lnT w="12700" cap="flat" cmpd="sng" algn="ctr">
+                      <a:solidFill>
+                        <a:srgbClr val="D8D8E6"/>
+                      </a:solidFill>
+                      <a:prstDash val="solid"/>
+                      <a:round/>
+                      <a:headEnd type="none" w="med" len="med"/>
+                      <a:tailEnd type="none" w="med" len="med"/>
+                    </a:lnT>
+                    <a:lnB w="12700" cap="flat" cmpd="sng" algn="ctr">
+                      <a:solidFill>
+                        <a:srgbClr val="D8D8E6"/>
+                      </a:solidFill>
+                      <a:prstDash val="solid"/>
+                      <a:round/>
+                      <a:headEnd type="none" w="med" len="med"/>
+                      <a:tailEnd type="none" w="med" len="med"/>
+                    </a:lnB>
+                    <a:solidFill>
+                      <a:srgbClr val="FFFFFF"/>
+                    </a:solidFill>
+                  </a:tcPr>
+                </a:tc>
+              </a:tr>
+              <a:tr h="566928">
+                <a:tc>
+                  <a:txBody>
+                    <a:bodyPr/>
+                    <a:lstStyle/>
+                    <a:p>
+                      <a:pPr algn="ctr" indent="0" marL="0">
+                        <a:buNone/>
+                      </a:pPr>
+                      <a:r>
+                        <a:rPr lang="en-US" sz="1150" b="1" dirty="0">
+                          <a:solidFill>
+                            <a:srgbClr val="26262F"/>
+                          </a:solidFill>
+                          <a:latin typeface="Calibri" pitchFamily="34" charset="0"/>
+                          <a:ea typeface="Calibri" pitchFamily="34" charset="-122"/>
+                          <a:cs typeface="Calibri" pitchFamily="34" charset="-120"/>
+                        </a:rPr>
+                        <a:t>DELETE</a:t>
+                      </a:r>
+                      <a:endParaRPr lang="en-US" sz="1150" dirty="0">
+                        <a:latin typeface="Calibri" charset="0"/>
+                        <a:ea typeface="Calibri" charset="0"/>
+                        <a:cs typeface="Calibri" charset="0"/>
+                      </a:endParaRPr>
+                    </a:p>
+                  </a:txBody>
+                  <a:tcPr marL="91440" marR="91440" marT="45720" marB="45720" anchor="ctr">
+                    <a:lnL w="12700" cap="flat" cmpd="sng" algn="ctr">
+                      <a:solidFill>
+                        <a:srgbClr val="D8D8E6"/>
+                      </a:solidFill>
+                      <a:prstDash val="solid"/>
+                      <a:round/>
+                      <a:headEnd type="none" w="med" len="med"/>
+                      <a:tailEnd type="none" w="med" len="med"/>
+                    </a:lnL>
+                    <a:lnR w="12700" cap="flat" cmpd="sng" algn="ctr">
+                      <a:solidFill>
+                        <a:srgbClr val="D8D8E6"/>
+                      </a:solidFill>
+                      <a:prstDash val="solid"/>
+                      <a:round/>
+                      <a:headEnd type="none" w="med" len="med"/>
+                      <a:tailEnd type="none" w="med" len="med"/>
+                    </a:lnR>
+                    <a:lnT w="12700" cap="flat" cmpd="sng" algn="ctr">
+                      <a:solidFill>
+                        <a:srgbClr val="D8D8E6"/>
+                      </a:solidFill>
+                      <a:prstDash val="solid"/>
+                      <a:round/>
+                      <a:headEnd type="none" w="med" len="med"/>
+                      <a:tailEnd type="none" w="med" len="med"/>
+                    </a:lnT>
+                    <a:lnB w="12700" cap="flat" cmpd="sng" algn="ctr">
+                      <a:solidFill>
+                        <a:srgbClr val="D8D8E6"/>
+                      </a:solidFill>
+                      <a:prstDash val="solid"/>
+                      <a:round/>
+                      <a:headEnd type="none" w="med" len="med"/>
+                      <a:tailEnd type="none" w="med" len="med"/>
+                    </a:lnB>
+                    <a:solidFill>
+                      <a:srgbClr val="FFFFFF"/>
+                    </a:solidFill>
+                  </a:tcPr>
+                </a:tc>
+                <a:tc>
+                  <a:txBody>
+                    <a:bodyPr/>
+                    <a:lstStyle/>
+                    <a:p>
+                      <a:pPr algn="l" indent="0" marL="0">
+                        <a:buNone/>
+                      </a:pPr>
+                      <a:r>
+                        <a:rPr lang="en-US" sz="1150" dirty="0">
+                          <a:solidFill>
+                            <a:srgbClr val="26262F"/>
+                          </a:solidFill>
+                          <a:latin typeface="Courier New" pitchFamily="34" charset="0"/>
+                          <a:ea typeface="Courier New" pitchFamily="34" charset="-122"/>
+                          <a:cs typeface="Courier New" pitchFamily="34" charset="-120"/>
+                        </a:rPr>
+                        <a:t>/stories/:id</a:t>
+                      </a:r>
+                      <a:endParaRPr lang="en-US" sz="1150" dirty="0">
+                        <a:latin typeface="Courier New" charset="0"/>
+                        <a:ea typeface="Courier New" charset="0"/>
+                        <a:cs typeface="Courier New" charset="0"/>
+                      </a:endParaRPr>
+                    </a:p>
+                  </a:txBody>
+                  <a:tcPr marL="91440" marR="91440" marT="45720" marB="45720" anchor="ctr">
+                    <a:lnL w="12700" cap="flat" cmpd="sng" algn="ctr">
+                      <a:solidFill>
+                        <a:srgbClr val="D8D8E6"/>
+                      </a:solidFill>
+                      <a:prstDash val="solid"/>
+                      <a:round/>
+                      <a:headEnd type="none" w="med" len="med"/>
+                      <a:tailEnd type="none" w="med" len="med"/>
+                    </a:lnL>
+                    <a:lnR w="12700" cap="flat" cmpd="sng" algn="ctr">
+                      <a:solidFill>
+                        <a:srgbClr val="D8D8E6"/>
+                      </a:solidFill>
+                      <a:prstDash val="solid"/>
+                      <a:round/>
+                      <a:headEnd type="none" w="med" len="med"/>
+                      <a:tailEnd type="none" w="med" len="med"/>
+                    </a:lnR>
+                    <a:lnT w="12700" cap="flat" cmpd="sng" algn="ctr">
+                      <a:solidFill>
+                        <a:srgbClr val="D8D8E6"/>
+                      </a:solidFill>
+                      <a:prstDash val="solid"/>
+                      <a:round/>
+                      <a:headEnd type="none" w="med" len="med"/>
+                      <a:tailEnd type="none" w="med" len="med"/>
+                    </a:lnT>
+                    <a:lnB w="12700" cap="flat" cmpd="sng" algn="ctr">
+                      <a:solidFill>
+                        <a:srgbClr val="D8D8E6"/>
+                      </a:solidFill>
+                      <a:prstDash val="solid"/>
+                      <a:round/>
+                      <a:headEnd type="none" w="med" len="med"/>
+                      <a:tailEnd type="none" w="med" len="med"/>
+                    </a:lnB>
+                    <a:solidFill>
+                      <a:srgbClr val="FFFFFF"/>
+                    </a:solidFill>
+                  </a:tcPr>
+                </a:tc>
+                <a:tc>
+                  <a:txBody>
+                    <a:bodyPr/>
+                    <a:lstStyle/>
+                    <a:p>
+                      <a:pPr algn="l" indent="0" marL="0">
+                        <a:buNone/>
+                      </a:pPr>
+                      <a:r>
+                        <a:rPr lang="en-US" sz="1100" dirty="0">
+                          <a:solidFill>
+                            <a:srgbClr val="26262F"/>
+                          </a:solidFill>
+                          <a:latin typeface="Courier New" pitchFamily="34" charset="0"/>
+                          <a:ea typeface="Courier New" pitchFamily="34" charset="-122"/>
+                          <a:cs typeface="Courier New" pitchFamily="34" charset="-120"/>
+                        </a:rPr>
+                        <a:t>--</a:t>
+                      </a:r>
+                      <a:endParaRPr lang="en-US" sz="1100" dirty="0">
+                        <a:latin typeface="Courier New" charset="0"/>
+                        <a:ea typeface="Courier New" charset="0"/>
+                        <a:cs typeface="Courier New" charset="0"/>
+                      </a:endParaRPr>
+                    </a:p>
+                  </a:txBody>
+                  <a:tcPr marL="91440" marR="91440" marT="45720" marB="45720" anchor="ctr">
+                    <a:lnL w="12700" cap="flat" cmpd="sng" algn="ctr">
+                      <a:solidFill>
+                        <a:srgbClr val="D8D8E6"/>
+                      </a:solidFill>
+                      <a:prstDash val="solid"/>
+                      <a:round/>
+                      <a:headEnd type="none" w="med" len="med"/>
+                      <a:tailEnd type="none" w="med" len="med"/>
+                    </a:lnL>
+                    <a:lnR w="12700" cap="flat" cmpd="sng" algn="ctr">
+                      <a:solidFill>
+                        <a:srgbClr val="D8D8E6"/>
+                      </a:solidFill>
+                      <a:prstDash val="solid"/>
+                      <a:round/>
+                      <a:headEnd type="none" w="med" len="med"/>
+                      <a:tailEnd type="none" w="med" len="med"/>
+                    </a:lnR>
+                    <a:lnT w="12700" cap="flat" cmpd="sng" algn="ctr">
+                      <a:solidFill>
+                        <a:srgbClr val="D8D8E6"/>
+                      </a:solidFill>
+                      <a:prstDash val="solid"/>
+                      <a:round/>
+                      <a:headEnd type="none" w="med" len="med"/>
+                      <a:tailEnd type="none" w="med" len="med"/>
+                    </a:lnT>
+                    <a:lnB w="12700" cap="flat" cmpd="sng" algn="ctr">
+                      <a:solidFill>
+                        <a:srgbClr val="D8D8E6"/>
+                      </a:solidFill>
+                      <a:prstDash val="solid"/>
+                      <a:round/>
+                      <a:headEnd type="none" w="med" len="med"/>
+                      <a:tailEnd type="none" w="med" len="med"/>
+                    </a:lnB>
+                    <a:solidFill>
+                      <a:srgbClr val="FFFFFF"/>
+                    </a:solidFill>
+                  </a:tcPr>
+                </a:tc>
+                <a:tc>
+                  <a:txBody>
+                    <a:bodyPr/>
+                    <a:lstStyle/>
+                    <a:p>
+                      <a:pPr algn="l" indent="0" marL="0">
+                        <a:buNone/>
+                      </a:pPr>
+                      <a:r>
+                        <a:rPr lang="en-US" sz="1100" dirty="0">
+                          <a:solidFill>
+                            <a:srgbClr val="26262F"/>
+                          </a:solidFill>
+                          <a:latin typeface="Courier New" pitchFamily="34" charset="0"/>
+                          <a:ea typeface="Courier New" pitchFamily="34" charset="-122"/>
+                          <a:cs typeface="Courier New" pitchFamily="34" charset="-120"/>
+                        </a:rPr>
+                        <a:t>{message}</a:t>
+                      </a:r>
+                      <a:endParaRPr lang="en-US" sz="1100" dirty="0">
+                        <a:latin typeface="Courier New" charset="0"/>
+                        <a:ea typeface="Courier New" charset="0"/>
+                        <a:cs typeface="Courier New" charset="0"/>
+                      </a:endParaRPr>
+                    </a:p>
+                  </a:txBody>
+                  <a:tcPr marL="91440" marR="91440" marT="45720" marB="45720" anchor="ctr">
+                    <a:lnL w="12700" cap="flat" cmpd="sng" algn="ctr">
+                      <a:solidFill>
+                        <a:srgbClr val="D8D8E6"/>
+                      </a:solidFill>
+                      <a:prstDash val="solid"/>
+                      <a:round/>
+                      <a:headEnd type="none" w="med" len="med"/>
+                      <a:tailEnd type="none" w="med" len="med"/>
+                    </a:lnL>
+                    <a:lnR w="12700" cap="flat" cmpd="sng" algn="ctr">
+                      <a:solidFill>
+                        <a:srgbClr val="D8D8E6"/>
+                      </a:solidFill>
+                      <a:prstDash val="solid"/>
+                      <a:round/>
+                      <a:headEnd type="none" w="med" len="med"/>
+                      <a:tailEnd type="none" w="med" len="med"/>
+                    </a:lnR>
+                    <a:lnT w="12700" cap="flat" cmpd="sng" algn="ctr">
+                      <a:solidFill>
+                        <a:srgbClr val="D8D8E6"/>
+                      </a:solidFill>
+                      <a:prstDash val="solid"/>
+                      <a:round/>
+                      <a:headEnd type="none" w="med" len="med"/>
+                      <a:tailEnd type="none" w="med" len="med"/>
+                    </a:lnT>
+                    <a:lnB w="12700" cap="flat" cmpd="sng" algn="ctr">
+                      <a:solidFill>
+                        <a:srgbClr val="D8D8E6"/>
+                      </a:solidFill>
+                      <a:prstDash val="solid"/>
+                      <a:round/>
+                      <a:headEnd type="none" w="med" len="med"/>
+                      <a:tailEnd type="none" w="med" len="med"/>
+                    </a:lnB>
+                    <a:solidFill>
+                      <a:srgbClr val="FFFFFF"/>
+                    </a:solidFill>
+                  </a:tcPr>
+                </a:tc>
+              </a:tr>
+            </a:tbl>
+          </a:graphicData>
+        </a:graphic>
+      </p:graphicFrame>
+      <p:sp>
+        <p:nvSpPr>
+          <p:cNvPr id="5" name="Text 2"/>
+          <p:cNvSpPr txBox="1"/>
+          <p:nvPr/>
+        </p:nvSpPr>
+        <p:spPr>
+          <a:xfrm>
+            <a:off x="640080" y="6035040"/>
+            <a:ext cx="10911535" cy="365760"/>
+          </a:xfrm>
+          <a:prstGeom prst="rect">
+            <a:avLst/>
+          </a:prstGeom>
+          <a:noFill/>
+          <a:ln/>
+        </p:spPr>
+        <p:txBody>
+          <a:bodyPr wrap="square" lIns="0" tIns="0" rIns="0" bIns="0" rtlCol="0" anchor="ctr"/>
+          <a:lstStyle/>
+          <a:p>
+            <a:pPr indent="0" marL="0">
+              <a:buNone/>
+            </a:pPr>
+            <a:r>
+              <a:rPr lang="en-US" sz="1150" i="1" dirty="0">
+                <a:solidFill>
+                  <a:srgbClr val="5D5D72"/>
+                </a:solidFill>
+                <a:latin typeface="Calibri" pitchFamily="34" charset="0"/>
+                <a:ea typeface="Calibri" pitchFamily="34" charset="-122"/>
+                <a:cs typeface="Calibri" pitchFamily="34" charset="-120"/>
+              </a:rPr>
+              <a:t>Base URL: https://usmanlive.com/wp-json/api -- every story is just { id, title, content }. No sign-up required.</a:t>
+            </a:r>
+            <a:endParaRPr lang="en-US" sz="1150" dirty="0"/>
+          </a:p>
+        </p:txBody>
+      </p:sp>
+      <p:sp>
+        <p:nvSpPr>
+          <p:cNvPr id="30" name="cuinotes-footer-mark"/>
+          <p:cNvSpPr txBox="1"/>
+          <p:nvPr/>
+        </p:nvSpPr>
+        <p:spPr>
+          <a:xfrm>
+            <a:off x="9951720" y="6455664"/>
+            <a:ext cx="2011680" cy="292608"/>
+          </a:xfrm>
+          <a:prstGeom prst="rect">
+            <a:avLst/>
+          </a:prstGeom>
+          <a:noFill/>
+        </p:spPr>
+        <p:txBody>
+          <a:bodyPr wrap="none" lIns="0" rIns="0" tIns="0" bIns="0">
+            <a:spAutoFit/>
+          </a:bodyPr>
+          <a:lstStyle/>
+          <a:p>
+            <a:pPr algn="r"/>
+            <a:r>
+              <a:rPr sz="1000">
+                <a:solidFill>
+                  <a:srgbClr val="8A939B"/>
+                </a:solidFill>
+                <a:hlinkClick r:id="rId3"/>
+              </a:rPr>
+              <a:t>cuinotes.com</a:t>
+            </a:r>
+            <a:r>
+              <a:rPr sz="1000">
+                <a:solidFill>
+                  <a:srgbClr val="8A939B"/>
+                </a:solidFill>
+              </a:rPr>
+              <a:t>  ·  26</a:t>
+            </a:r>
+          </a:p>
+        </p:txBody>
+      </p:sp>
+    </p:spTree>
+  </p:cSld>
+  <p:clrMapOvr>
+    <a:masterClrMapping/>
+  </p:clrMapOvr>
+</p:sld>
+</file>
+
+<file path=ppt/slides/slide39.xml><?xml version="1.0" encoding="utf-8"?>
+<p:sld xmlns:a="http://schemas.openxmlformats.org/drawingml/2006/main" xmlns:r="http://schemas.openxmlformats.org/officeDocument/2006/relationships" xmlns:p="http://schemas.openxmlformats.org/presentationml/2006/main">
+  <p:cSld name="Slide 32">
+    <p:bg>
+      <p:bgPr>
+        <a:solidFill>
+          <a:srgbClr val="FFFFFF"/>
+        </a:solidFill>
+      </p:bgPr>
+    </p:bg>
+    <p:spTree>
+      <p:nvGrpSpPr>
+        <p:cNvPr id="1" name=""/>
+        <p:cNvGrpSpPr/>
+        <p:nvPr/>
+      </p:nvGrpSpPr>
+      <p:grpSpPr>
+        <a:xfrm>
+          <a:off x="0" y="0"/>
+          <a:ext cx="0" cy="0"/>
+          <a:chOff x="0" y="0"/>
+          <a:chExt cx="0" cy="0"/>
+        </a:xfrm>
+      </p:grpSpPr>
+      <p:sp>
+        <p:nvSpPr>
+          <p:cNvPr id="2" name="Text 0"/>
+          <p:cNvSpPr txBox="1"/>
+          <p:nvPr/>
+        </p:nvSpPr>
+        <p:spPr>
+          <a:xfrm>
+            <a:off x="640080" y="457200"/>
+            <a:ext cx="10058400" cy="365760"/>
+          </a:xfrm>
+          <a:prstGeom prst="rect">
+            <a:avLst/>
+          </a:prstGeom>
+          <a:noFill/>
+          <a:ln/>
+        </p:spPr>
+        <p:txBody>
+          <a:bodyPr wrap="square" lIns="0" tIns="0" rIns="0" bIns="0" rtlCol="0" anchor="ctr"/>
+          <a:lstStyle/>
+          <a:p>
+            <a:pPr algn="l" indent="0" marL="0">
+              <a:buNone/>
+            </a:pPr>
+            <a:r>
+              <a:rPr lang="en-US" sz="1300" b="1" spc="300" kern="0" dirty="0">
+                <a:solidFill>
+                  <a:srgbClr val="FF8A3D"/>
+                </a:solidFill>
+                <a:latin typeface="Calibri" pitchFamily="34" charset="0"/>
+                <a:ea typeface="Calibri" pitchFamily="34" charset="-122"/>
+                <a:cs typeface="Calibri" pitchFamily="34" charset="-120"/>
+              </a:rPr>
+              <a:t>REST APIS AND HTTP METHODS</a:t>
+            </a:r>
+            <a:endParaRPr lang="en-US" sz="1300" dirty="0"/>
+          </a:p>
+        </p:txBody>
+      </p:sp>
+      <p:sp>
+        <p:nvSpPr>
+          <p:cNvPr id="3" name="Text 1"/>
+          <p:cNvSpPr txBox="1"/>
+          <p:nvPr/>
+        </p:nvSpPr>
+        <p:spPr>
+          <a:xfrm>
+            <a:off x="640080" y="841248"/>
+            <a:ext cx="10881360" cy="914400"/>
+          </a:xfrm>
+          <a:prstGeom prst="rect">
+            <a:avLst/>
+          </a:prstGeom>
+          <a:noFill/>
+          <a:ln/>
+        </p:spPr>
+        <p:txBody>
+          <a:bodyPr wrap="square" lIns="0" tIns="0" rIns="0" bIns="0" rtlCol="0" anchor="ctr"/>
+          <a:lstStyle/>
+          <a:p>
+            <a:pPr algn="l" indent="0" marL="0">
+              <a:buNone/>
+            </a:pPr>
+            <a:r>
+              <a:rPr lang="en-US" sz="3400" b="1" dirty="0">
+                <a:solidFill>
+                  <a:srgbClr val="2B2B7A"/>
+                </a:solidFill>
+                <a:latin typeface="Cambria" pitchFamily="34" charset="0"/>
+                <a:ea typeface="Cambria" pitchFamily="34" charset="-122"/>
+                <a:cs typeface="Cambria" pitchFamily="34" charset="-120"/>
+              </a:rPr>
+              <a:t>This API Does Not Validate Anything</a:t>
+            </a:r>
+            <a:endParaRPr lang="en-US" sz="3400" dirty="0"/>
+          </a:p>
+        </p:txBody>
+      </p:sp>
+      <p:sp>
+        <p:nvSpPr>
+          <p:cNvPr id="4" name="Shape 2"/>
+          <p:cNvSpPr/>
+          <p:nvPr/>
+        </p:nvSpPr>
+        <p:spPr>
+          <a:xfrm>
+            <a:off x="640080" y="1965960"/>
+            <a:ext cx="10911535" cy="3657600"/>
+          </a:xfrm>
+          <a:prstGeom prst="roundRect">
+            <a:avLst>
+              <a:gd name="adj" fmla="val 3158"/>
+            </a:avLst>
+          </a:prstGeom>
+          <a:solidFill>
+            <a:srgbClr val="FDECE0"/>
+          </a:solidFill>
+          <a:ln w="12700">
+            <a:solidFill>
+              <a:srgbClr val="FF8A3D"/>
+            </a:solidFill>
+            <a:prstDash val="solid"/>
+          </a:ln>
+        </p:spPr>
+        <p:txBody>
+          <a:bodyPr/>
+          <a:p/>
+        </p:txBody>
+      </p:sp>
+      <p:sp>
+        <p:nvSpPr>
+          <p:cNvPr id="5" name="Text 3"/>
+          <p:cNvSpPr txBox="1"/>
+          <p:nvPr/>
+        </p:nvSpPr>
+        <p:spPr>
+          <a:xfrm>
+            <a:off x="868680" y="2103120"/>
+            <a:ext cx="10454335" cy="400000"/>
+          </a:xfrm>
+          <a:prstGeom prst="rect">
+            <a:avLst/>
+          </a:prstGeom>
+          <a:noFill/>
+          <a:ln/>
+        </p:spPr>
+        <p:txBody>
+          <a:bodyPr wrap="square" lIns="0" tIns="0" rIns="0" bIns="0" rtlCol="0" anchor="ctr"/>
+          <a:lstStyle/>
+          <a:p>
+            <a:pPr indent="0" marL="0">
+              <a:buNone/>
+            </a:pPr>
+            <a:r>
+              <a:rPr lang="en-US" sz="1800" b="1" spc="200" kern="0" dirty="0">
+                <a:solidFill>
+                  <a:srgbClr val="8A3A12"/>
+                </a:solidFill>
+                <a:latin typeface="Calibri" pitchFamily="34" charset="0"/>
+                <a:ea typeface="Calibri" pitchFamily="34" charset="-122"/>
+                <a:cs typeface="Calibri" pitchFamily="34" charset="-120"/>
+              </a:rPr>
+              <a:t>WARNING</a:t>
+            </a:r>
+            <a:endParaRPr lang="en-US" sz="1800" dirty="0"/>
+          </a:p>
+        </p:txBody>
+      </p:sp>
+      <p:sp>
+        <p:nvSpPr>
+          <p:cNvPr id="6" name="Text 4"/>
+          <p:cNvSpPr txBox="1"/>
+          <p:nvPr/>
+        </p:nvSpPr>
+        <p:spPr>
+          <a:xfrm>
+            <a:off x="868680" y="2795960"/>
+            <a:ext cx="10454335" cy="2782400"/>
+          </a:xfrm>
+          <a:prstGeom prst="rect">
+            <a:avLst/>
+          </a:prstGeom>
+          <a:noFill/>
+          <a:ln/>
+        </p:spPr>
+        <p:txBody>
+          <a:bodyPr wrap="square" lIns="0" tIns="0" rIns="0" bIns="0" rtlCol="0" anchor="ctr"/>
+          <a:lstStyle/>
+          <a:p>
+            <a:pPr indent="0" marL="0">
+              <a:buNone/>
+            </a:pPr>
+            <a:r>
+              <a:rPr lang="en-US" sz="2800" dirty="0">
+                <a:solidFill>
+                  <a:srgbClr val="26262F"/>
+                </a:solidFill>
+                <a:latin typeface="Calibri" pitchFamily="34" charset="0"/>
+                <a:ea typeface="Calibri" pitchFamily="34" charset="-122"/>
+                <a:cs typeface="Calibri" pitchFamily="34" charset="-120"/>
+              </a:rPr>
+              <a:t>POST /stories with an empty {} body is accepted and silently creates a story with blank fields -- the server trusts whatever you send. Your client-side form validation is the only thing protecting the data.</a:t>
+            </a:r>
+            <a:endParaRPr lang="en-US" sz="2800" dirty="0"/>
+          </a:p>
+        </p:txBody>
+      </p:sp>
+      <p:sp>
+        <p:nvSpPr>
+          <p:cNvPr id="9" name="cuinotes-footer-mark"/>
+          <p:cNvSpPr txBox="1"/>
+          <p:nvPr/>
+        </p:nvSpPr>
+        <p:spPr>
+          <a:xfrm>
+            <a:off x="9951720" y="6455664"/>
+            <a:ext cx="2011680" cy="292608"/>
+          </a:xfrm>
+          <a:prstGeom prst="rect">
+            <a:avLst/>
+          </a:prstGeom>
+          <a:noFill/>
+        </p:spPr>
+        <p:txBody>
+          <a:bodyPr wrap="none" lIns="0" rIns="0" tIns="0" bIns="0">
+            <a:spAutoFit/>
+          </a:bodyPr>
+          <a:lstStyle/>
+          <a:p>
+            <a:pPr algn="r"/>
+            <a:r>
+              <a:rPr sz="1000">
+                <a:solidFill>
+                  <a:srgbClr val="8A939B"/>
+                </a:solidFill>
+                <a:hlinkClick r:id="rId3"/>
+              </a:rPr>
+              <a:t>cuinotes.com</a:t>
+            </a:r>
+            <a:r>
+              <a:rPr sz="1000">
+                <a:solidFill>
+                  <a:srgbClr val="8A939B"/>
+                </a:solidFill>
+              </a:rPr>
+              <a:t>  ·  27</a:t>
             </a:r>
           </a:p>
         </p:txBody>
